--- a/docs/SteelFlow_AI_LinkedIn_Carousel.pptx
+++ b/docs/SteelFlow_AI_LinkedIn_Carousel.pptx
@@ -2,22 +2,21 @@
 <file path=ppt/presentation.xml><?xml version="1.0" encoding="utf-8"?>
 <p:presentation xmlns:p="http://schemas.openxmlformats.org/presentationml/2006/main">
   <p:sldMasterIdLst>
-    <p:sldMasterId xmlns:r="http://schemas.openxmlformats.org/officeDocument/2006/relationships" id="2147483648" r:id="Rb294ebd5f1cb4480"/>
+    <p:sldMasterId xmlns:r="http://schemas.openxmlformats.org/officeDocument/2006/relationships" id="2147483648" r:id="R9f12ffe5fb644446"/>
   </p:sldMasterIdLst>
   <p:notesMasterIdLst>
-    <p:notesMasterId xmlns:r="http://schemas.openxmlformats.org/officeDocument/2006/relationships" r:id="R3693d790bf24407c"/>
+    <p:notesMasterId xmlns:r="http://schemas.openxmlformats.org/officeDocument/2006/relationships" r:id="Rbbfd5dfacad3439b"/>
   </p:notesMasterIdLst>
   <p:sldIdLst>
-    <p:sldId xmlns:r="http://schemas.openxmlformats.org/officeDocument/2006/relationships" id="256" r:id="R37431f12dfb24a01"/>
-    <p:sldId xmlns:r="http://schemas.openxmlformats.org/officeDocument/2006/relationships" id="257" r:id="R9e1881bc045c4a9a"/>
-    <p:sldId xmlns:r="http://schemas.openxmlformats.org/officeDocument/2006/relationships" id="258" r:id="R9d0c0610b25d4335"/>
-    <p:sldId xmlns:r="http://schemas.openxmlformats.org/officeDocument/2006/relationships" id="259" r:id="R072d49f1dd214653"/>
-    <p:sldId xmlns:r="http://schemas.openxmlformats.org/officeDocument/2006/relationships" id="260" r:id="R82f14f6e23114ea7"/>
-    <p:sldId xmlns:r="http://schemas.openxmlformats.org/officeDocument/2006/relationships" id="261" r:id="Rb5e5d1117c6e4ef2"/>
-    <p:sldId xmlns:r="http://schemas.openxmlformats.org/officeDocument/2006/relationships" id="262" r:id="R670e6ec6134b4bf8"/>
-    <p:sldId xmlns:r="http://schemas.openxmlformats.org/officeDocument/2006/relationships" id="263" r:id="R06acc6cb2ce94715"/>
-    <p:sldId xmlns:r="http://schemas.openxmlformats.org/officeDocument/2006/relationships" id="264" r:id="R28f50c7b2ca8427b"/>
-    <p:sldId xmlns:r="http://schemas.openxmlformats.org/officeDocument/2006/relationships" id="265" r:id="R5570a8f97ad34dee"/>
+    <p:sldId xmlns:r="http://schemas.openxmlformats.org/officeDocument/2006/relationships" id="256" r:id="Ra49649c3a4254c61"/>
+    <p:sldId xmlns:r="http://schemas.openxmlformats.org/officeDocument/2006/relationships" id="257" r:id="R1651487f1db54f33"/>
+    <p:sldId xmlns:r="http://schemas.openxmlformats.org/officeDocument/2006/relationships" id="258" r:id="R616ec72d6e6e4881"/>
+    <p:sldId xmlns:r="http://schemas.openxmlformats.org/officeDocument/2006/relationships" id="259" r:id="Re5ae1f15ad114bd1"/>
+    <p:sldId xmlns:r="http://schemas.openxmlformats.org/officeDocument/2006/relationships" id="260" r:id="Rce8c2db0bf9746cf"/>
+    <p:sldId xmlns:r="http://schemas.openxmlformats.org/officeDocument/2006/relationships" id="261" r:id="Rc6e8c41d636a48be"/>
+    <p:sldId xmlns:r="http://schemas.openxmlformats.org/officeDocument/2006/relationships" id="262" r:id="R6a804487f9984630"/>
+    <p:sldId xmlns:r="http://schemas.openxmlformats.org/officeDocument/2006/relationships" id="263" r:id="Rcbce00b70dfe456e"/>
+    <p:sldId xmlns:r="http://schemas.openxmlformats.org/officeDocument/2006/relationships" id="264" r:id="R8794a5356c204074"/>
   </p:sldIdLst>
   <p:sldSz cx="10287000" cy="12858750"/>
   <p:notesSz cx="6858000" cy="9144000"/>
@@ -496,96 +495,6 @@
 </p:notes>
 </file>
 
-<file path=ppt/notesSlides/notesSlide10.xml><?xml version="1.0" encoding="utf-8"?>
-<p:notes xmlns:p="http://schemas.openxmlformats.org/presentationml/2006/main">
-  <p:cSld>
-    <p:spTree>
-      <p:nvGrpSpPr>
-        <p:cNvPr id="1" name=""/>
-        <p:cNvGrpSpPr/>
-        <p:nvPr/>
-      </p:nvGrpSpPr>
-      <p:grpSpPr>
-        <a:xfrm xmlns:a="http://schemas.openxmlformats.org/drawingml/2006/main"/>
-      </p:grpSpPr>
-      <p:sp>
-        <p:nvSpPr>
-          <p:cNvPr id="2" name="Slide Image Placeholder 1"/>
-          <p:cNvSpPr>
-            <a:spLocks xmlns:a="http://schemas.openxmlformats.org/drawingml/2006/main" noGrp="1"/>
-          </p:cNvSpPr>
-          <p:nvPr>
-            <p:ph type="sldImg" idx="0"/>
-          </p:nvPr>
-        </p:nvSpPr>
-        <p:spPr/>
-      </p:sp>
-      <p:sp>
-        <p:nvSpPr>
-          <p:cNvPr id="3" name="Notes Placeholder 2"/>
-          <p:cNvSpPr>
-            <a:spLocks xmlns:a="http://schemas.openxmlformats.org/drawingml/2006/main" noGrp="1"/>
-          </p:cNvSpPr>
-          <p:nvPr>
-            <p:ph type="body" idx="1"/>
-          </p:nvPr>
-        </p:nvSpPr>
-        <p:spPr/>
-        <p:txBody>
-          <a:bodyPr xmlns:a="http://schemas.openxmlformats.org/drawingml/2006/main"/>
-          <a:lstStyle xmlns:a="http://schemas.openxmlformats.org/drawingml/2006/main"/>
-          <a:p xmlns:a="http://schemas.openxmlformats.org/drawingml/2006/main">
-            <a:r>
-              <a:t>[Sources]</a:t>
-            </a:r>
-          </a:p>
-          <a:p xmlns:a="http://schemas.openxmlformats.org/drawingml/2006/main">
-            <a:r>
-              <a:t>- README.md</a:t>
-            </a:r>
-          </a:p>
-          <a:p xmlns:a="http://schemas.openxmlformats.org/drawingml/2006/main">
-            <a:r>
-              <a:t>- docs/CASE_STUDY.md</a:t>
-            </a:r>
-          </a:p>
-          <a:p xmlns:a="http://schemas.openxmlformats.org/drawingml/2006/main">
-            <a:r>
-              <a:t>- https://github.com/bryanleme/steelFlow-ai</a:t>
-            </a:r>
-          </a:p>
-          <a:p xmlns:a="http://schemas.openxmlformats.org/drawingml/2006/main">
-            <a:r>
-              <a:t>[/Sources]</a:t>
-            </a:r>
-          </a:p>
-        </p:txBody>
-      </p:sp>
-      <p:sp>
-        <p:nvSpPr>
-          <p:cNvPr id="4" name="Slide Number Placeholder 3"/>
-          <p:cNvSpPr>
-            <a:spLocks xmlns:a="http://schemas.openxmlformats.org/drawingml/2006/main" noGrp="1"/>
-          </p:cNvSpPr>
-          <p:nvPr>
-            <p:ph type="sldNum" idx="5"/>
-          </p:nvPr>
-        </p:nvSpPr>
-        <p:spPr/>
-        <p:txBody>
-          <a:bodyPr xmlns:a="http://schemas.openxmlformats.org/drawingml/2006/main"/>
-          <a:lstStyle xmlns:a="http://schemas.openxmlformats.org/drawingml/2006/main"/>
-          <a:p xmlns:a="http://schemas.openxmlformats.org/drawingml/2006/main"/>
-        </p:txBody>
-      </p:sp>
-    </p:spTree>
-  </p:cSld>
-  <p:clrMapOvr>
-    <a:masterClrMapping xmlns:a="http://schemas.openxmlformats.org/drawingml/2006/main"/>
-  </p:clrMapOvr>
-</p:notes>
-</file>
-
 <file path=ppt/notesSlides/notesSlide2.xml><?xml version="1.0" encoding="utf-8"?>
 <p:notes xmlns:p="http://schemas.openxmlformats.org/presentationml/2006/main">
   <p:cSld>
@@ -716,17 +625,17 @@
           </a:p>
           <a:p xmlns:a="http://schemas.openxmlformats.org/drawingml/2006/main">
             <a:r>
-              <a:t>- artifacts/samples/phase_5_modeling_summaries.json</a:t>
-            </a:r>
-          </a:p>
-          <a:p xmlns:a="http://schemas.openxmlformats.org/drawingml/2006/main">
-            <a:r>
-              <a:t>- configs/simulation_mvp.yaml</a:t>
-            </a:r>
-          </a:p>
-          <a:p xmlns:a="http://schemas.openxmlformats.org/drawingml/2006/main">
-            <a:r>
-              <a:t>- docs/DATA_CARD.md</a:t>
+              <a:t>- README.md</a:t>
+            </a:r>
+          </a:p>
+          <a:p xmlns:a="http://schemas.openxmlformats.org/drawingml/2006/main">
+            <a:r>
+              <a:t>- docs/FEATURE_CONTRACT.md</a:t>
+            </a:r>
+          </a:p>
+          <a:p xmlns:a="http://schemas.openxmlformats.org/drawingml/2006/main">
+            <a:r>
+              <a:t>- docs/SCENARIO_CONTRACT.md</a:t>
             </a:r>
           </a:p>
           <a:p xmlns:a="http://schemas.openxmlformats.org/drawingml/2006/main">
@@ -806,17 +715,12 @@
           </a:p>
           <a:p xmlns:a="http://schemas.openxmlformats.org/drawingml/2006/main">
             <a:r>
-              <a:t>- README.md</a:t>
-            </a:r>
-          </a:p>
-          <a:p xmlns:a="http://schemas.openxmlformats.org/drawingml/2006/main">
-            <a:r>
-              <a:t>- docs/FEATURE_CONTRACT.md</a:t>
-            </a:r>
-          </a:p>
-          <a:p xmlns:a="http://schemas.openxmlformats.org/drawingml/2006/main">
-            <a:r>
-              <a:t>- docs/SCENARIO_CONTRACT.md</a:t>
+              <a:t>- artifacts/samples/phase_5_modeling_summaries.json</a:t>
+            </a:r>
+          </a:p>
+          <a:p xmlns:a="http://schemas.openxmlformats.org/drawingml/2006/main">
+            <a:r>
+              <a:t>- docs/MODELING_REPORT.md</a:t>
             </a:r>
           </a:p>
           <a:p xmlns:a="http://schemas.openxmlformats.org/drawingml/2006/main">
@@ -901,7 +805,7 @@
           </a:p>
           <a:p xmlns:a="http://schemas.openxmlformats.org/drawingml/2006/main">
             <a:r>
-              <a:t>- docs/MODELING_REPORT.md</a:t>
+              <a:t>- docs/images/phase7/forecast-risk.png</a:t>
             </a:r>
           </a:p>
           <a:p xmlns:a="http://schemas.openxmlformats.org/drawingml/2006/main">
@@ -981,12 +885,12 @@
           </a:p>
           <a:p xmlns:a="http://schemas.openxmlformats.org/drawingml/2006/main">
             <a:r>
-              <a:t>- artifacts/samples/phase_5_modeling_summaries.json</a:t>
-            </a:r>
-          </a:p>
-          <a:p xmlns:a="http://schemas.openxmlformats.org/drawingml/2006/main">
-            <a:r>
-              <a:t>- docs/images/phase7/forecast-risk.png</a:t>
+              <a:t>- artifacts/samples/phase_6_optimization_summaries.json</a:t>
+            </a:r>
+          </a:p>
+          <a:p xmlns:a="http://schemas.openxmlformats.org/drawingml/2006/main">
+            <a:r>
+              <a:t>- docs/images/phase7/scenario-lab.png</a:t>
             </a:r>
           </a:p>
           <a:p xmlns:a="http://schemas.openxmlformats.org/drawingml/2006/main">
@@ -1066,12 +970,17 @@
           </a:p>
           <a:p xmlns:a="http://schemas.openxmlformats.org/drawingml/2006/main">
             <a:r>
-              <a:t>- artifacts/samples/phase_6_optimization_summaries.json</a:t>
-            </a:r>
-          </a:p>
-          <a:p xmlns:a="http://schemas.openxmlformats.org/drawingml/2006/main">
-            <a:r>
-              <a:t>- docs/images/phase7/scenario-lab.png</a:t>
+              <a:t>- artifacts/samples/phase_7_product_summary.json</a:t>
+            </a:r>
+          </a:p>
+          <a:p xmlns:a="http://schemas.openxmlformats.org/drawingml/2006/main">
+            <a:r>
+              <a:t>- docs/images/phase7/root-cause-explainability.png</a:t>
+            </a:r>
+          </a:p>
+          <a:p xmlns:a="http://schemas.openxmlformats.org/drawingml/2006/main">
+            <a:r>
+              <a:t>- powerbi/README.md</a:t>
             </a:r>
           </a:p>
           <a:p xmlns:a="http://schemas.openxmlformats.org/drawingml/2006/main">
@@ -1151,17 +1060,17 @@
           </a:p>
           <a:p xmlns:a="http://schemas.openxmlformats.org/drawingml/2006/main">
             <a:r>
-              <a:t>- artifacts/samples/phase_7_product_summary.json</a:t>
-            </a:r>
-          </a:p>
-          <a:p xmlns:a="http://schemas.openxmlformats.org/drawingml/2006/main">
-            <a:r>
-              <a:t>- docs/images/phase7/root-cause-explainability.png</a:t>
-            </a:r>
-          </a:p>
-          <a:p xmlns:a="http://schemas.openxmlformats.org/drawingml/2006/main">
-            <a:r>
-              <a:t>- powerbi/README.md</a:t>
+              <a:t>- docs/MODEL_CARD.md</a:t>
+            </a:r>
+          </a:p>
+          <a:p xmlns:a="http://schemas.openxmlformats.org/drawingml/2006/main">
+            <a:r>
+              <a:t>- docs/images/phase7/model-reliability.png</a:t>
+            </a:r>
+          </a:p>
+          <a:p xmlns:a="http://schemas.openxmlformats.org/drawingml/2006/main">
+            <a:r>
+              <a:t>- docs/FINAL_ACCEPTANCE_REPORT.md</a:t>
             </a:r>
           </a:p>
           <a:p xmlns:a="http://schemas.openxmlformats.org/drawingml/2006/main">
@@ -1241,17 +1150,17 @@
           </a:p>
           <a:p xmlns:a="http://schemas.openxmlformats.org/drawingml/2006/main">
             <a:r>
-              <a:t>- docs/MODEL_CARD.md</a:t>
-            </a:r>
-          </a:p>
-          <a:p xmlns:a="http://schemas.openxmlformats.org/drawingml/2006/main">
-            <a:r>
-              <a:t>- docs/images/phase7/model-reliability.png</a:t>
-            </a:r>
-          </a:p>
-          <a:p xmlns:a="http://schemas.openxmlformats.org/drawingml/2006/main">
-            <a:r>
-              <a:t>- docs/FINAL_ACCEPTANCE_REPORT.md</a:t>
+              <a:t>- README.md</a:t>
+            </a:r>
+          </a:p>
+          <a:p xmlns:a="http://schemas.openxmlformats.org/drawingml/2006/main">
+            <a:r>
+              <a:t>- docs/CASE_STUDY.md</a:t>
+            </a:r>
+          </a:p>
+          <a:p xmlns:a="http://schemas.openxmlformats.org/drawingml/2006/main">
+            <a:r>
+              <a:t>- https://github.com/bryanleme/steelFlow-ai</a:t>
             </a:r>
           </a:p>
           <a:p xmlns:a="http://schemas.openxmlformats.org/drawingml/2006/main">
@@ -1324,7 +1233,7 @@
   </p:cSld>
   <p:clrMap bg1="lt1" tx1="dk1" bg2="lt2" tx2="dk2" accent1="accent1" accent2="accent2" accent3="accent3" accent4="accent4" accent5="accent5" accent6="accent6" hlink="hlink" folHlink="folHlink"/>
   <p:sldLayoutIdLst>
-    <p:sldLayoutId xmlns:r="http://schemas.openxmlformats.org/officeDocument/2006/relationships" id="2147483649" r:id="Rf436d7c6a01d41e6"/>
+    <p:sldLayoutId xmlns:r="http://schemas.openxmlformats.org/officeDocument/2006/relationships" id="2147483649" r:id="Rc6a3e9da5db841a6"/>
   </p:sldLayoutIdLst>
   <p:txStyles>
     <p:titleStyle>
@@ -2175,6 +2084,7 @@
           <a:lstStyle xmlns:a="http://schemas.openxmlformats.org/drawingml/2006/main"/>
           <a:p xmlns:a="http://schemas.openxmlformats.org/drawingml/2006/main">
             <a:pPr algn="l">
+              <a:buNone/>
               <a:defRPr sz="1350" b="1">
                 <a:solidFill>
                   <a:srgbClr val="20CDBF"/>
@@ -2193,7 +2103,7 @@
                 <a:ea typeface="Arial"/>
                 <a:cs typeface="Arial"/>
               </a:rPr>
-              <a:t>DECISION SUPPORT · DATA · ML</a:t>
+              <a:t>DADOS · ML · DECISÃO RESPONSÁVEL</a:t>
             </a:r>
           </a:p>
         </p:txBody>
@@ -2233,6 +2143,7 @@
           <a:lstStyle xmlns:a="http://schemas.openxmlformats.org/drawingml/2006/main"/>
           <a:p xmlns:a="http://schemas.openxmlformats.org/drawingml/2006/main">
             <a:pPr algn="l">
+              <a:buNone/>
               <a:defRPr sz="6150" b="1">
                 <a:solidFill>
                   <a:srgbClr val="FFFFFF"/>
@@ -2291,6 +2202,7 @@
           <a:lstStyle xmlns:a="http://schemas.openxmlformats.org/drawingml/2006/main"/>
           <a:p xmlns:a="http://schemas.openxmlformats.org/drawingml/2006/main">
             <a:pPr algn="l">
+              <a:buNone/>
               <a:defRPr sz="3150" b="1">
                 <a:solidFill>
                   <a:srgbClr val="FFFFFF"/>
@@ -2309,11 +2221,12 @@
                 <a:ea typeface="Arial"/>
                 <a:cs typeface="Arial"/>
               </a:rPr>
-              <a:t>Um digital twin que também sabe dizer:</a:t>
+              <a:t>Quando o modelo não sabe,</a:t>
             </a:r>
           </a:p>
           <a:p xmlns:a="http://schemas.openxmlformats.org/drawingml/2006/main">
             <a:pPr algn="l">
+              <a:buNone/>
               <a:defRPr sz="3150" b="1">
                 <a:solidFill>
                   <a:srgbClr val="FFFFFF"/>
@@ -2332,7 +2245,7 @@
                 <a:ea typeface="Arial"/>
                 <a:cs typeface="Arial"/>
               </a:rPr>
-              <a:t>evidência insuficiente.</a:t>
+              <a:t>ele para.</a:t>
             </a:r>
           </a:p>
         </p:txBody>
@@ -2372,6 +2285,7 @@
           <a:lstStyle xmlns:a="http://schemas.openxmlformats.org/drawingml/2006/main"/>
           <a:p xmlns:a="http://schemas.openxmlformats.org/drawingml/2006/main">
             <a:pPr algn="l">
+              <a:buNone/>
               <a:defRPr sz="2025" b="0">
                 <a:solidFill>
                   <a:srgbClr val="B7CAD8"/>
@@ -2390,21 +2304,21 @@
                 <a:ea typeface="Arial"/>
                 <a:cs typeface="Arial"/>
               </a:rPr>
-              <a:t>Previsão temporal, incerteza calibrada, explicabilidade e cenários Pareto — com limites explícitos.</a:t>
+              <a:t>Um projeto que prevê, explica e recusa cenários sem evidência suficiente.</a:t>
             </a:r>
           </a:p>
         </p:txBody>
       </p:sp>
       <p:pic>
         <p:nvPicPr>
-          <p:cNvPr id="12" name=""/>
+          <p:cNvPr id="14" name=""/>
           <p:cNvPicPr>
             <a:picLocks xmlns:a="http://schemas.openxmlformats.org/drawingml/2006/main" noChangeAspect="1"/>
           </p:cNvPicPr>
           <p:nvPr/>
         </p:nvPicPr>
         <p:blipFill>
-          <a:blip xmlns:r="http://schemas.openxmlformats.org/officeDocument/2006/relationships" xmlns:a="http://schemas.openxmlformats.org/drawingml/2006/main" r:embed="R5245ab735c674f4e"/>
+          <a:blip xmlns:r="http://schemas.openxmlformats.org/officeDocument/2006/relationships" xmlns:a="http://schemas.openxmlformats.org/drawingml/2006/main" r:embed="R229ca358aa3b448e"/>
           <a:srcRect xmlns:a="http://schemas.openxmlformats.org/drawingml/2006/main" l="0" t="6553" r="0" b="6553"/>
           <a:stretch xmlns:a="http://schemas.openxmlformats.org/drawingml/2006/main">
             <a:fillRect l="0" t="0" r="0" b="0"/>
@@ -2457,6 +2371,7 @@
           <a:lstStyle xmlns:a="http://schemas.openxmlformats.org/drawingml/2006/main"/>
           <a:p xmlns:a="http://schemas.openxmlformats.org/drawingml/2006/main">
             <a:pPr algn="l">
+              <a:buNone/>
               <a:defRPr sz="1350" b="1">
                 <a:solidFill>
                   <a:srgbClr val="20CDBF"/>
@@ -2515,6 +2430,7 @@
           <a:lstStyle xmlns:a="http://schemas.openxmlformats.org/drawingml/2006/main"/>
           <a:p xmlns:a="http://schemas.openxmlformats.org/drawingml/2006/main">
             <a:pPr algn="r">
+              <a:buNone/>
               <a:defRPr sz="1200" b="0">
                 <a:solidFill>
                   <a:srgbClr val="8296A5"/>
@@ -2533,7 +2449,7 @@
                 <a:ea typeface="Arial"/>
                 <a:cs typeface="Arial"/>
               </a:rPr>
-              <a:t>01/10</a:t>
+              <a:t>01/09</a:t>
             </a:r>
           </a:p>
         </p:txBody>
@@ -2542,544 +2458,6 @@
     <p:extLst>
       <p:ext uri="{BB962C8B-B14F-4D97-AF65-F5344CB8AC3E}">
         <p14:creationId xmlns:p14="http://schemas.microsoft.com/office/powerpoint/2010/main" val="1662700440"/>
-      </p:ext>
-    </p:extLst>
-  </p:cSld>
-</p:sld>
-</file>
-
-<file path=ppt/slides/slide10.xml><?xml version="1.0" encoding="utf-8"?>
-<p:sld xmlns:p="http://schemas.openxmlformats.org/presentationml/2006/main">
-  <p:cSld>
-    <p:bg>
-      <p:bgPr>
-        <a:solidFill xmlns:a="http://schemas.openxmlformats.org/drawingml/2006/main">
-          <a:srgbClr val="FFFFFF"/>
-        </a:solidFill>
-      </p:bgPr>
-    </p:bg>
-    <p:spTree>
-      <p:nvGrpSpPr>
-        <p:cNvPr id="1" name=""/>
-        <p:cNvGrpSpPr/>
-        <p:nvPr/>
-      </p:nvGrpSpPr>
-      <p:grpSpPr>
-        <a:xfrm xmlns:a="http://schemas.openxmlformats.org/drawingml/2006/main"/>
-      </p:grpSpPr>
-      <p:sp>
-        <p:nvSpPr>
-          <p:cNvPr id="10" name="close-kicker">
-            <a:extLst xmlns:a="http://schemas.openxmlformats.org/drawingml/2006/main">
-              <a:ext uri="{FF2B5EF4-FFF2-40B4-BE49-F238E27FC236}">
-                <a16:creationId xmlns:a16="http://schemas.microsoft.com/office/drawing/2014/main" id="{4A29BF44-3BDA-4C78-9CBD-C6046E39C2F2}"/>
-              </a:ext>
-            </a:extLst>
-          </p:cNvPr>
-          <p:cNvSpPr>
-            <a:spLocks xmlns:a="http://schemas.openxmlformats.org/drawingml/2006/main" noGrp="1"/>
-          </p:cNvSpPr>
-          <p:nvPr/>
-        </p:nvSpPr>
-        <p:spPr>
-          <a:xfrm xmlns:a="http://schemas.openxmlformats.org/drawingml/2006/main">
-            <a:off x="685800" y="762000"/>
-            <a:ext cx="8915400" cy="381000"/>
-          </a:xfrm>
-          <a:prstGeom xmlns:a="http://schemas.openxmlformats.org/drawingml/2006/main" prst="rect">
-            <a:avLst/>
-          </a:prstGeom>
-          <a:noFill xmlns:a="http://schemas.openxmlformats.org/drawingml/2006/main"/>
-          <a:ln xmlns:a="http://schemas.openxmlformats.org/drawingml/2006/main" w="0">
-            <a:noFill/>
-            <a:prstDash val="solid"/>
-          </a:ln>
-        </p:spPr>
-        <p:txBody>
-          <a:bodyPr xmlns:a="http://schemas.openxmlformats.org/drawingml/2006/main" anchor="t">
-            <a:normAutofit fontScale="100000"/>
-          </a:bodyPr>
-          <a:lstStyle xmlns:a="http://schemas.openxmlformats.org/drawingml/2006/main"/>
-          <a:p xmlns:a="http://schemas.openxmlformats.org/drawingml/2006/main">
-            <a:pPr algn="l">
-              <a:defRPr sz="1425" b="1">
-                <a:solidFill>
-                  <a:srgbClr val="3D8DFF"/>
-                </a:solidFill>
-                <a:latin typeface="Arial"/>
-                <a:ea typeface="Arial"/>
-                <a:cs typeface="Arial"/>
-              </a:defRPr>
-            </a:pPr>
-            <a:r>
-              <a:rPr sz="1425" b="1">
-                <a:solidFill>
-                  <a:srgbClr val="3D8DFF"/>
-                </a:solidFill>
-                <a:latin typeface="Arial"/>
-                <a:ea typeface="Arial"/>
-                <a:cs typeface="Arial"/>
-              </a:rPr>
-              <a:t>STEELFLOW AI</a:t>
-            </a:r>
-          </a:p>
-        </p:txBody>
-      </p:sp>
-      <p:sp>
-        <p:nvSpPr>
-          <p:cNvPr id="2" name="close-title">
-            <a:extLst xmlns:a="http://schemas.openxmlformats.org/drawingml/2006/main">
-              <a:ext uri="{FF2B5EF4-FFF2-40B4-BE49-F238E27FC236}">
-                <a16:creationId xmlns:a16="http://schemas.microsoft.com/office/drawing/2014/main" id="{584C9D75-4C20-4B03-ABCF-158C3E284423}"/>
-              </a:ext>
-            </a:extLst>
-          </p:cNvPr>
-          <p:cNvSpPr>
-            <a:spLocks xmlns:a="http://schemas.openxmlformats.org/drawingml/2006/main" noGrp="1"/>
-          </p:cNvSpPr>
-          <p:nvPr/>
-        </p:nvSpPr>
-        <p:spPr>
-          <a:xfrm xmlns:a="http://schemas.openxmlformats.org/drawingml/2006/main">
-            <a:off x="685800" y="1762125"/>
-            <a:ext cx="8915400" cy="2095500"/>
-          </a:xfrm>
-          <a:prstGeom xmlns:a="http://schemas.openxmlformats.org/drawingml/2006/main" prst="rect">
-            <a:avLst/>
-          </a:prstGeom>
-          <a:noFill xmlns:a="http://schemas.openxmlformats.org/drawingml/2006/main"/>
-          <a:ln xmlns:a="http://schemas.openxmlformats.org/drawingml/2006/main" w="0">
-            <a:noFill/>
-            <a:prstDash val="solid"/>
-          </a:ln>
-        </p:spPr>
-        <p:txBody>
-          <a:bodyPr xmlns:a="http://schemas.openxmlformats.org/drawingml/2006/main" anchor="t">
-            <a:normAutofit fontScale="100000"/>
-          </a:bodyPr>
-          <a:lstStyle xmlns:a="http://schemas.openxmlformats.org/drawingml/2006/main"/>
-          <a:p xmlns:a="http://schemas.openxmlformats.org/drawingml/2006/main">
-            <a:pPr algn="l">
-              <a:defRPr sz="4950" b="1">
-                <a:solidFill>
-                  <a:srgbClr val="07111C"/>
-                </a:solidFill>
-                <a:latin typeface="Arial"/>
-                <a:ea typeface="Arial"/>
-                <a:cs typeface="Arial"/>
-              </a:defRPr>
-            </a:pPr>
-            <a:r>
-              <a:rPr sz="4950" b="1">
-                <a:solidFill>
-                  <a:srgbClr val="07111C"/>
-                </a:solidFill>
-                <a:latin typeface="Arial"/>
-                <a:ea typeface="Arial"/>
-                <a:cs typeface="Arial"/>
-              </a:rPr>
-              <a:t>Explore. Teste.</a:t>
-            </a:r>
-          </a:p>
-          <a:p xmlns:a="http://schemas.openxmlformats.org/drawingml/2006/main">
-            <a:pPr algn="l">
-              <a:defRPr sz="4950" b="1">
-                <a:solidFill>
-                  <a:srgbClr val="07111C"/>
-                </a:solidFill>
-                <a:latin typeface="Arial"/>
-                <a:ea typeface="Arial"/>
-                <a:cs typeface="Arial"/>
-              </a:defRPr>
-            </a:pPr>
-            <a:r>
-              <a:rPr sz="4950" b="1">
-                <a:solidFill>
-                  <a:srgbClr val="07111C"/>
-                </a:solidFill>
-                <a:latin typeface="Arial"/>
-                <a:ea typeface="Arial"/>
-                <a:cs typeface="Arial"/>
-              </a:rPr>
-              <a:t>Questione os limites.</a:t>
-            </a:r>
-          </a:p>
-        </p:txBody>
-      </p:sp>
-      <p:sp>
-        <p:nvSpPr>
-          <p:cNvPr id="3" name="close-body">
-            <a:extLst xmlns:a="http://schemas.openxmlformats.org/drawingml/2006/main">
-              <a:ext uri="{FF2B5EF4-FFF2-40B4-BE49-F238E27FC236}">
-                <a16:creationId xmlns:a16="http://schemas.microsoft.com/office/drawing/2014/main" id="{B4D2B44C-B7F8-4096-840E-D7E4AEEFC94C}"/>
-              </a:ext>
-            </a:extLst>
-          </p:cNvPr>
-          <p:cNvSpPr>
-            <a:spLocks xmlns:a="http://schemas.openxmlformats.org/drawingml/2006/main" noGrp="1"/>
-          </p:cNvSpPr>
-          <p:nvPr/>
-        </p:nvSpPr>
-        <p:spPr>
-          <a:xfrm xmlns:a="http://schemas.openxmlformats.org/drawingml/2006/main">
-            <a:off x="685800" y="4476750"/>
-            <a:ext cx="8191500" cy="1428750"/>
-          </a:xfrm>
-          <a:prstGeom xmlns:a="http://schemas.openxmlformats.org/drawingml/2006/main" prst="rect">
-            <a:avLst/>
-          </a:prstGeom>
-          <a:noFill xmlns:a="http://schemas.openxmlformats.org/drawingml/2006/main"/>
-          <a:ln xmlns:a="http://schemas.openxmlformats.org/drawingml/2006/main" w="0">
-            <a:noFill/>
-            <a:prstDash val="solid"/>
-          </a:ln>
-        </p:spPr>
-        <p:txBody>
-          <a:bodyPr xmlns:a="http://schemas.openxmlformats.org/drawingml/2006/main" anchor="t">
-            <a:normAutofit fontScale="100000"/>
-          </a:bodyPr>
-          <a:lstStyle xmlns:a="http://schemas.openxmlformats.org/drawingml/2006/main"/>
-          <a:p xmlns:a="http://schemas.openxmlformats.org/drawingml/2006/main">
-            <a:pPr algn="l">
-              <a:defRPr sz="2175" b="0">
-                <a:solidFill>
-                  <a:srgbClr val="53606D"/>
-                </a:solidFill>
-                <a:latin typeface="Arial"/>
-                <a:ea typeface="Arial"/>
-                <a:cs typeface="Arial"/>
-              </a:defRPr>
-            </a:pPr>
-            <a:r>
-              <a:rPr sz="2175" b="0">
-                <a:solidFill>
-                  <a:srgbClr val="53606D"/>
-                </a:solidFill>
-                <a:latin typeface="Arial"/>
-                <a:ea typeface="Arial"/>
-                <a:cs typeface="Arial"/>
-              </a:rPr>
-              <a:t>O repositório reúne dados sintéticos reproduzíveis, pipeline temporal, modelos calibrados, otimização restrita, Streamlit e Power BI.</a:t>
-            </a:r>
-          </a:p>
-        </p:txBody>
-      </p:sp>
-      <p:cxnSp>
-        <p:nvCxnSpPr>
-          <p:cNvPr id="13" name="close-accent"/>
-          <p:cNvCxnSpPr/>
-          <p:nvPr/>
-        </p:nvCxnSpPr>
-        <p:spPr>
-          <a:xfrm xmlns:a="http://schemas.openxmlformats.org/drawingml/2006/main">
-            <a:off x="685800" y="6429375"/>
-            <a:ext cx="2857500" cy="0"/>
-          </a:xfrm>
-          <a:prstGeom xmlns:a="http://schemas.openxmlformats.org/drawingml/2006/main" prst="straightConnector1">
-            <a:avLst/>
-          </a:prstGeom>
-          <a:ln xmlns:a="http://schemas.openxmlformats.org/drawingml/2006/main" w="95250">
-            <a:solidFill>
-              <a:srgbClr val="20CDBF"/>
-            </a:solidFill>
-            <a:prstDash val="solid"/>
-          </a:ln>
-        </p:spPr>
-      </p:cxnSp>
-      <p:sp>
-        <p:nvSpPr>
-          <p:cNvPr id="5" name="close-url-label">
-            <a:extLst xmlns:a="http://schemas.openxmlformats.org/drawingml/2006/main">
-              <a:ext uri="{FF2B5EF4-FFF2-40B4-BE49-F238E27FC236}">
-                <a16:creationId xmlns:a16="http://schemas.microsoft.com/office/drawing/2014/main" id="{D3A57EAB-876A-4CEA-ABE5-5D9BE11EC9A9}"/>
-              </a:ext>
-            </a:extLst>
-          </p:cNvPr>
-          <p:cNvSpPr>
-            <a:spLocks xmlns:a="http://schemas.openxmlformats.org/drawingml/2006/main" noGrp="1"/>
-          </p:cNvSpPr>
-          <p:nvPr/>
-        </p:nvSpPr>
-        <p:spPr>
-          <a:xfrm xmlns:a="http://schemas.openxmlformats.org/drawingml/2006/main">
-            <a:off x="685800" y="7239000"/>
-            <a:ext cx="8915400" cy="400050"/>
-          </a:xfrm>
-          <a:prstGeom xmlns:a="http://schemas.openxmlformats.org/drawingml/2006/main" prst="rect">
-            <a:avLst/>
-          </a:prstGeom>
-          <a:noFill xmlns:a="http://schemas.openxmlformats.org/drawingml/2006/main"/>
-          <a:ln xmlns:a="http://schemas.openxmlformats.org/drawingml/2006/main" w="0">
-            <a:noFill/>
-            <a:prstDash val="solid"/>
-          </a:ln>
-        </p:spPr>
-        <p:txBody>
-          <a:bodyPr xmlns:a="http://schemas.openxmlformats.org/drawingml/2006/main" anchor="t">
-            <a:normAutofit fontScale="100000"/>
-          </a:bodyPr>
-          <a:lstStyle xmlns:a="http://schemas.openxmlformats.org/drawingml/2006/main"/>
-          <a:p xmlns:a="http://schemas.openxmlformats.org/drawingml/2006/main">
-            <a:pPr algn="l">
-              <a:defRPr sz="1350" b="1">
-                <a:solidFill>
-                  <a:srgbClr val="3D8DFF"/>
-                </a:solidFill>
-                <a:latin typeface="Arial"/>
-                <a:ea typeface="Arial"/>
-                <a:cs typeface="Arial"/>
-              </a:defRPr>
-            </a:pPr>
-            <a:r>
-              <a:rPr sz="1350" b="1">
-                <a:solidFill>
-                  <a:srgbClr val="3D8DFF"/>
-                </a:solidFill>
-                <a:latin typeface="Arial"/>
-                <a:ea typeface="Arial"/>
-                <a:cs typeface="Arial"/>
-              </a:rPr>
-              <a:t>CÓDIGO, EVIDÊNCIAS E DOCUMENTAÇÃO</a:t>
-            </a:r>
-          </a:p>
-        </p:txBody>
-      </p:sp>
-      <p:sp>
-        <p:nvSpPr>
-          <p:cNvPr id="6" name="close-url">
-            <a:extLst xmlns:a="http://schemas.openxmlformats.org/drawingml/2006/main">
-              <a:ext uri="{FF2B5EF4-FFF2-40B4-BE49-F238E27FC236}">
-                <a16:creationId xmlns:a16="http://schemas.microsoft.com/office/drawing/2014/main" id="{94A5A874-2061-4322-A504-FA6CDFB44C5E}"/>
-              </a:ext>
-            </a:extLst>
-          </p:cNvPr>
-          <p:cNvSpPr>
-            <a:spLocks xmlns:a="http://schemas.openxmlformats.org/drawingml/2006/main" noGrp="1"/>
-          </p:cNvSpPr>
-          <p:nvPr/>
-        </p:nvSpPr>
-        <p:spPr>
-          <a:xfrm xmlns:a="http://schemas.openxmlformats.org/drawingml/2006/main">
-            <a:off x="685800" y="7829550"/>
-            <a:ext cx="8915400" cy="952500"/>
-          </a:xfrm>
-          <a:prstGeom xmlns:a="http://schemas.openxmlformats.org/drawingml/2006/main" prst="rect">
-            <a:avLst/>
-          </a:prstGeom>
-          <a:noFill xmlns:a="http://schemas.openxmlformats.org/drawingml/2006/main"/>
-          <a:ln xmlns:a="http://schemas.openxmlformats.org/drawingml/2006/main" w="0">
-            <a:noFill/>
-            <a:prstDash val="solid"/>
-          </a:ln>
-        </p:spPr>
-        <p:txBody>
-          <a:bodyPr xmlns:a="http://schemas.openxmlformats.org/drawingml/2006/main" anchor="t">
-            <a:normAutofit fontScale="100000"/>
-          </a:bodyPr>
-          <a:lstStyle xmlns:a="http://schemas.openxmlformats.org/drawingml/2006/main"/>
-          <a:p xmlns:a="http://schemas.openxmlformats.org/drawingml/2006/main">
-            <a:pPr algn="l">
-              <a:defRPr sz="2850" b="1">
-                <a:solidFill>
-                  <a:srgbClr val="07111C"/>
-                </a:solidFill>
-                <a:latin typeface="Arial"/>
-                <a:ea typeface="Arial"/>
-                <a:cs typeface="Arial"/>
-              </a:defRPr>
-            </a:pPr>
-            <a:r>
-              <a:rPr sz="2850" b="1">
-                <a:solidFill>
-                  <a:srgbClr val="07111C"/>
-                </a:solidFill>
-                <a:latin typeface="Arial"/>
-                <a:ea typeface="Arial"/>
-                <a:cs typeface="Arial"/>
-              </a:rPr>
-              <a:t>github.com/bryanleme/steelFlow-ai</a:t>
-            </a:r>
-          </a:p>
-        </p:txBody>
-      </p:sp>
-      <p:sp>
-        <p:nvSpPr>
-          <p:cNvPr id="7" name="close-next">
-            <a:extLst xmlns:a="http://schemas.openxmlformats.org/drawingml/2006/main">
-              <a:ext uri="{FF2B5EF4-FFF2-40B4-BE49-F238E27FC236}">
-                <a16:creationId xmlns:a16="http://schemas.microsoft.com/office/drawing/2014/main" id="{8170760B-0AB7-4DE6-98EE-69BF5979AD91}"/>
-              </a:ext>
-            </a:extLst>
-          </p:cNvPr>
-          <p:cNvSpPr>
-            <a:spLocks xmlns:a="http://schemas.openxmlformats.org/drawingml/2006/main" noGrp="1"/>
-          </p:cNvSpPr>
-          <p:nvPr/>
-        </p:nvSpPr>
-        <p:spPr>
-          <a:xfrm xmlns:a="http://schemas.openxmlformats.org/drawingml/2006/main">
-            <a:off x="685800" y="9667875"/>
-            <a:ext cx="8572500" cy="1143000"/>
-          </a:xfrm>
-          <a:prstGeom xmlns:a="http://schemas.openxmlformats.org/drawingml/2006/main" prst="rect">
-            <a:avLst/>
-          </a:prstGeom>
-          <a:noFill xmlns:a="http://schemas.openxmlformats.org/drawingml/2006/main"/>
-          <a:ln xmlns:a="http://schemas.openxmlformats.org/drawingml/2006/main" w="0">
-            <a:noFill/>
-            <a:prstDash val="solid"/>
-          </a:ln>
-        </p:spPr>
-        <p:txBody>
-          <a:bodyPr xmlns:a="http://schemas.openxmlformats.org/drawingml/2006/main" anchor="t">
-            <a:normAutofit fontScale="100000"/>
-          </a:bodyPr>
-          <a:lstStyle xmlns:a="http://schemas.openxmlformats.org/drawingml/2006/main"/>
-          <a:p xmlns:a="http://schemas.openxmlformats.org/drawingml/2006/main">
-            <a:pPr algn="l">
-              <a:defRPr sz="1950" b="0">
-                <a:solidFill>
-                  <a:srgbClr val="53606D"/>
-                </a:solidFill>
-                <a:latin typeface="Arial"/>
-                <a:ea typeface="Arial"/>
-                <a:cs typeface="Arial"/>
-              </a:defRPr>
-            </a:pPr>
-            <a:r>
-              <a:rPr sz="1950" b="0">
-                <a:solidFill>
-                  <a:srgbClr val="53606D"/>
-                </a:solidFill>
-                <a:latin typeface="Arial"/>
-                <a:ea typeface="Arial"/>
-                <a:cs typeface="Arial"/>
-              </a:rPr>
-              <a:t>Próximo passo responsável: dados autorizados, revisão de processo e validação externa em modo observacional.</a:t>
-            </a:r>
-          </a:p>
-        </p:txBody>
-      </p:sp>
-      <p:sp>
-        <p:nvSpPr>
-          <p:cNvPr id="8" name="close-scope">
-            <a:extLst xmlns:a="http://schemas.openxmlformats.org/drawingml/2006/main">
-              <a:ext uri="{FF2B5EF4-FFF2-40B4-BE49-F238E27FC236}">
-                <a16:creationId xmlns:a16="http://schemas.microsoft.com/office/drawing/2014/main" id="{44E43D55-E684-4397-9217-42A4BAE55AC1}"/>
-              </a:ext>
-            </a:extLst>
-          </p:cNvPr>
-          <p:cNvSpPr>
-            <a:spLocks xmlns:a="http://schemas.openxmlformats.org/drawingml/2006/main" noGrp="1"/>
-          </p:cNvSpPr>
-          <p:nvPr/>
-        </p:nvSpPr>
-        <p:spPr>
-          <a:xfrm xmlns:a="http://schemas.openxmlformats.org/drawingml/2006/main">
-            <a:off x="685800" y="11668125"/>
-            <a:ext cx="8915400" cy="400050"/>
-          </a:xfrm>
-          <a:prstGeom xmlns:a="http://schemas.openxmlformats.org/drawingml/2006/main" prst="rect">
-            <a:avLst/>
-          </a:prstGeom>
-          <a:noFill xmlns:a="http://schemas.openxmlformats.org/drawingml/2006/main"/>
-          <a:ln xmlns:a="http://schemas.openxmlformats.org/drawingml/2006/main" w="0">
-            <a:noFill/>
-            <a:prstDash val="solid"/>
-          </a:ln>
-        </p:spPr>
-        <p:txBody>
-          <a:bodyPr xmlns:a="http://schemas.openxmlformats.org/drawingml/2006/main" anchor="t">
-            <a:normAutofit fontScale="100000"/>
-          </a:bodyPr>
-          <a:lstStyle xmlns:a="http://schemas.openxmlformats.org/drawingml/2006/main"/>
-          <a:p xmlns:a="http://schemas.openxmlformats.org/drawingml/2006/main">
-            <a:pPr algn="l">
-              <a:defRPr sz="1350" b="1">
-                <a:solidFill>
-                  <a:srgbClr val="07111C"/>
-                </a:solidFill>
-                <a:latin typeface="Arial"/>
-                <a:ea typeface="Arial"/>
-                <a:cs typeface="Arial"/>
-              </a:defRPr>
-            </a:pPr>
-            <a:r>
-              <a:rPr sz="1350" b="1">
-                <a:solidFill>
-                  <a:srgbClr val="07111C"/>
-                </a:solidFill>
-                <a:latin typeface="Arial"/>
-                <a:ea typeface="Arial"/>
-                <a:cs typeface="Arial"/>
-              </a:rPr>
-              <a:t>100% sintético · sem causalidade industrial · sem controle de máquina</a:t>
-            </a:r>
-          </a:p>
-        </p:txBody>
-      </p:sp>
-      <p:sp>
-        <p:nvSpPr>
-          <p:cNvPr id="9" name="close-page">
-            <a:extLst xmlns:a="http://schemas.openxmlformats.org/drawingml/2006/main">
-              <a:ext uri="{FF2B5EF4-FFF2-40B4-BE49-F238E27FC236}">
-                <a16:creationId xmlns:a16="http://schemas.microsoft.com/office/drawing/2014/main" id="{743BA035-DA5C-42C6-9464-2A791F3A6D2C}"/>
-              </a:ext>
-            </a:extLst>
-          </p:cNvPr>
-          <p:cNvSpPr>
-            <a:spLocks xmlns:a="http://schemas.openxmlformats.org/drawingml/2006/main" noGrp="1"/>
-          </p:cNvSpPr>
-          <p:nvPr/>
-        </p:nvSpPr>
-        <p:spPr>
-          <a:xfrm xmlns:a="http://schemas.openxmlformats.org/drawingml/2006/main">
-            <a:off x="8667750" y="12211050"/>
-            <a:ext cx="933450" cy="266700"/>
-          </a:xfrm>
-          <a:prstGeom xmlns:a="http://schemas.openxmlformats.org/drawingml/2006/main" prst="rect">
-            <a:avLst/>
-          </a:prstGeom>
-          <a:noFill xmlns:a="http://schemas.openxmlformats.org/drawingml/2006/main"/>
-          <a:ln xmlns:a="http://schemas.openxmlformats.org/drawingml/2006/main" w="0">
-            <a:noFill/>
-            <a:prstDash val="solid"/>
-          </a:ln>
-        </p:spPr>
-        <p:txBody>
-          <a:bodyPr xmlns:a="http://schemas.openxmlformats.org/drawingml/2006/main" anchor="t">
-            <a:normAutofit fontScale="95833"/>
-          </a:bodyPr>
-          <a:lstStyle xmlns:a="http://schemas.openxmlformats.org/drawingml/2006/main"/>
-          <a:p xmlns:a="http://schemas.openxmlformats.org/drawingml/2006/main">
-            <a:pPr algn="r">
-              <a:defRPr sz="1200" b="0">
-                <a:solidFill>
-                  <a:srgbClr val="53606D"/>
-                </a:solidFill>
-                <a:latin typeface="Arial"/>
-                <a:ea typeface="Arial"/>
-                <a:cs typeface="Arial"/>
-              </a:defRPr>
-            </a:pPr>
-            <a:r>
-              <a:rPr sz="1200" b="0">
-                <a:solidFill>
-                  <a:srgbClr val="53606D"/>
-                </a:solidFill>
-                <a:latin typeface="Arial"/>
-                <a:ea typeface="Arial"/>
-                <a:cs typeface="Arial"/>
-              </a:rPr>
-              <a:t>10/10</a:t>
-            </a:r>
-          </a:p>
-        </p:txBody>
-      </p:sp>
-    </p:spTree>
-    <p:extLst>
-      <p:ext uri="{BB962C8B-B14F-4D97-AF65-F5344CB8AC3E}">
-        <p14:creationId xmlns:p14="http://schemas.microsoft.com/office/powerpoint/2010/main" val="1423961865"/>
       </p:ext>
     </p:extLst>
   </p:cSld>
@@ -3140,6 +2518,7 @@
           <a:lstStyle xmlns:a="http://schemas.openxmlformats.org/drawingml/2006/main"/>
           <a:p xmlns:a="http://schemas.openxmlformats.org/drawingml/2006/main">
             <a:pPr algn="l">
+              <a:buNone/>
               <a:defRPr sz="1350" b="1">
                 <a:solidFill>
                   <a:srgbClr val="3D8DFF"/>
@@ -3158,7 +2537,7 @@
                 <a:ea typeface="Arial"/>
                 <a:cs typeface="Arial"/>
               </a:rPr>
-              <a:t>O PROBLEMA</a:t>
+              <a:t>O DESAFIO</a:t>
             </a:r>
           </a:p>
         </p:txBody>
@@ -3198,6 +2577,7 @@
           <a:lstStyle xmlns:a="http://schemas.openxmlformats.org/drawingml/2006/main"/>
           <a:p xmlns:a="http://schemas.openxmlformats.org/drawingml/2006/main">
             <a:pPr algn="r">
+              <a:buNone/>
               <a:defRPr sz="1350" b="1">
                 <a:solidFill>
                   <a:srgbClr val="53606D"/>
@@ -3256,6 +2636,7 @@
           <a:lstStyle xmlns:a="http://schemas.openxmlformats.org/drawingml/2006/main"/>
           <a:p xmlns:a="http://schemas.openxmlformats.org/drawingml/2006/main">
             <a:pPr algn="l">
+              <a:buNone/>
               <a:defRPr sz="3750" b="1">
                 <a:solidFill>
                   <a:srgbClr val="07111C"/>
@@ -3274,7 +2655,7 @@
                 <a:ea typeface="Arial"/>
                 <a:cs typeface="Arial"/>
               </a:rPr>
-              <a:t>Decisão ainda retrospectiva</a:t>
+              <a:t>Mais dados não bastam para decidir</a:t>
             </a:r>
           </a:p>
         </p:txBody>
@@ -3314,6 +2695,7 @@
           <a:lstStyle xmlns:a="http://schemas.openxmlformats.org/drawingml/2006/main"/>
           <a:p xmlns:a="http://schemas.openxmlformats.org/drawingml/2006/main">
             <a:pPr algn="l">
+              <a:buNone/>
               <a:defRPr sz="1875" b="0">
                 <a:solidFill>
                   <a:srgbClr val="53606D"/>
@@ -3332,14 +2714,14 @@
                 <a:ea typeface="Arial"/>
                 <a:cs typeface="Arial"/>
               </a:rPr>
-              <a:t>Mais dados não resolvem automaticamente contexto, tempo e causalidade.</a:t>
+              <a:t>Mix, desgaste e tempo mudam o contexto.</a:t>
             </a:r>
           </a:p>
         </p:txBody>
       </p:sp>
       <p:cxnSp>
         <p:nvCxnSpPr>
-          <p:cNvPr id="27" name="header-rule-2"/>
+          <p:cNvPr id="67" name="header-rule-2"/>
           <p:cNvCxnSpPr/>
           <p:nvPr/>
         </p:nvCxnSpPr>
@@ -3394,6 +2776,7 @@
           <a:lstStyle xmlns:a="http://schemas.openxmlformats.org/drawingml/2006/main"/>
           <a:p xmlns:a="http://schemas.openxmlformats.org/drawingml/2006/main">
             <a:pPr algn="l">
+              <a:buNone/>
               <a:defRPr sz="3300" b="1">
                 <a:solidFill>
                   <a:srgbClr val="3D8DFF"/>
@@ -3419,7 +2802,7 @@
       </p:sp>
       <p:cxnSp>
         <p:nvCxnSpPr>
-          <p:cNvPr id="29" name="problem-rule-01"/>
+          <p:cNvPr id="69" name="problem-rule-01"/>
           <p:cNvCxnSpPr/>
           <p:nvPr/>
         </p:nvCxnSpPr>
@@ -3474,6 +2857,7 @@
           <a:lstStyle xmlns:a="http://schemas.openxmlformats.org/drawingml/2006/main"/>
           <a:p xmlns:a="http://schemas.openxmlformats.org/drawingml/2006/main">
             <a:pPr algn="l">
+              <a:buNone/>
               <a:defRPr sz="2250" b="1">
                 <a:solidFill>
                   <a:srgbClr val="07111C"/>
@@ -3492,7 +2876,7 @@
                 <a:ea typeface="Arial"/>
                 <a:cs typeface="Arial"/>
               </a:rPr>
-              <a:t>Mix muda a base</a:t>
+              <a:t>O produto muda</a:t>
             </a:r>
           </a:p>
         </p:txBody>
@@ -3532,6 +2916,7 @@
           <a:lstStyle xmlns:a="http://schemas.openxmlformats.org/drawingml/2006/main"/>
           <a:p xmlns:a="http://schemas.openxmlformats.org/drawingml/2006/main">
             <a:pPr algn="l">
+              <a:buNone/>
               <a:defRPr sz="1800" b="0">
                 <a:solidFill>
                   <a:srgbClr val="53606D"/>
@@ -3550,7 +2935,7 @@
                 <a:ea typeface="Arial"/>
                 <a:cs typeface="Arial"/>
               </a:rPr>
-              <a:t>Produto, grau e linha alteram produtividade e qualidade antes de qualquer ajuste.</a:t>
+              <a:t>Cada família começa de um ponto diferente.</a:t>
             </a:r>
           </a:p>
         </p:txBody>
@@ -3590,6 +2975,7 @@
           <a:lstStyle xmlns:a="http://schemas.openxmlformats.org/drawingml/2006/main"/>
           <a:p xmlns:a="http://schemas.openxmlformats.org/drawingml/2006/main">
             <a:pPr algn="l">
+              <a:buNone/>
               <a:defRPr sz="3300" b="1">
                 <a:solidFill>
                   <a:srgbClr val="3D8DFF"/>
@@ -3615,7 +3001,7 @@
       </p:sp>
       <p:cxnSp>
         <p:nvCxnSpPr>
-          <p:cNvPr id="33" name="problem-rule-02"/>
+          <p:cNvPr id="73" name="problem-rule-02"/>
           <p:cNvCxnSpPr/>
           <p:nvPr/>
         </p:nvCxnSpPr>
@@ -3670,6 +3056,7 @@
           <a:lstStyle xmlns:a="http://schemas.openxmlformats.org/drawingml/2006/main"/>
           <a:p xmlns:a="http://schemas.openxmlformats.org/drawingml/2006/main">
             <a:pPr algn="l">
+              <a:buNone/>
               <a:defRPr sz="2250" b="1">
                 <a:solidFill>
                   <a:srgbClr val="07111C"/>
@@ -3688,7 +3075,7 @@
                 <a:ea typeface="Arial"/>
                 <a:cs typeface="Arial"/>
               </a:rPr>
-              <a:t>Desgaste muda o envelope</a:t>
+              <a:t>O ativo desgasta</a:t>
             </a:r>
           </a:p>
         </p:txBody>
@@ -3728,6 +3115,7 @@
           <a:lstStyle xmlns:a="http://schemas.openxmlformats.org/drawingml/2006/main"/>
           <a:p xmlns:a="http://schemas.openxmlformats.org/drawingml/2006/main">
             <a:pPr algn="l">
+              <a:buNone/>
               <a:defRPr sz="1800" b="0">
                 <a:solidFill>
                   <a:srgbClr val="53606D"/>
@@ -3746,7 +3134,7 @@
                 <a:ea typeface="Arial"/>
                 <a:cs typeface="Arial"/>
               </a:rPr>
-              <a:t>O que parece viável hoje pode estar fora do suporte em outra condição do ativo.</a:t>
+              <a:t>O que funcionava ontem pode sair do limite hoje.</a:t>
             </a:r>
           </a:p>
         </p:txBody>
@@ -3786,6 +3174,7 @@
           <a:lstStyle xmlns:a="http://schemas.openxmlformats.org/drawingml/2006/main"/>
           <a:p xmlns:a="http://schemas.openxmlformats.org/drawingml/2006/main">
             <a:pPr algn="l">
+              <a:buNone/>
               <a:defRPr sz="3300" b="1">
                 <a:solidFill>
                   <a:srgbClr val="3D8DFF"/>
@@ -3811,7 +3200,7 @@
       </p:sp>
       <p:cxnSp>
         <p:nvCxnSpPr>
-          <p:cNvPr id="37" name="problem-rule-03"/>
+          <p:cNvPr id="77" name="problem-rule-03"/>
           <p:cNvCxnSpPr/>
           <p:nvPr/>
         </p:nvCxnSpPr>
@@ -3866,6 +3255,7 @@
           <a:lstStyle xmlns:a="http://schemas.openxmlformats.org/drawingml/2006/main"/>
           <a:p xmlns:a="http://schemas.openxmlformats.org/drawingml/2006/main">
             <a:pPr algn="l">
+              <a:buNone/>
               <a:defRPr sz="2250" b="1">
                 <a:solidFill>
                   <a:srgbClr val="07111C"/>
@@ -3884,7 +3274,7 @@
                 <a:ea typeface="Arial"/>
                 <a:cs typeface="Arial"/>
               </a:rPr>
-              <a:t>Média esconde contexto</a:t>
+              <a:t>A média engana</a:t>
             </a:r>
           </a:p>
         </p:txBody>
@@ -3924,6 +3314,7 @@
           <a:lstStyle xmlns:a="http://schemas.openxmlformats.org/drawingml/2006/main"/>
           <a:p xmlns:a="http://schemas.openxmlformats.org/drawingml/2006/main">
             <a:pPr algn="l">
+              <a:buNone/>
               <a:defRPr sz="1800" b="0">
                 <a:solidFill>
                   <a:srgbClr val="53606D"/>
@@ -3942,7 +3333,7 @@
                 <a:ea typeface="Arial"/>
                 <a:cs typeface="Arial"/>
               </a:rPr>
-              <a:t>Uma leitura agregada pode transformar associação em uma explicação conveniente.</a:t>
+              <a:t>Juntar tudo esconde diferenças importantes.</a:t>
             </a:r>
           </a:p>
         </p:txBody>
@@ -3982,6 +3373,7 @@
           <a:lstStyle xmlns:a="http://schemas.openxmlformats.org/drawingml/2006/main"/>
           <a:p xmlns:a="http://schemas.openxmlformats.org/drawingml/2006/main">
             <a:pPr algn="l">
+              <a:buNone/>
               <a:defRPr sz="2850" b="1">
                 <a:solidFill>
                   <a:srgbClr val="07111C"/>
@@ -4000,11 +3392,12 @@
                 <a:ea typeface="Arial"/>
                 <a:cs typeface="Arial"/>
               </a:rPr>
-              <a:t>A pergunta não é só “qual número?”.</a:t>
+              <a:t>Antes de recomendar, o sistema precisa</a:t>
             </a:r>
           </a:p>
           <a:p xmlns:a="http://schemas.openxmlformats.org/drawingml/2006/main">
             <a:pPr algn="l">
+              <a:buNone/>
               <a:defRPr sz="2850" b="1">
                 <a:solidFill>
                   <a:srgbClr val="07111C"/>
@@ -4023,14 +3416,14 @@
                 <a:ea typeface="Arial"/>
                 <a:cs typeface="Arial"/>
               </a:rPr>
-              <a:t>É “em qual contexto — e com qual incerteza?”.</a:t>
+              <a:t>entender o contexto.</a:t>
             </a:r>
           </a:p>
         </p:txBody>
       </p:sp>
       <p:cxnSp>
         <p:nvCxnSpPr>
-          <p:cNvPr id="41" name="problem-accent"/>
+          <p:cNvPr id="81" name="problem-accent"/>
           <p:cNvCxnSpPr/>
           <p:nvPr/>
         </p:nvCxnSpPr>
@@ -4052,7 +3445,7 @@
       </p:cxnSp>
       <p:cxnSp>
         <p:nvCxnSpPr>
-          <p:cNvPr id="42" name="footer-rule-2"/>
+          <p:cNvPr id="82" name="footer-rule-2"/>
           <p:cNvCxnSpPr/>
           <p:nvPr/>
         </p:nvCxnSpPr>
@@ -4107,6 +3500,7 @@
           <a:lstStyle xmlns:a="http://schemas.openxmlformats.org/drawingml/2006/main"/>
           <a:p xmlns:a="http://schemas.openxmlformats.org/drawingml/2006/main">
             <a:pPr algn="l">
+              <a:buNone/>
               <a:defRPr sz="1200" b="0">
                 <a:solidFill>
                   <a:srgbClr val="53606D"/>
@@ -4165,6 +3559,7 @@
           <a:lstStyle xmlns:a="http://schemas.openxmlformats.org/drawingml/2006/main"/>
           <a:p xmlns:a="http://schemas.openxmlformats.org/drawingml/2006/main">
             <a:pPr algn="r">
+              <a:buNone/>
               <a:defRPr sz="1200" b="0">
                 <a:solidFill>
                   <a:srgbClr val="53606D"/>
@@ -4183,7 +3578,7 @@
                 <a:ea typeface="Arial"/>
                 <a:cs typeface="Arial"/>
               </a:rPr>
-              <a:t>2/10</a:t>
+              <a:t>2/9</a:t>
             </a:r>
           </a:p>
         </p:txBody>
@@ -4219,10 +3614,10 @@
       </p:grpSpPr>
       <p:sp>
         <p:nvSpPr>
-          <p:cNvPr id="21" name="kicker-3">
-            <a:extLst xmlns:a="http://schemas.openxmlformats.org/drawingml/2006/main">
-              <a:ext uri="{FF2B5EF4-FFF2-40B4-BE49-F238E27FC236}">
-                <a16:creationId xmlns:a16="http://schemas.microsoft.com/office/drawing/2014/main" id="{E40C8A0D-DDDE-4CC6-A107-304694954F97}"/>
+          <p:cNvPr id="28" name="kicker-4">
+            <a:extLst xmlns:a="http://schemas.openxmlformats.org/drawingml/2006/main">
+              <a:ext uri="{FF2B5EF4-FFF2-40B4-BE49-F238E27FC236}">
+                <a16:creationId xmlns:a16="http://schemas.microsoft.com/office/drawing/2014/main" id="{EDD52721-5E7E-4DF1-AEDE-59D1E96E341B}"/>
               </a:ext>
             </a:extLst>
           </p:cNvPr>
@@ -4252,6 +3647,7 @@
           <a:lstStyle xmlns:a="http://schemas.openxmlformats.org/drawingml/2006/main"/>
           <a:p xmlns:a="http://schemas.openxmlformats.org/drawingml/2006/main">
             <a:pPr algn="l">
+              <a:buNone/>
               <a:defRPr sz="1350" b="1">
                 <a:solidFill>
                   <a:srgbClr val="3D8DFF"/>
@@ -4270,17 +3666,17 @@
                 <a:ea typeface="Arial"/>
                 <a:cs typeface="Arial"/>
               </a:rPr>
-              <a:t>A CONSTRUÇÃO</a:t>
-            </a:r>
-          </a:p>
-        </p:txBody>
-      </p:sp>
-      <p:sp>
-        <p:nvSpPr>
-          <p:cNvPr id="2" name="page-3">
-            <a:extLst xmlns:a="http://schemas.openxmlformats.org/drawingml/2006/main">
-              <a:ext uri="{FF2B5EF4-FFF2-40B4-BE49-F238E27FC236}">
-                <a16:creationId xmlns:a16="http://schemas.microsoft.com/office/drawing/2014/main" id="{0A471C6A-DF9E-4B63-87B1-FC9D0246CB04}"/>
+              <a:t>COMO FUNCIONA</a:t>
+            </a:r>
+          </a:p>
+        </p:txBody>
+      </p:sp>
+      <p:sp>
+        <p:nvSpPr>
+          <p:cNvPr id="2" name="page-4">
+            <a:extLst xmlns:a="http://schemas.openxmlformats.org/drawingml/2006/main">
+              <a:ext uri="{FF2B5EF4-FFF2-40B4-BE49-F238E27FC236}">
+                <a16:creationId xmlns:a16="http://schemas.microsoft.com/office/drawing/2014/main" id="{3AB7F21C-31FD-4A63-8313-DB8BACA04D81}"/>
               </a:ext>
             </a:extLst>
           </p:cNvPr>
@@ -4310,6 +3706,7 @@
           <a:lstStyle xmlns:a="http://schemas.openxmlformats.org/drawingml/2006/main"/>
           <a:p xmlns:a="http://schemas.openxmlformats.org/drawingml/2006/main">
             <a:pPr algn="r">
+              <a:buNone/>
               <a:defRPr sz="1350" b="1">
                 <a:solidFill>
                   <a:srgbClr val="53606D"/>
@@ -4335,10 +3732,10 @@
       </p:sp>
       <p:sp>
         <p:nvSpPr>
-          <p:cNvPr id="3" name="title-3">
-            <a:extLst xmlns:a="http://schemas.openxmlformats.org/drawingml/2006/main">
-              <a:ext uri="{FF2B5EF4-FFF2-40B4-BE49-F238E27FC236}">
-                <a16:creationId xmlns:a16="http://schemas.microsoft.com/office/drawing/2014/main" id="{C63ADC85-D3F5-408E-BF3D-1475B420C08A}"/>
+          <p:cNvPr id="3" name="title-4">
+            <a:extLst xmlns:a="http://schemas.openxmlformats.org/drawingml/2006/main">
+              <a:ext uri="{FF2B5EF4-FFF2-40B4-BE49-F238E27FC236}">
+                <a16:creationId xmlns:a16="http://schemas.microsoft.com/office/drawing/2014/main" id="{00505D56-F7D8-4458-B71A-983F70C6C1AA}"/>
               </a:ext>
             </a:extLst>
           </p:cNvPr>
@@ -4368,6 +3765,7 @@
           <a:lstStyle xmlns:a="http://schemas.openxmlformats.org/drawingml/2006/main"/>
           <a:p xmlns:a="http://schemas.openxmlformats.org/drawingml/2006/main">
             <a:pPr algn="l">
+              <a:buNone/>
               <a:defRPr sz="3750" b="1">
                 <a:solidFill>
                   <a:srgbClr val="07111C"/>
@@ -4386,17 +3784,17 @@
                 <a:ea typeface="Arial"/>
                 <a:cs typeface="Arial"/>
               </a:rPr>
-              <a:t>Escala com rastreabilidade</a:t>
-            </a:r>
-          </a:p>
-        </p:txBody>
-      </p:sp>
-      <p:sp>
-        <p:nvSpPr>
-          <p:cNvPr id="4" name="subtitle-3">
-            <a:extLst xmlns:a="http://schemas.openxmlformats.org/drawingml/2006/main">
-              <a:ext uri="{FF2B5EF4-FFF2-40B4-BE49-F238E27FC236}">
-                <a16:creationId xmlns:a16="http://schemas.microsoft.com/office/drawing/2014/main" id="{2F596F01-D0D6-494F-B6E6-121568339914}"/>
+              <a:t>Do dado à decisão em quatro passos</a:t>
+            </a:r>
+          </a:p>
+        </p:txBody>
+      </p:sp>
+      <p:sp>
+        <p:nvSpPr>
+          <p:cNvPr id="4" name="subtitle-4">
+            <a:extLst xmlns:a="http://schemas.openxmlformats.org/drawingml/2006/main">
+              <a:ext uri="{FF2B5EF4-FFF2-40B4-BE49-F238E27FC236}">
+                <a16:creationId xmlns:a16="http://schemas.microsoft.com/office/drawing/2014/main" id="{8B4488E1-94C0-4570-BEDA-595A45E135C1}"/>
               </a:ext>
             </a:extLst>
           </p:cNvPr>
@@ -4426,6 +3824,7 @@
           <a:lstStyle xmlns:a="http://schemas.openxmlformats.org/drawingml/2006/main"/>
           <a:p xmlns:a="http://schemas.openxmlformats.org/drawingml/2006/main">
             <a:pPr algn="l">
+              <a:buNone/>
               <a:defRPr sz="1875" b="0">
                 <a:solidFill>
                   <a:srgbClr val="53606D"/>
@@ -4444,14 +3843,14 @@
                 <a:ea typeface="Arial"/>
                 <a:cs typeface="Arial"/>
               </a:rPr>
-              <a:t>O gerador sintético nasce auditável: configuração, seed, IDs, manifests e hashes.</a:t>
+              <a:t>Sem usar informação do futuro.</a:t>
             </a:r>
           </a:p>
         </p:txBody>
       </p:sp>
       <p:cxnSp>
         <p:nvCxnSpPr>
-          <p:cNvPr id="25" name="header-rule-3"/>
+          <p:cNvPr id="82" name="header-rule-4"/>
           <p:cNvCxnSpPr/>
           <p:nvPr/>
         </p:nvCxnSpPr>
@@ -4471,28 +3870,94 @@
           </a:ln>
         </p:spPr>
       </p:cxnSp>
-      <p:sp>
-        <p:nvSpPr>
-          <p:cNvPr id="6" name="scale-panel-0">
-            <a:extLst xmlns:a="http://schemas.openxmlformats.org/drawingml/2006/main">
-              <a:ext uri="{FF2B5EF4-FFF2-40B4-BE49-F238E27FC236}">
-                <a16:creationId xmlns:a16="http://schemas.microsoft.com/office/drawing/2014/main" id="{9003E482-082D-4741-AE42-681DDAADC565}"/>
-              </a:ext>
-            </a:extLst>
-          </p:cNvPr>
-          <p:cNvSpPr>
-            <a:spLocks xmlns:a="http://schemas.openxmlformats.org/drawingml/2006/main" noGrp="1"/>
-          </p:cNvSpPr>
-          <p:nvPr/>
-        </p:nvSpPr>
-        <p:spPr>
-          <a:xfrm xmlns:a="http://schemas.openxmlformats.org/drawingml/2006/main">
-            <a:off x="685800" y="3714750"/>
-            <a:ext cx="2381250" cy="2952750"/>
+      <p:cxnSp>
+        <p:nvCxnSpPr>
+          <p:cNvPr id="83" name="architecture-connector-0"/>
+          <p:cNvCxnSpPr/>
+          <p:nvPr/>
+        </p:nvCxnSpPr>
+        <p:spPr>
+          <a:xfrm xmlns:a="http://schemas.openxmlformats.org/drawingml/2006/main">
+            <a:off x="1676400" y="5067300"/>
+            <a:ext cx="0" cy="438150"/>
+          </a:xfrm>
+          <a:prstGeom xmlns:a="http://schemas.openxmlformats.org/drawingml/2006/main" prst="straightConnector1">
+            <a:avLst/>
+          </a:prstGeom>
+          <a:ln xmlns:a="http://schemas.openxmlformats.org/drawingml/2006/main" w="38100">
+            <a:solidFill>
+              <a:srgbClr val="BCC4CC"/>
+            </a:solidFill>
+            <a:prstDash val="solid"/>
+          </a:ln>
+        </p:spPr>
+      </p:cxnSp>
+      <p:cxnSp>
+        <p:nvCxnSpPr>
+          <p:cNvPr id="84" name="architecture-connector-1"/>
+          <p:cNvCxnSpPr/>
+          <p:nvPr/>
+        </p:nvCxnSpPr>
+        <p:spPr>
+          <a:xfrm xmlns:a="http://schemas.openxmlformats.org/drawingml/2006/main">
+            <a:off x="1676400" y="7029450"/>
+            <a:ext cx="0" cy="438150"/>
+          </a:xfrm>
+          <a:prstGeom xmlns:a="http://schemas.openxmlformats.org/drawingml/2006/main" prst="straightConnector1">
+            <a:avLst/>
+          </a:prstGeom>
+          <a:ln xmlns:a="http://schemas.openxmlformats.org/drawingml/2006/main" w="38100">
+            <a:solidFill>
+              <a:srgbClr val="BCC4CC"/>
+            </a:solidFill>
+            <a:prstDash val="solid"/>
+          </a:ln>
+        </p:spPr>
+      </p:cxnSp>
+      <p:cxnSp>
+        <p:nvCxnSpPr>
+          <p:cNvPr id="85" name="architecture-connector-2"/>
+          <p:cNvCxnSpPr/>
+          <p:nvPr/>
+        </p:nvCxnSpPr>
+        <p:spPr>
+          <a:xfrm xmlns:a="http://schemas.openxmlformats.org/drawingml/2006/main">
+            <a:off x="1676400" y="8991600"/>
+            <a:ext cx="0" cy="438150"/>
+          </a:xfrm>
+          <a:prstGeom xmlns:a="http://schemas.openxmlformats.org/drawingml/2006/main" prst="straightConnector1">
+            <a:avLst/>
+          </a:prstGeom>
+          <a:ln xmlns:a="http://schemas.openxmlformats.org/drawingml/2006/main" w="38100">
+            <a:solidFill>
+              <a:srgbClr val="BCC4CC"/>
+            </a:solidFill>
+            <a:prstDash val="solid"/>
+          </a:ln>
+        </p:spPr>
+      </p:cxnSp>
+      <p:sp>
+        <p:nvSpPr>
+          <p:cNvPr id="9" name="architecture-node-0">
+            <a:extLst xmlns:a="http://schemas.openxmlformats.org/drawingml/2006/main">
+              <a:ext uri="{FF2B5EF4-FFF2-40B4-BE49-F238E27FC236}">
+                <a16:creationId xmlns:a16="http://schemas.microsoft.com/office/drawing/2014/main" id="{809E894A-E895-4BE4-99BA-04106EDB1FC1}"/>
+              </a:ext>
+            </a:extLst>
+          </p:cNvPr>
+          <p:cNvSpPr>
+            <a:spLocks xmlns:a="http://schemas.openxmlformats.org/drawingml/2006/main" noGrp="1"/>
+          </p:cNvSpPr>
+          <p:nvPr/>
+        </p:nvSpPr>
+        <p:spPr>
+          <a:xfrm xmlns:a="http://schemas.openxmlformats.org/drawingml/2006/main">
+            <a:off x="685800" y="3543300"/>
+            <a:ext cx="8915400" cy="1524000"/>
           </a:xfrm>
           <a:prstGeom xmlns:a="http://schemas.openxmlformats.org/drawingml/2006/main" prst="roundRect">
             <a:avLst>
-              <a:gd name="adj" fmla="val 4800"/>
+              <a:gd name="adj" fmla="val 7500"/>
             </a:avLst>
           </a:prstGeom>
           <a:solidFill xmlns:a="http://schemas.openxmlformats.org/drawingml/2006/main">
@@ -4506,22 +3971,22 @@
       </p:sp>
       <p:sp>
         <p:nvSpPr>
-          <p:cNvPr id="7" name="scale-value-0">
-            <a:extLst xmlns:a="http://schemas.openxmlformats.org/drawingml/2006/main">
-              <a:ext uri="{FF2B5EF4-FFF2-40B4-BE49-F238E27FC236}">
-                <a16:creationId xmlns:a16="http://schemas.microsoft.com/office/drawing/2014/main" id="{901F0D1A-A890-4CD1-87B0-86F31BEFD32D}"/>
-              </a:ext>
-            </a:extLst>
-          </p:cNvPr>
-          <p:cNvSpPr>
-            <a:spLocks xmlns:a="http://schemas.openxmlformats.org/drawingml/2006/main" noGrp="1"/>
-          </p:cNvSpPr>
-          <p:nvPr/>
-        </p:nvSpPr>
-        <p:spPr>
-          <a:xfrm xmlns:a="http://schemas.openxmlformats.org/drawingml/2006/main">
-            <a:off x="914400" y="4191000"/>
-            <a:ext cx="1924050" cy="1047750"/>
+          <p:cNvPr id="10" name="architecture-label-0">
+            <a:extLst xmlns:a="http://schemas.openxmlformats.org/drawingml/2006/main">
+              <a:ext uri="{FF2B5EF4-FFF2-40B4-BE49-F238E27FC236}">
+                <a16:creationId xmlns:a16="http://schemas.microsoft.com/office/drawing/2014/main" id="{E9A456B3-EDAF-496A-842F-132499E93466}"/>
+              </a:ext>
+            </a:extLst>
+          </p:cNvPr>
+          <p:cNvSpPr>
+            <a:spLocks xmlns:a="http://schemas.openxmlformats.org/drawingml/2006/main" noGrp="1"/>
+          </p:cNvSpPr>
+          <p:nvPr/>
+        </p:nvSpPr>
+        <p:spPr>
+          <a:xfrm xmlns:a="http://schemas.openxmlformats.org/drawingml/2006/main">
+            <a:off x="971550" y="3829050"/>
+            <a:ext cx="2190750" cy="342900"/>
           </a:xfrm>
           <a:prstGeom xmlns:a="http://schemas.openxmlformats.org/drawingml/2006/main" prst="rect">
             <a:avLst/>
@@ -4539,7 +4004,8 @@
           <a:lstStyle xmlns:a="http://schemas.openxmlformats.org/drawingml/2006/main"/>
           <a:p xmlns:a="http://schemas.openxmlformats.org/drawingml/2006/main">
             <a:pPr algn="l">
-              <a:defRPr sz="2550" b="1">
+              <a:buNone/>
+              <a:defRPr sz="1350" b="1">
                 <a:solidFill>
                   <a:srgbClr val="3D8DFF"/>
                 </a:solidFill>
@@ -4549,7 +4015,7 @@
               </a:defRPr>
             </a:pPr>
             <a:r>
-              <a:rPr sz="2550" b="1">
+              <a:rPr sz="1350" b="1">
                 <a:solidFill>
                   <a:srgbClr val="3D8DFF"/>
                 </a:solidFill>
@@ -4557,29 +4023,29 @@
                 <a:ea typeface="Arial"/>
                 <a:cs typeface="Arial"/>
               </a:rPr>
-              <a:t>12.594.517</a:t>
-            </a:r>
-          </a:p>
-        </p:txBody>
-      </p:sp>
-      <p:sp>
-        <p:nvSpPr>
-          <p:cNvPr id="8" name="scale-label-0">
-            <a:extLst xmlns:a="http://schemas.openxmlformats.org/drawingml/2006/main">
-              <a:ext uri="{FF2B5EF4-FFF2-40B4-BE49-F238E27FC236}">
-                <a16:creationId xmlns:a16="http://schemas.microsoft.com/office/drawing/2014/main" id="{60E060D8-07DB-48CA-AA2A-AFA3AF12028B}"/>
-              </a:ext>
-            </a:extLst>
-          </p:cNvPr>
-          <p:cNvSpPr>
-            <a:spLocks xmlns:a="http://schemas.openxmlformats.org/drawingml/2006/main" noGrp="1"/>
-          </p:cNvSpPr>
-          <p:nvPr/>
-        </p:nvSpPr>
-        <p:spPr>
-          <a:xfrm xmlns:a="http://schemas.openxmlformats.org/drawingml/2006/main">
-            <a:off x="914400" y="5429250"/>
-            <a:ext cx="1924050" cy="666750"/>
+              <a:t>01 · REGISTRAR</a:t>
+            </a:r>
+          </a:p>
+        </p:txBody>
+      </p:sp>
+      <p:sp>
+        <p:nvSpPr>
+          <p:cNvPr id="11" name="architecture-title-0">
+            <a:extLst xmlns:a="http://schemas.openxmlformats.org/drawingml/2006/main">
+              <a:ext uri="{FF2B5EF4-FFF2-40B4-BE49-F238E27FC236}">
+                <a16:creationId xmlns:a16="http://schemas.microsoft.com/office/drawing/2014/main" id="{AE7C1909-0EF2-4C52-9241-72E69DE9210C}"/>
+              </a:ext>
+            </a:extLst>
+          </p:cNvPr>
+          <p:cNvSpPr>
+            <a:spLocks xmlns:a="http://schemas.openxmlformats.org/drawingml/2006/main" noGrp="1"/>
+          </p:cNvSpPr>
+          <p:nvPr/>
+        </p:nvSpPr>
+        <p:spPr>
+          <a:xfrm xmlns:a="http://schemas.openxmlformats.org/drawingml/2006/main">
+            <a:off x="971550" y="4229100"/>
+            <a:ext cx="3810000" cy="457200"/>
           </a:xfrm>
           <a:prstGeom xmlns:a="http://schemas.openxmlformats.org/drawingml/2006/main" prst="rect">
             <a:avLst/>
@@ -4597,7 +4063,67 @@
           <a:lstStyle xmlns:a="http://schemas.openxmlformats.org/drawingml/2006/main"/>
           <a:p xmlns:a="http://schemas.openxmlformats.org/drawingml/2006/main">
             <a:pPr algn="l">
-              <a:defRPr sz="1725" b="0">
+              <a:buNone/>
+              <a:defRPr sz="2325" b="1">
+                <a:solidFill>
+                  <a:srgbClr val="07111C"/>
+                </a:solidFill>
+                <a:latin typeface="Arial"/>
+                <a:ea typeface="Arial"/>
+                <a:cs typeface="Arial"/>
+              </a:defRPr>
+            </a:pPr>
+            <a:r>
+              <a:rPr sz="2325" b="1">
+                <a:solidFill>
+                  <a:srgbClr val="07111C"/>
+                </a:solidFill>
+                <a:latin typeface="Arial"/>
+                <a:ea typeface="Arial"/>
+                <a:cs typeface="Arial"/>
+              </a:rPr>
+              <a:t>Gerar os dados</a:t>
+            </a:r>
+          </a:p>
+        </p:txBody>
+      </p:sp>
+      <p:sp>
+        <p:nvSpPr>
+          <p:cNvPr id="12" name="architecture-body-0">
+            <a:extLst xmlns:a="http://schemas.openxmlformats.org/drawingml/2006/main">
+              <a:ext uri="{FF2B5EF4-FFF2-40B4-BE49-F238E27FC236}">
+                <a16:creationId xmlns:a16="http://schemas.microsoft.com/office/drawing/2014/main" id="{2443E20E-D37D-4C08-9820-E0CDAA86B7BD}"/>
+              </a:ext>
+            </a:extLst>
+          </p:cNvPr>
+          <p:cNvSpPr>
+            <a:spLocks xmlns:a="http://schemas.openxmlformats.org/drawingml/2006/main" noGrp="1"/>
+          </p:cNvSpPr>
+          <p:nvPr/>
+        </p:nvSpPr>
+        <p:spPr>
+          <a:xfrm xmlns:a="http://schemas.openxmlformats.org/drawingml/2006/main">
+            <a:off x="5219700" y="4248150"/>
+            <a:ext cx="3790950" cy="514350"/>
+          </a:xfrm>
+          <a:prstGeom xmlns:a="http://schemas.openxmlformats.org/drawingml/2006/main" prst="rect">
+            <a:avLst/>
+          </a:prstGeom>
+          <a:noFill xmlns:a="http://schemas.openxmlformats.org/drawingml/2006/main"/>
+          <a:ln xmlns:a="http://schemas.openxmlformats.org/drawingml/2006/main" w="0">
+            <a:noFill/>
+            <a:prstDash val="solid"/>
+          </a:ln>
+        </p:spPr>
+        <p:txBody>
+          <a:bodyPr xmlns:a="http://schemas.openxmlformats.org/drawingml/2006/main" anchor="t">
+            <a:normAutofit fontScale="100000"/>
+          </a:bodyPr>
+          <a:lstStyle xmlns:a="http://schemas.openxmlformats.org/drawingml/2006/main"/>
+          <a:p xmlns:a="http://schemas.openxmlformats.org/drawingml/2006/main">
+            <a:pPr algn="r">
+              <a:buNone/>
+              <a:defRPr sz="1650" b="0">
                 <a:solidFill>
                   <a:srgbClr val="53606D"/>
                 </a:solidFill>
@@ -4607,7 +4133,7 @@
               </a:defRPr>
             </a:pPr>
             <a:r>
-              <a:rPr sz="1725" b="0">
+              <a:rPr sz="1650" b="0">
                 <a:solidFill>
                   <a:srgbClr val="53606D"/>
                 </a:solidFill>
@@ -4615,33 +4141,33 @@
                 <a:ea typeface="Arial"/>
                 <a:cs typeface="Arial"/>
               </a:rPr>
-              <a:t>registros públicos</a:t>
-            </a:r>
-          </a:p>
-        </p:txBody>
-      </p:sp>
-      <p:sp>
-        <p:nvSpPr>
-          <p:cNvPr id="9" name="scale-panel-1">
-            <a:extLst xmlns:a="http://schemas.openxmlformats.org/drawingml/2006/main">
-              <a:ext uri="{FF2B5EF4-FFF2-40B4-BE49-F238E27FC236}">
-                <a16:creationId xmlns:a16="http://schemas.microsoft.com/office/drawing/2014/main" id="{8AAF25ED-0EB1-4EFE-ADFC-495E4D98839D}"/>
-              </a:ext>
-            </a:extLst>
-          </p:cNvPr>
-          <p:cNvSpPr>
-            <a:spLocks xmlns:a="http://schemas.openxmlformats.org/drawingml/2006/main" noGrp="1"/>
-          </p:cNvSpPr>
-          <p:nvPr/>
-        </p:nvSpPr>
-        <p:spPr>
-          <a:xfrm xmlns:a="http://schemas.openxmlformats.org/drawingml/2006/main">
-            <a:off x="3752850" y="3714750"/>
-            <a:ext cx="2381250" cy="2952750"/>
+              <a:t>IDs, versões e hashes</a:t>
+            </a:r>
+          </a:p>
+        </p:txBody>
+      </p:sp>
+      <p:sp>
+        <p:nvSpPr>
+          <p:cNvPr id="13" name="architecture-node-1">
+            <a:extLst xmlns:a="http://schemas.openxmlformats.org/drawingml/2006/main">
+              <a:ext uri="{FF2B5EF4-FFF2-40B4-BE49-F238E27FC236}">
+                <a16:creationId xmlns:a16="http://schemas.microsoft.com/office/drawing/2014/main" id="{FBA93CBE-036B-42B7-806D-397F0C341C91}"/>
+              </a:ext>
+            </a:extLst>
+          </p:cNvPr>
+          <p:cNvSpPr>
+            <a:spLocks xmlns:a="http://schemas.openxmlformats.org/drawingml/2006/main" noGrp="1"/>
+          </p:cNvSpPr>
+          <p:nvPr/>
+        </p:nvSpPr>
+        <p:spPr>
+          <a:xfrm xmlns:a="http://schemas.openxmlformats.org/drawingml/2006/main">
+            <a:off x="685800" y="5505450"/>
+            <a:ext cx="8915400" cy="1524000"/>
           </a:xfrm>
           <a:prstGeom xmlns:a="http://schemas.openxmlformats.org/drawingml/2006/main" prst="roundRect">
             <a:avLst>
-              <a:gd name="adj" fmla="val 4800"/>
+              <a:gd name="adj" fmla="val 7500"/>
             </a:avLst>
           </a:prstGeom>
           <a:solidFill xmlns:a="http://schemas.openxmlformats.org/drawingml/2006/main">
@@ -4655,22 +4181,22 @@
       </p:sp>
       <p:sp>
         <p:nvSpPr>
-          <p:cNvPr id="10" name="scale-value-1">
-            <a:extLst xmlns:a="http://schemas.openxmlformats.org/drawingml/2006/main">
-              <a:ext uri="{FF2B5EF4-FFF2-40B4-BE49-F238E27FC236}">
-                <a16:creationId xmlns:a16="http://schemas.microsoft.com/office/drawing/2014/main" id="{3254C4D1-E694-4C17-8F57-6C5F35B1B030}"/>
-              </a:ext>
-            </a:extLst>
-          </p:cNvPr>
-          <p:cNvSpPr>
-            <a:spLocks xmlns:a="http://schemas.openxmlformats.org/drawingml/2006/main" noGrp="1"/>
-          </p:cNvSpPr>
-          <p:nvPr/>
-        </p:nvSpPr>
-        <p:spPr>
-          <a:xfrm xmlns:a="http://schemas.openxmlformats.org/drawingml/2006/main">
-            <a:off x="3981450" y="4191000"/>
-            <a:ext cx="1924050" cy="1047750"/>
+          <p:cNvPr id="14" name="architecture-label-1">
+            <a:extLst xmlns:a="http://schemas.openxmlformats.org/drawingml/2006/main">
+              <a:ext uri="{FF2B5EF4-FFF2-40B4-BE49-F238E27FC236}">
+                <a16:creationId xmlns:a16="http://schemas.microsoft.com/office/drawing/2014/main" id="{191F405A-4BBF-474E-939F-BE7C4E1C476E}"/>
+              </a:ext>
+            </a:extLst>
+          </p:cNvPr>
+          <p:cNvSpPr>
+            <a:spLocks xmlns:a="http://schemas.openxmlformats.org/drawingml/2006/main" noGrp="1"/>
+          </p:cNvSpPr>
+          <p:nvPr/>
+        </p:nvSpPr>
+        <p:spPr>
+          <a:xfrm xmlns:a="http://schemas.openxmlformats.org/drawingml/2006/main">
+            <a:off x="971550" y="5791200"/>
+            <a:ext cx="2190750" cy="342900"/>
           </a:xfrm>
           <a:prstGeom xmlns:a="http://schemas.openxmlformats.org/drawingml/2006/main" prst="rect">
             <a:avLst/>
@@ -4688,47 +4214,48 @@
           <a:lstStyle xmlns:a="http://schemas.openxmlformats.org/drawingml/2006/main"/>
           <a:p xmlns:a="http://schemas.openxmlformats.org/drawingml/2006/main">
             <a:pPr algn="l">
-              <a:defRPr sz="3600" b="1">
-                <a:solidFill>
-                  <a:srgbClr val="20CDBF"/>
-                </a:solidFill>
-                <a:latin typeface="Arial"/>
-                <a:ea typeface="Arial"/>
-                <a:cs typeface="Arial"/>
-              </a:defRPr>
-            </a:pPr>
-            <a:r>
-              <a:rPr sz="3600" b="1">
-                <a:solidFill>
-                  <a:srgbClr val="20CDBF"/>
-                </a:solidFill>
-                <a:latin typeface="Arial"/>
-                <a:ea typeface="Arial"/>
-                <a:cs typeface="Arial"/>
-              </a:rPr>
-              <a:t>250 mil</a:t>
-            </a:r>
-          </a:p>
-        </p:txBody>
-      </p:sp>
-      <p:sp>
-        <p:nvSpPr>
-          <p:cNvPr id="11" name="scale-label-1">
-            <a:extLst xmlns:a="http://schemas.openxmlformats.org/drawingml/2006/main">
-              <a:ext uri="{FF2B5EF4-FFF2-40B4-BE49-F238E27FC236}">
-                <a16:creationId xmlns:a16="http://schemas.microsoft.com/office/drawing/2014/main" id="{56A600E3-D71D-4DCD-BDC9-A83401741D68}"/>
-              </a:ext>
-            </a:extLst>
-          </p:cNvPr>
-          <p:cNvSpPr>
-            <a:spLocks xmlns:a="http://schemas.openxmlformats.org/drawingml/2006/main" noGrp="1"/>
-          </p:cNvSpPr>
-          <p:nvPr/>
-        </p:nvSpPr>
-        <p:spPr>
-          <a:xfrm xmlns:a="http://schemas.openxmlformats.org/drawingml/2006/main">
-            <a:off x="3981450" y="5429250"/>
-            <a:ext cx="1924050" cy="666750"/>
+              <a:buNone/>
+              <a:defRPr sz="1350" b="1">
+                <a:solidFill>
+                  <a:srgbClr val="3D8DFF"/>
+                </a:solidFill>
+                <a:latin typeface="Arial"/>
+                <a:ea typeface="Arial"/>
+                <a:cs typeface="Arial"/>
+              </a:defRPr>
+            </a:pPr>
+            <a:r>
+              <a:rPr sz="1350" b="1">
+                <a:solidFill>
+                  <a:srgbClr val="3D8DFF"/>
+                </a:solidFill>
+                <a:latin typeface="Arial"/>
+                <a:ea typeface="Arial"/>
+                <a:cs typeface="Arial"/>
+              </a:rPr>
+              <a:t>02 · ORGANIZAR</a:t>
+            </a:r>
+          </a:p>
+        </p:txBody>
+      </p:sp>
+      <p:sp>
+        <p:nvSpPr>
+          <p:cNvPr id="15" name="architecture-title-1">
+            <a:extLst xmlns:a="http://schemas.openxmlformats.org/drawingml/2006/main">
+              <a:ext uri="{FF2B5EF4-FFF2-40B4-BE49-F238E27FC236}">
+                <a16:creationId xmlns:a16="http://schemas.microsoft.com/office/drawing/2014/main" id="{3137CB2C-176E-4F6C-A774-495799E620B4}"/>
+              </a:ext>
+            </a:extLst>
+          </p:cNvPr>
+          <p:cNvSpPr>
+            <a:spLocks xmlns:a="http://schemas.openxmlformats.org/drawingml/2006/main" noGrp="1"/>
+          </p:cNvSpPr>
+          <p:nvPr/>
+        </p:nvSpPr>
+        <p:spPr>
+          <a:xfrm xmlns:a="http://schemas.openxmlformats.org/drawingml/2006/main">
+            <a:off x="971550" y="6191250"/>
+            <a:ext cx="3810000" cy="457200"/>
           </a:xfrm>
           <a:prstGeom xmlns:a="http://schemas.openxmlformats.org/drawingml/2006/main" prst="rect">
             <a:avLst/>
@@ -4746,7 +4273,67 @@
           <a:lstStyle xmlns:a="http://schemas.openxmlformats.org/drawingml/2006/main"/>
           <a:p xmlns:a="http://schemas.openxmlformats.org/drawingml/2006/main">
             <a:pPr algn="l">
-              <a:defRPr sz="1725" b="0">
+              <a:buNone/>
+              <a:defRPr sz="2325" b="1">
+                <a:solidFill>
+                  <a:srgbClr val="07111C"/>
+                </a:solidFill>
+                <a:latin typeface="Arial"/>
+                <a:ea typeface="Arial"/>
+                <a:cs typeface="Arial"/>
+              </a:defRPr>
+            </a:pPr>
+            <a:r>
+              <a:rPr sz="2325" b="1">
+                <a:solidFill>
+                  <a:srgbClr val="07111C"/>
+                </a:solidFill>
+                <a:latin typeface="Arial"/>
+                <a:ea typeface="Arial"/>
+                <a:cs typeface="Arial"/>
+              </a:rPr>
+              <a:t>Preparar a análise</a:t>
+            </a:r>
+          </a:p>
+        </p:txBody>
+      </p:sp>
+      <p:sp>
+        <p:nvSpPr>
+          <p:cNvPr id="16" name="architecture-body-1">
+            <a:extLst xmlns:a="http://schemas.openxmlformats.org/drawingml/2006/main">
+              <a:ext uri="{FF2B5EF4-FFF2-40B4-BE49-F238E27FC236}">
+                <a16:creationId xmlns:a16="http://schemas.microsoft.com/office/drawing/2014/main" id="{1CA2F84E-D437-49B1-A04A-851099413D6A}"/>
+              </a:ext>
+            </a:extLst>
+          </p:cNvPr>
+          <p:cNvSpPr>
+            <a:spLocks xmlns:a="http://schemas.openxmlformats.org/drawingml/2006/main" noGrp="1"/>
+          </p:cNvSpPr>
+          <p:nvPr/>
+        </p:nvSpPr>
+        <p:spPr>
+          <a:xfrm xmlns:a="http://schemas.openxmlformats.org/drawingml/2006/main">
+            <a:off x="5219700" y="6210300"/>
+            <a:ext cx="3790950" cy="514350"/>
+          </a:xfrm>
+          <a:prstGeom xmlns:a="http://schemas.openxmlformats.org/drawingml/2006/main" prst="rect">
+            <a:avLst/>
+          </a:prstGeom>
+          <a:noFill xmlns:a="http://schemas.openxmlformats.org/drawingml/2006/main"/>
+          <a:ln xmlns:a="http://schemas.openxmlformats.org/drawingml/2006/main" w="0">
+            <a:noFill/>
+            <a:prstDash val="solid"/>
+          </a:ln>
+        </p:spPr>
+        <p:txBody>
+          <a:bodyPr xmlns:a="http://schemas.openxmlformats.org/drawingml/2006/main" anchor="t">
+            <a:normAutofit fontScale="100000"/>
+          </a:bodyPr>
+          <a:lstStyle xmlns:a="http://schemas.openxmlformats.org/drawingml/2006/main"/>
+          <a:p xmlns:a="http://schemas.openxmlformats.org/drawingml/2006/main">
+            <a:pPr algn="r">
+              <a:buNone/>
+              <a:defRPr sz="1650" b="0">
                 <a:solidFill>
                   <a:srgbClr val="53606D"/>
                 </a:solidFill>
@@ -4756,7 +4343,7 @@
               </a:defRPr>
             </a:pPr>
             <a:r>
-              <a:rPr sz="1725" b="0">
+              <a:rPr sz="1650" b="0">
                 <a:solidFill>
                   <a:srgbClr val="53606D"/>
                 </a:solidFill>
@@ -4764,33 +4351,33 @@
                 <a:ea typeface="Arial"/>
                 <a:cs typeface="Arial"/>
               </a:rPr>
-              <a:t>tubos sintéticos</a:t>
-            </a:r>
-          </a:p>
-        </p:txBody>
-      </p:sp>
-      <p:sp>
-        <p:nvSpPr>
-          <p:cNvPr id="12" name="scale-panel-2">
-            <a:extLst xmlns:a="http://schemas.openxmlformats.org/drawingml/2006/main">
-              <a:ext uri="{FF2B5EF4-FFF2-40B4-BE49-F238E27FC236}">
-                <a16:creationId xmlns:a16="http://schemas.microsoft.com/office/drawing/2014/main" id="{593EE660-167F-4022-A890-723F92EAC5B4}"/>
-              </a:ext>
-            </a:extLst>
-          </p:cNvPr>
-          <p:cNvSpPr>
-            <a:spLocks xmlns:a="http://schemas.openxmlformats.org/drawingml/2006/main" noGrp="1"/>
-          </p:cNvSpPr>
-          <p:nvPr/>
-        </p:nvSpPr>
-        <p:spPr>
-          <a:xfrm xmlns:a="http://schemas.openxmlformats.org/drawingml/2006/main">
-            <a:off x="6819900" y="3714750"/>
-            <a:ext cx="2381250" cy="2952750"/>
+              <a:t>KPIs comparáveis e rastreáveis</a:t>
+            </a:r>
+          </a:p>
+        </p:txBody>
+      </p:sp>
+      <p:sp>
+        <p:nvSpPr>
+          <p:cNvPr id="17" name="architecture-node-2">
+            <a:extLst xmlns:a="http://schemas.openxmlformats.org/drawingml/2006/main">
+              <a:ext uri="{FF2B5EF4-FFF2-40B4-BE49-F238E27FC236}">
+                <a16:creationId xmlns:a16="http://schemas.microsoft.com/office/drawing/2014/main" id="{499F244B-526A-458B-BA0F-A69DADFAD396}"/>
+              </a:ext>
+            </a:extLst>
+          </p:cNvPr>
+          <p:cNvSpPr>
+            <a:spLocks xmlns:a="http://schemas.openxmlformats.org/drawingml/2006/main" noGrp="1"/>
+          </p:cNvSpPr>
+          <p:nvPr/>
+        </p:nvSpPr>
+        <p:spPr>
+          <a:xfrm xmlns:a="http://schemas.openxmlformats.org/drawingml/2006/main">
+            <a:off x="685800" y="7467600"/>
+            <a:ext cx="8915400" cy="1524000"/>
           </a:xfrm>
           <a:prstGeom xmlns:a="http://schemas.openxmlformats.org/drawingml/2006/main" prst="roundRect">
             <a:avLst>
-              <a:gd name="adj" fmla="val 4800"/>
+              <a:gd name="adj" fmla="val 7500"/>
             </a:avLst>
           </a:prstGeom>
           <a:solidFill xmlns:a="http://schemas.openxmlformats.org/drawingml/2006/main">
@@ -4804,80 +4391,81 @@
       </p:sp>
       <p:sp>
         <p:nvSpPr>
-          <p:cNvPr id="13" name="scale-value-2">
-            <a:extLst xmlns:a="http://schemas.openxmlformats.org/drawingml/2006/main">
-              <a:ext uri="{FF2B5EF4-FFF2-40B4-BE49-F238E27FC236}">
-                <a16:creationId xmlns:a16="http://schemas.microsoft.com/office/drawing/2014/main" id="{89387527-79D8-4DDD-B808-38A8C5968D95}"/>
-              </a:ext>
-            </a:extLst>
-          </p:cNvPr>
-          <p:cNvSpPr>
-            <a:spLocks xmlns:a="http://schemas.openxmlformats.org/drawingml/2006/main" noGrp="1"/>
-          </p:cNvSpPr>
-          <p:nvPr/>
-        </p:nvSpPr>
-        <p:spPr>
-          <a:xfrm xmlns:a="http://schemas.openxmlformats.org/drawingml/2006/main">
-            <a:off x="7048500" y="4191000"/>
-            <a:ext cx="1924050" cy="1047750"/>
-          </a:xfrm>
-          <a:prstGeom xmlns:a="http://schemas.openxmlformats.org/drawingml/2006/main" prst="rect">
-            <a:avLst/>
-          </a:prstGeom>
-          <a:noFill xmlns:a="http://schemas.openxmlformats.org/drawingml/2006/main"/>
-          <a:ln xmlns:a="http://schemas.openxmlformats.org/drawingml/2006/main" w="0">
-            <a:noFill/>
-            <a:prstDash val="solid"/>
-          </a:ln>
-        </p:spPr>
-        <p:txBody>
-          <a:bodyPr xmlns:a="http://schemas.openxmlformats.org/drawingml/2006/main" anchor="t">
-            <a:normAutofit fontScale="87153"/>
+          <p:cNvPr id="18" name="architecture-label-2">
+            <a:extLst xmlns:a="http://schemas.openxmlformats.org/drawingml/2006/main">
+              <a:ext uri="{FF2B5EF4-FFF2-40B4-BE49-F238E27FC236}">
+                <a16:creationId xmlns:a16="http://schemas.microsoft.com/office/drawing/2014/main" id="{338B6713-54E4-48C3-B08D-94D4ACABA9A4}"/>
+              </a:ext>
+            </a:extLst>
+          </p:cNvPr>
+          <p:cNvSpPr>
+            <a:spLocks xmlns:a="http://schemas.openxmlformats.org/drawingml/2006/main" noGrp="1"/>
+          </p:cNvSpPr>
+          <p:nvPr/>
+        </p:nvSpPr>
+        <p:spPr>
+          <a:xfrm xmlns:a="http://schemas.openxmlformats.org/drawingml/2006/main">
+            <a:off x="971550" y="7753350"/>
+            <a:ext cx="2190750" cy="342900"/>
+          </a:xfrm>
+          <a:prstGeom xmlns:a="http://schemas.openxmlformats.org/drawingml/2006/main" prst="rect">
+            <a:avLst/>
+          </a:prstGeom>
+          <a:noFill xmlns:a="http://schemas.openxmlformats.org/drawingml/2006/main"/>
+          <a:ln xmlns:a="http://schemas.openxmlformats.org/drawingml/2006/main" w="0">
+            <a:noFill/>
+            <a:prstDash val="solid"/>
+          </a:ln>
+        </p:spPr>
+        <p:txBody>
+          <a:bodyPr xmlns:a="http://schemas.openxmlformats.org/drawingml/2006/main" anchor="t">
+            <a:normAutofit fontScale="100000"/>
           </a:bodyPr>
           <a:lstStyle xmlns:a="http://schemas.openxmlformats.org/drawingml/2006/main"/>
           <a:p xmlns:a="http://schemas.openxmlformats.org/drawingml/2006/main">
             <a:pPr algn="l">
-              <a:defRPr sz="3600" b="1">
-                <a:solidFill>
-                  <a:srgbClr val="FFB341"/>
-                </a:solidFill>
-                <a:latin typeface="Arial"/>
-                <a:ea typeface="Arial"/>
-                <a:cs typeface="Arial"/>
-              </a:defRPr>
-            </a:pPr>
-            <a:r>
-              <a:rPr sz="3600" b="1">
-                <a:solidFill>
-                  <a:srgbClr val="FFB341"/>
-                </a:solidFill>
-                <a:latin typeface="Arial"/>
-                <a:ea typeface="Arial"/>
-                <a:cs typeface="Arial"/>
-              </a:rPr>
-              <a:t>24 meses</a:t>
-            </a:r>
-          </a:p>
-        </p:txBody>
-      </p:sp>
-      <p:sp>
-        <p:nvSpPr>
-          <p:cNvPr id="14" name="scale-label-2">
-            <a:extLst xmlns:a="http://schemas.openxmlformats.org/drawingml/2006/main">
-              <a:ext uri="{FF2B5EF4-FFF2-40B4-BE49-F238E27FC236}">
-                <a16:creationId xmlns:a16="http://schemas.microsoft.com/office/drawing/2014/main" id="{389C8564-2C1D-4A36-9A1F-4AC3E428760B}"/>
-              </a:ext>
-            </a:extLst>
-          </p:cNvPr>
-          <p:cNvSpPr>
-            <a:spLocks xmlns:a="http://schemas.openxmlformats.org/drawingml/2006/main" noGrp="1"/>
-          </p:cNvSpPr>
-          <p:nvPr/>
-        </p:nvSpPr>
-        <p:spPr>
-          <a:xfrm xmlns:a="http://schemas.openxmlformats.org/drawingml/2006/main">
-            <a:off x="7048500" y="5429250"/>
-            <a:ext cx="1924050" cy="666750"/>
+              <a:buNone/>
+              <a:defRPr sz="1350" b="1">
+                <a:solidFill>
+                  <a:srgbClr val="3D8DFF"/>
+                </a:solidFill>
+                <a:latin typeface="Arial"/>
+                <a:ea typeface="Arial"/>
+                <a:cs typeface="Arial"/>
+              </a:defRPr>
+            </a:pPr>
+            <a:r>
+              <a:rPr sz="1350" b="1">
+                <a:solidFill>
+                  <a:srgbClr val="3D8DFF"/>
+                </a:solidFill>
+                <a:latin typeface="Arial"/>
+                <a:ea typeface="Arial"/>
+                <a:cs typeface="Arial"/>
+              </a:rPr>
+              <a:t>03 · ENTENDER</a:t>
+            </a:r>
+          </a:p>
+        </p:txBody>
+      </p:sp>
+      <p:sp>
+        <p:nvSpPr>
+          <p:cNvPr id="19" name="architecture-title-2">
+            <a:extLst xmlns:a="http://schemas.openxmlformats.org/drawingml/2006/main">
+              <a:ext uri="{FF2B5EF4-FFF2-40B4-BE49-F238E27FC236}">
+                <a16:creationId xmlns:a16="http://schemas.microsoft.com/office/drawing/2014/main" id="{15507171-AF5E-4A48-B891-1E3C5C774568}"/>
+              </a:ext>
+            </a:extLst>
+          </p:cNvPr>
+          <p:cNvSpPr>
+            <a:spLocks xmlns:a="http://schemas.openxmlformats.org/drawingml/2006/main" noGrp="1"/>
+          </p:cNvSpPr>
+          <p:nvPr/>
+        </p:nvSpPr>
+        <p:spPr>
+          <a:xfrm xmlns:a="http://schemas.openxmlformats.org/drawingml/2006/main">
+            <a:off x="971550" y="8153400"/>
+            <a:ext cx="3810000" cy="457200"/>
           </a:xfrm>
           <a:prstGeom xmlns:a="http://schemas.openxmlformats.org/drawingml/2006/main" prst="rect">
             <a:avLst/>
@@ -4895,7 +4483,67 @@
           <a:lstStyle xmlns:a="http://schemas.openxmlformats.org/drawingml/2006/main"/>
           <a:p xmlns:a="http://schemas.openxmlformats.org/drawingml/2006/main">
             <a:pPr algn="l">
-              <a:defRPr sz="1725" b="0">
+              <a:buNone/>
+              <a:defRPr sz="2325" b="1">
+                <a:solidFill>
+                  <a:srgbClr val="07111C"/>
+                </a:solidFill>
+                <a:latin typeface="Arial"/>
+                <a:ea typeface="Arial"/>
+                <a:cs typeface="Arial"/>
+              </a:defRPr>
+            </a:pPr>
+            <a:r>
+              <a:rPr sz="2325" b="1">
+                <a:solidFill>
+                  <a:srgbClr val="07111C"/>
+                </a:solidFill>
+                <a:latin typeface="Arial"/>
+                <a:ea typeface="Arial"/>
+                <a:cs typeface="Arial"/>
+              </a:rPr>
+              <a:t>Prever e explicar</a:t>
+            </a:r>
+          </a:p>
+        </p:txBody>
+      </p:sp>
+      <p:sp>
+        <p:nvSpPr>
+          <p:cNvPr id="20" name="architecture-body-2">
+            <a:extLst xmlns:a="http://schemas.openxmlformats.org/drawingml/2006/main">
+              <a:ext uri="{FF2B5EF4-FFF2-40B4-BE49-F238E27FC236}">
+                <a16:creationId xmlns:a16="http://schemas.microsoft.com/office/drawing/2014/main" id="{8522248E-326F-4065-A609-497C1EA71F8C}"/>
+              </a:ext>
+            </a:extLst>
+          </p:cNvPr>
+          <p:cNvSpPr>
+            <a:spLocks xmlns:a="http://schemas.openxmlformats.org/drawingml/2006/main" noGrp="1"/>
+          </p:cNvSpPr>
+          <p:nvPr/>
+        </p:nvSpPr>
+        <p:spPr>
+          <a:xfrm xmlns:a="http://schemas.openxmlformats.org/drawingml/2006/main">
+            <a:off x="5219700" y="8172450"/>
+            <a:ext cx="3790950" cy="514350"/>
+          </a:xfrm>
+          <a:prstGeom xmlns:a="http://schemas.openxmlformats.org/drawingml/2006/main" prst="rect">
+            <a:avLst/>
+          </a:prstGeom>
+          <a:noFill xmlns:a="http://schemas.openxmlformats.org/drawingml/2006/main"/>
+          <a:ln xmlns:a="http://schemas.openxmlformats.org/drawingml/2006/main" w="0">
+            <a:noFill/>
+            <a:prstDash val="solid"/>
+          </a:ln>
+        </p:spPr>
+        <p:txBody>
+          <a:bodyPr xmlns:a="http://schemas.openxmlformats.org/drawingml/2006/main" anchor="t">
+            <a:normAutofit fontScale="100000"/>
+          </a:bodyPr>
+          <a:lstStyle xmlns:a="http://schemas.openxmlformats.org/drawingml/2006/main"/>
+          <a:p xmlns:a="http://schemas.openxmlformats.org/drawingml/2006/main">
+            <a:pPr algn="r">
+              <a:buNone/>
+              <a:defRPr sz="1650" b="0">
                 <a:solidFill>
                   <a:srgbClr val="53606D"/>
                 </a:solidFill>
@@ -4905,7 +4553,7 @@
               </a:defRPr>
             </a:pPr>
             <a:r>
-              <a:rPr sz="1725" b="0">
+              <a:rPr sz="1650" b="0">
                 <a:solidFill>
                   <a:srgbClr val="53606D"/>
                 </a:solidFill>
@@ -4913,29 +4561,62 @@
                 <a:ea typeface="Arial"/>
                 <a:cs typeface="Arial"/>
               </a:rPr>
-              <a:t>de trajetória temporal</a:t>
-            </a:r>
-          </a:p>
-        </p:txBody>
-      </p:sp>
-      <p:sp>
-        <p:nvSpPr>
-          <p:cNvPr id="15" name="scale-isolation-title">
-            <a:extLst xmlns:a="http://schemas.openxmlformats.org/drawingml/2006/main">
-              <a:ext uri="{FF2B5EF4-FFF2-40B4-BE49-F238E27FC236}">
-                <a16:creationId xmlns:a16="http://schemas.microsoft.com/office/drawing/2014/main" id="{8B09EAD8-F00E-467E-9656-62DA239B5494}"/>
-              </a:ext>
-            </a:extLst>
-          </p:cNvPr>
-          <p:cNvSpPr>
-            <a:spLocks xmlns:a="http://schemas.openxmlformats.org/drawingml/2006/main" noGrp="1"/>
-          </p:cNvSpPr>
-          <p:nvPr/>
-        </p:nvSpPr>
-        <p:spPr>
-          <a:xfrm xmlns:a="http://schemas.openxmlformats.org/drawingml/2006/main">
-            <a:off x="685800" y="7524750"/>
-            <a:ext cx="8915400" cy="685800"/>
+              <a:t>Faixas de incerteza + SHAP</a:t>
+            </a:r>
+          </a:p>
+        </p:txBody>
+      </p:sp>
+      <p:sp>
+        <p:nvSpPr>
+          <p:cNvPr id="21" name="architecture-node-3">
+            <a:extLst xmlns:a="http://schemas.openxmlformats.org/drawingml/2006/main">
+              <a:ext uri="{FF2B5EF4-FFF2-40B4-BE49-F238E27FC236}">
+                <a16:creationId xmlns:a16="http://schemas.microsoft.com/office/drawing/2014/main" id="{30C0A199-4DE7-4AC1-862B-9E8942886C4D}"/>
+              </a:ext>
+            </a:extLst>
+          </p:cNvPr>
+          <p:cNvSpPr>
+            <a:spLocks xmlns:a="http://schemas.openxmlformats.org/drawingml/2006/main" noGrp="1"/>
+          </p:cNvSpPr>
+          <p:nvPr/>
+        </p:nvSpPr>
+        <p:spPr>
+          <a:xfrm xmlns:a="http://schemas.openxmlformats.org/drawingml/2006/main">
+            <a:off x="685800" y="9429750"/>
+            <a:ext cx="8915400" cy="1524000"/>
+          </a:xfrm>
+          <a:prstGeom xmlns:a="http://schemas.openxmlformats.org/drawingml/2006/main" prst="roundRect">
+            <a:avLst>
+              <a:gd name="adj" fmla="val 7500"/>
+            </a:avLst>
+          </a:prstGeom>
+          <a:solidFill xmlns:a="http://schemas.openxmlformats.org/drawingml/2006/main">
+            <a:srgbClr val="DDF3FC"/>
+          </a:solidFill>
+          <a:ln xmlns:a="http://schemas.openxmlformats.org/drawingml/2006/main" w="0">
+            <a:noFill/>
+            <a:prstDash val="solid"/>
+          </a:ln>
+        </p:spPr>
+      </p:sp>
+      <p:sp>
+        <p:nvSpPr>
+          <p:cNvPr id="22" name="architecture-label-3">
+            <a:extLst xmlns:a="http://schemas.openxmlformats.org/drawingml/2006/main">
+              <a:ext uri="{FF2B5EF4-FFF2-40B4-BE49-F238E27FC236}">
+                <a16:creationId xmlns:a16="http://schemas.microsoft.com/office/drawing/2014/main" id="{8390117C-492F-4BBF-B516-9654EF400C56}"/>
+              </a:ext>
+            </a:extLst>
+          </p:cNvPr>
+          <p:cNvSpPr>
+            <a:spLocks xmlns:a="http://schemas.openxmlformats.org/drawingml/2006/main" noGrp="1"/>
+          </p:cNvSpPr>
+          <p:nvPr/>
+        </p:nvSpPr>
+        <p:spPr>
+          <a:xfrm xmlns:a="http://schemas.openxmlformats.org/drawingml/2006/main">
+            <a:off x="971550" y="9715500"/>
+            <a:ext cx="2190750" cy="342900"/>
           </a:xfrm>
           <a:prstGeom xmlns:a="http://schemas.openxmlformats.org/drawingml/2006/main" prst="rect">
             <a:avLst/>
@@ -4953,7 +4634,67 @@
           <a:lstStyle xmlns:a="http://schemas.openxmlformats.org/drawingml/2006/main"/>
           <a:p xmlns:a="http://schemas.openxmlformats.org/drawingml/2006/main">
             <a:pPr algn="l">
-              <a:defRPr sz="2850" b="1">
+              <a:buNone/>
+              <a:defRPr sz="1350" b="1">
+                <a:solidFill>
+                  <a:srgbClr val="3D8DFF"/>
+                </a:solidFill>
+                <a:latin typeface="Arial"/>
+                <a:ea typeface="Arial"/>
+                <a:cs typeface="Arial"/>
+              </a:defRPr>
+            </a:pPr>
+            <a:r>
+              <a:rPr sz="1350" b="1">
+                <a:solidFill>
+                  <a:srgbClr val="3D8DFF"/>
+                </a:solidFill>
+                <a:latin typeface="Arial"/>
+                <a:ea typeface="Arial"/>
+                <a:cs typeface="Arial"/>
+              </a:rPr>
+              <a:t>04 · DECIDIR</a:t>
+            </a:r>
+          </a:p>
+        </p:txBody>
+      </p:sp>
+      <p:sp>
+        <p:nvSpPr>
+          <p:cNvPr id="23" name="architecture-title-3">
+            <a:extLst xmlns:a="http://schemas.openxmlformats.org/drawingml/2006/main">
+              <a:ext uri="{FF2B5EF4-FFF2-40B4-BE49-F238E27FC236}">
+                <a16:creationId xmlns:a16="http://schemas.microsoft.com/office/drawing/2014/main" id="{1EB2DEA6-769B-4633-BDDD-A8C81E63629B}"/>
+              </a:ext>
+            </a:extLst>
+          </p:cNvPr>
+          <p:cNvSpPr>
+            <a:spLocks xmlns:a="http://schemas.openxmlformats.org/drawingml/2006/main" noGrp="1"/>
+          </p:cNvSpPr>
+          <p:nvPr/>
+        </p:nvSpPr>
+        <p:spPr>
+          <a:xfrm xmlns:a="http://schemas.openxmlformats.org/drawingml/2006/main">
+            <a:off x="971550" y="10115550"/>
+            <a:ext cx="3810000" cy="457200"/>
+          </a:xfrm>
+          <a:prstGeom xmlns:a="http://schemas.openxmlformats.org/drawingml/2006/main" prst="rect">
+            <a:avLst/>
+          </a:prstGeom>
+          <a:noFill xmlns:a="http://schemas.openxmlformats.org/drawingml/2006/main"/>
+          <a:ln xmlns:a="http://schemas.openxmlformats.org/drawingml/2006/main" w="0">
+            <a:noFill/>
+            <a:prstDash val="solid"/>
+          </a:ln>
+        </p:spPr>
+        <p:txBody>
+          <a:bodyPr xmlns:a="http://schemas.openxmlformats.org/drawingml/2006/main" anchor="t">
+            <a:normAutofit fontScale="100000"/>
+          </a:bodyPr>
+          <a:lstStyle xmlns:a="http://schemas.openxmlformats.org/drawingml/2006/main"/>
+          <a:p xmlns:a="http://schemas.openxmlformats.org/drawingml/2006/main">
+            <a:pPr algn="l">
+              <a:buNone/>
+              <a:defRPr sz="2325" b="1">
                 <a:solidFill>
                   <a:srgbClr val="07111C"/>
                 </a:solidFill>
@@ -4963,7 +4704,7 @@
               </a:defRPr>
             </a:pPr>
             <a:r>
-              <a:rPr sz="2850" b="1">
+              <a:rPr sz="2325" b="1">
                 <a:solidFill>
                   <a:srgbClr val="07111C"/>
                 </a:solidFill>
@@ -4971,29 +4712,29 @@
                 <a:ea typeface="Arial"/>
                 <a:cs typeface="Arial"/>
               </a:rPr>
-              <a:t>A verdade causal fica fora do treino.</a:t>
-            </a:r>
-          </a:p>
-        </p:txBody>
-      </p:sp>
-      <p:sp>
-        <p:nvSpPr>
-          <p:cNvPr id="16" name="scale-isolation-body">
-            <a:extLst xmlns:a="http://schemas.openxmlformats.org/drawingml/2006/main">
-              <a:ext uri="{FF2B5EF4-FFF2-40B4-BE49-F238E27FC236}">
-                <a16:creationId xmlns:a16="http://schemas.microsoft.com/office/drawing/2014/main" id="{B489DFF5-4A06-44AE-B5E3-431AC2FDA866}"/>
-              </a:ext>
-            </a:extLst>
-          </p:cNvPr>
-          <p:cNvSpPr>
-            <a:spLocks xmlns:a="http://schemas.openxmlformats.org/drawingml/2006/main" noGrp="1"/>
-          </p:cNvSpPr>
-          <p:nvPr/>
-        </p:nvSpPr>
-        <p:spPr>
-          <a:xfrm xmlns:a="http://schemas.openxmlformats.org/drawingml/2006/main">
-            <a:off x="685800" y="8420100"/>
-            <a:ext cx="8915400" cy="1238250"/>
+              <a:t>Testar e revisar</a:t>
+            </a:r>
+          </a:p>
+        </p:txBody>
+      </p:sp>
+      <p:sp>
+        <p:nvSpPr>
+          <p:cNvPr id="24" name="architecture-body-3">
+            <a:extLst xmlns:a="http://schemas.openxmlformats.org/drawingml/2006/main">
+              <a:ext uri="{FF2B5EF4-FFF2-40B4-BE49-F238E27FC236}">
+                <a16:creationId xmlns:a16="http://schemas.microsoft.com/office/drawing/2014/main" id="{B7FC4A07-4684-448B-AAC5-85ACD6D078B1}"/>
+              </a:ext>
+            </a:extLst>
+          </p:cNvPr>
+          <p:cNvSpPr>
+            <a:spLocks xmlns:a="http://schemas.openxmlformats.org/drawingml/2006/main" noGrp="1"/>
+          </p:cNvSpPr>
+          <p:nvPr/>
+        </p:nvSpPr>
+        <p:spPr>
+          <a:xfrm xmlns:a="http://schemas.openxmlformats.org/drawingml/2006/main">
+            <a:off x="5219700" y="10134600"/>
+            <a:ext cx="3790950" cy="514350"/>
           </a:xfrm>
           <a:prstGeom xmlns:a="http://schemas.openxmlformats.org/drawingml/2006/main" prst="rect">
             <a:avLst/>
@@ -5010,8 +4751,9 @@
           </a:bodyPr>
           <a:lstStyle xmlns:a="http://schemas.openxmlformats.org/drawingml/2006/main"/>
           <a:p xmlns:a="http://schemas.openxmlformats.org/drawingml/2006/main">
-            <a:pPr algn="l">
-              <a:defRPr sz="1950" b="0">
+            <a:pPr algn="r">
+              <a:buNone/>
+              <a:defRPr sz="1650" b="0">
                 <a:solidFill>
                   <a:srgbClr val="53606D"/>
                 </a:solidFill>
@@ -5021,7 +4763,7 @@
               </a:defRPr>
             </a:pPr>
             <a:r>
-              <a:rPr sz="1950" b="0">
+              <a:rPr sz="1650" b="0">
                 <a:solidFill>
                   <a:srgbClr val="53606D"/>
                 </a:solidFill>
@@ -5029,72 +4771,14 @@
                 <a:ea typeface="Arial"/>
                 <a:cs typeface="Arial"/>
               </a:rPr>
-              <a:t>Parâmetros latentes vivem em armazenamento isolado. Features, modelos e otimização usam apenas campos públicos disponíveis no tempo.</a:t>
-            </a:r>
-          </a:p>
-        </p:txBody>
-      </p:sp>
-      <p:sp>
-        <p:nvSpPr>
-          <p:cNvPr id="17" name="scale-proof">
-            <a:extLst xmlns:a="http://schemas.openxmlformats.org/drawingml/2006/main">
-              <a:ext uri="{FF2B5EF4-FFF2-40B4-BE49-F238E27FC236}">
-                <a16:creationId xmlns:a16="http://schemas.microsoft.com/office/drawing/2014/main" id="{31E690D1-A627-45E6-8A7D-714AD5B96803}"/>
-              </a:ext>
-            </a:extLst>
-          </p:cNvPr>
-          <p:cNvSpPr>
-            <a:spLocks xmlns:a="http://schemas.openxmlformats.org/drawingml/2006/main" noGrp="1"/>
-          </p:cNvSpPr>
-          <p:nvPr/>
-        </p:nvSpPr>
-        <p:spPr>
-          <a:xfrm xmlns:a="http://schemas.openxmlformats.org/drawingml/2006/main">
-            <a:off x="685800" y="10287000"/>
-            <a:ext cx="8915400" cy="495300"/>
-          </a:xfrm>
-          <a:prstGeom xmlns:a="http://schemas.openxmlformats.org/drawingml/2006/main" prst="rect">
-            <a:avLst/>
-          </a:prstGeom>
-          <a:noFill xmlns:a="http://schemas.openxmlformats.org/drawingml/2006/main"/>
-          <a:ln xmlns:a="http://schemas.openxmlformats.org/drawingml/2006/main" w="0">
-            <a:noFill/>
-            <a:prstDash val="solid"/>
-          </a:ln>
-        </p:spPr>
-        <p:txBody>
-          <a:bodyPr xmlns:a="http://schemas.openxmlformats.org/drawingml/2006/main" anchor="t">
-            <a:normAutofit fontScale="100000"/>
-          </a:bodyPr>
-          <a:lstStyle xmlns:a="http://schemas.openxmlformats.org/drawingml/2006/main"/>
-          <a:p xmlns:a="http://schemas.openxmlformats.org/drawingml/2006/main">
-            <a:pPr algn="l">
-              <a:defRPr sz="1725" b="1">
-                <a:solidFill>
-                  <a:srgbClr val="3D8DFF"/>
-                </a:solidFill>
-                <a:latin typeface="Arial"/>
-                <a:ea typeface="Arial"/>
-                <a:cs typeface="Arial"/>
-              </a:defRPr>
-            </a:pPr>
-            <a:r>
-              <a:rPr sz="1725" b="1">
-                <a:solidFill>
-                  <a:srgbClr val="3D8DFF"/>
-                </a:solidFill>
-                <a:latin typeface="Arial"/>
-                <a:ea typeface="Arial"/>
-                <a:cs typeface="Arial"/>
-              </a:rPr>
-              <a:t>MESMA SEED → MESMOS IDs E HASH LÓGICO</a:t>
+              <a:t>Cenários seguros + decisão humana</a:t>
             </a:r>
           </a:p>
         </p:txBody>
       </p:sp>
       <p:cxnSp>
         <p:nvCxnSpPr>
-          <p:cNvPr id="38" name="footer-rule-3"/>
+          <p:cNvPr id="102" name="footer-rule-4"/>
           <p:cNvCxnSpPr/>
           <p:nvPr/>
         </p:nvCxnSpPr>
@@ -5116,10 +4800,10 @@
       </p:cxnSp>
       <p:sp>
         <p:nvSpPr>
-          <p:cNvPr id="19" name="footer-3">
-            <a:extLst xmlns:a="http://schemas.openxmlformats.org/drawingml/2006/main">
-              <a:ext uri="{FF2B5EF4-FFF2-40B4-BE49-F238E27FC236}">
-                <a16:creationId xmlns:a16="http://schemas.microsoft.com/office/drawing/2014/main" id="{247CD476-3CF3-452B-976B-935DE610776C}"/>
+          <p:cNvPr id="26" name="footer-4">
+            <a:extLst xmlns:a="http://schemas.openxmlformats.org/drawingml/2006/main">
+              <a:ext uri="{FF2B5EF4-FFF2-40B4-BE49-F238E27FC236}">
+                <a16:creationId xmlns:a16="http://schemas.microsoft.com/office/drawing/2014/main" id="{652DA731-9400-4D43-8639-1FBE93804821}"/>
               </a:ext>
             </a:extLst>
           </p:cNvPr>
@@ -5149,6 +4833,7 @@
           <a:lstStyle xmlns:a="http://schemas.openxmlformats.org/drawingml/2006/main"/>
           <a:p xmlns:a="http://schemas.openxmlformats.org/drawingml/2006/main">
             <a:pPr algn="l">
+              <a:buNone/>
               <a:defRPr sz="1200" b="0">
                 <a:solidFill>
                   <a:srgbClr val="53606D"/>
@@ -5174,10 +4859,10 @@
       </p:sp>
       <p:sp>
         <p:nvSpPr>
-          <p:cNvPr id="20" name="footer-page-3">
-            <a:extLst xmlns:a="http://schemas.openxmlformats.org/drawingml/2006/main">
-              <a:ext uri="{FF2B5EF4-FFF2-40B4-BE49-F238E27FC236}">
-                <a16:creationId xmlns:a16="http://schemas.microsoft.com/office/drawing/2014/main" id="{B80F9634-0980-403F-8FC6-DAED36781B2D}"/>
+          <p:cNvPr id="27" name="footer-page-4">
+            <a:extLst xmlns:a="http://schemas.openxmlformats.org/drawingml/2006/main">
+              <a:ext uri="{FF2B5EF4-FFF2-40B4-BE49-F238E27FC236}">
+                <a16:creationId xmlns:a16="http://schemas.microsoft.com/office/drawing/2014/main" id="{32E3F5F1-82AB-417B-825F-5C1321C85743}"/>
               </a:ext>
             </a:extLst>
           </p:cNvPr>
@@ -5207,6 +4892,7 @@
           <a:lstStyle xmlns:a="http://schemas.openxmlformats.org/drawingml/2006/main"/>
           <a:p xmlns:a="http://schemas.openxmlformats.org/drawingml/2006/main">
             <a:pPr algn="r">
+              <a:buNone/>
               <a:defRPr sz="1200" b="0">
                 <a:solidFill>
                   <a:srgbClr val="53606D"/>
@@ -5225,7 +4911,7 @@
                 <a:ea typeface="Arial"/>
                 <a:cs typeface="Arial"/>
               </a:rPr>
-              <a:t>3/10</a:t>
+              <a:t>3/9</a:t>
             </a:r>
           </a:p>
         </p:txBody>
@@ -5233,7 +4919,7 @@
     </p:spTree>
     <p:extLst>
       <p:ext uri="{BB962C8B-B14F-4D97-AF65-F5344CB8AC3E}">
-        <p14:creationId xmlns:p14="http://schemas.microsoft.com/office/powerpoint/2010/main" val="1133527748"/>
+        <p14:creationId xmlns:p14="http://schemas.microsoft.com/office/powerpoint/2010/main" val="1425504938"/>
       </p:ext>
     </p:extLst>
   </p:cSld>
@@ -5261,10 +4947,10 @@
       </p:grpSpPr>
       <p:sp>
         <p:nvSpPr>
-          <p:cNvPr id="28" name="kicker-4">
-            <a:extLst xmlns:a="http://schemas.openxmlformats.org/drawingml/2006/main">
-              <a:ext uri="{FF2B5EF4-FFF2-40B4-BE49-F238E27FC236}">
-                <a16:creationId xmlns:a16="http://schemas.microsoft.com/office/drawing/2014/main" id="{EDD52721-5E7E-4DF1-AEDE-59D1E96E341B}"/>
+          <p:cNvPr id="13" name="kicker-5">
+            <a:extLst xmlns:a="http://schemas.openxmlformats.org/drawingml/2006/main">
+              <a:ext uri="{FF2B5EF4-FFF2-40B4-BE49-F238E27FC236}">
+                <a16:creationId xmlns:a16="http://schemas.microsoft.com/office/drawing/2014/main" id="{16479E2D-EC67-46B6-B504-0D78D4DD3C91}"/>
               </a:ext>
             </a:extLst>
           </p:cNvPr>
@@ -5294,6 +4980,7 @@
           <a:lstStyle xmlns:a="http://schemas.openxmlformats.org/drawingml/2006/main"/>
           <a:p xmlns:a="http://schemas.openxmlformats.org/drawingml/2006/main">
             <a:pPr algn="l">
+              <a:buNone/>
               <a:defRPr sz="1350" b="1">
                 <a:solidFill>
                   <a:srgbClr val="3D8DFF"/>
@@ -5312,17 +4999,17 @@
                 <a:ea typeface="Arial"/>
                 <a:cs typeface="Arial"/>
               </a:rPr>
-              <a:t>ARQUITETURA</a:t>
-            </a:r>
-          </a:p>
-        </p:txBody>
-      </p:sp>
-      <p:sp>
-        <p:nvSpPr>
-          <p:cNvPr id="2" name="page-4">
-            <a:extLst xmlns:a="http://schemas.openxmlformats.org/drawingml/2006/main">
-              <a:ext uri="{FF2B5EF4-FFF2-40B4-BE49-F238E27FC236}">
-                <a16:creationId xmlns:a16="http://schemas.microsoft.com/office/drawing/2014/main" id="{3AB7F21C-31FD-4A63-8313-DB8BACA04D81}"/>
+              <a:t>A DESCOBERTA</a:t>
+            </a:r>
+          </a:p>
+        </p:txBody>
+      </p:sp>
+      <p:sp>
+        <p:nvSpPr>
+          <p:cNvPr id="2" name="page-5">
+            <a:extLst xmlns:a="http://schemas.openxmlformats.org/drawingml/2006/main">
+              <a:ext uri="{FF2B5EF4-FFF2-40B4-BE49-F238E27FC236}">
+                <a16:creationId xmlns:a16="http://schemas.microsoft.com/office/drawing/2014/main" id="{C8DA4592-4AA8-4286-AA86-79A57C187911}"/>
               </a:ext>
             </a:extLst>
           </p:cNvPr>
@@ -5352,6 +5039,7 @@
           <a:lstStyle xmlns:a="http://schemas.openxmlformats.org/drawingml/2006/main"/>
           <a:p xmlns:a="http://schemas.openxmlformats.org/drawingml/2006/main">
             <a:pPr algn="r">
+              <a:buNone/>
               <a:defRPr sz="1350" b="1">
                 <a:solidFill>
                   <a:srgbClr val="53606D"/>
@@ -5377,10 +5065,10 @@
       </p:sp>
       <p:sp>
         <p:nvSpPr>
-          <p:cNvPr id="3" name="title-4">
-            <a:extLst xmlns:a="http://schemas.openxmlformats.org/drawingml/2006/main">
-              <a:ext uri="{FF2B5EF4-FFF2-40B4-BE49-F238E27FC236}">
-                <a16:creationId xmlns:a16="http://schemas.microsoft.com/office/drawing/2014/main" id="{00505D56-F7D8-4458-B71A-983F70C6C1AA}"/>
+          <p:cNvPr id="3" name="title-5">
+            <a:extLst xmlns:a="http://schemas.openxmlformats.org/drawingml/2006/main">
+              <a:ext uri="{FF2B5EF4-FFF2-40B4-BE49-F238E27FC236}">
+                <a16:creationId xmlns:a16="http://schemas.microsoft.com/office/drawing/2014/main" id="{C7A5FB37-2FB3-42B3-89E9-BD03B03BA79B}"/>
               </a:ext>
             </a:extLst>
           </p:cNvPr>
@@ -5410,6 +5098,7 @@
           <a:lstStyle xmlns:a="http://schemas.openxmlformats.org/drawingml/2006/main"/>
           <a:p xmlns:a="http://schemas.openxmlformats.org/drawingml/2006/main">
             <a:pPr algn="l">
+              <a:buNone/>
               <a:defRPr sz="3750" b="1">
                 <a:solidFill>
                   <a:srgbClr val="07111C"/>
@@ -5428,17 +5117,17 @@
                 <a:ea typeface="Arial"/>
                 <a:cs typeface="Arial"/>
               </a:rPr>
-              <a:t>O pipeline preserva o tempo</a:t>
-            </a:r>
-          </a:p>
-        </p:txBody>
-      </p:sp>
-      <p:sp>
-        <p:nvSpPr>
-          <p:cNvPr id="4" name="subtitle-4">
-            <a:extLst xmlns:a="http://schemas.openxmlformats.org/drawingml/2006/main">
-              <a:ext uri="{FF2B5EF4-FFF2-40B4-BE49-F238E27FC236}">
-                <a16:creationId xmlns:a16="http://schemas.microsoft.com/office/drawing/2014/main" id="{8B4488E1-94C0-4570-BEDA-595A45E135C1}"/>
+              <a:t>O modelo não bateu a meta</a:t>
+            </a:r>
+          </a:p>
+        </p:txBody>
+      </p:sp>
+      <p:sp>
+        <p:nvSpPr>
+          <p:cNvPr id="4" name="subtitle-5">
+            <a:extLst xmlns:a="http://schemas.openxmlformats.org/drawingml/2006/main">
+              <a:ext uri="{FF2B5EF4-FFF2-40B4-BE49-F238E27FC236}">
+                <a16:creationId xmlns:a16="http://schemas.microsoft.com/office/drawing/2014/main" id="{00368B43-48A8-49D7-8FD2-0BB474F66167}"/>
               </a:ext>
             </a:extLst>
           </p:cNvPr>
@@ -5468,6 +5157,7 @@
           <a:lstStyle xmlns:a="http://schemas.openxmlformats.org/drawingml/2006/main"/>
           <a:p xmlns:a="http://schemas.openxmlformats.org/drawingml/2006/main">
             <a:pPr algn="l">
+              <a:buNone/>
               <a:defRPr sz="1875" b="0">
                 <a:solidFill>
                   <a:srgbClr val="53606D"/>
@@ -5486,14 +5176,14 @@
                 <a:ea typeface="Arial"/>
                 <a:cs typeface="Arial"/>
               </a:rPr>
-              <a:t>Cada camada recebe somente o que estaria disponível no momento da decisão.</a:t>
+              <a:t>Meta: 5%. Resultado: 0,98%. O projeto mostra isso sem esconder.</a:t>
             </a:r>
           </a:p>
         </p:txBody>
       </p:sp>
       <p:cxnSp>
         <p:nvCxnSpPr>
-          <p:cNvPr id="32" name="header-rule-4"/>
+          <p:cNvPr id="39" name="header-rule-5"/>
           <p:cNvCxnSpPr/>
           <p:nvPr/>
         </p:nvCxnSpPr>
@@ -5513,903 +5203,226 @@
           </a:ln>
         </p:spPr>
       </p:cxnSp>
+      <p:graphicFrame>
+        <p:nvGraphicFramePr>
+          <p:cNvPr id="40" name="Chart"/>
+          <p:cNvGraphicFramePr/>
+          <p:nvPr/>
+        </p:nvGraphicFramePr>
+        <p:xfrm>
+          <a:off xmlns:a="http://schemas.openxmlformats.org/drawingml/2006/main" x="1143000" y="3619500"/>
+          <a:ext xmlns:a="http://schemas.openxmlformats.org/drawingml/2006/main" cx="8001000" cy="5048250"/>
+        </p:xfrm>
+        <a:graphic xmlns:a="http://schemas.openxmlformats.org/drawingml/2006/main">
+          <a:graphicData uri="http://schemas.openxmlformats.org/drawingml/2006/chart">
+            <c:chart xmlns:r="http://schemas.openxmlformats.org/officeDocument/2006/relationships" xmlns:c="http://schemas.openxmlformats.org/drawingml/2006/chart" r:id="R3c146db518334c8e"/>
+          </a:graphicData>
+        </a:graphic>
+      </p:graphicFrame>
+      <p:sp>
+        <p:nvSpPr>
+          <p:cNvPr id="7" name="goal-result">
+            <a:extLst xmlns:a="http://schemas.openxmlformats.org/drawingml/2006/main">
+              <a:ext uri="{FF2B5EF4-FFF2-40B4-BE49-F238E27FC236}">
+                <a16:creationId xmlns:a16="http://schemas.microsoft.com/office/drawing/2014/main" id="{7E45A790-C2D5-431E-A514-608F9BF7AE07}"/>
+              </a:ext>
+            </a:extLst>
+          </p:cNvPr>
+          <p:cNvSpPr>
+            <a:spLocks xmlns:a="http://schemas.openxmlformats.org/drawingml/2006/main" noGrp="1"/>
+          </p:cNvSpPr>
+          <p:nvPr/>
+        </p:nvSpPr>
+        <p:spPr>
+          <a:xfrm xmlns:a="http://schemas.openxmlformats.org/drawingml/2006/main">
+            <a:off x="685800" y="8763000"/>
+            <a:ext cx="2857500" cy="857250"/>
+          </a:xfrm>
+          <a:prstGeom xmlns:a="http://schemas.openxmlformats.org/drawingml/2006/main" prst="rect">
+            <a:avLst/>
+          </a:prstGeom>
+          <a:noFill xmlns:a="http://schemas.openxmlformats.org/drawingml/2006/main"/>
+          <a:ln xmlns:a="http://schemas.openxmlformats.org/drawingml/2006/main" w="0">
+            <a:noFill/>
+            <a:prstDash val="solid"/>
+          </a:ln>
+        </p:spPr>
+        <p:txBody>
+          <a:bodyPr xmlns:a="http://schemas.openxmlformats.org/drawingml/2006/main" anchor="t">
+            <a:normAutofit fontScale="100000"/>
+          </a:bodyPr>
+          <a:lstStyle xmlns:a="http://schemas.openxmlformats.org/drawingml/2006/main"/>
+          <a:p xmlns:a="http://schemas.openxmlformats.org/drawingml/2006/main">
+            <a:pPr algn="l">
+              <a:buNone/>
+              <a:defRPr sz="4200" b="1">
+                <a:solidFill>
+                  <a:srgbClr val="3D8DFF"/>
+                </a:solidFill>
+                <a:latin typeface="Arial"/>
+                <a:ea typeface="Arial"/>
+                <a:cs typeface="Arial"/>
+              </a:defRPr>
+            </a:pPr>
+            <a:r>
+              <a:rPr sz="4200" b="1">
+                <a:solidFill>
+                  <a:srgbClr val="3D8DFF"/>
+                </a:solidFill>
+                <a:latin typeface="Arial"/>
+                <a:ea typeface="Arial"/>
+                <a:cs typeface="Arial"/>
+              </a:rPr>
+              <a:t>0,98%</a:t>
+            </a:r>
+          </a:p>
+        </p:txBody>
+      </p:sp>
+      <p:sp>
+        <p:nvSpPr>
+          <p:cNvPr id="8" name="goal-result-label">
+            <a:extLst xmlns:a="http://schemas.openxmlformats.org/drawingml/2006/main">
+              <a:ext uri="{FF2B5EF4-FFF2-40B4-BE49-F238E27FC236}">
+                <a16:creationId xmlns:a16="http://schemas.microsoft.com/office/drawing/2014/main" id="{D84CA675-496A-4FEE-8117-7B716C782C9B}"/>
+              </a:ext>
+            </a:extLst>
+          </p:cNvPr>
+          <p:cNvSpPr>
+            <a:spLocks xmlns:a="http://schemas.openxmlformats.org/drawingml/2006/main" noGrp="1"/>
+          </p:cNvSpPr>
+          <p:nvPr/>
+        </p:nvSpPr>
+        <p:spPr>
+          <a:xfrm xmlns:a="http://schemas.openxmlformats.org/drawingml/2006/main">
+            <a:off x="3733800" y="8858250"/>
+            <a:ext cx="4000500" cy="857250"/>
+          </a:xfrm>
+          <a:prstGeom xmlns:a="http://schemas.openxmlformats.org/drawingml/2006/main" prst="rect">
+            <a:avLst/>
+          </a:prstGeom>
+          <a:noFill xmlns:a="http://schemas.openxmlformats.org/drawingml/2006/main"/>
+          <a:ln xmlns:a="http://schemas.openxmlformats.org/drawingml/2006/main" w="0">
+            <a:noFill/>
+            <a:prstDash val="solid"/>
+          </a:ln>
+        </p:spPr>
+        <p:txBody>
+          <a:bodyPr xmlns:a="http://schemas.openxmlformats.org/drawingml/2006/main" anchor="t">
+            <a:normAutofit fontScale="100000"/>
+          </a:bodyPr>
+          <a:lstStyle xmlns:a="http://schemas.openxmlformats.org/drawingml/2006/main"/>
+          <a:p xmlns:a="http://schemas.openxmlformats.org/drawingml/2006/main">
+            <a:pPr algn="l">
+              <a:buNone/>
+              <a:defRPr sz="1950" b="0">
+                <a:solidFill>
+                  <a:srgbClr val="53606D"/>
+                </a:solidFill>
+                <a:latin typeface="Arial"/>
+                <a:ea typeface="Arial"/>
+                <a:cs typeface="Arial"/>
+              </a:defRPr>
+            </a:pPr>
+            <a:r>
+              <a:rPr sz="1950" b="0">
+                <a:solidFill>
+                  <a:srgbClr val="53606D"/>
+                </a:solidFill>
+                <a:latin typeface="Arial"/>
+                <a:ea typeface="Arial"/>
+                <a:cs typeface="Arial"/>
+              </a:rPr>
+              <a:t>melhora estimada</a:t>
+            </a:r>
+          </a:p>
+          <a:p xmlns:a="http://schemas.openxmlformats.org/drawingml/2006/main">
+            <a:pPr algn="l">
+              <a:buNone/>
+              <a:defRPr sz="1950" b="0">
+                <a:solidFill>
+                  <a:srgbClr val="53606D"/>
+                </a:solidFill>
+                <a:latin typeface="Arial"/>
+                <a:ea typeface="Arial"/>
+                <a:cs typeface="Arial"/>
+              </a:defRPr>
+            </a:pPr>
+            <a:r>
+              <a:rPr sz="1950" b="0">
+                <a:solidFill>
+                  <a:srgbClr val="53606D"/>
+                </a:solidFill>
+                <a:latin typeface="Arial"/>
+                <a:ea typeface="Arial"/>
+                <a:cs typeface="Arial"/>
+              </a:rPr>
+              <a:t>contra a melhor baseline</a:t>
+            </a:r>
+          </a:p>
+        </p:txBody>
+      </p:sp>
+      <p:sp>
+        <p:nvSpPr>
+          <p:cNvPr id="9" name="goal-conclusion">
+            <a:extLst xmlns:a="http://schemas.openxmlformats.org/drawingml/2006/main">
+              <a:ext uri="{FF2B5EF4-FFF2-40B4-BE49-F238E27FC236}">
+                <a16:creationId xmlns:a16="http://schemas.microsoft.com/office/drawing/2014/main" id="{63A48D6E-2B42-472B-AE0F-71529D203CEB}"/>
+              </a:ext>
+            </a:extLst>
+          </p:cNvPr>
+          <p:cNvSpPr>
+            <a:spLocks xmlns:a="http://schemas.openxmlformats.org/drawingml/2006/main" noGrp="1"/>
+          </p:cNvSpPr>
+          <p:nvPr/>
+        </p:nvSpPr>
+        <p:spPr>
+          <a:xfrm xmlns:a="http://schemas.openxmlformats.org/drawingml/2006/main">
+            <a:off x="685800" y="10334625"/>
+            <a:ext cx="8915400" cy="590550"/>
+          </a:xfrm>
+          <a:prstGeom xmlns:a="http://schemas.openxmlformats.org/drawingml/2006/main" prst="rect">
+            <a:avLst/>
+          </a:prstGeom>
+          <a:noFill xmlns:a="http://schemas.openxmlformats.org/drawingml/2006/main"/>
+          <a:ln xmlns:a="http://schemas.openxmlformats.org/drawingml/2006/main" w="0">
+            <a:noFill/>
+            <a:prstDash val="solid"/>
+          </a:ln>
+        </p:spPr>
+        <p:txBody>
+          <a:bodyPr xmlns:a="http://schemas.openxmlformats.org/drawingml/2006/main" anchor="t">
+            <a:normAutofit fontScale="100000"/>
+          </a:bodyPr>
+          <a:lstStyle xmlns:a="http://schemas.openxmlformats.org/drawingml/2006/main"/>
+          <a:p xmlns:a="http://schemas.openxmlformats.org/drawingml/2006/main">
+            <a:pPr algn="l">
+              <a:buNone/>
+              <a:defRPr sz="2700" b="1">
+                <a:solidFill>
+                  <a:srgbClr val="07111C"/>
+                </a:solidFill>
+                <a:latin typeface="Arial"/>
+                <a:ea typeface="Arial"/>
+                <a:cs typeface="Arial"/>
+              </a:defRPr>
+            </a:pPr>
+            <a:r>
+              <a:rPr sz="2700" b="1">
+                <a:solidFill>
+                  <a:srgbClr val="07111C"/>
+                </a:solidFill>
+                <a:latin typeface="Arial"/>
+                <a:ea typeface="Arial"/>
+                <a:cs typeface="Arial"/>
+              </a:rPr>
+              <a:t>Transparência também é resultado.</a:t>
+            </a:r>
+          </a:p>
+        </p:txBody>
+      </p:sp>
       <p:cxnSp>
         <p:nvCxnSpPr>
-          <p:cNvPr id="33" name="architecture-connector-0"/>
-          <p:cNvCxnSpPr/>
-          <p:nvPr/>
-        </p:nvCxnSpPr>
-        <p:spPr>
-          <a:xfrm xmlns:a="http://schemas.openxmlformats.org/drawingml/2006/main">
-            <a:off x="1676400" y="5067300"/>
-            <a:ext cx="0" cy="438150"/>
-          </a:xfrm>
-          <a:prstGeom xmlns:a="http://schemas.openxmlformats.org/drawingml/2006/main" prst="straightConnector1">
-            <a:avLst/>
-          </a:prstGeom>
-          <a:ln xmlns:a="http://schemas.openxmlformats.org/drawingml/2006/main" w="38100">
-            <a:solidFill>
-              <a:srgbClr val="BCC4CC"/>
-            </a:solidFill>
-            <a:prstDash val="solid"/>
-          </a:ln>
-        </p:spPr>
-      </p:cxnSp>
-      <p:cxnSp>
-        <p:nvCxnSpPr>
-          <p:cNvPr id="34" name="architecture-connector-1"/>
-          <p:cNvCxnSpPr/>
-          <p:nvPr/>
-        </p:nvCxnSpPr>
-        <p:spPr>
-          <a:xfrm xmlns:a="http://schemas.openxmlformats.org/drawingml/2006/main">
-            <a:off x="1676400" y="7029450"/>
-            <a:ext cx="0" cy="438150"/>
-          </a:xfrm>
-          <a:prstGeom xmlns:a="http://schemas.openxmlformats.org/drawingml/2006/main" prst="straightConnector1">
-            <a:avLst/>
-          </a:prstGeom>
-          <a:ln xmlns:a="http://schemas.openxmlformats.org/drawingml/2006/main" w="38100">
-            <a:solidFill>
-              <a:srgbClr val="BCC4CC"/>
-            </a:solidFill>
-            <a:prstDash val="solid"/>
-          </a:ln>
-        </p:spPr>
-      </p:cxnSp>
-      <p:cxnSp>
-        <p:nvCxnSpPr>
-          <p:cNvPr id="35" name="architecture-connector-2"/>
-          <p:cNvCxnSpPr/>
-          <p:nvPr/>
-        </p:nvCxnSpPr>
-        <p:spPr>
-          <a:xfrm xmlns:a="http://schemas.openxmlformats.org/drawingml/2006/main">
-            <a:off x="1676400" y="8991600"/>
-            <a:ext cx="0" cy="438150"/>
-          </a:xfrm>
-          <a:prstGeom xmlns:a="http://schemas.openxmlformats.org/drawingml/2006/main" prst="straightConnector1">
-            <a:avLst/>
-          </a:prstGeom>
-          <a:ln xmlns:a="http://schemas.openxmlformats.org/drawingml/2006/main" w="38100">
-            <a:solidFill>
-              <a:srgbClr val="BCC4CC"/>
-            </a:solidFill>
-            <a:prstDash val="solid"/>
-          </a:ln>
-        </p:spPr>
-      </p:cxnSp>
-      <p:sp>
-        <p:nvSpPr>
-          <p:cNvPr id="9" name="architecture-node-0">
-            <a:extLst xmlns:a="http://schemas.openxmlformats.org/drawingml/2006/main">
-              <a:ext uri="{FF2B5EF4-FFF2-40B4-BE49-F238E27FC236}">
-                <a16:creationId xmlns:a16="http://schemas.microsoft.com/office/drawing/2014/main" id="{809E894A-E895-4BE4-99BA-04106EDB1FC1}"/>
-              </a:ext>
-            </a:extLst>
-          </p:cNvPr>
-          <p:cNvSpPr>
-            <a:spLocks xmlns:a="http://schemas.openxmlformats.org/drawingml/2006/main" noGrp="1"/>
-          </p:cNvSpPr>
-          <p:nvPr/>
-        </p:nvSpPr>
-        <p:spPr>
-          <a:xfrm xmlns:a="http://schemas.openxmlformats.org/drawingml/2006/main">
-            <a:off x="685800" y="3543300"/>
-            <a:ext cx="8915400" cy="1524000"/>
-          </a:xfrm>
-          <a:prstGeom xmlns:a="http://schemas.openxmlformats.org/drawingml/2006/main" prst="roundRect">
-            <a:avLst>
-              <a:gd name="adj" fmla="val 7500"/>
-            </a:avLst>
-          </a:prstGeom>
-          <a:solidFill xmlns:a="http://schemas.openxmlformats.org/drawingml/2006/main">
-            <a:srgbClr val="EEF1F4"/>
-          </a:solidFill>
-          <a:ln xmlns:a="http://schemas.openxmlformats.org/drawingml/2006/main" w="0">
-            <a:noFill/>
-            <a:prstDash val="solid"/>
-          </a:ln>
-        </p:spPr>
-      </p:sp>
-      <p:sp>
-        <p:nvSpPr>
-          <p:cNvPr id="10" name="architecture-label-0">
-            <a:extLst xmlns:a="http://schemas.openxmlformats.org/drawingml/2006/main">
-              <a:ext uri="{FF2B5EF4-FFF2-40B4-BE49-F238E27FC236}">
-                <a16:creationId xmlns:a16="http://schemas.microsoft.com/office/drawing/2014/main" id="{E9A456B3-EDAF-496A-842F-132499E93466}"/>
-              </a:ext>
-            </a:extLst>
-          </p:cNvPr>
-          <p:cNvSpPr>
-            <a:spLocks xmlns:a="http://schemas.openxmlformats.org/drawingml/2006/main" noGrp="1"/>
-          </p:cNvSpPr>
-          <p:nvPr/>
-        </p:nvSpPr>
-        <p:spPr>
-          <a:xfrm xmlns:a="http://schemas.openxmlformats.org/drawingml/2006/main">
-            <a:off x="971550" y="3829050"/>
-            <a:ext cx="2190750" cy="342900"/>
-          </a:xfrm>
-          <a:prstGeom xmlns:a="http://schemas.openxmlformats.org/drawingml/2006/main" prst="rect">
-            <a:avLst/>
-          </a:prstGeom>
-          <a:noFill xmlns:a="http://schemas.openxmlformats.org/drawingml/2006/main"/>
-          <a:ln xmlns:a="http://schemas.openxmlformats.org/drawingml/2006/main" w="0">
-            <a:noFill/>
-            <a:prstDash val="solid"/>
-          </a:ln>
-        </p:spPr>
-        <p:txBody>
-          <a:bodyPr xmlns:a="http://schemas.openxmlformats.org/drawingml/2006/main" anchor="t">
-            <a:normAutofit fontScale="100000"/>
-          </a:bodyPr>
-          <a:lstStyle xmlns:a="http://schemas.openxmlformats.org/drawingml/2006/main"/>
-          <a:p xmlns:a="http://schemas.openxmlformats.org/drawingml/2006/main">
-            <a:pPr algn="l">
-              <a:defRPr sz="1350" b="1">
-                <a:solidFill>
-                  <a:srgbClr val="3D8DFF"/>
-                </a:solidFill>
-                <a:latin typeface="Arial"/>
-                <a:ea typeface="Arial"/>
-                <a:cs typeface="Arial"/>
-              </a:defRPr>
-            </a:pPr>
-            <a:r>
-              <a:rPr sz="1350" b="1">
-                <a:solidFill>
-                  <a:srgbClr val="3D8DFF"/>
-                </a:solidFill>
-                <a:latin typeface="Arial"/>
-                <a:ea typeface="Arial"/>
-                <a:cs typeface="Arial"/>
-              </a:rPr>
-              <a:t>01 · FONTE</a:t>
-            </a:r>
-          </a:p>
-        </p:txBody>
-      </p:sp>
-      <p:sp>
-        <p:nvSpPr>
-          <p:cNvPr id="11" name="architecture-title-0">
-            <a:extLst xmlns:a="http://schemas.openxmlformats.org/drawingml/2006/main">
-              <a:ext uri="{FF2B5EF4-FFF2-40B4-BE49-F238E27FC236}">
-                <a16:creationId xmlns:a16="http://schemas.microsoft.com/office/drawing/2014/main" id="{AE7C1909-0EF2-4C52-9241-72E69DE9210C}"/>
-              </a:ext>
-            </a:extLst>
-          </p:cNvPr>
-          <p:cNvSpPr>
-            <a:spLocks xmlns:a="http://schemas.openxmlformats.org/drawingml/2006/main" noGrp="1"/>
-          </p:cNvSpPr>
-          <p:nvPr/>
-        </p:nvSpPr>
-        <p:spPr>
-          <a:xfrm xmlns:a="http://schemas.openxmlformats.org/drawingml/2006/main">
-            <a:off x="971550" y="4229100"/>
-            <a:ext cx="3810000" cy="457200"/>
-          </a:xfrm>
-          <a:prstGeom xmlns:a="http://schemas.openxmlformats.org/drawingml/2006/main" prst="rect">
-            <a:avLst/>
-          </a:prstGeom>
-          <a:noFill xmlns:a="http://schemas.openxmlformats.org/drawingml/2006/main"/>
-          <a:ln xmlns:a="http://schemas.openxmlformats.org/drawingml/2006/main" w="0">
-            <a:noFill/>
-            <a:prstDash val="solid"/>
-          </a:ln>
-        </p:spPr>
-        <p:txBody>
-          <a:bodyPr xmlns:a="http://schemas.openxmlformats.org/drawingml/2006/main" anchor="t">
-            <a:normAutofit fontScale="92879"/>
-          </a:bodyPr>
-          <a:lstStyle xmlns:a="http://schemas.openxmlformats.org/drawingml/2006/main"/>
-          <a:p xmlns:a="http://schemas.openxmlformats.org/drawingml/2006/main">
-            <a:pPr algn="l">
-              <a:defRPr sz="2325" b="1">
-                <a:solidFill>
-                  <a:srgbClr val="07111C"/>
-                </a:solidFill>
-                <a:latin typeface="Arial"/>
-                <a:ea typeface="Arial"/>
-                <a:cs typeface="Arial"/>
-              </a:defRPr>
-            </a:pPr>
-            <a:r>
-              <a:rPr sz="2325" b="1">
-                <a:solidFill>
-                  <a:srgbClr val="07111C"/>
-                </a:solidFill>
-                <a:latin typeface="Arial"/>
-                <a:ea typeface="Arial"/>
-                <a:cs typeface="Arial"/>
-              </a:rPr>
-              <a:t>YAML versionado + gerador</a:t>
-            </a:r>
-          </a:p>
-        </p:txBody>
-      </p:sp>
-      <p:sp>
-        <p:nvSpPr>
-          <p:cNvPr id="12" name="architecture-body-0">
-            <a:extLst xmlns:a="http://schemas.openxmlformats.org/drawingml/2006/main">
-              <a:ext uri="{FF2B5EF4-FFF2-40B4-BE49-F238E27FC236}">
-                <a16:creationId xmlns:a16="http://schemas.microsoft.com/office/drawing/2014/main" id="{2443E20E-D37D-4C08-9820-E0CDAA86B7BD}"/>
-              </a:ext>
-            </a:extLst>
-          </p:cNvPr>
-          <p:cNvSpPr>
-            <a:spLocks xmlns:a="http://schemas.openxmlformats.org/drawingml/2006/main" noGrp="1"/>
-          </p:cNvSpPr>
-          <p:nvPr/>
-        </p:nvSpPr>
-        <p:spPr>
-          <a:xfrm xmlns:a="http://schemas.openxmlformats.org/drawingml/2006/main">
-            <a:off x="5219700" y="4248150"/>
-            <a:ext cx="3790950" cy="514350"/>
-          </a:xfrm>
-          <a:prstGeom xmlns:a="http://schemas.openxmlformats.org/drawingml/2006/main" prst="rect">
-            <a:avLst/>
-          </a:prstGeom>
-          <a:noFill xmlns:a="http://schemas.openxmlformats.org/drawingml/2006/main"/>
-          <a:ln xmlns:a="http://schemas.openxmlformats.org/drawingml/2006/main" w="0">
-            <a:noFill/>
-            <a:prstDash val="solid"/>
-          </a:ln>
-        </p:spPr>
-        <p:txBody>
-          <a:bodyPr xmlns:a="http://schemas.openxmlformats.org/drawingml/2006/main" anchor="t">
-            <a:normAutofit fontScale="93329"/>
-          </a:bodyPr>
-          <a:lstStyle xmlns:a="http://schemas.openxmlformats.org/drawingml/2006/main"/>
-          <a:p xmlns:a="http://schemas.openxmlformats.org/drawingml/2006/main">
-            <a:pPr algn="r">
-              <a:defRPr sz="1650" b="0">
-                <a:solidFill>
-                  <a:srgbClr val="53606D"/>
-                </a:solidFill>
-                <a:latin typeface="Arial"/>
-                <a:ea typeface="Arial"/>
-                <a:cs typeface="Arial"/>
-              </a:defRPr>
-            </a:pPr>
-            <a:r>
-              <a:rPr sz="1650" b="0">
-                <a:solidFill>
-                  <a:srgbClr val="53606D"/>
-                </a:solidFill>
-                <a:latin typeface="Arial"/>
-                <a:ea typeface="Arial"/>
-                <a:cs typeface="Arial"/>
-              </a:rPr>
-              <a:t>Parquet particionado, manifests e hashes</a:t>
-            </a:r>
-          </a:p>
-        </p:txBody>
-      </p:sp>
-      <p:sp>
-        <p:nvSpPr>
-          <p:cNvPr id="13" name="architecture-node-1">
-            <a:extLst xmlns:a="http://schemas.openxmlformats.org/drawingml/2006/main">
-              <a:ext uri="{FF2B5EF4-FFF2-40B4-BE49-F238E27FC236}">
-                <a16:creationId xmlns:a16="http://schemas.microsoft.com/office/drawing/2014/main" id="{FBA93CBE-036B-42B7-806D-397F0C341C91}"/>
-              </a:ext>
-            </a:extLst>
-          </p:cNvPr>
-          <p:cNvSpPr>
-            <a:spLocks xmlns:a="http://schemas.openxmlformats.org/drawingml/2006/main" noGrp="1"/>
-          </p:cNvSpPr>
-          <p:nvPr/>
-        </p:nvSpPr>
-        <p:spPr>
-          <a:xfrm xmlns:a="http://schemas.openxmlformats.org/drawingml/2006/main">
-            <a:off x="685800" y="5505450"/>
-            <a:ext cx="8915400" cy="1524000"/>
-          </a:xfrm>
-          <a:prstGeom xmlns:a="http://schemas.openxmlformats.org/drawingml/2006/main" prst="roundRect">
-            <a:avLst>
-              <a:gd name="adj" fmla="val 7500"/>
-            </a:avLst>
-          </a:prstGeom>
-          <a:solidFill xmlns:a="http://schemas.openxmlformats.org/drawingml/2006/main">
-            <a:srgbClr val="EEF1F4"/>
-          </a:solidFill>
-          <a:ln xmlns:a="http://schemas.openxmlformats.org/drawingml/2006/main" w="0">
-            <a:noFill/>
-            <a:prstDash val="solid"/>
-          </a:ln>
-        </p:spPr>
-      </p:sp>
-      <p:sp>
-        <p:nvSpPr>
-          <p:cNvPr id="14" name="architecture-label-1">
-            <a:extLst xmlns:a="http://schemas.openxmlformats.org/drawingml/2006/main">
-              <a:ext uri="{FF2B5EF4-FFF2-40B4-BE49-F238E27FC236}">
-                <a16:creationId xmlns:a16="http://schemas.microsoft.com/office/drawing/2014/main" id="{191F405A-4BBF-474E-939F-BE7C4E1C476E}"/>
-              </a:ext>
-            </a:extLst>
-          </p:cNvPr>
-          <p:cNvSpPr>
-            <a:spLocks xmlns:a="http://schemas.openxmlformats.org/drawingml/2006/main" noGrp="1"/>
-          </p:cNvSpPr>
-          <p:nvPr/>
-        </p:nvSpPr>
-        <p:spPr>
-          <a:xfrm xmlns:a="http://schemas.openxmlformats.org/drawingml/2006/main">
-            <a:off x="971550" y="5791200"/>
-            <a:ext cx="2190750" cy="342900"/>
-          </a:xfrm>
-          <a:prstGeom xmlns:a="http://schemas.openxmlformats.org/drawingml/2006/main" prst="rect">
-            <a:avLst/>
-          </a:prstGeom>
-          <a:noFill xmlns:a="http://schemas.openxmlformats.org/drawingml/2006/main"/>
-          <a:ln xmlns:a="http://schemas.openxmlformats.org/drawingml/2006/main" w="0">
-            <a:noFill/>
-            <a:prstDash val="solid"/>
-          </a:ln>
-        </p:spPr>
-        <p:txBody>
-          <a:bodyPr xmlns:a="http://schemas.openxmlformats.org/drawingml/2006/main" anchor="t">
-            <a:normAutofit fontScale="100000"/>
-          </a:bodyPr>
-          <a:lstStyle xmlns:a="http://schemas.openxmlformats.org/drawingml/2006/main"/>
-          <a:p xmlns:a="http://schemas.openxmlformats.org/drawingml/2006/main">
-            <a:pPr algn="l">
-              <a:defRPr sz="1350" b="1">
-                <a:solidFill>
-                  <a:srgbClr val="3D8DFF"/>
-                </a:solidFill>
-                <a:latin typeface="Arial"/>
-                <a:ea typeface="Arial"/>
-                <a:cs typeface="Arial"/>
-              </a:defRPr>
-            </a:pPr>
-            <a:r>
-              <a:rPr sz="1350" b="1">
-                <a:solidFill>
-                  <a:srgbClr val="3D8DFF"/>
-                </a:solidFill>
-                <a:latin typeface="Arial"/>
-                <a:ea typeface="Arial"/>
-                <a:cs typeface="Arial"/>
-              </a:rPr>
-              <a:t>02 · DADOS</a:t>
-            </a:r>
-          </a:p>
-        </p:txBody>
-      </p:sp>
-      <p:sp>
-        <p:nvSpPr>
-          <p:cNvPr id="15" name="architecture-title-1">
-            <a:extLst xmlns:a="http://schemas.openxmlformats.org/drawingml/2006/main">
-              <a:ext uri="{FF2B5EF4-FFF2-40B4-BE49-F238E27FC236}">
-                <a16:creationId xmlns:a16="http://schemas.microsoft.com/office/drawing/2014/main" id="{3137CB2C-176E-4F6C-A774-495799E620B4}"/>
-              </a:ext>
-            </a:extLst>
-          </p:cNvPr>
-          <p:cNvSpPr>
-            <a:spLocks xmlns:a="http://schemas.openxmlformats.org/drawingml/2006/main" noGrp="1"/>
-          </p:cNvSpPr>
-          <p:nvPr/>
-        </p:nvSpPr>
-        <p:spPr>
-          <a:xfrm xmlns:a="http://schemas.openxmlformats.org/drawingml/2006/main">
-            <a:off x="971550" y="6191250"/>
-            <a:ext cx="3810000" cy="457200"/>
-          </a:xfrm>
-          <a:prstGeom xmlns:a="http://schemas.openxmlformats.org/drawingml/2006/main" prst="rect">
-            <a:avLst/>
-          </a:prstGeom>
-          <a:noFill xmlns:a="http://schemas.openxmlformats.org/drawingml/2006/main"/>
-          <a:ln xmlns:a="http://schemas.openxmlformats.org/drawingml/2006/main" w="0">
-            <a:noFill/>
-            <a:prstDash val="solid"/>
-          </a:ln>
-        </p:spPr>
-        <p:txBody>
-          <a:bodyPr xmlns:a="http://schemas.openxmlformats.org/drawingml/2006/main" anchor="t">
-            <a:normAutofit fontScale="100000"/>
-          </a:bodyPr>
-          <a:lstStyle xmlns:a="http://schemas.openxmlformats.org/drawingml/2006/main"/>
-          <a:p xmlns:a="http://schemas.openxmlformats.org/drawingml/2006/main">
-            <a:pPr algn="l">
-              <a:defRPr sz="2325" b="1">
-                <a:solidFill>
-                  <a:srgbClr val="07111C"/>
-                </a:solidFill>
-                <a:latin typeface="Arial"/>
-                <a:ea typeface="Arial"/>
-                <a:cs typeface="Arial"/>
-              </a:defRPr>
-            </a:pPr>
-            <a:r>
-              <a:rPr sz="2325" b="1">
-                <a:solidFill>
-                  <a:srgbClr val="07111C"/>
-                </a:solidFill>
-                <a:latin typeface="Arial"/>
-                <a:ea typeface="Arial"/>
-                <a:cs typeface="Arial"/>
-              </a:rPr>
-              <a:t>DuckDB + marts</a:t>
-            </a:r>
-          </a:p>
-        </p:txBody>
-      </p:sp>
-      <p:sp>
-        <p:nvSpPr>
-          <p:cNvPr id="16" name="architecture-body-1">
-            <a:extLst xmlns:a="http://schemas.openxmlformats.org/drawingml/2006/main">
-              <a:ext uri="{FF2B5EF4-FFF2-40B4-BE49-F238E27FC236}">
-                <a16:creationId xmlns:a16="http://schemas.microsoft.com/office/drawing/2014/main" id="{1CA2F84E-D437-49B1-A04A-851099413D6A}"/>
-              </a:ext>
-            </a:extLst>
-          </p:cNvPr>
-          <p:cNvSpPr>
-            <a:spLocks xmlns:a="http://schemas.openxmlformats.org/drawingml/2006/main" noGrp="1"/>
-          </p:cNvSpPr>
-          <p:nvPr/>
-        </p:nvSpPr>
-        <p:spPr>
-          <a:xfrm xmlns:a="http://schemas.openxmlformats.org/drawingml/2006/main">
-            <a:off x="5219700" y="6210300"/>
-            <a:ext cx="3790950" cy="514350"/>
-          </a:xfrm>
-          <a:prstGeom xmlns:a="http://schemas.openxmlformats.org/drawingml/2006/main" prst="rect">
-            <a:avLst/>
-          </a:prstGeom>
-          <a:noFill xmlns:a="http://schemas.openxmlformats.org/drawingml/2006/main"/>
-          <a:ln xmlns:a="http://schemas.openxmlformats.org/drawingml/2006/main" w="0">
-            <a:noFill/>
-            <a:prstDash val="solid"/>
-          </a:ln>
-        </p:spPr>
-        <p:txBody>
-          <a:bodyPr xmlns:a="http://schemas.openxmlformats.org/drawingml/2006/main" anchor="t">
-            <a:normAutofit fontScale="100000"/>
-          </a:bodyPr>
-          <a:lstStyle xmlns:a="http://schemas.openxmlformats.org/drawingml/2006/main"/>
-          <a:p xmlns:a="http://schemas.openxmlformats.org/drawingml/2006/main">
-            <a:pPr algn="r">
-              <a:defRPr sz="1650" b="0">
-                <a:solidFill>
-                  <a:srgbClr val="53606D"/>
-                </a:solidFill>
-                <a:latin typeface="Arial"/>
-                <a:ea typeface="Arial"/>
-                <a:cs typeface="Arial"/>
-              </a:defRPr>
-            </a:pPr>
-            <a:r>
-              <a:rPr sz="1650" b="0">
-                <a:solidFill>
-                  <a:srgbClr val="53606D"/>
-                </a:solidFill>
-                <a:latin typeface="Arial"/>
-                <a:ea typeface="Arial"/>
-                <a:cs typeface="Arial"/>
-              </a:rPr>
-              <a:t>KPIs reconciliados e esquema estrela</a:t>
-            </a:r>
-          </a:p>
-        </p:txBody>
-      </p:sp>
-      <p:sp>
-        <p:nvSpPr>
-          <p:cNvPr id="17" name="architecture-node-2">
-            <a:extLst xmlns:a="http://schemas.openxmlformats.org/drawingml/2006/main">
-              <a:ext uri="{FF2B5EF4-FFF2-40B4-BE49-F238E27FC236}">
-                <a16:creationId xmlns:a16="http://schemas.microsoft.com/office/drawing/2014/main" id="{499F244B-526A-458B-BA0F-A69DADFAD396}"/>
-              </a:ext>
-            </a:extLst>
-          </p:cNvPr>
-          <p:cNvSpPr>
-            <a:spLocks xmlns:a="http://schemas.openxmlformats.org/drawingml/2006/main" noGrp="1"/>
-          </p:cNvSpPr>
-          <p:nvPr/>
-        </p:nvSpPr>
-        <p:spPr>
-          <a:xfrm xmlns:a="http://schemas.openxmlformats.org/drawingml/2006/main">
-            <a:off x="685800" y="7467600"/>
-            <a:ext cx="8915400" cy="1524000"/>
-          </a:xfrm>
-          <a:prstGeom xmlns:a="http://schemas.openxmlformats.org/drawingml/2006/main" prst="roundRect">
-            <a:avLst>
-              <a:gd name="adj" fmla="val 7500"/>
-            </a:avLst>
-          </a:prstGeom>
-          <a:solidFill xmlns:a="http://schemas.openxmlformats.org/drawingml/2006/main">
-            <a:srgbClr val="EEF1F4"/>
-          </a:solidFill>
-          <a:ln xmlns:a="http://schemas.openxmlformats.org/drawingml/2006/main" w="0">
-            <a:noFill/>
-            <a:prstDash val="solid"/>
-          </a:ln>
-        </p:spPr>
-      </p:sp>
-      <p:sp>
-        <p:nvSpPr>
-          <p:cNvPr id="18" name="architecture-label-2">
-            <a:extLst xmlns:a="http://schemas.openxmlformats.org/drawingml/2006/main">
-              <a:ext uri="{FF2B5EF4-FFF2-40B4-BE49-F238E27FC236}">
-                <a16:creationId xmlns:a16="http://schemas.microsoft.com/office/drawing/2014/main" id="{338B6713-54E4-48C3-B08D-94D4ACABA9A4}"/>
-              </a:ext>
-            </a:extLst>
-          </p:cNvPr>
-          <p:cNvSpPr>
-            <a:spLocks xmlns:a="http://schemas.openxmlformats.org/drawingml/2006/main" noGrp="1"/>
-          </p:cNvSpPr>
-          <p:nvPr/>
-        </p:nvSpPr>
-        <p:spPr>
-          <a:xfrm xmlns:a="http://schemas.openxmlformats.org/drawingml/2006/main">
-            <a:off x="971550" y="7753350"/>
-            <a:ext cx="2190750" cy="342900"/>
-          </a:xfrm>
-          <a:prstGeom xmlns:a="http://schemas.openxmlformats.org/drawingml/2006/main" prst="rect">
-            <a:avLst/>
-          </a:prstGeom>
-          <a:noFill xmlns:a="http://schemas.openxmlformats.org/drawingml/2006/main"/>
-          <a:ln xmlns:a="http://schemas.openxmlformats.org/drawingml/2006/main" w="0">
-            <a:noFill/>
-            <a:prstDash val="solid"/>
-          </a:ln>
-        </p:spPr>
-        <p:txBody>
-          <a:bodyPr xmlns:a="http://schemas.openxmlformats.org/drawingml/2006/main" anchor="t">
-            <a:normAutofit fontScale="100000"/>
-          </a:bodyPr>
-          <a:lstStyle xmlns:a="http://schemas.openxmlformats.org/drawingml/2006/main"/>
-          <a:p xmlns:a="http://schemas.openxmlformats.org/drawingml/2006/main">
-            <a:pPr algn="l">
-              <a:defRPr sz="1350" b="1">
-                <a:solidFill>
-                  <a:srgbClr val="3D8DFF"/>
-                </a:solidFill>
-                <a:latin typeface="Arial"/>
-                <a:ea typeface="Arial"/>
-                <a:cs typeface="Arial"/>
-              </a:defRPr>
-            </a:pPr>
-            <a:r>
-              <a:rPr sz="1350" b="1">
-                <a:solidFill>
-                  <a:srgbClr val="3D8DFF"/>
-                </a:solidFill>
-                <a:latin typeface="Arial"/>
-                <a:ea typeface="Arial"/>
-                <a:cs typeface="Arial"/>
-              </a:rPr>
-              <a:t>03 · INTELIGÊNCIA</a:t>
-            </a:r>
-          </a:p>
-        </p:txBody>
-      </p:sp>
-      <p:sp>
-        <p:nvSpPr>
-          <p:cNvPr id="19" name="architecture-title-2">
-            <a:extLst xmlns:a="http://schemas.openxmlformats.org/drawingml/2006/main">
-              <a:ext uri="{FF2B5EF4-FFF2-40B4-BE49-F238E27FC236}">
-                <a16:creationId xmlns:a16="http://schemas.microsoft.com/office/drawing/2014/main" id="{15507171-AF5E-4A48-B891-1E3C5C774568}"/>
-              </a:ext>
-            </a:extLst>
-          </p:cNvPr>
-          <p:cNvSpPr>
-            <a:spLocks xmlns:a="http://schemas.openxmlformats.org/drawingml/2006/main" noGrp="1"/>
-          </p:cNvSpPr>
-          <p:nvPr/>
-        </p:nvSpPr>
-        <p:spPr>
-          <a:xfrm xmlns:a="http://schemas.openxmlformats.org/drawingml/2006/main">
-            <a:off x="971550" y="8153400"/>
-            <a:ext cx="3810000" cy="457200"/>
-          </a:xfrm>
-          <a:prstGeom xmlns:a="http://schemas.openxmlformats.org/drawingml/2006/main" prst="rect">
-            <a:avLst/>
-          </a:prstGeom>
-          <a:noFill xmlns:a="http://schemas.openxmlformats.org/drawingml/2006/main"/>
-          <a:ln xmlns:a="http://schemas.openxmlformats.org/drawingml/2006/main" w="0">
-            <a:noFill/>
-            <a:prstDash val="solid"/>
-          </a:ln>
-        </p:spPr>
-        <p:txBody>
-          <a:bodyPr xmlns:a="http://schemas.openxmlformats.org/drawingml/2006/main" anchor="t">
-            <a:normAutofit fontScale="100000"/>
-          </a:bodyPr>
-          <a:lstStyle xmlns:a="http://schemas.openxmlformats.org/drawingml/2006/main"/>
-          <a:p xmlns:a="http://schemas.openxmlformats.org/drawingml/2006/main">
-            <a:pPr algn="l">
-              <a:defRPr sz="2325" b="1">
-                <a:solidFill>
-                  <a:srgbClr val="07111C"/>
-                </a:solidFill>
-                <a:latin typeface="Arial"/>
-                <a:ea typeface="Arial"/>
-                <a:cs typeface="Arial"/>
-              </a:defRPr>
-            </a:pPr>
-            <a:r>
-              <a:rPr sz="2325" b="1">
-                <a:solidFill>
-                  <a:srgbClr val="07111C"/>
-                </a:solidFill>
-                <a:latin typeface="Arial"/>
-                <a:ea typeface="Arial"/>
-                <a:cs typeface="Arial"/>
-              </a:rPr>
-              <a:t>Snapshots + ML temporal</a:t>
-            </a:r>
-          </a:p>
-        </p:txBody>
-      </p:sp>
-      <p:sp>
-        <p:nvSpPr>
-          <p:cNvPr id="20" name="architecture-body-2">
-            <a:extLst xmlns:a="http://schemas.openxmlformats.org/drawingml/2006/main">
-              <a:ext uri="{FF2B5EF4-FFF2-40B4-BE49-F238E27FC236}">
-                <a16:creationId xmlns:a16="http://schemas.microsoft.com/office/drawing/2014/main" id="{8522248E-326F-4065-A609-497C1EA71F8C}"/>
-              </a:ext>
-            </a:extLst>
-          </p:cNvPr>
-          <p:cNvSpPr>
-            <a:spLocks xmlns:a="http://schemas.openxmlformats.org/drawingml/2006/main" noGrp="1"/>
-          </p:cNvSpPr>
-          <p:nvPr/>
-        </p:nvSpPr>
-        <p:spPr>
-          <a:xfrm xmlns:a="http://schemas.openxmlformats.org/drawingml/2006/main">
-            <a:off x="5219700" y="8172450"/>
-            <a:ext cx="3790950" cy="514350"/>
-          </a:xfrm>
-          <a:prstGeom xmlns:a="http://schemas.openxmlformats.org/drawingml/2006/main" prst="rect">
-            <a:avLst/>
-          </a:prstGeom>
-          <a:noFill xmlns:a="http://schemas.openxmlformats.org/drawingml/2006/main"/>
-          <a:ln xmlns:a="http://schemas.openxmlformats.org/drawingml/2006/main" w="0">
-            <a:noFill/>
-            <a:prstDash val="solid"/>
-          </a:ln>
-        </p:spPr>
-        <p:txBody>
-          <a:bodyPr xmlns:a="http://schemas.openxmlformats.org/drawingml/2006/main" anchor="t">
-            <a:normAutofit fontScale="100000"/>
-          </a:bodyPr>
-          <a:lstStyle xmlns:a="http://schemas.openxmlformats.org/drawingml/2006/main"/>
-          <a:p xmlns:a="http://schemas.openxmlformats.org/drawingml/2006/main">
-            <a:pPr algn="r">
-              <a:defRPr sz="1650" b="0">
-                <a:solidFill>
-                  <a:srgbClr val="53606D"/>
-                </a:solidFill>
-                <a:latin typeface="Arial"/>
-                <a:ea typeface="Arial"/>
-                <a:cs typeface="Arial"/>
-              </a:defRPr>
-            </a:pPr>
-            <a:r>
-              <a:rPr sz="1650" b="0">
-                <a:solidFill>
-                  <a:srgbClr val="53606D"/>
-                </a:solidFill>
-                <a:latin typeface="Arial"/>
-                <a:ea typeface="Arial"/>
-                <a:cs typeface="Arial"/>
-              </a:rPr>
-              <a:t>Calibração, P10/P50/P90 e TreeSHAP</a:t>
-            </a:r>
-          </a:p>
-        </p:txBody>
-      </p:sp>
-      <p:sp>
-        <p:nvSpPr>
-          <p:cNvPr id="21" name="architecture-node-3">
-            <a:extLst xmlns:a="http://schemas.openxmlformats.org/drawingml/2006/main">
-              <a:ext uri="{FF2B5EF4-FFF2-40B4-BE49-F238E27FC236}">
-                <a16:creationId xmlns:a16="http://schemas.microsoft.com/office/drawing/2014/main" id="{30C0A199-4DE7-4AC1-862B-9E8942886C4D}"/>
-              </a:ext>
-            </a:extLst>
-          </p:cNvPr>
-          <p:cNvSpPr>
-            <a:spLocks xmlns:a="http://schemas.openxmlformats.org/drawingml/2006/main" noGrp="1"/>
-          </p:cNvSpPr>
-          <p:nvPr/>
-        </p:nvSpPr>
-        <p:spPr>
-          <a:xfrm xmlns:a="http://schemas.openxmlformats.org/drawingml/2006/main">
-            <a:off x="685800" y="9429750"/>
-            <a:ext cx="8915400" cy="1524000"/>
-          </a:xfrm>
-          <a:prstGeom xmlns:a="http://schemas.openxmlformats.org/drawingml/2006/main" prst="roundRect">
-            <a:avLst>
-              <a:gd name="adj" fmla="val 7500"/>
-            </a:avLst>
-          </a:prstGeom>
-          <a:solidFill xmlns:a="http://schemas.openxmlformats.org/drawingml/2006/main">
-            <a:srgbClr val="DDF3FC"/>
-          </a:solidFill>
-          <a:ln xmlns:a="http://schemas.openxmlformats.org/drawingml/2006/main" w="0">
-            <a:noFill/>
-            <a:prstDash val="solid"/>
-          </a:ln>
-        </p:spPr>
-      </p:sp>
-      <p:sp>
-        <p:nvSpPr>
-          <p:cNvPr id="22" name="architecture-label-3">
-            <a:extLst xmlns:a="http://schemas.openxmlformats.org/drawingml/2006/main">
-              <a:ext uri="{FF2B5EF4-FFF2-40B4-BE49-F238E27FC236}">
-                <a16:creationId xmlns:a16="http://schemas.microsoft.com/office/drawing/2014/main" id="{8390117C-492F-4BBF-B516-9654EF400C56}"/>
-              </a:ext>
-            </a:extLst>
-          </p:cNvPr>
-          <p:cNvSpPr>
-            <a:spLocks xmlns:a="http://schemas.openxmlformats.org/drawingml/2006/main" noGrp="1"/>
-          </p:cNvSpPr>
-          <p:nvPr/>
-        </p:nvSpPr>
-        <p:spPr>
-          <a:xfrm xmlns:a="http://schemas.openxmlformats.org/drawingml/2006/main">
-            <a:off x="971550" y="9715500"/>
-            <a:ext cx="2190750" cy="342900"/>
-          </a:xfrm>
-          <a:prstGeom xmlns:a="http://schemas.openxmlformats.org/drawingml/2006/main" prst="rect">
-            <a:avLst/>
-          </a:prstGeom>
-          <a:noFill xmlns:a="http://schemas.openxmlformats.org/drawingml/2006/main"/>
-          <a:ln xmlns:a="http://schemas.openxmlformats.org/drawingml/2006/main" w="0">
-            <a:noFill/>
-            <a:prstDash val="solid"/>
-          </a:ln>
-        </p:spPr>
-        <p:txBody>
-          <a:bodyPr xmlns:a="http://schemas.openxmlformats.org/drawingml/2006/main" anchor="t">
-            <a:normAutofit fontScale="100000"/>
-          </a:bodyPr>
-          <a:lstStyle xmlns:a="http://schemas.openxmlformats.org/drawingml/2006/main"/>
-          <a:p xmlns:a="http://schemas.openxmlformats.org/drawingml/2006/main">
-            <a:pPr algn="l">
-              <a:defRPr sz="1350" b="1">
-                <a:solidFill>
-                  <a:srgbClr val="3D8DFF"/>
-                </a:solidFill>
-                <a:latin typeface="Arial"/>
-                <a:ea typeface="Arial"/>
-                <a:cs typeface="Arial"/>
-              </a:defRPr>
-            </a:pPr>
-            <a:r>
-              <a:rPr sz="1350" b="1">
-                <a:solidFill>
-                  <a:srgbClr val="3D8DFF"/>
-                </a:solidFill>
-                <a:latin typeface="Arial"/>
-                <a:ea typeface="Arial"/>
-                <a:cs typeface="Arial"/>
-              </a:rPr>
-              <a:t>04 · DECISÃO</a:t>
-            </a:r>
-          </a:p>
-        </p:txBody>
-      </p:sp>
-      <p:sp>
-        <p:nvSpPr>
-          <p:cNvPr id="23" name="architecture-title-3">
-            <a:extLst xmlns:a="http://schemas.openxmlformats.org/drawingml/2006/main">
-              <a:ext uri="{FF2B5EF4-FFF2-40B4-BE49-F238E27FC236}">
-                <a16:creationId xmlns:a16="http://schemas.microsoft.com/office/drawing/2014/main" id="{1EB2DEA6-769B-4633-BDDD-A8C81E63629B}"/>
-              </a:ext>
-            </a:extLst>
-          </p:cNvPr>
-          <p:cNvSpPr>
-            <a:spLocks xmlns:a="http://schemas.openxmlformats.org/drawingml/2006/main" noGrp="1"/>
-          </p:cNvSpPr>
-          <p:nvPr/>
-        </p:nvSpPr>
-        <p:spPr>
-          <a:xfrm xmlns:a="http://schemas.openxmlformats.org/drawingml/2006/main">
-            <a:off x="971550" y="10115550"/>
-            <a:ext cx="3810000" cy="457200"/>
-          </a:xfrm>
-          <a:prstGeom xmlns:a="http://schemas.openxmlformats.org/drawingml/2006/main" prst="rect">
-            <a:avLst/>
-          </a:prstGeom>
-          <a:noFill xmlns:a="http://schemas.openxmlformats.org/drawingml/2006/main"/>
-          <a:ln xmlns:a="http://schemas.openxmlformats.org/drawingml/2006/main" w="0">
-            <a:noFill/>
-            <a:prstDash val="solid"/>
-          </a:ln>
-        </p:spPr>
-        <p:txBody>
-          <a:bodyPr xmlns:a="http://schemas.openxmlformats.org/drawingml/2006/main" anchor="t">
-            <a:normAutofit fontScale="76950"/>
-          </a:bodyPr>
-          <a:lstStyle xmlns:a="http://schemas.openxmlformats.org/drawingml/2006/main"/>
-          <a:p xmlns:a="http://schemas.openxmlformats.org/drawingml/2006/main">
-            <a:pPr algn="l">
-              <a:defRPr sz="2325" b="1">
-                <a:solidFill>
-                  <a:srgbClr val="07111C"/>
-                </a:solidFill>
-                <a:latin typeface="Arial"/>
-                <a:ea typeface="Arial"/>
-                <a:cs typeface="Arial"/>
-              </a:defRPr>
-            </a:pPr>
-            <a:r>
-              <a:rPr sz="2325" b="1">
-                <a:solidFill>
-                  <a:srgbClr val="07111C"/>
-                </a:solidFill>
-                <a:latin typeface="Arial"/>
-                <a:ea typeface="Arial"/>
-                <a:cs typeface="Arial"/>
-              </a:rPr>
-              <a:t>OOD + NSGA-II + revisão humana</a:t>
-            </a:r>
-          </a:p>
-        </p:txBody>
-      </p:sp>
-      <p:sp>
-        <p:nvSpPr>
-          <p:cNvPr id="24" name="architecture-body-3">
-            <a:extLst xmlns:a="http://schemas.openxmlformats.org/drawingml/2006/main">
-              <a:ext uri="{FF2B5EF4-FFF2-40B4-BE49-F238E27FC236}">
-                <a16:creationId xmlns:a16="http://schemas.microsoft.com/office/drawing/2014/main" id="{B7FC4A07-4684-448B-AAC5-85ACD6D078B1}"/>
-              </a:ext>
-            </a:extLst>
-          </p:cNvPr>
-          <p:cNvSpPr>
-            <a:spLocks xmlns:a="http://schemas.openxmlformats.org/drawingml/2006/main" noGrp="1"/>
-          </p:cNvSpPr>
-          <p:nvPr/>
-        </p:nvSpPr>
-        <p:spPr>
-          <a:xfrm xmlns:a="http://schemas.openxmlformats.org/drawingml/2006/main">
-            <a:off x="5219700" y="10134600"/>
-            <a:ext cx="3790950" cy="514350"/>
-          </a:xfrm>
-          <a:prstGeom xmlns:a="http://schemas.openxmlformats.org/drawingml/2006/main" prst="rect">
-            <a:avLst/>
-          </a:prstGeom>
-          <a:noFill xmlns:a="http://schemas.openxmlformats.org/drawingml/2006/main"/>
-          <a:ln xmlns:a="http://schemas.openxmlformats.org/drawingml/2006/main" w="0">
-            <a:noFill/>
-            <a:prstDash val="solid"/>
-          </a:ln>
-        </p:spPr>
-        <p:txBody>
-          <a:bodyPr xmlns:a="http://schemas.openxmlformats.org/drawingml/2006/main" anchor="t">
-            <a:normAutofit fontScale="84091"/>
-          </a:bodyPr>
-          <a:lstStyle xmlns:a="http://schemas.openxmlformats.org/drawingml/2006/main"/>
-          <a:p xmlns:a="http://schemas.openxmlformats.org/drawingml/2006/main">
-            <a:pPr algn="r">
-              <a:defRPr sz="1650" b="0">
-                <a:solidFill>
-                  <a:srgbClr val="53606D"/>
-                </a:solidFill>
-                <a:latin typeface="Arial"/>
-                <a:ea typeface="Arial"/>
-                <a:cs typeface="Arial"/>
-              </a:defRPr>
-            </a:pPr>
-            <a:r>
-              <a:rPr sz="1650" b="0">
-                <a:solidFill>
-                  <a:srgbClr val="53606D"/>
-                </a:solidFill>
-                <a:latin typeface="Arial"/>
-                <a:ea typeface="Arial"/>
-                <a:cs typeface="Arial"/>
-              </a:rPr>
-              <a:t>Cenários restritos; nenhum comando de máquina</a:t>
-            </a:r>
-          </a:p>
-        </p:txBody>
-      </p:sp>
-      <p:cxnSp>
-        <p:nvCxnSpPr>
-          <p:cNvPr id="52" name="footer-rule-4"/>
+          <p:cNvPr id="44" name="footer-rule-5"/>
           <p:cNvCxnSpPr/>
           <p:nvPr/>
         </p:nvCxnSpPr>
@@ -6431,10 +5444,10 @@
       </p:cxnSp>
       <p:sp>
         <p:nvSpPr>
-          <p:cNvPr id="26" name="footer-4">
-            <a:extLst xmlns:a="http://schemas.openxmlformats.org/drawingml/2006/main">
-              <a:ext uri="{FF2B5EF4-FFF2-40B4-BE49-F238E27FC236}">
-                <a16:creationId xmlns:a16="http://schemas.microsoft.com/office/drawing/2014/main" id="{652DA731-9400-4D43-8639-1FBE93804821}"/>
+          <p:cNvPr id="11" name="footer-5">
+            <a:extLst xmlns:a="http://schemas.openxmlformats.org/drawingml/2006/main">
+              <a:ext uri="{FF2B5EF4-FFF2-40B4-BE49-F238E27FC236}">
+                <a16:creationId xmlns:a16="http://schemas.microsoft.com/office/drawing/2014/main" id="{B4AB63AA-4EA4-4769-8BB7-32CBDC9464AE}"/>
               </a:ext>
             </a:extLst>
           </p:cNvPr>
@@ -6464,6 +5477,7 @@
           <a:lstStyle xmlns:a="http://schemas.openxmlformats.org/drawingml/2006/main"/>
           <a:p xmlns:a="http://schemas.openxmlformats.org/drawingml/2006/main">
             <a:pPr algn="l">
+              <a:buNone/>
               <a:defRPr sz="1200" b="0">
                 <a:solidFill>
                   <a:srgbClr val="53606D"/>
@@ -6482,17 +5496,17 @@
                 <a:ea typeface="Arial"/>
                 <a:cs typeface="Arial"/>
               </a:rPr>
-              <a:t>100% sintético · sem controle de máquina</a:t>
-            </a:r>
-          </a:p>
-        </p:txBody>
-      </p:sp>
-      <p:sp>
-        <p:nvSpPr>
-          <p:cNvPr id="27" name="footer-page-4">
-            <a:extLst xmlns:a="http://schemas.openxmlformats.org/drawingml/2006/main">
-              <a:ext uri="{FF2B5EF4-FFF2-40B4-BE49-F238E27FC236}">
-                <a16:creationId xmlns:a16="http://schemas.microsoft.com/office/drawing/2014/main" id="{32E3F5F1-82AB-417B-825F-5C1321C85743}"/>
+              <a:t>Backtest sintético · meta de 5% não atingida</a:t>
+            </a:r>
+          </a:p>
+        </p:txBody>
+      </p:sp>
+      <p:sp>
+        <p:nvSpPr>
+          <p:cNvPr id="12" name="footer-page-5">
+            <a:extLst xmlns:a="http://schemas.openxmlformats.org/drawingml/2006/main">
+              <a:ext uri="{FF2B5EF4-FFF2-40B4-BE49-F238E27FC236}">
+                <a16:creationId xmlns:a16="http://schemas.microsoft.com/office/drawing/2014/main" id="{50B3E65A-5C17-4548-A2FB-B36D309DB059}"/>
               </a:ext>
             </a:extLst>
           </p:cNvPr>
@@ -6522,6 +5536,7 @@
           <a:lstStyle xmlns:a="http://schemas.openxmlformats.org/drawingml/2006/main"/>
           <a:p xmlns:a="http://schemas.openxmlformats.org/drawingml/2006/main">
             <a:pPr algn="r">
+              <a:buNone/>
               <a:defRPr sz="1200" b="0">
                 <a:solidFill>
                   <a:srgbClr val="53606D"/>
@@ -6540,7 +5555,7 @@
                 <a:ea typeface="Arial"/>
                 <a:cs typeface="Arial"/>
               </a:rPr>
-              <a:t>4/10</a:t>
+              <a:t>4/9</a:t>
             </a:r>
           </a:p>
         </p:txBody>
@@ -6548,7 +5563,7 @@
     </p:spTree>
     <p:extLst>
       <p:ext uri="{BB962C8B-B14F-4D97-AF65-F5344CB8AC3E}">
-        <p14:creationId xmlns:p14="http://schemas.microsoft.com/office/powerpoint/2010/main" val="1425504938"/>
+        <p14:creationId xmlns:p14="http://schemas.microsoft.com/office/powerpoint/2010/main" val="1293692852"/>
       </p:ext>
     </p:extLst>
   </p:cSld>
@@ -6576,10 +5591,10 @@
       </p:grpSpPr>
       <p:sp>
         <p:nvSpPr>
-          <p:cNvPr id="13" name="kicker-5">
-            <a:extLst xmlns:a="http://schemas.openxmlformats.org/drawingml/2006/main">
-              <a:ext uri="{FF2B5EF4-FFF2-40B4-BE49-F238E27FC236}">
-                <a16:creationId xmlns:a16="http://schemas.microsoft.com/office/drawing/2014/main" id="{16479E2D-EC67-46B6-B504-0D78D4DD3C91}"/>
+          <p:cNvPr id="17" name="kicker-6">
+            <a:extLst xmlns:a="http://schemas.openxmlformats.org/drawingml/2006/main">
+              <a:ext uri="{FF2B5EF4-FFF2-40B4-BE49-F238E27FC236}">
+                <a16:creationId xmlns:a16="http://schemas.microsoft.com/office/drawing/2014/main" id="{659F945D-A006-43A3-AB1A-75F5D7E456D3}"/>
               </a:ext>
             </a:extLst>
           </p:cNvPr>
@@ -6609,6 +5624,7 @@
           <a:lstStyle xmlns:a="http://schemas.openxmlformats.org/drawingml/2006/main"/>
           <a:p xmlns:a="http://schemas.openxmlformats.org/drawingml/2006/main">
             <a:pPr algn="l">
+              <a:buNone/>
               <a:defRPr sz="1350" b="1">
                 <a:solidFill>
                   <a:srgbClr val="3D8DFF"/>
@@ -6627,17 +5643,17 @@
                 <a:ea typeface="Arial"/>
                 <a:cs typeface="Arial"/>
               </a:rPr>
-              <a:t>AVALIAÇÃO</a:t>
-            </a:r>
-          </a:p>
-        </p:txBody>
-      </p:sp>
-      <p:sp>
-        <p:nvSpPr>
-          <p:cNvPr id="2" name="page-5">
-            <a:extLst xmlns:a="http://schemas.openxmlformats.org/drawingml/2006/main">
-              <a:ext uri="{FF2B5EF4-FFF2-40B4-BE49-F238E27FC236}">
-                <a16:creationId xmlns:a16="http://schemas.microsoft.com/office/drawing/2014/main" id="{C8DA4592-4AA8-4286-AA86-79A57C187911}"/>
+              <a:t>A RESPOSTA</a:t>
+            </a:r>
+          </a:p>
+        </p:txBody>
+      </p:sp>
+      <p:sp>
+        <p:nvSpPr>
+          <p:cNvPr id="2" name="page-6">
+            <a:extLst xmlns:a="http://schemas.openxmlformats.org/drawingml/2006/main">
+              <a:ext uri="{FF2B5EF4-FFF2-40B4-BE49-F238E27FC236}">
+                <a16:creationId xmlns:a16="http://schemas.microsoft.com/office/drawing/2014/main" id="{0B509CEE-2A28-444C-B744-1F7E6C3F7E4E}"/>
               </a:ext>
             </a:extLst>
           </p:cNvPr>
@@ -6667,6 +5683,7 @@
           <a:lstStyle xmlns:a="http://schemas.openxmlformats.org/drawingml/2006/main"/>
           <a:p xmlns:a="http://schemas.openxmlformats.org/drawingml/2006/main">
             <a:pPr algn="r">
+              <a:buNone/>
               <a:defRPr sz="1350" b="1">
                 <a:solidFill>
                   <a:srgbClr val="53606D"/>
@@ -6692,10 +5709,10 @@
       </p:sp>
       <p:sp>
         <p:nvSpPr>
-          <p:cNvPr id="3" name="title-5">
-            <a:extLst xmlns:a="http://schemas.openxmlformats.org/drawingml/2006/main">
-              <a:ext uri="{FF2B5EF4-FFF2-40B4-BE49-F238E27FC236}">
-                <a16:creationId xmlns:a16="http://schemas.microsoft.com/office/drawing/2014/main" id="{C7A5FB37-2FB3-42B3-89E9-BD03B03BA79B}"/>
+          <p:cNvPr id="3" name="title-6">
+            <a:extLst xmlns:a="http://schemas.openxmlformats.org/drawingml/2006/main">
+              <a:ext uri="{FF2B5EF4-FFF2-40B4-BE49-F238E27FC236}">
+                <a16:creationId xmlns:a16="http://schemas.microsoft.com/office/drawing/2014/main" id="{5492D9AD-FB96-4C42-8E81-83EF7CDA4A63}"/>
               </a:ext>
             </a:extLst>
           </p:cNvPr>
@@ -6725,6 +5742,7 @@
           <a:lstStyle xmlns:a="http://schemas.openxmlformats.org/drawingml/2006/main"/>
           <a:p xmlns:a="http://schemas.openxmlformats.org/drawingml/2006/main">
             <a:pPr algn="l">
+              <a:buNone/>
               <a:defRPr sz="3750" b="1">
                 <a:solidFill>
                   <a:srgbClr val="07111C"/>
@@ -6743,17 +5761,17 @@
                 <a:ea typeface="Arial"/>
                 <a:cs typeface="Arial"/>
               </a:rPr>
-              <a:t>A meta não foi atingida</a:t>
-            </a:r>
-          </a:p>
-        </p:txBody>
-      </p:sp>
-      <p:sp>
-        <p:nvSpPr>
-          <p:cNvPr id="4" name="subtitle-5">
-            <a:extLst xmlns:a="http://schemas.openxmlformats.org/drawingml/2006/main">
-              <a:ext uri="{FF2B5EF4-FFF2-40B4-BE49-F238E27FC236}">
-                <a16:creationId xmlns:a16="http://schemas.microsoft.com/office/drawing/2014/main" id="{00368B43-48A8-49D7-8FD2-0BB474F66167}"/>
+              <a:t>Cada previsão vem com contexto</a:t>
+            </a:r>
+          </a:p>
+        </p:txBody>
+      </p:sp>
+      <p:sp>
+        <p:nvSpPr>
+          <p:cNvPr id="4" name="subtitle-6">
+            <a:extLst xmlns:a="http://schemas.openxmlformats.org/drawingml/2006/main">
+              <a:ext uri="{FF2B5EF4-FFF2-40B4-BE49-F238E27FC236}">
+                <a16:creationId xmlns:a16="http://schemas.microsoft.com/office/drawing/2014/main" id="{B93B64D3-FB90-4719-855E-5414F94AACA1}"/>
               </a:ext>
             </a:extLst>
           </p:cNvPr>
@@ -6783,6 +5801,7 @@
           <a:lstStyle xmlns:a="http://schemas.openxmlformats.org/drawingml/2006/main"/>
           <a:p xmlns:a="http://schemas.openxmlformats.org/drawingml/2006/main">
             <a:pPr algn="l">
+              <a:buNone/>
               <a:defRPr sz="1875" b="0">
                 <a:solidFill>
                   <a:srgbClr val="53606D"/>
@@ -6801,14 +5820,14 @@
                 <a:ea typeface="Arial"/>
                 <a:cs typeface="Arial"/>
               </a:rPr>
-              <a:t>O teste cronológico final ficou congelado — e o resultado desfavorável permaneceu visível.</a:t>
+              <a:t>O sistema mostra valor esperado, faixa e confiança.</a:t>
             </a:r>
           </a:p>
         </p:txBody>
       </p:sp>
       <p:cxnSp>
         <p:nvCxnSpPr>
-          <p:cNvPr id="17" name="header-rule-5"/>
+          <p:cNvPr id="51" name="header-rule-6"/>
           <p:cNvCxnSpPr/>
           <p:nvPr/>
         </p:nvCxnSpPr>
@@ -6828,40 +5847,57 @@
           </a:ln>
         </p:spPr>
       </p:cxnSp>
-      <p:graphicFrame>
-        <p:nvGraphicFramePr>
-          <p:cNvPr id="18" name="Chart"/>
-          <p:cNvGraphicFramePr/>
-          <p:nvPr/>
-        </p:nvGraphicFramePr>
-        <p:xfrm>
-          <a:off xmlns:a="http://schemas.openxmlformats.org/drawingml/2006/main" x="1143000" y="3619500"/>
-          <a:ext xmlns:a="http://schemas.openxmlformats.org/drawingml/2006/main" cx="8001000" cy="5048250"/>
-        </p:xfrm>
-        <a:graphic xmlns:a="http://schemas.openxmlformats.org/drawingml/2006/main">
-          <a:graphicData uri="http://schemas.openxmlformats.org/drawingml/2006/chart">
-            <c:chart xmlns:r="http://schemas.openxmlformats.org/officeDocument/2006/relationships" xmlns:c="http://schemas.openxmlformats.org/drawingml/2006/chart" r:id="R6c6dac7b8e4b4cfa"/>
-          </a:graphicData>
-        </a:graphic>
-      </p:graphicFrame>
-      <p:sp>
-        <p:nvSpPr>
-          <p:cNvPr id="7" name="goal-result">
-            <a:extLst xmlns:a="http://schemas.openxmlformats.org/drawingml/2006/main">
-              <a:ext uri="{FF2B5EF4-FFF2-40B4-BE49-F238E27FC236}">
-                <a16:creationId xmlns:a16="http://schemas.microsoft.com/office/drawing/2014/main" id="{7E45A790-C2D5-431E-A514-608F9BF7AE07}"/>
-              </a:ext>
-            </a:extLst>
-          </p:cNvPr>
-          <p:cNvSpPr>
-            <a:spLocks xmlns:a="http://schemas.openxmlformats.org/drawingml/2006/main" noGrp="1"/>
-          </p:cNvSpPr>
-          <p:nvPr/>
-        </p:nvSpPr>
-        <p:spPr>
-          <a:xfrm xmlns:a="http://schemas.openxmlformats.org/drawingml/2006/main">
-            <a:off x="685800" y="8763000"/>
-            <a:ext cx="2857500" cy="857250"/>
+      <p:sp>
+        <p:nvSpPr>
+          <p:cNvPr id="6" name="coverage-panel">
+            <a:extLst xmlns:a="http://schemas.openxmlformats.org/drawingml/2006/main">
+              <a:ext uri="{FF2B5EF4-FFF2-40B4-BE49-F238E27FC236}">
+                <a16:creationId xmlns:a16="http://schemas.microsoft.com/office/drawing/2014/main" id="{EC299AF2-E080-435B-A00E-BD55179F766D}"/>
+              </a:ext>
+            </a:extLst>
+          </p:cNvPr>
+          <p:cNvSpPr>
+            <a:spLocks xmlns:a="http://schemas.openxmlformats.org/drawingml/2006/main" noGrp="1"/>
+          </p:cNvSpPr>
+          <p:nvPr/>
+        </p:nvSpPr>
+        <p:spPr>
+          <a:xfrm xmlns:a="http://schemas.openxmlformats.org/drawingml/2006/main">
+            <a:off x="685800" y="3543300"/>
+            <a:ext cx="4229100" cy="1809750"/>
+          </a:xfrm>
+          <a:prstGeom xmlns:a="http://schemas.openxmlformats.org/drawingml/2006/main" prst="roundRect">
+            <a:avLst>
+              <a:gd name="adj" fmla="val 6316"/>
+            </a:avLst>
+          </a:prstGeom>
+          <a:solidFill xmlns:a="http://schemas.openxmlformats.org/drawingml/2006/main">
+            <a:srgbClr val="DDF3FC"/>
+          </a:solidFill>
+          <a:ln xmlns:a="http://schemas.openxmlformats.org/drawingml/2006/main" w="0">
+            <a:noFill/>
+            <a:prstDash val="solid"/>
+          </a:ln>
+        </p:spPr>
+      </p:sp>
+      <p:sp>
+        <p:nvSpPr>
+          <p:cNvPr id="7" name="coverage-value">
+            <a:extLst xmlns:a="http://schemas.openxmlformats.org/drawingml/2006/main">
+              <a:ext uri="{FF2B5EF4-FFF2-40B4-BE49-F238E27FC236}">
+                <a16:creationId xmlns:a16="http://schemas.microsoft.com/office/drawing/2014/main" id="{D6CF3F07-787A-47F9-9146-0C2605BF5B61}"/>
+              </a:ext>
+            </a:extLst>
+          </p:cNvPr>
+          <p:cNvSpPr>
+            <a:spLocks xmlns:a="http://schemas.openxmlformats.org/drawingml/2006/main" noGrp="1"/>
+          </p:cNvSpPr>
+          <p:nvPr/>
+        </p:nvSpPr>
+        <p:spPr>
+          <a:xfrm xmlns:a="http://schemas.openxmlformats.org/drawingml/2006/main">
+            <a:off x="971550" y="3943350"/>
+            <a:ext cx="3695700" cy="666750"/>
           </a:xfrm>
           <a:prstGeom xmlns:a="http://schemas.openxmlformats.org/drawingml/2006/main" prst="rect">
             <a:avLst/>
@@ -6879,7 +5915,8 @@
           <a:lstStyle xmlns:a="http://schemas.openxmlformats.org/drawingml/2006/main"/>
           <a:p xmlns:a="http://schemas.openxmlformats.org/drawingml/2006/main">
             <a:pPr algn="l">
-              <a:defRPr sz="4200" b="1">
+              <a:buNone/>
+              <a:defRPr sz="3150" b="1">
                 <a:solidFill>
                   <a:srgbClr val="3D8DFF"/>
                 </a:solidFill>
@@ -6889,7 +5926,7 @@
               </a:defRPr>
             </a:pPr>
             <a:r>
-              <a:rPr sz="4200" b="1">
+              <a:rPr sz="3150" b="1">
                 <a:solidFill>
                   <a:srgbClr val="3D8DFF"/>
                 </a:solidFill>
@@ -6897,29 +5934,145 @@
                 <a:ea typeface="Arial"/>
                 <a:cs typeface="Arial"/>
               </a:rPr>
-              <a:t>0,98%</a:t>
-            </a:r>
-          </a:p>
-        </p:txBody>
-      </p:sp>
-      <p:sp>
-        <p:nvSpPr>
-          <p:cNvPr id="8" name="goal-result-label">
-            <a:extLst xmlns:a="http://schemas.openxmlformats.org/drawingml/2006/main">
-              <a:ext uri="{FF2B5EF4-FFF2-40B4-BE49-F238E27FC236}">
-                <a16:creationId xmlns:a16="http://schemas.microsoft.com/office/drawing/2014/main" id="{D84CA675-496A-4FEE-8117-7B716C782C9B}"/>
-              </a:ext>
-            </a:extLst>
-          </p:cNvPr>
-          <p:cNvSpPr>
-            <a:spLocks xmlns:a="http://schemas.openxmlformats.org/drawingml/2006/main" noGrp="1"/>
-          </p:cNvSpPr>
-          <p:nvPr/>
-        </p:nvSpPr>
-        <p:spPr>
-          <a:xfrm xmlns:a="http://schemas.openxmlformats.org/drawingml/2006/main">
-            <a:off x="3733800" y="8858250"/>
-            <a:ext cx="4000500" cy="857250"/>
+              <a:t>77–82%</a:t>
+            </a:r>
+          </a:p>
+        </p:txBody>
+      </p:sp>
+      <p:sp>
+        <p:nvSpPr>
+          <p:cNvPr id="8" name="coverage-label">
+            <a:extLst xmlns:a="http://schemas.openxmlformats.org/drawingml/2006/main">
+              <a:ext uri="{FF2B5EF4-FFF2-40B4-BE49-F238E27FC236}">
+                <a16:creationId xmlns:a16="http://schemas.microsoft.com/office/drawing/2014/main" id="{C58CB391-84C5-4855-8331-BB1F00EEE94A}"/>
+              </a:ext>
+            </a:extLst>
+          </p:cNvPr>
+          <p:cNvSpPr>
+            <a:spLocks xmlns:a="http://schemas.openxmlformats.org/drawingml/2006/main" noGrp="1"/>
+          </p:cNvSpPr>
+          <p:nvPr/>
+        </p:nvSpPr>
+        <p:spPr>
+          <a:xfrm xmlns:a="http://schemas.openxmlformats.org/drawingml/2006/main">
+            <a:off x="971550" y="4686300"/>
+            <a:ext cx="3695700" cy="571500"/>
+          </a:xfrm>
+          <a:prstGeom xmlns:a="http://schemas.openxmlformats.org/drawingml/2006/main" prst="rect">
+            <a:avLst/>
+          </a:prstGeom>
+          <a:noFill xmlns:a="http://schemas.openxmlformats.org/drawingml/2006/main"/>
+          <a:ln xmlns:a="http://schemas.openxmlformats.org/drawingml/2006/main" w="0">
+            <a:noFill/>
+            <a:prstDash val="solid"/>
+          </a:ln>
+        </p:spPr>
+        <p:txBody>
+          <a:bodyPr xmlns:a="http://schemas.openxmlformats.org/drawingml/2006/main" anchor="t">
+            <a:normAutofit fontScale="95454"/>
+          </a:bodyPr>
+          <a:lstStyle xmlns:a="http://schemas.openxmlformats.org/drawingml/2006/main"/>
+          <a:p xmlns:a="http://schemas.openxmlformats.org/drawingml/2006/main">
+            <a:pPr algn="l">
+              <a:buNone/>
+              <a:defRPr sz="1650" b="0">
+                <a:solidFill>
+                  <a:srgbClr val="53606D"/>
+                </a:solidFill>
+                <a:latin typeface="Arial"/>
+                <a:ea typeface="Arial"/>
+                <a:cs typeface="Arial"/>
+              </a:defRPr>
+            </a:pPr>
+            <a:r>
+              <a:rPr sz="1650" b="0">
+                <a:solidFill>
+                  <a:srgbClr val="53606D"/>
+                </a:solidFill>
+                <a:latin typeface="Arial"/>
+                <a:ea typeface="Arial"/>
+                <a:cs typeface="Arial"/>
+              </a:rPr>
+              <a:t>cobertura observada</a:t>
+            </a:r>
+          </a:p>
+          <a:p xmlns:a="http://schemas.openxmlformats.org/drawingml/2006/main">
+            <a:pPr algn="l">
+              <a:buNone/>
+              <a:defRPr sz="1650" b="0">
+                <a:solidFill>
+                  <a:srgbClr val="53606D"/>
+                </a:solidFill>
+                <a:latin typeface="Arial"/>
+                <a:ea typeface="Arial"/>
+                <a:cs typeface="Arial"/>
+              </a:defRPr>
+            </a:pPr>
+            <a:r>
+              <a:rPr sz="1650" b="0">
+                <a:solidFill>
+                  <a:srgbClr val="53606D"/>
+                </a:solidFill>
+                <a:latin typeface="Arial"/>
+                <a:ea typeface="Arial"/>
+                <a:cs typeface="Arial"/>
+              </a:rPr>
+              <a:t>das faixas previstas</a:t>
+            </a:r>
+          </a:p>
+        </p:txBody>
+      </p:sp>
+      <p:sp>
+        <p:nvSpPr>
+          <p:cNvPr id="9" name="calibration-panel">
+            <a:extLst xmlns:a="http://schemas.openxmlformats.org/drawingml/2006/main">
+              <a:ext uri="{FF2B5EF4-FFF2-40B4-BE49-F238E27FC236}">
+                <a16:creationId xmlns:a16="http://schemas.microsoft.com/office/drawing/2014/main" id="{A53F84A9-C583-45A2-A10D-ED2808C11D61}"/>
+              </a:ext>
+            </a:extLst>
+          </p:cNvPr>
+          <p:cNvSpPr>
+            <a:spLocks xmlns:a="http://schemas.openxmlformats.org/drawingml/2006/main" noGrp="1"/>
+          </p:cNvSpPr>
+          <p:nvPr/>
+        </p:nvSpPr>
+        <p:spPr>
+          <a:xfrm xmlns:a="http://schemas.openxmlformats.org/drawingml/2006/main">
+            <a:off x="5372100" y="3543300"/>
+            <a:ext cx="4229100" cy="1809750"/>
+          </a:xfrm>
+          <a:prstGeom xmlns:a="http://schemas.openxmlformats.org/drawingml/2006/main" prst="roundRect">
+            <a:avLst>
+              <a:gd name="adj" fmla="val 6316"/>
+            </a:avLst>
+          </a:prstGeom>
+          <a:solidFill xmlns:a="http://schemas.openxmlformats.org/drawingml/2006/main">
+            <a:srgbClr val="EEF1F4"/>
+          </a:solidFill>
+          <a:ln xmlns:a="http://schemas.openxmlformats.org/drawingml/2006/main" w="0">
+            <a:noFill/>
+            <a:prstDash val="solid"/>
+          </a:ln>
+        </p:spPr>
+      </p:sp>
+      <p:sp>
+        <p:nvSpPr>
+          <p:cNvPr id="10" name="calibration-value">
+            <a:extLst xmlns:a="http://schemas.openxmlformats.org/drawingml/2006/main">
+              <a:ext uri="{FF2B5EF4-FFF2-40B4-BE49-F238E27FC236}">
+                <a16:creationId xmlns:a16="http://schemas.microsoft.com/office/drawing/2014/main" id="{35C904CA-1018-4383-AC1B-D5DF900EC581}"/>
+              </a:ext>
+            </a:extLst>
+          </p:cNvPr>
+          <p:cNvSpPr>
+            <a:spLocks xmlns:a="http://schemas.openxmlformats.org/drawingml/2006/main" noGrp="1"/>
+          </p:cNvSpPr>
+          <p:nvPr/>
+        </p:nvSpPr>
+        <p:spPr>
+          <a:xfrm xmlns:a="http://schemas.openxmlformats.org/drawingml/2006/main">
+            <a:off x="5657850" y="3943350"/>
+            <a:ext cx="3695700" cy="666750"/>
           </a:xfrm>
           <a:prstGeom xmlns:a="http://schemas.openxmlformats.org/drawingml/2006/main" prst="rect">
             <a:avLst/>
@@ -6937,7 +6090,67 @@
           <a:lstStyle xmlns:a="http://schemas.openxmlformats.org/drawingml/2006/main"/>
           <a:p xmlns:a="http://schemas.openxmlformats.org/drawingml/2006/main">
             <a:pPr algn="l">
-              <a:defRPr sz="1950" b="0">
+              <a:buNone/>
+              <a:defRPr sz="2700" b="1">
+                <a:solidFill>
+                  <a:srgbClr val="20CDBF"/>
+                </a:solidFill>
+                <a:latin typeface="Arial"/>
+                <a:ea typeface="Arial"/>
+                <a:cs typeface="Arial"/>
+              </a:defRPr>
+            </a:pPr>
+            <a:r>
+              <a:rPr sz="2700" b="1">
+                <a:solidFill>
+                  <a:srgbClr val="20CDBF"/>
+                </a:solidFill>
+                <a:latin typeface="Arial"/>
+                <a:ea typeface="Arial"/>
+                <a:cs typeface="Arial"/>
+              </a:rPr>
+              <a:t>4 modelos</a:t>
+            </a:r>
+          </a:p>
+        </p:txBody>
+      </p:sp>
+      <p:sp>
+        <p:nvSpPr>
+          <p:cNvPr id="11" name="calibration-label">
+            <a:extLst xmlns:a="http://schemas.openxmlformats.org/drawingml/2006/main">
+              <a:ext uri="{FF2B5EF4-FFF2-40B4-BE49-F238E27FC236}">
+                <a16:creationId xmlns:a16="http://schemas.microsoft.com/office/drawing/2014/main" id="{9808A3DB-6589-4E66-82B5-8ACE943759BF}"/>
+              </a:ext>
+            </a:extLst>
+          </p:cNvPr>
+          <p:cNvSpPr>
+            <a:spLocks xmlns:a="http://schemas.openxmlformats.org/drawingml/2006/main" noGrp="1"/>
+          </p:cNvSpPr>
+          <p:nvPr/>
+        </p:nvSpPr>
+        <p:spPr>
+          <a:xfrm xmlns:a="http://schemas.openxmlformats.org/drawingml/2006/main">
+            <a:off x="5657850" y="4686300"/>
+            <a:ext cx="3695700" cy="571500"/>
+          </a:xfrm>
+          <a:prstGeom xmlns:a="http://schemas.openxmlformats.org/drawingml/2006/main" prst="rect">
+            <a:avLst/>
+          </a:prstGeom>
+          <a:noFill xmlns:a="http://schemas.openxmlformats.org/drawingml/2006/main"/>
+          <a:ln xmlns:a="http://schemas.openxmlformats.org/drawingml/2006/main" w="0">
+            <a:noFill/>
+            <a:prstDash val="solid"/>
+          </a:ln>
+        </p:spPr>
+        <p:txBody>
+          <a:bodyPr xmlns:a="http://schemas.openxmlformats.org/drawingml/2006/main" anchor="t">
+            <a:normAutofit fontScale="95454"/>
+          </a:bodyPr>
+          <a:lstStyle xmlns:a="http://schemas.openxmlformats.org/drawingml/2006/main"/>
+          <a:p xmlns:a="http://schemas.openxmlformats.org/drawingml/2006/main">
+            <a:pPr algn="l">
+              <a:buNone/>
+              <a:defRPr sz="1650" b="0">
                 <a:solidFill>
                   <a:srgbClr val="53606D"/>
                 </a:solidFill>
@@ -6947,7 +6160,7 @@
               </a:defRPr>
             </a:pPr>
             <a:r>
-              <a:rPr sz="1950" b="0">
+              <a:rPr sz="1650" b="0">
                 <a:solidFill>
                   <a:srgbClr val="53606D"/>
                 </a:solidFill>
@@ -6955,12 +6168,13 @@
                 <a:ea typeface="Arial"/>
                 <a:cs typeface="Arial"/>
               </a:rPr>
-              <a:t>melhora estimada</a:t>
+              <a:t>de risco passaram</a:t>
             </a:r>
           </a:p>
           <a:p xmlns:a="http://schemas.openxmlformats.org/drawingml/2006/main">
             <a:pPr algn="l">
-              <a:defRPr sz="1950" b="0">
+              <a:buNone/>
+              <a:defRPr sz="1650" b="0">
                 <a:solidFill>
                   <a:srgbClr val="53606D"/>
                 </a:solidFill>
@@ -6970,7 +6184,7 @@
               </a:defRPr>
             </a:pPr>
             <a:r>
-              <a:rPr sz="1950" b="0">
+              <a:rPr sz="1650" b="0">
                 <a:solidFill>
                   <a:srgbClr val="53606D"/>
                 </a:solidFill>
@@ -6978,29 +6192,56 @@
                 <a:ea typeface="Arial"/>
                 <a:cs typeface="Arial"/>
               </a:rPr>
-              <a:t>contra a melhor baseline</a:t>
-            </a:r>
-          </a:p>
-        </p:txBody>
-      </p:sp>
-      <p:sp>
-        <p:nvSpPr>
-          <p:cNvPr id="9" name="goal-conclusion">
-            <a:extLst xmlns:a="http://schemas.openxmlformats.org/drawingml/2006/main">
-              <a:ext uri="{FF2B5EF4-FFF2-40B4-BE49-F238E27FC236}">
-                <a16:creationId xmlns:a16="http://schemas.microsoft.com/office/drawing/2014/main" id="{63A48D6E-2B42-472B-AE0F-71529D203CEB}"/>
-              </a:ext>
-            </a:extLst>
-          </p:cNvPr>
-          <p:cNvSpPr>
-            <a:spLocks xmlns:a="http://schemas.openxmlformats.org/drawingml/2006/main" noGrp="1"/>
-          </p:cNvSpPr>
-          <p:nvPr/>
-        </p:nvSpPr>
-        <p:spPr>
-          <a:xfrm xmlns:a="http://schemas.openxmlformats.org/drawingml/2006/main">
-            <a:off x="685800" y="10334625"/>
-            <a:ext cx="8915400" cy="590550"/>
+              <a:t>por calibração</a:t>
+            </a:r>
+          </a:p>
+        </p:txBody>
+      </p:sp>
+      <p:pic>
+        <p:nvPicPr>
+          <p:cNvPr id="58" name=""/>
+          <p:cNvPicPr>
+            <a:picLocks xmlns:a="http://schemas.openxmlformats.org/drawingml/2006/main" noChangeAspect="1"/>
+          </p:cNvPicPr>
+          <p:nvPr/>
+        </p:nvPicPr>
+        <p:blipFill>
+          <a:blip xmlns:r="http://schemas.openxmlformats.org/officeDocument/2006/relationships" xmlns:a="http://schemas.openxmlformats.org/drawingml/2006/main" r:embed="Rc491025bdd9249f6"/>
+          <a:srcRect xmlns:a="http://schemas.openxmlformats.org/drawingml/2006/main" l="0" t="13675" r="0" b="13675"/>
+          <a:stretch xmlns:a="http://schemas.openxmlformats.org/drawingml/2006/main">
+            <a:fillRect l="0" t="0" r="0" b="0"/>
+          </a:stretch>
+        </p:blipFill>
+        <p:spPr>
+          <a:xfrm xmlns:a="http://schemas.openxmlformats.org/drawingml/2006/main">
+            <a:off x="685800" y="5905500"/>
+            <a:ext cx="8915400" cy="4857750"/>
+          </a:xfrm>
+          <a:prstGeom xmlns:a="http://schemas.openxmlformats.org/drawingml/2006/main" prst="roundRect">
+            <a:avLst>
+              <a:gd name="adj" fmla="val 2353"/>
+            </a:avLst>
+          </a:prstGeom>
+        </p:spPr>
+      </p:pic>
+      <p:sp>
+        <p:nvSpPr>
+          <p:cNvPr id="13" name="uncertainty-caption">
+            <a:extLst xmlns:a="http://schemas.openxmlformats.org/drawingml/2006/main">
+              <a:ext uri="{FF2B5EF4-FFF2-40B4-BE49-F238E27FC236}">
+                <a16:creationId xmlns:a16="http://schemas.microsoft.com/office/drawing/2014/main" id="{27BF9B8F-FE17-46E5-A26F-BC14C8E998B6}"/>
+              </a:ext>
+            </a:extLst>
+          </p:cNvPr>
+          <p:cNvSpPr>
+            <a:spLocks xmlns:a="http://schemas.openxmlformats.org/drawingml/2006/main" noGrp="1"/>
+          </p:cNvSpPr>
+          <p:nvPr/>
+        </p:nvSpPr>
+        <p:spPr>
+          <a:xfrm xmlns:a="http://schemas.openxmlformats.org/drawingml/2006/main">
+            <a:off x="685800" y="11125200"/>
+            <a:ext cx="8915400" cy="457200"/>
           </a:xfrm>
           <a:prstGeom xmlns:a="http://schemas.openxmlformats.org/drawingml/2006/main" prst="rect">
             <a:avLst/>
@@ -7018,7 +6259,8 @@
           <a:lstStyle xmlns:a="http://schemas.openxmlformats.org/drawingml/2006/main"/>
           <a:p xmlns:a="http://schemas.openxmlformats.org/drawingml/2006/main">
             <a:pPr algn="l">
-              <a:defRPr sz="2700" b="1">
+              <a:buNone/>
+              <a:defRPr sz="2100" b="1">
                 <a:solidFill>
                   <a:srgbClr val="07111C"/>
                 </a:solidFill>
@@ -7028,7 +6270,7 @@
               </a:defRPr>
             </a:pPr>
             <a:r>
-              <a:rPr sz="2700" b="1">
+              <a:rPr sz="2100" b="1">
                 <a:solidFill>
                   <a:srgbClr val="07111C"/>
                 </a:solidFill>
@@ -7036,14 +6278,14 @@
                 <a:ea typeface="Arial"/>
                 <a:cs typeface="Arial"/>
               </a:rPr>
-              <a:t>Modelo complexo não ganha por decreto.</a:t>
+              <a:t>Não é só um número: é um número com contexto.</a:t>
             </a:r>
           </a:p>
         </p:txBody>
       </p:sp>
       <p:cxnSp>
         <p:nvCxnSpPr>
-          <p:cNvPr id="22" name="footer-rule-5"/>
+          <p:cNvPr id="60" name="footer-rule-6"/>
           <p:cNvCxnSpPr/>
           <p:nvPr/>
         </p:nvCxnSpPr>
@@ -7065,10 +6307,10 @@
       </p:cxnSp>
       <p:sp>
         <p:nvSpPr>
-          <p:cNvPr id="11" name="footer-5">
-            <a:extLst xmlns:a="http://schemas.openxmlformats.org/drawingml/2006/main">
-              <a:ext uri="{FF2B5EF4-FFF2-40B4-BE49-F238E27FC236}">
-                <a16:creationId xmlns:a16="http://schemas.microsoft.com/office/drawing/2014/main" id="{B4AB63AA-4EA4-4769-8BB7-32CBDC9464AE}"/>
+          <p:cNvPr id="15" name="footer-6">
+            <a:extLst xmlns:a="http://schemas.openxmlformats.org/drawingml/2006/main">
+              <a:ext uri="{FF2B5EF4-FFF2-40B4-BE49-F238E27FC236}">
+                <a16:creationId xmlns:a16="http://schemas.microsoft.com/office/drawing/2014/main" id="{4C805FD8-4599-4ADF-B429-241AE7810433}"/>
               </a:ext>
             </a:extLst>
           </p:cNvPr>
@@ -7098,6 +6340,7 @@
           <a:lstStyle xmlns:a="http://schemas.openxmlformats.org/drawingml/2006/main"/>
           <a:p xmlns:a="http://schemas.openxmlformats.org/drawingml/2006/main">
             <a:pPr algn="l">
+              <a:buNone/>
               <a:defRPr sz="1200" b="0">
                 <a:solidFill>
                   <a:srgbClr val="53606D"/>
@@ -7116,17 +6359,17 @@
                 <a:ea typeface="Arial"/>
                 <a:cs typeface="Arial"/>
               </a:rPr>
-              <a:t>Backtest sintético · meta de 5% não atingida</a:t>
-            </a:r>
-          </a:p>
-        </p:txBody>
-      </p:sp>
-      <p:sp>
-        <p:nvSpPr>
-          <p:cNvPr id="12" name="footer-page-5">
-            <a:extLst xmlns:a="http://schemas.openxmlformats.org/drawingml/2006/main">
-              <a:ext uri="{FF2B5EF4-FFF2-40B4-BE49-F238E27FC236}">
-                <a16:creationId xmlns:a16="http://schemas.microsoft.com/office/drawing/2014/main" id="{50B3E65A-5C17-4548-A2FB-B36D309DB059}"/>
+              <a:t>100% sintético · sem controle de máquina</a:t>
+            </a:r>
+          </a:p>
+        </p:txBody>
+      </p:sp>
+      <p:sp>
+        <p:nvSpPr>
+          <p:cNvPr id="16" name="footer-page-6">
+            <a:extLst xmlns:a="http://schemas.openxmlformats.org/drawingml/2006/main">
+              <a:ext uri="{FF2B5EF4-FFF2-40B4-BE49-F238E27FC236}">
+                <a16:creationId xmlns:a16="http://schemas.microsoft.com/office/drawing/2014/main" id="{2013CB81-4EEF-4A4F-908A-E38429DD83EC}"/>
               </a:ext>
             </a:extLst>
           </p:cNvPr>
@@ -7156,6 +6399,7 @@
           <a:lstStyle xmlns:a="http://schemas.openxmlformats.org/drawingml/2006/main"/>
           <a:p xmlns:a="http://schemas.openxmlformats.org/drawingml/2006/main">
             <a:pPr algn="r">
+              <a:buNone/>
               <a:defRPr sz="1200" b="0">
                 <a:solidFill>
                   <a:srgbClr val="53606D"/>
@@ -7174,7 +6418,7 @@
                 <a:ea typeface="Arial"/>
                 <a:cs typeface="Arial"/>
               </a:rPr>
-              <a:t>5/10</a:t>
+              <a:t>5/9</a:t>
             </a:r>
           </a:p>
         </p:txBody>
@@ -7182,7 +6426,7 @@
     </p:spTree>
     <p:extLst>
       <p:ext uri="{BB962C8B-B14F-4D97-AF65-F5344CB8AC3E}">
-        <p14:creationId xmlns:p14="http://schemas.microsoft.com/office/powerpoint/2010/main" val="1293692852"/>
+        <p14:creationId xmlns:p14="http://schemas.microsoft.com/office/powerpoint/2010/main" val="998034244"/>
       </p:ext>
     </p:extLst>
   </p:cSld>
@@ -7210,10 +6454,10 @@
       </p:grpSpPr>
       <p:sp>
         <p:nvSpPr>
-          <p:cNvPr id="17" name="kicker-6">
-            <a:extLst xmlns:a="http://schemas.openxmlformats.org/drawingml/2006/main">
-              <a:ext uri="{FF2B5EF4-FFF2-40B4-BE49-F238E27FC236}">
-                <a16:creationId xmlns:a16="http://schemas.microsoft.com/office/drawing/2014/main" id="{659F945D-A006-43A3-AB1A-75F5D7E456D3}"/>
+          <p:cNvPr id="17" name="kicker-7">
+            <a:extLst xmlns:a="http://schemas.openxmlformats.org/drawingml/2006/main">
+              <a:ext uri="{FF2B5EF4-FFF2-40B4-BE49-F238E27FC236}">
+                <a16:creationId xmlns:a16="http://schemas.microsoft.com/office/drawing/2014/main" id="{7DD2BC6F-D214-4CBA-88EC-599B1C28FA7D}"/>
               </a:ext>
             </a:extLst>
           </p:cNvPr>
@@ -7243,6 +6487,7 @@
           <a:lstStyle xmlns:a="http://schemas.openxmlformats.org/drawingml/2006/main"/>
           <a:p xmlns:a="http://schemas.openxmlformats.org/drawingml/2006/main">
             <a:pPr algn="l">
+              <a:buNone/>
               <a:defRPr sz="1350" b="1">
                 <a:solidFill>
                   <a:srgbClr val="3D8DFF"/>
@@ -7261,17 +6506,17 @@
                 <a:ea typeface="Arial"/>
                 <a:cs typeface="Arial"/>
               </a:rPr>
-              <a:t>CONFIABILIDADE</a:t>
-            </a:r>
-          </a:p>
-        </p:txBody>
-      </p:sp>
-      <p:sp>
-        <p:nvSpPr>
-          <p:cNvPr id="2" name="page-6">
-            <a:extLst xmlns:a="http://schemas.openxmlformats.org/drawingml/2006/main">
-              <a:ext uri="{FF2B5EF4-FFF2-40B4-BE49-F238E27FC236}">
-                <a16:creationId xmlns:a16="http://schemas.microsoft.com/office/drawing/2014/main" id="{0B509CEE-2A28-444C-B744-1F7E6C3F7E4E}"/>
+              <a:t>O GUARDRAIL</a:t>
+            </a:r>
+          </a:p>
+        </p:txBody>
+      </p:sp>
+      <p:sp>
+        <p:nvSpPr>
+          <p:cNvPr id="2" name="page-7">
+            <a:extLst xmlns:a="http://schemas.openxmlformats.org/drawingml/2006/main">
+              <a:ext uri="{FF2B5EF4-FFF2-40B4-BE49-F238E27FC236}">
+                <a16:creationId xmlns:a16="http://schemas.microsoft.com/office/drawing/2014/main" id="{6A092EF0-99DD-4B9B-AA19-12622A4EDBCC}"/>
               </a:ext>
             </a:extLst>
           </p:cNvPr>
@@ -7301,6 +6546,7 @@
           <a:lstStyle xmlns:a="http://schemas.openxmlformats.org/drawingml/2006/main"/>
           <a:p xmlns:a="http://schemas.openxmlformats.org/drawingml/2006/main">
             <a:pPr algn="r">
+              <a:buNone/>
               <a:defRPr sz="1350" b="1">
                 <a:solidFill>
                   <a:srgbClr val="53606D"/>
@@ -7326,10 +6572,10 @@
       </p:sp>
       <p:sp>
         <p:nvSpPr>
-          <p:cNvPr id="3" name="title-6">
-            <a:extLst xmlns:a="http://schemas.openxmlformats.org/drawingml/2006/main">
-              <a:ext uri="{FF2B5EF4-FFF2-40B4-BE49-F238E27FC236}">
-                <a16:creationId xmlns:a16="http://schemas.microsoft.com/office/drawing/2014/main" id="{5492D9AD-FB96-4C42-8E81-83EF7CDA4A63}"/>
+          <p:cNvPr id="3" name="title-7">
+            <a:extLst xmlns:a="http://schemas.openxmlformats.org/drawingml/2006/main">
+              <a:ext uri="{FF2B5EF4-FFF2-40B4-BE49-F238E27FC236}">
+                <a16:creationId xmlns:a16="http://schemas.microsoft.com/office/drawing/2014/main" id="{B63F41E9-DCD1-4F71-9BF9-B13413805947}"/>
               </a:ext>
             </a:extLst>
           </p:cNvPr>
@@ -7359,6 +6605,7 @@
           <a:lstStyle xmlns:a="http://schemas.openxmlformats.org/drawingml/2006/main"/>
           <a:p xmlns:a="http://schemas.openxmlformats.org/drawingml/2006/main">
             <a:pPr algn="l">
+              <a:buNone/>
               <a:defRPr sz="3750" b="1">
                 <a:solidFill>
                   <a:srgbClr val="07111C"/>
@@ -7377,17 +6624,17 @@
                 <a:ea typeface="Arial"/>
                 <a:cs typeface="Arial"/>
               </a:rPr>
-              <a:t>Incerteza faz parte da resposta</a:t>
-            </a:r>
-          </a:p>
-        </p:txBody>
-      </p:sp>
-      <p:sp>
-        <p:nvSpPr>
-          <p:cNvPr id="4" name="subtitle-6">
-            <a:extLst xmlns:a="http://schemas.openxmlformats.org/drawingml/2006/main">
-              <a:ext uri="{FF2B5EF4-FFF2-40B4-BE49-F238E27FC236}">
-                <a16:creationId xmlns:a16="http://schemas.microsoft.com/office/drawing/2014/main" id="{B93B64D3-FB90-4719-855E-5414F94AACA1}"/>
+              <a:t>Quando não sabe, o sistema recusa</a:t>
+            </a:r>
+          </a:p>
+        </p:txBody>
+      </p:sp>
+      <p:sp>
+        <p:nvSpPr>
+          <p:cNvPr id="4" name="subtitle-7">
+            <a:extLst xmlns:a="http://schemas.openxmlformats.org/drawingml/2006/main">
+              <a:ext uri="{FF2B5EF4-FFF2-40B4-BE49-F238E27FC236}">
+                <a16:creationId xmlns:a16="http://schemas.microsoft.com/office/drawing/2014/main" id="{301F72D8-C84C-47AE-B5A3-54F74CA295D5}"/>
               </a:ext>
             </a:extLst>
           </p:cNvPr>
@@ -7417,6 +6664,7 @@
           <a:lstStyle xmlns:a="http://schemas.openxmlformats.org/drawingml/2006/main"/>
           <a:p xmlns:a="http://schemas.openxmlformats.org/drawingml/2006/main">
             <a:pPr algn="l">
+              <a:buNone/>
               <a:defRPr sz="1875" b="0">
                 <a:solidFill>
                   <a:srgbClr val="53606D"/>
@@ -7435,14 +6683,14 @@
                 <a:ea typeface="Arial"/>
                 <a:cs typeface="Arial"/>
               </a:rPr>
-              <a:t>Previsão pontual, faixa, calibração e distância histórica aparecem juntas.</a:t>
+              <a:t>Nenhuma recomendação sai fora dos limites definidos.</a:t>
             </a:r>
           </a:p>
         </p:txBody>
       </p:sp>
       <p:cxnSp>
         <p:nvCxnSpPr>
-          <p:cNvPr id="21" name="header-rule-6"/>
+          <p:cNvPr id="51" name="header-rule-7"/>
           <p:cNvCxnSpPr/>
           <p:nvPr/>
         </p:nvCxnSpPr>
@@ -7464,55 +6712,22 @@
       </p:cxnSp>
       <p:sp>
         <p:nvSpPr>
-          <p:cNvPr id="6" name="coverage-panel">
-            <a:extLst xmlns:a="http://schemas.openxmlformats.org/drawingml/2006/main">
-              <a:ext uri="{FF2B5EF4-FFF2-40B4-BE49-F238E27FC236}">
-                <a16:creationId xmlns:a16="http://schemas.microsoft.com/office/drawing/2014/main" id="{EC299AF2-E080-435B-A00E-BD55179F766D}"/>
-              </a:ext>
-            </a:extLst>
-          </p:cNvPr>
-          <p:cNvSpPr>
-            <a:spLocks xmlns:a="http://schemas.openxmlformats.org/drawingml/2006/main" noGrp="1"/>
-          </p:cNvSpPr>
-          <p:nvPr/>
-        </p:nvSpPr>
-        <p:spPr>
-          <a:xfrm xmlns:a="http://schemas.openxmlformats.org/drawingml/2006/main">
-            <a:off x="685800" y="3543300"/>
-            <a:ext cx="4229100" cy="1809750"/>
-          </a:xfrm>
-          <a:prstGeom xmlns:a="http://schemas.openxmlformats.org/drawingml/2006/main" prst="roundRect">
-            <a:avLst>
-              <a:gd name="adj" fmla="val 6316"/>
-            </a:avLst>
-          </a:prstGeom>
-          <a:solidFill xmlns:a="http://schemas.openxmlformats.org/drawingml/2006/main">
-            <a:srgbClr val="DDF3FC"/>
-          </a:solidFill>
-          <a:ln xmlns:a="http://schemas.openxmlformats.org/drawingml/2006/main" w="0">
-            <a:noFill/>
-            <a:prstDash val="solid"/>
-          </a:ln>
-        </p:spPr>
-      </p:sp>
-      <p:sp>
-        <p:nvSpPr>
-          <p:cNvPr id="7" name="coverage-value">
-            <a:extLst xmlns:a="http://schemas.openxmlformats.org/drawingml/2006/main">
-              <a:ext uri="{FF2B5EF4-FFF2-40B4-BE49-F238E27FC236}">
-                <a16:creationId xmlns:a16="http://schemas.microsoft.com/office/drawing/2014/main" id="{D6CF3F07-787A-47F9-9146-0C2605BF5B61}"/>
-              </a:ext>
-            </a:extLst>
-          </p:cNvPr>
-          <p:cNvSpPr>
-            <a:spLocks xmlns:a="http://schemas.openxmlformats.org/drawingml/2006/main" noGrp="1"/>
-          </p:cNvSpPr>
-          <p:nvPr/>
-        </p:nvSpPr>
-        <p:spPr>
-          <a:xfrm xmlns:a="http://schemas.openxmlformats.org/drawingml/2006/main">
-            <a:off x="971550" y="3943350"/>
-            <a:ext cx="3695700" cy="666750"/>
+          <p:cNvPr id="6" name="scenario-stat-0">
+            <a:extLst xmlns:a="http://schemas.openxmlformats.org/drawingml/2006/main">
+              <a:ext uri="{FF2B5EF4-FFF2-40B4-BE49-F238E27FC236}">
+                <a16:creationId xmlns:a16="http://schemas.microsoft.com/office/drawing/2014/main" id="{3874855A-F37C-4BE5-91CD-BFB684E4AD1A}"/>
+              </a:ext>
+            </a:extLst>
+          </p:cNvPr>
+          <p:cNvSpPr>
+            <a:spLocks xmlns:a="http://schemas.openxmlformats.org/drawingml/2006/main" noGrp="1"/>
+          </p:cNvSpPr>
+          <p:nvPr/>
+        </p:nvSpPr>
+        <p:spPr>
+          <a:xfrm xmlns:a="http://schemas.openxmlformats.org/drawingml/2006/main">
+            <a:off x="685800" y="3429000"/>
+            <a:ext cx="2381250" cy="685800"/>
           </a:xfrm>
           <a:prstGeom xmlns:a="http://schemas.openxmlformats.org/drawingml/2006/main" prst="rect">
             <a:avLst/>
@@ -7530,7 +6745,8 @@
           <a:lstStyle xmlns:a="http://schemas.openxmlformats.org/drawingml/2006/main"/>
           <a:p xmlns:a="http://schemas.openxmlformats.org/drawingml/2006/main">
             <a:pPr algn="l">
-              <a:defRPr sz="3150" b="1">
+              <a:buNone/>
+              <a:defRPr sz="3300" b="1">
                 <a:solidFill>
                   <a:srgbClr val="3D8DFF"/>
                 </a:solidFill>
@@ -7540,7 +6756,7 @@
               </a:defRPr>
             </a:pPr>
             <a:r>
-              <a:rPr sz="3150" b="1">
+              <a:rPr sz="3300" b="1">
                 <a:solidFill>
                   <a:srgbClr val="3D8DFF"/>
                 </a:solidFill>
@@ -7548,47 +6764,48 @@
                 <a:ea typeface="Arial"/>
                 <a:cs typeface="Arial"/>
               </a:rPr>
-              <a:t>77,39–82,13%</a:t>
-            </a:r>
-          </a:p>
-        </p:txBody>
-      </p:sp>
-      <p:sp>
-        <p:nvSpPr>
-          <p:cNvPr id="8" name="coverage-label">
-            <a:extLst xmlns:a="http://schemas.openxmlformats.org/drawingml/2006/main">
-              <a:ext uri="{FF2B5EF4-FFF2-40B4-BE49-F238E27FC236}">
-                <a16:creationId xmlns:a16="http://schemas.microsoft.com/office/drawing/2014/main" id="{C58CB391-84C5-4855-8331-BB1F00EEE94A}"/>
-              </a:ext>
-            </a:extLst>
-          </p:cNvPr>
-          <p:cNvSpPr>
-            <a:spLocks xmlns:a="http://schemas.openxmlformats.org/drawingml/2006/main" noGrp="1"/>
-          </p:cNvSpPr>
-          <p:nvPr/>
-        </p:nvSpPr>
-        <p:spPr>
-          <a:xfrm xmlns:a="http://schemas.openxmlformats.org/drawingml/2006/main">
-            <a:off x="971550" y="4686300"/>
-            <a:ext cx="3695700" cy="571500"/>
-          </a:xfrm>
-          <a:prstGeom xmlns:a="http://schemas.openxmlformats.org/drawingml/2006/main" prst="rect">
-            <a:avLst/>
-          </a:prstGeom>
-          <a:noFill xmlns:a="http://schemas.openxmlformats.org/drawingml/2006/main"/>
-          <a:ln xmlns:a="http://schemas.openxmlformats.org/drawingml/2006/main" w="0">
-            <a:noFill/>
-            <a:prstDash val="solid"/>
-          </a:ln>
-        </p:spPr>
-        <p:txBody>
-          <a:bodyPr xmlns:a="http://schemas.openxmlformats.org/drawingml/2006/main" anchor="t">
-            <a:normAutofit fontScale="95454"/>
+              <a:t>12</a:t>
+            </a:r>
+          </a:p>
+        </p:txBody>
+      </p:sp>
+      <p:sp>
+        <p:nvSpPr>
+          <p:cNvPr id="7" name="scenario-label-0">
+            <a:extLst xmlns:a="http://schemas.openxmlformats.org/drawingml/2006/main">
+              <a:ext uri="{FF2B5EF4-FFF2-40B4-BE49-F238E27FC236}">
+                <a16:creationId xmlns:a16="http://schemas.microsoft.com/office/drawing/2014/main" id="{4B60A1AD-6086-4D18-AA3A-BF02DED97DC9}"/>
+              </a:ext>
+            </a:extLst>
+          </p:cNvPr>
+          <p:cNvSpPr>
+            <a:spLocks xmlns:a="http://schemas.openxmlformats.org/drawingml/2006/main" noGrp="1"/>
+          </p:cNvSpPr>
+          <p:nvPr/>
+        </p:nvSpPr>
+        <p:spPr>
+          <a:xfrm xmlns:a="http://schemas.openxmlformats.org/drawingml/2006/main">
+            <a:off x="685800" y="4171950"/>
+            <a:ext cx="2381250" cy="552450"/>
+          </a:xfrm>
+          <a:prstGeom xmlns:a="http://schemas.openxmlformats.org/drawingml/2006/main" prst="rect">
+            <a:avLst/>
+          </a:prstGeom>
+          <a:noFill xmlns:a="http://schemas.openxmlformats.org/drawingml/2006/main"/>
+          <a:ln xmlns:a="http://schemas.openxmlformats.org/drawingml/2006/main" w="0">
+            <a:noFill/>
+            <a:prstDash val="solid"/>
+          </a:ln>
+        </p:spPr>
+        <p:txBody>
+          <a:bodyPr xmlns:a="http://schemas.openxmlformats.org/drawingml/2006/main" anchor="t">
+            <a:normAutofit fontScale="100000"/>
           </a:bodyPr>
           <a:lstStyle xmlns:a="http://schemas.openxmlformats.org/drawingml/2006/main"/>
           <a:p xmlns:a="http://schemas.openxmlformats.org/drawingml/2006/main">
             <a:pPr algn="l">
-              <a:defRPr sz="1650" b="0">
+              <a:buNone/>
+              <a:defRPr sz="1500" b="0">
                 <a:solidFill>
                   <a:srgbClr val="53606D"/>
                 </a:solidFill>
@@ -7598,7 +6815,7 @@
               </a:defRPr>
             </a:pPr>
             <a:r>
-              <a:rPr sz="1650" b="0">
+              <a:rPr sz="1500" b="0">
                 <a:solidFill>
                   <a:srgbClr val="53606D"/>
                 </a:solidFill>
@@ -7606,12 +6823,107 @@
                 <a:ea typeface="Arial"/>
                 <a:cs typeface="Arial"/>
               </a:rPr>
-              <a:t>cobertura P10–P90</a:t>
-            </a:r>
-          </a:p>
+              <a:t>cenários aprovados</a:t>
+            </a:r>
+          </a:p>
+        </p:txBody>
+      </p:sp>
+      <p:sp>
+        <p:nvSpPr>
+          <p:cNvPr id="8" name="scenario-stat-1">
+            <a:extLst xmlns:a="http://schemas.openxmlformats.org/drawingml/2006/main">
+              <a:ext uri="{FF2B5EF4-FFF2-40B4-BE49-F238E27FC236}">
+                <a16:creationId xmlns:a16="http://schemas.microsoft.com/office/drawing/2014/main" id="{5D22E322-4953-4C2D-91E9-4402904D1F6F}"/>
+              </a:ext>
+            </a:extLst>
+          </p:cNvPr>
+          <p:cNvSpPr>
+            <a:spLocks xmlns:a="http://schemas.openxmlformats.org/drawingml/2006/main" noGrp="1"/>
+          </p:cNvSpPr>
+          <p:nvPr/>
+        </p:nvSpPr>
+        <p:spPr>
+          <a:xfrm xmlns:a="http://schemas.openxmlformats.org/drawingml/2006/main">
+            <a:off x="3752850" y="3429000"/>
+            <a:ext cx="2381250" cy="685800"/>
+          </a:xfrm>
+          <a:prstGeom xmlns:a="http://schemas.openxmlformats.org/drawingml/2006/main" prst="rect">
+            <a:avLst/>
+          </a:prstGeom>
+          <a:noFill xmlns:a="http://schemas.openxmlformats.org/drawingml/2006/main"/>
+          <a:ln xmlns:a="http://schemas.openxmlformats.org/drawingml/2006/main" w="0">
+            <a:noFill/>
+            <a:prstDash val="solid"/>
+          </a:ln>
+        </p:spPr>
+        <p:txBody>
+          <a:bodyPr xmlns:a="http://schemas.openxmlformats.org/drawingml/2006/main" anchor="t">
+            <a:normAutofit fontScale="100000"/>
+          </a:bodyPr>
+          <a:lstStyle xmlns:a="http://schemas.openxmlformats.org/drawingml/2006/main"/>
           <a:p xmlns:a="http://schemas.openxmlformats.org/drawingml/2006/main">
             <a:pPr algn="l">
-              <a:defRPr sz="1650" b="0">
+              <a:buNone/>
+              <a:defRPr sz="3300" b="1">
+                <a:solidFill>
+                  <a:srgbClr val="3D8DFF"/>
+                </a:solidFill>
+                <a:latin typeface="Arial"/>
+                <a:ea typeface="Arial"/>
+                <a:cs typeface="Arial"/>
+              </a:defRPr>
+            </a:pPr>
+            <a:r>
+              <a:rPr sz="3300" b="1">
+                <a:solidFill>
+                  <a:srgbClr val="3D8DFF"/>
+                </a:solidFill>
+                <a:latin typeface="Arial"/>
+                <a:ea typeface="Arial"/>
+                <a:cs typeface="Arial"/>
+              </a:rPr>
+              <a:t>9</a:t>
+            </a:r>
+          </a:p>
+        </p:txBody>
+      </p:sp>
+      <p:sp>
+        <p:nvSpPr>
+          <p:cNvPr id="9" name="scenario-label-1">
+            <a:extLst xmlns:a="http://schemas.openxmlformats.org/drawingml/2006/main">
+              <a:ext uri="{FF2B5EF4-FFF2-40B4-BE49-F238E27FC236}">
+                <a16:creationId xmlns:a16="http://schemas.microsoft.com/office/drawing/2014/main" id="{E033F261-4F50-4440-B9EC-5106D37A955B}"/>
+              </a:ext>
+            </a:extLst>
+          </p:cNvPr>
+          <p:cNvSpPr>
+            <a:spLocks xmlns:a="http://schemas.openxmlformats.org/drawingml/2006/main" noGrp="1"/>
+          </p:cNvSpPr>
+          <p:nvPr/>
+        </p:nvSpPr>
+        <p:spPr>
+          <a:xfrm xmlns:a="http://schemas.openxmlformats.org/drawingml/2006/main">
+            <a:off x="3752850" y="4171950"/>
+            <a:ext cx="2381250" cy="552450"/>
+          </a:xfrm>
+          <a:prstGeom xmlns:a="http://schemas.openxmlformats.org/drawingml/2006/main" prst="rect">
+            <a:avLst/>
+          </a:prstGeom>
+          <a:noFill xmlns:a="http://schemas.openxmlformats.org/drawingml/2006/main"/>
+          <a:ln xmlns:a="http://schemas.openxmlformats.org/drawingml/2006/main" w="0">
+            <a:noFill/>
+            <a:prstDash val="solid"/>
+          </a:ln>
+        </p:spPr>
+        <p:txBody>
+          <a:bodyPr xmlns:a="http://schemas.openxmlformats.org/drawingml/2006/main" anchor="t">
+            <a:normAutofit fontScale="100000"/>
+          </a:bodyPr>
+          <a:lstStyle xmlns:a="http://schemas.openxmlformats.org/drawingml/2006/main"/>
+          <a:p xmlns:a="http://schemas.openxmlformats.org/drawingml/2006/main">
+            <a:pPr algn="l">
+              <a:buNone/>
+              <a:defRPr sz="1500" b="0">
                 <a:solidFill>
                   <a:srgbClr val="53606D"/>
                 </a:solidFill>
@@ -7621,7 +6933,7 @@
               </a:defRPr>
             </a:pPr>
             <a:r>
-              <a:rPr sz="1650" b="0">
+              <a:rPr sz="1500" b="0">
                 <a:solidFill>
                   <a:srgbClr val="53606D"/>
                 </a:solidFill>
@@ -7629,62 +6941,29 @@
                 <a:ea typeface="Arial"/>
                 <a:cs typeface="Arial"/>
               </a:rPr>
-              <a:t>nos seis alvos contínuos</a:t>
-            </a:r>
-          </a:p>
-        </p:txBody>
-      </p:sp>
-      <p:sp>
-        <p:nvSpPr>
-          <p:cNvPr id="9" name="calibration-panel">
-            <a:extLst xmlns:a="http://schemas.openxmlformats.org/drawingml/2006/main">
-              <a:ext uri="{FF2B5EF4-FFF2-40B4-BE49-F238E27FC236}">
-                <a16:creationId xmlns:a16="http://schemas.microsoft.com/office/drawing/2014/main" id="{A53F84A9-C583-45A2-A10D-ED2808C11D61}"/>
-              </a:ext>
-            </a:extLst>
-          </p:cNvPr>
-          <p:cNvSpPr>
-            <a:spLocks xmlns:a="http://schemas.openxmlformats.org/drawingml/2006/main" noGrp="1"/>
-          </p:cNvSpPr>
-          <p:nvPr/>
-        </p:nvSpPr>
-        <p:spPr>
-          <a:xfrm xmlns:a="http://schemas.openxmlformats.org/drawingml/2006/main">
-            <a:off x="5372100" y="3543300"/>
-            <a:ext cx="4229100" cy="1809750"/>
-          </a:xfrm>
-          <a:prstGeom xmlns:a="http://schemas.openxmlformats.org/drawingml/2006/main" prst="roundRect">
-            <a:avLst>
-              <a:gd name="adj" fmla="val 6316"/>
-            </a:avLst>
-          </a:prstGeom>
-          <a:solidFill xmlns:a="http://schemas.openxmlformats.org/drawingml/2006/main">
-            <a:srgbClr val="EEF1F4"/>
-          </a:solidFill>
-          <a:ln xmlns:a="http://schemas.openxmlformats.org/drawingml/2006/main" w="0">
-            <a:noFill/>
-            <a:prstDash val="solid"/>
-          </a:ln>
-        </p:spPr>
-      </p:sp>
-      <p:sp>
-        <p:nvSpPr>
-          <p:cNvPr id="10" name="calibration-value">
-            <a:extLst xmlns:a="http://schemas.openxmlformats.org/drawingml/2006/main">
-              <a:ext uri="{FF2B5EF4-FFF2-40B4-BE49-F238E27FC236}">
-                <a16:creationId xmlns:a16="http://schemas.microsoft.com/office/drawing/2014/main" id="{35C904CA-1018-4383-AC1B-D5DF900EC581}"/>
-              </a:ext>
-            </a:extLst>
-          </p:cNvPr>
-          <p:cNvSpPr>
-            <a:spLocks xmlns:a="http://schemas.openxmlformats.org/drawingml/2006/main" noGrp="1"/>
-          </p:cNvSpPr>
-          <p:nvPr/>
-        </p:nvSpPr>
-        <p:spPr>
-          <a:xfrm xmlns:a="http://schemas.openxmlformats.org/drawingml/2006/main">
-            <a:off x="5657850" y="3943350"/>
-            <a:ext cx="3695700" cy="666750"/>
+              <a:t>regras obrigatórias</a:t>
+            </a:r>
+          </a:p>
+        </p:txBody>
+      </p:sp>
+      <p:sp>
+        <p:nvSpPr>
+          <p:cNvPr id="10" name="scenario-stat-2">
+            <a:extLst xmlns:a="http://schemas.openxmlformats.org/drawingml/2006/main">
+              <a:ext uri="{FF2B5EF4-FFF2-40B4-BE49-F238E27FC236}">
+                <a16:creationId xmlns:a16="http://schemas.microsoft.com/office/drawing/2014/main" id="{7DD40CCC-8CAC-4B1A-A91B-89AD34FD2788}"/>
+              </a:ext>
+            </a:extLst>
+          </p:cNvPr>
+          <p:cNvSpPr>
+            <a:spLocks xmlns:a="http://schemas.openxmlformats.org/drawingml/2006/main" noGrp="1"/>
+          </p:cNvSpPr>
+          <p:nvPr/>
+        </p:nvSpPr>
+        <p:spPr>
+          <a:xfrm xmlns:a="http://schemas.openxmlformats.org/drawingml/2006/main">
+            <a:off x="6819900" y="3429000"/>
+            <a:ext cx="2381250" cy="685800"/>
           </a:xfrm>
           <a:prstGeom xmlns:a="http://schemas.openxmlformats.org/drawingml/2006/main" prst="rect">
             <a:avLst/>
@@ -7702,65 +6981,67 @@
           <a:lstStyle xmlns:a="http://schemas.openxmlformats.org/drawingml/2006/main"/>
           <a:p xmlns:a="http://schemas.openxmlformats.org/drawingml/2006/main">
             <a:pPr algn="l">
-              <a:defRPr sz="2700" b="1">
-                <a:solidFill>
-                  <a:srgbClr val="20CDBF"/>
-                </a:solidFill>
-                <a:latin typeface="Arial"/>
-                <a:ea typeface="Arial"/>
-                <a:cs typeface="Arial"/>
-              </a:defRPr>
-            </a:pPr>
-            <a:r>
-              <a:rPr sz="2700" b="1">
-                <a:solidFill>
-                  <a:srgbClr val="20CDBF"/>
-                </a:solidFill>
-                <a:latin typeface="Arial"/>
-                <a:ea typeface="Arial"/>
-                <a:cs typeface="Arial"/>
-              </a:rPr>
-              <a:t>0,00053–0,01572</a:t>
-            </a:r>
-          </a:p>
-        </p:txBody>
-      </p:sp>
-      <p:sp>
-        <p:nvSpPr>
-          <p:cNvPr id="11" name="calibration-label">
-            <a:extLst xmlns:a="http://schemas.openxmlformats.org/drawingml/2006/main">
-              <a:ext uri="{FF2B5EF4-FFF2-40B4-BE49-F238E27FC236}">
-                <a16:creationId xmlns:a16="http://schemas.microsoft.com/office/drawing/2014/main" id="{9808A3DB-6589-4E66-82B5-8ACE943759BF}"/>
-              </a:ext>
-            </a:extLst>
-          </p:cNvPr>
-          <p:cNvSpPr>
-            <a:spLocks xmlns:a="http://schemas.openxmlformats.org/drawingml/2006/main" noGrp="1"/>
-          </p:cNvSpPr>
-          <p:nvPr/>
-        </p:nvSpPr>
-        <p:spPr>
-          <a:xfrm xmlns:a="http://schemas.openxmlformats.org/drawingml/2006/main">
-            <a:off x="5657850" y="4686300"/>
-            <a:ext cx="3695700" cy="571500"/>
-          </a:xfrm>
-          <a:prstGeom xmlns:a="http://schemas.openxmlformats.org/drawingml/2006/main" prst="rect">
-            <a:avLst/>
-          </a:prstGeom>
-          <a:noFill xmlns:a="http://schemas.openxmlformats.org/drawingml/2006/main"/>
-          <a:ln xmlns:a="http://schemas.openxmlformats.org/drawingml/2006/main" w="0">
-            <a:noFill/>
-            <a:prstDash val="solid"/>
-          </a:ln>
-        </p:spPr>
-        <p:txBody>
-          <a:bodyPr xmlns:a="http://schemas.openxmlformats.org/drawingml/2006/main" anchor="t">
-            <a:normAutofit fontScale="95454"/>
+              <a:buNone/>
+              <a:defRPr sz="3300" b="1">
+                <a:solidFill>
+                  <a:srgbClr val="E55B68"/>
+                </a:solidFill>
+                <a:latin typeface="Arial"/>
+                <a:ea typeface="Arial"/>
+                <a:cs typeface="Arial"/>
+              </a:defRPr>
+            </a:pPr>
+            <a:r>
+              <a:rPr sz="3300" b="1">
+                <a:solidFill>
+                  <a:srgbClr val="E55B68"/>
+                </a:solidFill>
+                <a:latin typeface="Arial"/>
+                <a:ea typeface="Arial"/>
+                <a:cs typeface="Arial"/>
+              </a:rPr>
+              <a:t>3/3</a:t>
+            </a:r>
+          </a:p>
+        </p:txBody>
+      </p:sp>
+      <p:sp>
+        <p:nvSpPr>
+          <p:cNvPr id="11" name="scenario-label-2">
+            <a:extLst xmlns:a="http://schemas.openxmlformats.org/drawingml/2006/main">
+              <a:ext uri="{FF2B5EF4-FFF2-40B4-BE49-F238E27FC236}">
+                <a16:creationId xmlns:a16="http://schemas.microsoft.com/office/drawing/2014/main" id="{A76B89E4-D43B-41CE-8CB1-6E6DA87F4D0B}"/>
+              </a:ext>
+            </a:extLst>
+          </p:cNvPr>
+          <p:cNvSpPr>
+            <a:spLocks xmlns:a="http://schemas.openxmlformats.org/drawingml/2006/main" noGrp="1"/>
+          </p:cNvSpPr>
+          <p:nvPr/>
+        </p:nvSpPr>
+        <p:spPr>
+          <a:xfrm xmlns:a="http://schemas.openxmlformats.org/drawingml/2006/main">
+            <a:off x="6819900" y="4171950"/>
+            <a:ext cx="2381250" cy="552450"/>
+          </a:xfrm>
+          <a:prstGeom xmlns:a="http://schemas.openxmlformats.org/drawingml/2006/main" prst="rect">
+            <a:avLst/>
+          </a:prstGeom>
+          <a:noFill xmlns:a="http://schemas.openxmlformats.org/drawingml/2006/main"/>
+          <a:ln xmlns:a="http://schemas.openxmlformats.org/drawingml/2006/main" w="0">
+            <a:noFill/>
+            <a:prstDash val="solid"/>
+          </a:ln>
+        </p:spPr>
+        <p:txBody>
+          <a:bodyPr xmlns:a="http://schemas.openxmlformats.org/drawingml/2006/main" anchor="t">
+            <a:normAutofit fontScale="100000"/>
           </a:bodyPr>
           <a:lstStyle xmlns:a="http://schemas.openxmlformats.org/drawingml/2006/main"/>
           <a:p xmlns:a="http://schemas.openxmlformats.org/drawingml/2006/main">
             <a:pPr algn="l">
-              <a:defRPr sz="1650" b="0">
+              <a:buNone/>
+              <a:defRPr sz="1500" b="0">
                 <a:solidFill>
                   <a:srgbClr val="53606D"/>
                 </a:solidFill>
@@ -7770,7 +7051,7 @@
               </a:defRPr>
             </a:pPr>
             <a:r>
-              <a:rPr sz="1650" b="0">
+              <a:rPr sz="1500" b="0">
                 <a:solidFill>
                   <a:srgbClr val="53606D"/>
                 </a:solidFill>
@@ -7778,12 +7059,13 @@
                 <a:ea typeface="Arial"/>
                 <a:cs typeface="Arial"/>
               </a:rPr>
-              <a:t>ECE após calibração</a:t>
+              <a:t>casos fora do padrão</a:t>
             </a:r>
           </a:p>
           <a:p xmlns:a="http://schemas.openxmlformats.org/drawingml/2006/main">
             <a:pPr algn="l">
-              <a:defRPr sz="1650" b="0">
+              <a:buNone/>
+              <a:defRPr sz="1500" b="0">
                 <a:solidFill>
                   <a:srgbClr val="53606D"/>
                 </a:solidFill>
@@ -7793,7 +7075,7 @@
               </a:defRPr>
             </a:pPr>
             <a:r>
-              <a:rPr sz="1650" b="0">
+              <a:rPr sz="1500" b="0">
                 <a:solidFill>
                   <a:srgbClr val="53606D"/>
                 </a:solidFill>
@@ -7801,56 +7083,56 @@
                 <a:ea typeface="Arial"/>
                 <a:cs typeface="Arial"/>
               </a:rPr>
-              <a:t>nos quatro classificadores</a:t>
+              <a:t>recusados</a:t>
             </a:r>
           </a:p>
         </p:txBody>
       </p:sp>
       <p:pic>
         <p:nvPicPr>
-          <p:cNvPr id="28" name=""/>
+          <p:cNvPr id="58" name=""/>
           <p:cNvPicPr>
             <a:picLocks xmlns:a="http://schemas.openxmlformats.org/drawingml/2006/main" noChangeAspect="1"/>
           </p:cNvPicPr>
           <p:nvPr/>
         </p:nvPicPr>
         <p:blipFill>
-          <a:blip xmlns:r="http://schemas.openxmlformats.org/officeDocument/2006/relationships" xmlns:a="http://schemas.openxmlformats.org/drawingml/2006/main" r:embed="R0bb7a080185043d7"/>
-          <a:srcRect xmlns:a="http://schemas.openxmlformats.org/drawingml/2006/main" l="0" t="13675" r="0" b="13675"/>
+          <a:blip xmlns:r="http://schemas.openxmlformats.org/officeDocument/2006/relationships" xmlns:a="http://schemas.openxmlformats.org/drawingml/2006/main" r:embed="Rbf21a78ae5704727"/>
+          <a:srcRect xmlns:a="http://schemas.openxmlformats.org/drawingml/2006/main" l="0" t="10114" r="0" b="10114"/>
           <a:stretch xmlns:a="http://schemas.openxmlformats.org/drawingml/2006/main">
             <a:fillRect l="0" t="0" r="0" b="0"/>
           </a:stretch>
         </p:blipFill>
         <p:spPr>
           <a:xfrm xmlns:a="http://schemas.openxmlformats.org/drawingml/2006/main">
-            <a:off x="685800" y="5905500"/>
-            <a:ext cx="8915400" cy="4857750"/>
+            <a:off x="685800" y="5219700"/>
+            <a:ext cx="8915400" cy="5334000"/>
           </a:xfrm>
           <a:prstGeom xmlns:a="http://schemas.openxmlformats.org/drawingml/2006/main" prst="roundRect">
             <a:avLst>
-              <a:gd name="adj" fmla="val 2353"/>
+              <a:gd name="adj" fmla="val 2143"/>
             </a:avLst>
           </a:prstGeom>
         </p:spPr>
       </p:pic>
       <p:sp>
         <p:nvSpPr>
-          <p:cNvPr id="13" name="uncertainty-caption">
-            <a:extLst xmlns:a="http://schemas.openxmlformats.org/drawingml/2006/main">
-              <a:ext uri="{FF2B5EF4-FFF2-40B4-BE49-F238E27FC236}">
-                <a16:creationId xmlns:a16="http://schemas.microsoft.com/office/drawing/2014/main" id="{27BF9B8F-FE17-46E5-A26F-BC14C8E998B6}"/>
-              </a:ext>
-            </a:extLst>
-          </p:cNvPr>
-          <p:cNvSpPr>
-            <a:spLocks xmlns:a="http://schemas.openxmlformats.org/drawingml/2006/main" noGrp="1"/>
-          </p:cNvSpPr>
-          <p:nvPr/>
-        </p:nvSpPr>
-        <p:spPr>
-          <a:xfrm xmlns:a="http://schemas.openxmlformats.org/drawingml/2006/main">
-            <a:off x="685800" y="11125200"/>
-            <a:ext cx="8915400" cy="457200"/>
+          <p:cNvPr id="13" name="scenario-close">
+            <a:extLst xmlns:a="http://schemas.openxmlformats.org/drawingml/2006/main">
+              <a:ext uri="{FF2B5EF4-FFF2-40B4-BE49-F238E27FC236}">
+                <a16:creationId xmlns:a16="http://schemas.microsoft.com/office/drawing/2014/main" id="{77D68B23-F225-4FB9-AD55-5D8FE63700B5}"/>
+              </a:ext>
+            </a:extLst>
+          </p:cNvPr>
+          <p:cNvSpPr>
+            <a:spLocks xmlns:a="http://schemas.openxmlformats.org/drawingml/2006/main" noGrp="1"/>
+          </p:cNvSpPr>
+          <p:nvPr/>
+        </p:nvSpPr>
+        <p:spPr>
+          <a:xfrm xmlns:a="http://schemas.openxmlformats.org/drawingml/2006/main">
+            <a:off x="685800" y="10953750"/>
+            <a:ext cx="8915400" cy="609600"/>
           </a:xfrm>
           <a:prstGeom xmlns:a="http://schemas.openxmlformats.org/drawingml/2006/main" prst="rect">
             <a:avLst/>
@@ -7868,7 +7150,8 @@
           <a:lstStyle xmlns:a="http://schemas.openxmlformats.org/drawingml/2006/main"/>
           <a:p xmlns:a="http://schemas.openxmlformats.org/drawingml/2006/main">
             <a:pPr algn="l">
-              <a:defRPr sz="2100" b="1">
+              <a:buNone/>
+              <a:defRPr sz="1875" b="1">
                 <a:solidFill>
                   <a:srgbClr val="07111C"/>
                 </a:solidFill>
@@ -7878,7 +7161,7 @@
               </a:defRPr>
             </a:pPr>
             <a:r>
-              <a:rPr sz="2100" b="1">
+              <a:rPr sz="1875" b="1">
                 <a:solidFill>
                   <a:srgbClr val="07111C"/>
                 </a:solidFill>
@@ -7886,14 +7169,14 @@
                 <a:ea typeface="Arial"/>
                 <a:cs typeface="Arial"/>
               </a:rPr>
-              <a:t>A faixa não é rodapé: ela muda a decisão.</a:t>
+              <a:t>Depois disso: compare alternativas e peça revisão humana.</a:t>
             </a:r>
           </a:p>
         </p:txBody>
       </p:sp>
       <p:cxnSp>
         <p:nvCxnSpPr>
-          <p:cNvPr id="30" name="footer-rule-6"/>
+          <p:cNvPr id="60" name="footer-rule-7"/>
           <p:cNvCxnSpPr/>
           <p:nvPr/>
         </p:nvCxnSpPr>
@@ -7915,10 +7198,10 @@
       </p:cxnSp>
       <p:sp>
         <p:nvSpPr>
-          <p:cNvPr id="15" name="footer-6">
-            <a:extLst xmlns:a="http://schemas.openxmlformats.org/drawingml/2006/main">
-              <a:ext uri="{FF2B5EF4-FFF2-40B4-BE49-F238E27FC236}">
-                <a16:creationId xmlns:a16="http://schemas.microsoft.com/office/drawing/2014/main" id="{4C805FD8-4599-4ADF-B429-241AE7810433}"/>
+          <p:cNvPr id="15" name="footer-7">
+            <a:extLst xmlns:a="http://schemas.openxmlformats.org/drawingml/2006/main">
+              <a:ext uri="{FF2B5EF4-FFF2-40B4-BE49-F238E27FC236}">
+                <a16:creationId xmlns:a16="http://schemas.microsoft.com/office/drawing/2014/main" id="{879FB160-5E7C-4A0A-BE16-8BA8440858BF}"/>
               </a:ext>
             </a:extLst>
           </p:cNvPr>
@@ -7948,6 +7231,7 @@
           <a:lstStyle xmlns:a="http://schemas.openxmlformats.org/drawingml/2006/main"/>
           <a:p xmlns:a="http://schemas.openxmlformats.org/drawingml/2006/main">
             <a:pPr algn="l">
+              <a:buNone/>
               <a:defRPr sz="1200" b="0">
                 <a:solidFill>
                   <a:srgbClr val="53606D"/>
@@ -7973,10 +7257,10 @@
       </p:sp>
       <p:sp>
         <p:nvSpPr>
-          <p:cNvPr id="16" name="footer-page-6">
-            <a:extLst xmlns:a="http://schemas.openxmlformats.org/drawingml/2006/main">
-              <a:ext uri="{FF2B5EF4-FFF2-40B4-BE49-F238E27FC236}">
-                <a16:creationId xmlns:a16="http://schemas.microsoft.com/office/drawing/2014/main" id="{2013CB81-4EEF-4A4F-908A-E38429DD83EC}"/>
+          <p:cNvPr id="16" name="footer-page-7">
+            <a:extLst xmlns:a="http://schemas.openxmlformats.org/drawingml/2006/main">
+              <a:ext uri="{FF2B5EF4-FFF2-40B4-BE49-F238E27FC236}">
+                <a16:creationId xmlns:a16="http://schemas.microsoft.com/office/drawing/2014/main" id="{6CA91ED8-7E0E-433D-9AFA-55771DA22B52}"/>
               </a:ext>
             </a:extLst>
           </p:cNvPr>
@@ -8006,6 +7290,7 @@
           <a:lstStyle xmlns:a="http://schemas.openxmlformats.org/drawingml/2006/main"/>
           <a:p xmlns:a="http://schemas.openxmlformats.org/drawingml/2006/main">
             <a:pPr algn="r">
+              <a:buNone/>
               <a:defRPr sz="1200" b="0">
                 <a:solidFill>
                   <a:srgbClr val="53606D"/>
@@ -8024,7 +7309,7 @@
                 <a:ea typeface="Arial"/>
                 <a:cs typeface="Arial"/>
               </a:rPr>
-              <a:t>6/10</a:t>
+              <a:t>6/9</a:t>
             </a:r>
           </a:p>
         </p:txBody>
@@ -8032,7 +7317,7 @@
     </p:spTree>
     <p:extLst>
       <p:ext uri="{BB962C8B-B14F-4D97-AF65-F5344CB8AC3E}">
-        <p14:creationId xmlns:p14="http://schemas.microsoft.com/office/powerpoint/2010/main" val="998034244"/>
+        <p14:creationId xmlns:p14="http://schemas.microsoft.com/office/powerpoint/2010/main" val="679812029"/>
       </p:ext>
     </p:extLst>
   </p:cSld>
@@ -8060,10 +7345,10 @@
       </p:grpSpPr>
       <p:sp>
         <p:nvSpPr>
-          <p:cNvPr id="17" name="kicker-7">
-            <a:extLst xmlns:a="http://schemas.openxmlformats.org/drawingml/2006/main">
-              <a:ext uri="{FF2B5EF4-FFF2-40B4-BE49-F238E27FC236}">
-                <a16:creationId xmlns:a16="http://schemas.microsoft.com/office/drawing/2014/main" id="{7DD2BC6F-D214-4CBA-88EC-599B1C28FA7D}"/>
+          <p:cNvPr id="26" name="kicker-8">
+            <a:extLst xmlns:a="http://schemas.openxmlformats.org/drawingml/2006/main">
+              <a:ext uri="{FF2B5EF4-FFF2-40B4-BE49-F238E27FC236}">
+                <a16:creationId xmlns:a16="http://schemas.microsoft.com/office/drawing/2014/main" id="{13323388-F758-47C3-802D-1ACEDC76A4D2}"/>
               </a:ext>
             </a:extLst>
           </p:cNvPr>
@@ -8093,6 +7378,7 @@
           <a:lstStyle xmlns:a="http://schemas.openxmlformats.org/drawingml/2006/main"/>
           <a:p xmlns:a="http://schemas.openxmlformats.org/drawingml/2006/main">
             <a:pPr algn="l">
+              <a:buNone/>
               <a:defRPr sz="1350" b="1">
                 <a:solidFill>
                   <a:srgbClr val="3D8DFF"/>
@@ -8111,17 +7397,17 @@
                 <a:ea typeface="Arial"/>
                 <a:cs typeface="Arial"/>
               </a:rPr>
-              <a:t>CENÁRIOS</a:t>
-            </a:r>
-          </a:p>
-        </p:txBody>
-      </p:sp>
-      <p:sp>
-        <p:nvSpPr>
-          <p:cNvPr id="2" name="page-7">
-            <a:extLst xmlns:a="http://schemas.openxmlformats.org/drawingml/2006/main">
-              <a:ext uri="{FF2B5EF4-FFF2-40B4-BE49-F238E27FC236}">
-                <a16:creationId xmlns:a16="http://schemas.microsoft.com/office/drawing/2014/main" id="{6A092EF0-99DD-4B9B-AA19-12622A4EDBCC}"/>
+              <a:t>A EXPERIÊNCIA</a:t>
+            </a:r>
+          </a:p>
+        </p:txBody>
+      </p:sp>
+      <p:sp>
+        <p:nvSpPr>
+          <p:cNvPr id="2" name="page-8">
+            <a:extLst xmlns:a="http://schemas.openxmlformats.org/drawingml/2006/main">
+              <a:ext uri="{FF2B5EF4-FFF2-40B4-BE49-F238E27FC236}">
+                <a16:creationId xmlns:a16="http://schemas.microsoft.com/office/drawing/2014/main" id="{085CC0FB-9DA9-4DB1-948A-14D31DFD71C3}"/>
               </a:ext>
             </a:extLst>
           </p:cNvPr>
@@ -8151,6 +7437,7 @@
           <a:lstStyle xmlns:a="http://schemas.openxmlformats.org/drawingml/2006/main"/>
           <a:p xmlns:a="http://schemas.openxmlformats.org/drawingml/2006/main">
             <a:pPr algn="r">
+              <a:buNone/>
               <a:defRPr sz="1350" b="1">
                 <a:solidFill>
                   <a:srgbClr val="53606D"/>
@@ -8176,10 +7463,10 @@
       </p:sp>
       <p:sp>
         <p:nvSpPr>
-          <p:cNvPr id="3" name="title-7">
-            <a:extLst xmlns:a="http://schemas.openxmlformats.org/drawingml/2006/main">
-              <a:ext uri="{FF2B5EF4-FFF2-40B4-BE49-F238E27FC236}">
-                <a16:creationId xmlns:a16="http://schemas.microsoft.com/office/drawing/2014/main" id="{B63F41E9-DCD1-4F71-9BF9-B13413805947}"/>
+          <p:cNvPr id="3" name="title-8">
+            <a:extLst xmlns:a="http://schemas.openxmlformats.org/drawingml/2006/main">
+              <a:ext uri="{FF2B5EF4-FFF2-40B4-BE49-F238E27FC236}">
+                <a16:creationId xmlns:a16="http://schemas.microsoft.com/office/drawing/2014/main" id="{8EAD528E-F504-44D4-97EC-A4ED4177FC17}"/>
               </a:ext>
             </a:extLst>
           </p:cNvPr>
@@ -8209,6 +7496,7 @@
           <a:lstStyle xmlns:a="http://schemas.openxmlformats.org/drawingml/2006/main"/>
           <a:p xmlns:a="http://schemas.openxmlformats.org/drawingml/2006/main">
             <a:pPr algn="l">
+              <a:buNone/>
               <a:defRPr sz="3750" b="1">
                 <a:solidFill>
                   <a:srgbClr val="07111C"/>
@@ -8227,17 +7515,17 @@
                 <a:ea typeface="Arial"/>
                 <a:cs typeface="Arial"/>
               </a:rPr>
-              <a:t>O otimizador também sabe recusar</a:t>
-            </a:r>
-          </a:p>
-        </p:txBody>
-      </p:sp>
-      <p:sp>
-        <p:nvSpPr>
-          <p:cNvPr id="4" name="subtitle-7">
-            <a:extLst xmlns:a="http://schemas.openxmlformats.org/drawingml/2006/main">
-              <a:ext uri="{FF2B5EF4-FFF2-40B4-BE49-F238E27FC236}">
-                <a16:creationId xmlns:a16="http://schemas.microsoft.com/office/drawing/2014/main" id="{301F72D8-C84C-47AE-B5A3-54F74CA295D5}"/>
+              <a:t>Uma trilha simples até a decisão</a:t>
+            </a:r>
+          </a:p>
+        </p:txBody>
+      </p:sp>
+      <p:sp>
+        <p:nvSpPr>
+          <p:cNvPr id="4" name="subtitle-8">
+            <a:extLst xmlns:a="http://schemas.openxmlformats.org/drawingml/2006/main">
+              <a:ext uri="{FF2B5EF4-FFF2-40B4-BE49-F238E27FC236}">
+                <a16:creationId xmlns:a16="http://schemas.microsoft.com/office/drawing/2014/main" id="{8F1FE70D-04EE-4DA5-B441-1A4F36CD241C}"/>
               </a:ext>
             </a:extLst>
           </p:cNvPr>
@@ -8267,6 +7555,7 @@
           <a:lstStyle xmlns:a="http://schemas.openxmlformats.org/drawingml/2006/main"/>
           <a:p xmlns:a="http://schemas.openxmlformats.org/drawingml/2006/main">
             <a:pPr algn="l">
+              <a:buNone/>
               <a:defRPr sz="1875" b="0">
                 <a:solidFill>
                   <a:srgbClr val="53606D"/>
@@ -8285,14 +7574,14 @@
                 <a:ea typeface="Arial"/>
                 <a:cs typeface="Arial"/>
               </a:rPr>
-              <a:t>Alternativas só aparecem dentro do suporte sintético e após todas as restrições.</a:t>
+              <a:t>Entender → prever → comparar → decidir.</a:t>
             </a:r>
           </a:p>
         </p:txBody>
       </p:sp>
       <p:cxnSp>
         <p:nvCxnSpPr>
-          <p:cNvPr id="21" name="header-rule-7"/>
+          <p:cNvPr id="78" name="header-rule-8"/>
           <p:cNvCxnSpPr/>
           <p:nvPr/>
         </p:nvCxnSpPr>
@@ -8314,22 +7603,22 @@
       </p:cxnSp>
       <p:sp>
         <p:nvSpPr>
-          <p:cNvPr id="6" name="scenario-stat-0">
-            <a:extLst xmlns:a="http://schemas.openxmlformats.org/drawingml/2006/main">
-              <a:ext uri="{FF2B5EF4-FFF2-40B4-BE49-F238E27FC236}">
-                <a16:creationId xmlns:a16="http://schemas.microsoft.com/office/drawing/2014/main" id="{3874855A-F37C-4BE5-91CD-BFB684E4AD1A}"/>
-              </a:ext>
-            </a:extLst>
-          </p:cNvPr>
-          <p:cNvSpPr>
-            <a:spLocks xmlns:a="http://schemas.openxmlformats.org/drawingml/2006/main" noGrp="1"/>
-          </p:cNvSpPr>
-          <p:nvPr/>
-        </p:nvSpPr>
-        <p:spPr>
-          <a:xfrm xmlns:a="http://schemas.openxmlformats.org/drawingml/2006/main">
-            <a:off x="685800" y="3429000"/>
-            <a:ext cx="2381250" cy="685800"/>
+          <p:cNvPr id="6" name="product-index-0">
+            <a:extLst xmlns:a="http://schemas.openxmlformats.org/drawingml/2006/main">
+              <a:ext uri="{FF2B5EF4-FFF2-40B4-BE49-F238E27FC236}">
+                <a16:creationId xmlns:a16="http://schemas.microsoft.com/office/drawing/2014/main" id="{8C5E6F41-3061-44E2-A958-2141A1F641A8}"/>
+              </a:ext>
+            </a:extLst>
+          </p:cNvPr>
+          <p:cNvSpPr>
+            <a:spLocks xmlns:a="http://schemas.openxmlformats.org/drawingml/2006/main" noGrp="1"/>
+          </p:cNvSpPr>
+          <p:nvPr/>
+        </p:nvSpPr>
+        <p:spPr>
+          <a:xfrm xmlns:a="http://schemas.openxmlformats.org/drawingml/2006/main">
+            <a:off x="685800" y="3543300"/>
+            <a:ext cx="628650" cy="438150"/>
           </a:xfrm>
           <a:prstGeom xmlns:a="http://schemas.openxmlformats.org/drawingml/2006/main" prst="rect">
             <a:avLst/>
@@ -8347,7 +7636,8 @@
           <a:lstStyle xmlns:a="http://schemas.openxmlformats.org/drawingml/2006/main"/>
           <a:p xmlns:a="http://schemas.openxmlformats.org/drawingml/2006/main">
             <a:pPr algn="l">
-              <a:defRPr sz="3300" b="1">
+              <a:buNone/>
+              <a:defRPr sz="1650" b="1">
                 <a:solidFill>
                   <a:srgbClr val="3D8DFF"/>
                 </a:solidFill>
@@ -8357,7 +7647,7 @@
               </a:defRPr>
             </a:pPr>
             <a:r>
-              <a:rPr sz="3300" b="1">
+              <a:rPr sz="1650" b="1">
                 <a:solidFill>
                   <a:srgbClr val="3D8DFF"/>
                 </a:solidFill>
@@ -8365,29 +7655,29 @@
                 <a:ea typeface="Arial"/>
                 <a:cs typeface="Arial"/>
               </a:rPr>
-              <a:t>20.160</a:t>
-            </a:r>
-          </a:p>
-        </p:txBody>
-      </p:sp>
-      <p:sp>
-        <p:nvSpPr>
-          <p:cNvPr id="7" name="scenario-label-0">
-            <a:extLst xmlns:a="http://schemas.openxmlformats.org/drawingml/2006/main">
-              <a:ext uri="{FF2B5EF4-FFF2-40B4-BE49-F238E27FC236}">
-                <a16:creationId xmlns:a16="http://schemas.microsoft.com/office/drawing/2014/main" id="{4B60A1AD-6086-4D18-AA3A-BF02DED97DC9}"/>
-              </a:ext>
-            </a:extLst>
-          </p:cNvPr>
-          <p:cNvSpPr>
-            <a:spLocks xmlns:a="http://schemas.openxmlformats.org/drawingml/2006/main" noGrp="1"/>
-          </p:cNvSpPr>
-          <p:nvPr/>
-        </p:nvSpPr>
-        <p:spPr>
-          <a:xfrm xmlns:a="http://schemas.openxmlformats.org/drawingml/2006/main">
-            <a:off x="685800" y="4171950"/>
-            <a:ext cx="2381250" cy="552450"/>
+              <a:t>01</a:t>
+            </a:r>
+          </a:p>
+        </p:txBody>
+      </p:sp>
+      <p:sp>
+        <p:nvSpPr>
+          <p:cNvPr id="7" name="product-page-0">
+            <a:extLst xmlns:a="http://schemas.openxmlformats.org/drawingml/2006/main">
+              <a:ext uri="{FF2B5EF4-FFF2-40B4-BE49-F238E27FC236}">
+                <a16:creationId xmlns:a16="http://schemas.microsoft.com/office/drawing/2014/main" id="{E620A6BE-FC68-492B-8B95-69CA27A7568F}"/>
+              </a:ext>
+            </a:extLst>
+          </p:cNvPr>
+          <p:cNvSpPr>
+            <a:spLocks xmlns:a="http://schemas.openxmlformats.org/drawingml/2006/main" noGrp="1"/>
+          </p:cNvSpPr>
+          <p:nvPr/>
+        </p:nvSpPr>
+        <p:spPr>
+          <a:xfrm xmlns:a="http://schemas.openxmlformats.org/drawingml/2006/main">
+            <a:off x="1485900" y="3486150"/>
+            <a:ext cx="3429000" cy="552450"/>
           </a:xfrm>
           <a:prstGeom xmlns:a="http://schemas.openxmlformats.org/drawingml/2006/main" prst="rect">
             <a:avLst/>
@@ -8405,47 +7695,70 @@
           <a:lstStyle xmlns:a="http://schemas.openxmlformats.org/drawingml/2006/main"/>
           <a:p xmlns:a="http://schemas.openxmlformats.org/drawingml/2006/main">
             <a:pPr algn="l">
-              <a:defRPr sz="1500" b="0">
-                <a:solidFill>
-                  <a:srgbClr val="53606D"/>
-                </a:solidFill>
-                <a:latin typeface="Arial"/>
-                <a:ea typeface="Arial"/>
-                <a:cs typeface="Arial"/>
-              </a:defRPr>
-            </a:pPr>
-            <a:r>
-              <a:rPr sz="1500" b="0">
-                <a:solidFill>
-                  <a:srgbClr val="53606D"/>
-                </a:solidFill>
-                <a:latin typeface="Arial"/>
-                <a:ea typeface="Arial"/>
-                <a:cs typeface="Arial"/>
-              </a:rPr>
-              <a:t>avaliações NSGA-II</a:t>
-            </a:r>
-          </a:p>
-        </p:txBody>
-      </p:sp>
-      <p:sp>
-        <p:nvSpPr>
-          <p:cNvPr id="8" name="scenario-stat-1">
-            <a:extLst xmlns:a="http://schemas.openxmlformats.org/drawingml/2006/main">
-              <a:ext uri="{FF2B5EF4-FFF2-40B4-BE49-F238E27FC236}">
-                <a16:creationId xmlns:a16="http://schemas.microsoft.com/office/drawing/2014/main" id="{5D22E322-4953-4C2D-91E9-4402904D1F6F}"/>
-              </a:ext>
-            </a:extLst>
-          </p:cNvPr>
-          <p:cNvSpPr>
-            <a:spLocks xmlns:a="http://schemas.openxmlformats.org/drawingml/2006/main" noGrp="1"/>
-          </p:cNvSpPr>
-          <p:nvPr/>
-        </p:nvSpPr>
-        <p:spPr>
-          <a:xfrm xmlns:a="http://schemas.openxmlformats.org/drawingml/2006/main">
-            <a:off x="3752850" y="3429000"/>
-            <a:ext cx="2381250" cy="685800"/>
+              <a:buNone/>
+              <a:defRPr sz="1875" b="1">
+                <a:solidFill>
+                  <a:srgbClr val="07111C"/>
+                </a:solidFill>
+                <a:latin typeface="Arial"/>
+                <a:ea typeface="Arial"/>
+                <a:cs typeface="Arial"/>
+              </a:defRPr>
+            </a:pPr>
+            <a:r>
+              <a:rPr sz="1875" b="1">
+                <a:solidFill>
+                  <a:srgbClr val="07111C"/>
+                </a:solidFill>
+                <a:latin typeface="Arial"/>
+                <a:ea typeface="Arial"/>
+                <a:cs typeface="Arial"/>
+              </a:rPr>
+              <a:t>Visão geral</a:t>
+            </a:r>
+          </a:p>
+        </p:txBody>
+      </p:sp>
+      <p:cxnSp>
+        <p:nvCxnSpPr>
+          <p:cNvPr id="81" name="product-rule-0"/>
+          <p:cNvCxnSpPr/>
+          <p:nvPr/>
+        </p:nvCxnSpPr>
+        <p:spPr>
+          <a:xfrm xmlns:a="http://schemas.openxmlformats.org/drawingml/2006/main">
+            <a:off x="1485900" y="4133850"/>
+            <a:ext cx="3429000" cy="0"/>
+          </a:xfrm>
+          <a:prstGeom xmlns:a="http://schemas.openxmlformats.org/drawingml/2006/main" prst="straightConnector1">
+            <a:avLst/>
+          </a:prstGeom>
+          <a:ln xmlns:a="http://schemas.openxmlformats.org/drawingml/2006/main" w="9525">
+            <a:solidFill>
+              <a:srgbClr val="BCC4CC"/>
+            </a:solidFill>
+            <a:prstDash val="solid"/>
+          </a:ln>
+        </p:spPr>
+      </p:cxnSp>
+      <p:sp>
+        <p:nvSpPr>
+          <p:cNvPr id="9" name="product-index-1">
+            <a:extLst xmlns:a="http://schemas.openxmlformats.org/drawingml/2006/main">
+              <a:ext uri="{FF2B5EF4-FFF2-40B4-BE49-F238E27FC236}">
+                <a16:creationId xmlns:a16="http://schemas.microsoft.com/office/drawing/2014/main" id="{EBF830FF-E4DE-4E0C-9072-A52B69F8773E}"/>
+              </a:ext>
+            </a:extLst>
+          </p:cNvPr>
+          <p:cNvSpPr>
+            <a:spLocks xmlns:a="http://schemas.openxmlformats.org/drawingml/2006/main" noGrp="1"/>
+          </p:cNvSpPr>
+          <p:nvPr/>
+        </p:nvSpPr>
+        <p:spPr>
+          <a:xfrm xmlns:a="http://schemas.openxmlformats.org/drawingml/2006/main">
+            <a:off x="685800" y="4610100"/>
+            <a:ext cx="628650" cy="438150"/>
           </a:xfrm>
           <a:prstGeom xmlns:a="http://schemas.openxmlformats.org/drawingml/2006/main" prst="rect">
             <a:avLst/>
@@ -8463,7 +7776,8 @@
           <a:lstStyle xmlns:a="http://schemas.openxmlformats.org/drawingml/2006/main"/>
           <a:p xmlns:a="http://schemas.openxmlformats.org/drawingml/2006/main">
             <a:pPr algn="l">
-              <a:defRPr sz="3300" b="1">
+              <a:buNone/>
+              <a:defRPr sz="1650" b="1">
                 <a:solidFill>
                   <a:srgbClr val="3D8DFF"/>
                 </a:solidFill>
@@ -8473,7 +7787,7 @@
               </a:defRPr>
             </a:pPr>
             <a:r>
-              <a:rPr sz="3300" b="1">
+              <a:rPr sz="1650" b="1">
                 <a:solidFill>
                   <a:srgbClr val="3D8DFF"/>
                 </a:solidFill>
@@ -8481,29 +7795,29 @@
                 <a:ea typeface="Arial"/>
                 <a:cs typeface="Arial"/>
               </a:rPr>
-              <a:t>9</a:t>
-            </a:r>
-          </a:p>
-        </p:txBody>
-      </p:sp>
-      <p:sp>
-        <p:nvSpPr>
-          <p:cNvPr id="9" name="scenario-label-1">
-            <a:extLst xmlns:a="http://schemas.openxmlformats.org/drawingml/2006/main">
-              <a:ext uri="{FF2B5EF4-FFF2-40B4-BE49-F238E27FC236}">
-                <a16:creationId xmlns:a16="http://schemas.microsoft.com/office/drawing/2014/main" id="{E033F261-4F50-4440-B9EC-5106D37A955B}"/>
-              </a:ext>
-            </a:extLst>
-          </p:cNvPr>
-          <p:cNvSpPr>
-            <a:spLocks xmlns:a="http://schemas.openxmlformats.org/drawingml/2006/main" noGrp="1"/>
-          </p:cNvSpPr>
-          <p:nvPr/>
-        </p:nvSpPr>
-        <p:spPr>
-          <a:xfrm xmlns:a="http://schemas.openxmlformats.org/drawingml/2006/main">
-            <a:off x="3752850" y="4171950"/>
-            <a:ext cx="2381250" cy="552450"/>
+              <a:t>02</a:t>
+            </a:r>
+          </a:p>
+        </p:txBody>
+      </p:sp>
+      <p:sp>
+        <p:nvSpPr>
+          <p:cNvPr id="10" name="product-page-1">
+            <a:extLst xmlns:a="http://schemas.openxmlformats.org/drawingml/2006/main">
+              <a:ext uri="{FF2B5EF4-FFF2-40B4-BE49-F238E27FC236}">
+                <a16:creationId xmlns:a16="http://schemas.microsoft.com/office/drawing/2014/main" id="{BC167A51-2493-4275-B03A-235C4AA6B681}"/>
+              </a:ext>
+            </a:extLst>
+          </p:cNvPr>
+          <p:cNvSpPr>
+            <a:spLocks xmlns:a="http://schemas.openxmlformats.org/drawingml/2006/main" noGrp="1"/>
+          </p:cNvSpPr>
+          <p:nvPr/>
+        </p:nvSpPr>
+        <p:spPr>
+          <a:xfrm xmlns:a="http://schemas.openxmlformats.org/drawingml/2006/main">
+            <a:off x="1485900" y="4552950"/>
+            <a:ext cx="3429000" cy="552450"/>
           </a:xfrm>
           <a:prstGeom xmlns:a="http://schemas.openxmlformats.org/drawingml/2006/main" prst="rect">
             <a:avLst/>
@@ -8521,47 +7835,70 @@
           <a:lstStyle xmlns:a="http://schemas.openxmlformats.org/drawingml/2006/main"/>
           <a:p xmlns:a="http://schemas.openxmlformats.org/drawingml/2006/main">
             <a:pPr algn="l">
-              <a:defRPr sz="1500" b="0">
-                <a:solidFill>
-                  <a:srgbClr val="53606D"/>
-                </a:solidFill>
-                <a:latin typeface="Arial"/>
-                <a:ea typeface="Arial"/>
-                <a:cs typeface="Arial"/>
-              </a:defRPr>
-            </a:pPr>
-            <a:r>
-              <a:rPr sz="1500" b="0">
-                <a:solidFill>
-                  <a:srgbClr val="53606D"/>
-                </a:solidFill>
-                <a:latin typeface="Arial"/>
-                <a:ea typeface="Arial"/>
-                <a:cs typeface="Arial"/>
-              </a:rPr>
-              <a:t>restrições duras</a:t>
-            </a:r>
-          </a:p>
-        </p:txBody>
-      </p:sp>
-      <p:sp>
-        <p:nvSpPr>
-          <p:cNvPr id="10" name="scenario-stat-2">
-            <a:extLst xmlns:a="http://schemas.openxmlformats.org/drawingml/2006/main">
-              <a:ext uri="{FF2B5EF4-FFF2-40B4-BE49-F238E27FC236}">
-                <a16:creationId xmlns:a16="http://schemas.microsoft.com/office/drawing/2014/main" id="{7DD40CCC-8CAC-4B1A-A91B-89AD34FD2788}"/>
-              </a:ext>
-            </a:extLst>
-          </p:cNvPr>
-          <p:cNvSpPr>
-            <a:spLocks xmlns:a="http://schemas.openxmlformats.org/drawingml/2006/main" noGrp="1"/>
-          </p:cNvSpPr>
-          <p:nvPr/>
-        </p:nvSpPr>
-        <p:spPr>
-          <a:xfrm xmlns:a="http://schemas.openxmlformats.org/drawingml/2006/main">
-            <a:off x="6819900" y="3429000"/>
-            <a:ext cx="2381250" cy="685800"/>
+              <a:buNone/>
+              <a:defRPr sz="1875" b="1">
+                <a:solidFill>
+                  <a:srgbClr val="07111C"/>
+                </a:solidFill>
+                <a:latin typeface="Arial"/>
+                <a:ea typeface="Arial"/>
+                <a:cs typeface="Arial"/>
+              </a:defRPr>
+            </a:pPr>
+            <a:r>
+              <a:rPr sz="1875" b="1">
+                <a:solidFill>
+                  <a:srgbClr val="07111C"/>
+                </a:solidFill>
+                <a:latin typeface="Arial"/>
+                <a:ea typeface="Arial"/>
+                <a:cs typeface="Arial"/>
+              </a:rPr>
+              <a:t>O que influenciou</a:t>
+            </a:r>
+          </a:p>
+        </p:txBody>
+      </p:sp>
+      <p:cxnSp>
+        <p:nvCxnSpPr>
+          <p:cNvPr id="84" name="product-rule-1"/>
+          <p:cNvCxnSpPr/>
+          <p:nvPr/>
+        </p:nvCxnSpPr>
+        <p:spPr>
+          <a:xfrm xmlns:a="http://schemas.openxmlformats.org/drawingml/2006/main">
+            <a:off x="1485900" y="5200650"/>
+            <a:ext cx="3429000" cy="0"/>
+          </a:xfrm>
+          <a:prstGeom xmlns:a="http://schemas.openxmlformats.org/drawingml/2006/main" prst="straightConnector1">
+            <a:avLst/>
+          </a:prstGeom>
+          <a:ln xmlns:a="http://schemas.openxmlformats.org/drawingml/2006/main" w="9525">
+            <a:solidFill>
+              <a:srgbClr val="BCC4CC"/>
+            </a:solidFill>
+            <a:prstDash val="solid"/>
+          </a:ln>
+        </p:spPr>
+      </p:cxnSp>
+      <p:sp>
+        <p:nvSpPr>
+          <p:cNvPr id="12" name="product-index-2">
+            <a:extLst xmlns:a="http://schemas.openxmlformats.org/drawingml/2006/main">
+              <a:ext uri="{FF2B5EF4-FFF2-40B4-BE49-F238E27FC236}">
+                <a16:creationId xmlns:a16="http://schemas.microsoft.com/office/drawing/2014/main" id="{32B4761E-026D-488B-9A42-FCE986DB702B}"/>
+              </a:ext>
+            </a:extLst>
+          </p:cNvPr>
+          <p:cNvSpPr>
+            <a:spLocks xmlns:a="http://schemas.openxmlformats.org/drawingml/2006/main" noGrp="1"/>
+          </p:cNvSpPr>
+          <p:nvPr/>
+        </p:nvSpPr>
+        <p:spPr>
+          <a:xfrm xmlns:a="http://schemas.openxmlformats.org/drawingml/2006/main">
+            <a:off x="685800" y="5676900"/>
+            <a:ext cx="628650" cy="438150"/>
           </a:xfrm>
           <a:prstGeom xmlns:a="http://schemas.openxmlformats.org/drawingml/2006/main" prst="rect">
             <a:avLst/>
@@ -8579,47 +7916,48 @@
           <a:lstStyle xmlns:a="http://schemas.openxmlformats.org/drawingml/2006/main"/>
           <a:p xmlns:a="http://schemas.openxmlformats.org/drawingml/2006/main">
             <a:pPr algn="l">
-              <a:defRPr sz="3300" b="1">
-                <a:solidFill>
-                  <a:srgbClr val="E55B68"/>
-                </a:solidFill>
-                <a:latin typeface="Arial"/>
-                <a:ea typeface="Arial"/>
-                <a:cs typeface="Arial"/>
-              </a:defRPr>
-            </a:pPr>
-            <a:r>
-              <a:rPr sz="3300" b="1">
-                <a:solidFill>
-                  <a:srgbClr val="E55B68"/>
-                </a:solidFill>
-                <a:latin typeface="Arial"/>
-                <a:ea typeface="Arial"/>
-                <a:cs typeface="Arial"/>
-              </a:rPr>
-              <a:t>3/3</a:t>
-            </a:r>
-          </a:p>
-        </p:txBody>
-      </p:sp>
-      <p:sp>
-        <p:nvSpPr>
-          <p:cNvPr id="11" name="scenario-label-2">
-            <a:extLst xmlns:a="http://schemas.openxmlformats.org/drawingml/2006/main">
-              <a:ext uri="{FF2B5EF4-FFF2-40B4-BE49-F238E27FC236}">
-                <a16:creationId xmlns:a16="http://schemas.microsoft.com/office/drawing/2014/main" id="{A76B89E4-D43B-41CE-8CB1-6E6DA87F4D0B}"/>
-              </a:ext>
-            </a:extLst>
-          </p:cNvPr>
-          <p:cNvSpPr>
-            <a:spLocks xmlns:a="http://schemas.openxmlformats.org/drawingml/2006/main" noGrp="1"/>
-          </p:cNvSpPr>
-          <p:nvPr/>
-        </p:nvSpPr>
-        <p:spPr>
-          <a:xfrm xmlns:a="http://schemas.openxmlformats.org/drawingml/2006/main">
-            <a:off x="6819900" y="4171950"/>
-            <a:ext cx="2381250" cy="552450"/>
+              <a:buNone/>
+              <a:defRPr sz="1650" b="1">
+                <a:solidFill>
+                  <a:srgbClr val="3D8DFF"/>
+                </a:solidFill>
+                <a:latin typeface="Arial"/>
+                <a:ea typeface="Arial"/>
+                <a:cs typeface="Arial"/>
+              </a:defRPr>
+            </a:pPr>
+            <a:r>
+              <a:rPr sz="1650" b="1">
+                <a:solidFill>
+                  <a:srgbClr val="3D8DFF"/>
+                </a:solidFill>
+                <a:latin typeface="Arial"/>
+                <a:ea typeface="Arial"/>
+                <a:cs typeface="Arial"/>
+              </a:rPr>
+              <a:t>03</a:t>
+            </a:r>
+          </a:p>
+        </p:txBody>
+      </p:sp>
+      <p:sp>
+        <p:nvSpPr>
+          <p:cNvPr id="13" name="product-page-2">
+            <a:extLst xmlns:a="http://schemas.openxmlformats.org/drawingml/2006/main">
+              <a:ext uri="{FF2B5EF4-FFF2-40B4-BE49-F238E27FC236}">
+                <a16:creationId xmlns:a16="http://schemas.microsoft.com/office/drawing/2014/main" id="{DAA49201-0452-461D-8554-51B5EC018777}"/>
+              </a:ext>
+            </a:extLst>
+          </p:cNvPr>
+          <p:cNvSpPr>
+            <a:spLocks xmlns:a="http://schemas.openxmlformats.org/drawingml/2006/main" noGrp="1"/>
+          </p:cNvSpPr>
+          <p:nvPr/>
+        </p:nvSpPr>
+        <p:spPr>
+          <a:xfrm xmlns:a="http://schemas.openxmlformats.org/drawingml/2006/main">
+            <a:off x="1485900" y="5619750"/>
+            <a:ext cx="3429000" cy="552450"/>
           </a:xfrm>
           <a:prstGeom xmlns:a="http://schemas.openxmlformats.org/drawingml/2006/main" prst="rect">
             <a:avLst/>
@@ -8637,74 +7975,414 @@
           <a:lstStyle xmlns:a="http://schemas.openxmlformats.org/drawingml/2006/main"/>
           <a:p xmlns:a="http://schemas.openxmlformats.org/drawingml/2006/main">
             <a:pPr algn="l">
-              <a:defRPr sz="1500" b="0">
-                <a:solidFill>
-                  <a:srgbClr val="53606D"/>
-                </a:solidFill>
-                <a:latin typeface="Arial"/>
-                <a:ea typeface="Arial"/>
-                <a:cs typeface="Arial"/>
-              </a:defRPr>
-            </a:pPr>
-            <a:r>
-              <a:rPr sz="1500" b="0">
-                <a:solidFill>
-                  <a:srgbClr val="53606D"/>
-                </a:solidFill>
-                <a:latin typeface="Arial"/>
-                <a:ea typeface="Arial"/>
-                <a:cs typeface="Arial"/>
-              </a:rPr>
-              <a:t>sondas OOD recusadas</a:t>
+              <a:buNone/>
+              <a:defRPr sz="1875" b="1">
+                <a:solidFill>
+                  <a:srgbClr val="07111C"/>
+                </a:solidFill>
+                <a:latin typeface="Arial"/>
+                <a:ea typeface="Arial"/>
+                <a:cs typeface="Arial"/>
+              </a:defRPr>
+            </a:pPr>
+            <a:r>
+              <a:rPr sz="1875" b="1">
+                <a:solidFill>
+                  <a:srgbClr val="07111C"/>
+                </a:solidFill>
+                <a:latin typeface="Arial"/>
+                <a:ea typeface="Arial"/>
+                <a:cs typeface="Arial"/>
+              </a:rPr>
+              <a:t>Previsão e risco</a:t>
+            </a:r>
+          </a:p>
+        </p:txBody>
+      </p:sp>
+      <p:cxnSp>
+        <p:nvCxnSpPr>
+          <p:cNvPr id="87" name="product-rule-2"/>
+          <p:cNvCxnSpPr/>
+          <p:nvPr/>
+        </p:nvCxnSpPr>
+        <p:spPr>
+          <a:xfrm xmlns:a="http://schemas.openxmlformats.org/drawingml/2006/main">
+            <a:off x="1485900" y="6267450"/>
+            <a:ext cx="3429000" cy="0"/>
+          </a:xfrm>
+          <a:prstGeom xmlns:a="http://schemas.openxmlformats.org/drawingml/2006/main" prst="straightConnector1">
+            <a:avLst/>
+          </a:prstGeom>
+          <a:ln xmlns:a="http://schemas.openxmlformats.org/drawingml/2006/main" w="9525">
+            <a:solidFill>
+              <a:srgbClr val="BCC4CC"/>
+            </a:solidFill>
+            <a:prstDash val="solid"/>
+          </a:ln>
+        </p:spPr>
+      </p:cxnSp>
+      <p:sp>
+        <p:nvSpPr>
+          <p:cNvPr id="15" name="product-index-3">
+            <a:extLst xmlns:a="http://schemas.openxmlformats.org/drawingml/2006/main">
+              <a:ext uri="{FF2B5EF4-FFF2-40B4-BE49-F238E27FC236}">
+                <a16:creationId xmlns:a16="http://schemas.microsoft.com/office/drawing/2014/main" id="{00D96976-D4CC-4D65-B420-80FBC0257C03}"/>
+              </a:ext>
+            </a:extLst>
+          </p:cNvPr>
+          <p:cNvSpPr>
+            <a:spLocks xmlns:a="http://schemas.openxmlformats.org/drawingml/2006/main" noGrp="1"/>
+          </p:cNvSpPr>
+          <p:nvPr/>
+        </p:nvSpPr>
+        <p:spPr>
+          <a:xfrm xmlns:a="http://schemas.openxmlformats.org/drawingml/2006/main">
+            <a:off x="685800" y="6743700"/>
+            <a:ext cx="628650" cy="438150"/>
+          </a:xfrm>
+          <a:prstGeom xmlns:a="http://schemas.openxmlformats.org/drawingml/2006/main" prst="rect">
+            <a:avLst/>
+          </a:prstGeom>
+          <a:noFill xmlns:a="http://schemas.openxmlformats.org/drawingml/2006/main"/>
+          <a:ln xmlns:a="http://schemas.openxmlformats.org/drawingml/2006/main" w="0">
+            <a:noFill/>
+            <a:prstDash val="solid"/>
+          </a:ln>
+        </p:spPr>
+        <p:txBody>
+          <a:bodyPr xmlns:a="http://schemas.openxmlformats.org/drawingml/2006/main" anchor="t">
+            <a:normAutofit fontScale="100000"/>
+          </a:bodyPr>
+          <a:lstStyle xmlns:a="http://schemas.openxmlformats.org/drawingml/2006/main"/>
+          <a:p xmlns:a="http://schemas.openxmlformats.org/drawingml/2006/main">
+            <a:pPr algn="l">
+              <a:buNone/>
+              <a:defRPr sz="1650" b="1">
+                <a:solidFill>
+                  <a:srgbClr val="3D8DFF"/>
+                </a:solidFill>
+                <a:latin typeface="Arial"/>
+                <a:ea typeface="Arial"/>
+                <a:cs typeface="Arial"/>
+              </a:defRPr>
+            </a:pPr>
+            <a:r>
+              <a:rPr sz="1650" b="1">
+                <a:solidFill>
+                  <a:srgbClr val="3D8DFF"/>
+                </a:solidFill>
+                <a:latin typeface="Arial"/>
+                <a:ea typeface="Arial"/>
+                <a:cs typeface="Arial"/>
+              </a:rPr>
+              <a:t>04</a:t>
+            </a:r>
+          </a:p>
+        </p:txBody>
+      </p:sp>
+      <p:sp>
+        <p:nvSpPr>
+          <p:cNvPr id="16" name="product-page-3">
+            <a:extLst xmlns:a="http://schemas.openxmlformats.org/drawingml/2006/main">
+              <a:ext uri="{FF2B5EF4-FFF2-40B4-BE49-F238E27FC236}">
+                <a16:creationId xmlns:a16="http://schemas.microsoft.com/office/drawing/2014/main" id="{568E5AE2-EE32-436A-88F0-35FA6D0AFAF0}"/>
+              </a:ext>
+            </a:extLst>
+          </p:cNvPr>
+          <p:cNvSpPr>
+            <a:spLocks xmlns:a="http://schemas.openxmlformats.org/drawingml/2006/main" noGrp="1"/>
+          </p:cNvSpPr>
+          <p:nvPr/>
+        </p:nvSpPr>
+        <p:spPr>
+          <a:xfrm xmlns:a="http://schemas.openxmlformats.org/drawingml/2006/main">
+            <a:off x="1485900" y="6686550"/>
+            <a:ext cx="3429000" cy="552450"/>
+          </a:xfrm>
+          <a:prstGeom xmlns:a="http://schemas.openxmlformats.org/drawingml/2006/main" prst="rect">
+            <a:avLst/>
+          </a:prstGeom>
+          <a:noFill xmlns:a="http://schemas.openxmlformats.org/drawingml/2006/main"/>
+          <a:ln xmlns:a="http://schemas.openxmlformats.org/drawingml/2006/main" w="0">
+            <a:noFill/>
+            <a:prstDash val="solid"/>
+          </a:ln>
+        </p:spPr>
+        <p:txBody>
+          <a:bodyPr xmlns:a="http://schemas.openxmlformats.org/drawingml/2006/main" anchor="t">
+            <a:normAutofit fontScale="100000"/>
+          </a:bodyPr>
+          <a:lstStyle xmlns:a="http://schemas.openxmlformats.org/drawingml/2006/main"/>
+          <a:p xmlns:a="http://schemas.openxmlformats.org/drawingml/2006/main">
+            <a:pPr algn="l">
+              <a:buNone/>
+              <a:defRPr sz="1875" b="1">
+                <a:solidFill>
+                  <a:srgbClr val="07111C"/>
+                </a:solidFill>
+                <a:latin typeface="Arial"/>
+                <a:ea typeface="Arial"/>
+                <a:cs typeface="Arial"/>
+              </a:defRPr>
+            </a:pPr>
+            <a:r>
+              <a:rPr sz="1875" b="1">
+                <a:solidFill>
+                  <a:srgbClr val="07111C"/>
+                </a:solidFill>
+                <a:latin typeface="Arial"/>
+                <a:ea typeface="Arial"/>
+                <a:cs typeface="Arial"/>
+              </a:rPr>
+              <a:t>Teste de cenários</a:t>
+            </a:r>
+          </a:p>
+        </p:txBody>
+      </p:sp>
+      <p:cxnSp>
+        <p:nvCxnSpPr>
+          <p:cNvPr id="90" name="product-rule-3"/>
+          <p:cNvCxnSpPr/>
+          <p:nvPr/>
+        </p:nvCxnSpPr>
+        <p:spPr>
+          <a:xfrm xmlns:a="http://schemas.openxmlformats.org/drawingml/2006/main">
+            <a:off x="1485900" y="7334250"/>
+            <a:ext cx="3429000" cy="0"/>
+          </a:xfrm>
+          <a:prstGeom xmlns:a="http://schemas.openxmlformats.org/drawingml/2006/main" prst="straightConnector1">
+            <a:avLst/>
+          </a:prstGeom>
+          <a:ln xmlns:a="http://schemas.openxmlformats.org/drawingml/2006/main" w="9525">
+            <a:solidFill>
+              <a:srgbClr val="BCC4CC"/>
+            </a:solidFill>
+            <a:prstDash val="solid"/>
+          </a:ln>
+        </p:spPr>
+      </p:cxnSp>
+      <p:sp>
+        <p:nvSpPr>
+          <p:cNvPr id="18" name="product-index-4">
+            <a:extLst xmlns:a="http://schemas.openxmlformats.org/drawingml/2006/main">
+              <a:ext uri="{FF2B5EF4-FFF2-40B4-BE49-F238E27FC236}">
+                <a16:creationId xmlns:a16="http://schemas.microsoft.com/office/drawing/2014/main" id="{24741B3C-62D6-4B77-99E1-12FB6F7AEE3D}"/>
+              </a:ext>
+            </a:extLst>
+          </p:cNvPr>
+          <p:cNvSpPr>
+            <a:spLocks xmlns:a="http://schemas.openxmlformats.org/drawingml/2006/main" noGrp="1"/>
+          </p:cNvSpPr>
+          <p:nvPr/>
+        </p:nvSpPr>
+        <p:spPr>
+          <a:xfrm xmlns:a="http://schemas.openxmlformats.org/drawingml/2006/main">
+            <a:off x="685800" y="7810500"/>
+            <a:ext cx="628650" cy="438150"/>
+          </a:xfrm>
+          <a:prstGeom xmlns:a="http://schemas.openxmlformats.org/drawingml/2006/main" prst="rect">
+            <a:avLst/>
+          </a:prstGeom>
+          <a:noFill xmlns:a="http://schemas.openxmlformats.org/drawingml/2006/main"/>
+          <a:ln xmlns:a="http://schemas.openxmlformats.org/drawingml/2006/main" w="0">
+            <a:noFill/>
+            <a:prstDash val="solid"/>
+          </a:ln>
+        </p:spPr>
+        <p:txBody>
+          <a:bodyPr xmlns:a="http://schemas.openxmlformats.org/drawingml/2006/main" anchor="t">
+            <a:normAutofit fontScale="100000"/>
+          </a:bodyPr>
+          <a:lstStyle xmlns:a="http://schemas.openxmlformats.org/drawingml/2006/main"/>
+          <a:p xmlns:a="http://schemas.openxmlformats.org/drawingml/2006/main">
+            <a:pPr algn="l">
+              <a:buNone/>
+              <a:defRPr sz="1650" b="1">
+                <a:solidFill>
+                  <a:srgbClr val="3D8DFF"/>
+                </a:solidFill>
+                <a:latin typeface="Arial"/>
+                <a:ea typeface="Arial"/>
+                <a:cs typeface="Arial"/>
+              </a:defRPr>
+            </a:pPr>
+            <a:r>
+              <a:rPr sz="1650" b="1">
+                <a:solidFill>
+                  <a:srgbClr val="3D8DFF"/>
+                </a:solidFill>
+                <a:latin typeface="Arial"/>
+                <a:ea typeface="Arial"/>
+                <a:cs typeface="Arial"/>
+              </a:rPr>
+              <a:t>05</a:t>
+            </a:r>
+          </a:p>
+        </p:txBody>
+      </p:sp>
+      <p:sp>
+        <p:nvSpPr>
+          <p:cNvPr id="19" name="product-page-4">
+            <a:extLst xmlns:a="http://schemas.openxmlformats.org/drawingml/2006/main">
+              <a:ext uri="{FF2B5EF4-FFF2-40B4-BE49-F238E27FC236}">
+                <a16:creationId xmlns:a16="http://schemas.microsoft.com/office/drawing/2014/main" id="{F17CF344-F140-4841-BCBF-3E810813091C}"/>
+              </a:ext>
+            </a:extLst>
+          </p:cNvPr>
+          <p:cNvSpPr>
+            <a:spLocks xmlns:a="http://schemas.openxmlformats.org/drawingml/2006/main" noGrp="1"/>
+          </p:cNvSpPr>
+          <p:nvPr/>
+        </p:nvSpPr>
+        <p:spPr>
+          <a:xfrm xmlns:a="http://schemas.openxmlformats.org/drawingml/2006/main">
+            <a:off x="1485900" y="7753350"/>
+            <a:ext cx="3429000" cy="552450"/>
+          </a:xfrm>
+          <a:prstGeom xmlns:a="http://schemas.openxmlformats.org/drawingml/2006/main" prst="rect">
+            <a:avLst/>
+          </a:prstGeom>
+          <a:noFill xmlns:a="http://schemas.openxmlformats.org/drawingml/2006/main"/>
+          <a:ln xmlns:a="http://schemas.openxmlformats.org/drawingml/2006/main" w="0">
+            <a:noFill/>
+            <a:prstDash val="solid"/>
+          </a:ln>
+        </p:spPr>
+        <p:txBody>
+          <a:bodyPr xmlns:a="http://schemas.openxmlformats.org/drawingml/2006/main" anchor="t">
+            <a:normAutofit fontScale="100000"/>
+          </a:bodyPr>
+          <a:lstStyle xmlns:a="http://schemas.openxmlformats.org/drawingml/2006/main"/>
+          <a:p xmlns:a="http://schemas.openxmlformats.org/drawingml/2006/main">
+            <a:pPr algn="l">
+              <a:buNone/>
+              <a:defRPr sz="1875" b="1">
+                <a:solidFill>
+                  <a:srgbClr val="07111C"/>
+                </a:solidFill>
+                <a:latin typeface="Arial"/>
+                <a:ea typeface="Arial"/>
+                <a:cs typeface="Arial"/>
+              </a:defRPr>
+            </a:pPr>
+            <a:r>
+              <a:rPr sz="1875" b="1">
+                <a:solidFill>
+                  <a:srgbClr val="07111C"/>
+                </a:solidFill>
+                <a:latin typeface="Arial"/>
+                <a:ea typeface="Arial"/>
+                <a:cs typeface="Arial"/>
+              </a:rPr>
+              <a:t>Confiabilidade do modelo</a:t>
             </a:r>
           </a:p>
         </p:txBody>
       </p:sp>
       <p:pic>
         <p:nvPicPr>
-          <p:cNvPr id="28" name=""/>
+          <p:cNvPr id="93" name=""/>
           <p:cNvPicPr>
             <a:picLocks xmlns:a="http://schemas.openxmlformats.org/drawingml/2006/main" noChangeAspect="1"/>
           </p:cNvPicPr>
           <p:nvPr/>
         </p:nvPicPr>
         <p:blipFill>
-          <a:blip xmlns:r="http://schemas.openxmlformats.org/officeDocument/2006/relationships" xmlns:a="http://schemas.openxmlformats.org/drawingml/2006/main" r:embed="Rc5102d4cbe3844f4"/>
-          <a:srcRect xmlns:a="http://schemas.openxmlformats.org/drawingml/2006/main" l="0" t="10114" r="0" b="10114"/>
+          <a:blip xmlns:r="http://schemas.openxmlformats.org/officeDocument/2006/relationships" xmlns:a="http://schemas.openxmlformats.org/drawingml/2006/main" r:embed="Ree96a32e8c5c4e9a"/>
+          <a:srcRect xmlns:a="http://schemas.openxmlformats.org/drawingml/2006/main" l="23462" t="0" r="23462" b="0"/>
           <a:stretch xmlns:a="http://schemas.openxmlformats.org/drawingml/2006/main">
             <a:fillRect l="0" t="0" r="0" b="0"/>
           </a:stretch>
         </p:blipFill>
         <p:spPr>
           <a:xfrm xmlns:a="http://schemas.openxmlformats.org/drawingml/2006/main">
-            <a:off x="685800" y="5219700"/>
-            <a:ext cx="8915400" cy="5334000"/>
+            <a:off x="5219700" y="3543300"/>
+            <a:ext cx="4381500" cy="6191250"/>
           </a:xfrm>
           <a:prstGeom xmlns:a="http://schemas.openxmlformats.org/drawingml/2006/main" prst="roundRect">
             <a:avLst>
-              <a:gd name="adj" fmla="val 2143"/>
+              <a:gd name="adj" fmla="val 2609"/>
             </a:avLst>
           </a:prstGeom>
         </p:spPr>
       </p:pic>
       <p:sp>
         <p:nvSpPr>
-          <p:cNvPr id="13" name="scenario-close">
-            <a:extLst xmlns:a="http://schemas.openxmlformats.org/drawingml/2006/main">
-              <a:ext uri="{FF2B5EF4-FFF2-40B4-BE49-F238E27FC236}">
-                <a16:creationId xmlns:a16="http://schemas.microsoft.com/office/drawing/2014/main" id="{77D68B23-F225-4FB9-AD55-5D8FE63700B5}"/>
-              </a:ext>
-            </a:extLst>
-          </p:cNvPr>
-          <p:cNvSpPr>
-            <a:spLocks xmlns:a="http://schemas.openxmlformats.org/drawingml/2006/main" noGrp="1"/>
-          </p:cNvSpPr>
-          <p:nvPr/>
-        </p:nvSpPr>
-        <p:spPr>
-          <a:xfrm xmlns:a="http://schemas.openxmlformats.org/drawingml/2006/main">
-            <a:off x="685800" y="10953750"/>
-            <a:ext cx="8915400" cy="609600"/>
+          <p:cNvPr id="21" name="product-powerbi">
+            <a:extLst xmlns:a="http://schemas.openxmlformats.org/drawingml/2006/main">
+              <a:ext uri="{FF2B5EF4-FFF2-40B4-BE49-F238E27FC236}">
+                <a16:creationId xmlns:a16="http://schemas.microsoft.com/office/drawing/2014/main" id="{801DA8E9-9406-4FF1-A04E-0239F4D8BCDE}"/>
+              </a:ext>
+            </a:extLst>
+          </p:cNvPr>
+          <p:cNvSpPr>
+            <a:spLocks xmlns:a="http://schemas.openxmlformats.org/drawingml/2006/main" noGrp="1"/>
+          </p:cNvSpPr>
+          <p:nvPr/>
+        </p:nvSpPr>
+        <p:spPr>
+          <a:xfrm xmlns:a="http://schemas.openxmlformats.org/drawingml/2006/main">
+            <a:off x="685800" y="9829800"/>
+            <a:ext cx="1714500" cy="342900"/>
+          </a:xfrm>
+          <a:prstGeom xmlns:a="http://schemas.openxmlformats.org/drawingml/2006/main" prst="rect">
+            <a:avLst/>
+          </a:prstGeom>
+          <a:noFill xmlns:a="http://schemas.openxmlformats.org/drawingml/2006/main"/>
+          <a:ln xmlns:a="http://schemas.openxmlformats.org/drawingml/2006/main" w="0">
+            <a:noFill/>
+            <a:prstDash val="solid"/>
+          </a:ln>
+        </p:spPr>
+        <p:txBody>
+          <a:bodyPr xmlns:a="http://schemas.openxmlformats.org/drawingml/2006/main" anchor="t">
+            <a:normAutofit fontScale="68986"/>
+          </a:bodyPr>
+          <a:lstStyle xmlns:a="http://schemas.openxmlformats.org/drawingml/2006/main"/>
+          <a:p xmlns:a="http://schemas.openxmlformats.org/drawingml/2006/main">
+            <a:pPr algn="l">
+              <a:buNone/>
+              <a:defRPr sz="1350" b="1">
+                <a:solidFill>
+                  <a:srgbClr val="3D8DFF"/>
+                </a:solidFill>
+                <a:latin typeface="Arial"/>
+                <a:ea typeface="Arial"/>
+                <a:cs typeface="Arial"/>
+              </a:defRPr>
+            </a:pPr>
+            <a:r>
+              <a:rPr sz="1350" b="1">
+                <a:solidFill>
+                  <a:srgbClr val="3D8DFF"/>
+                </a:solidFill>
+                <a:latin typeface="Arial"/>
+                <a:ea typeface="Arial"/>
+                <a:cs typeface="Arial"/>
+              </a:rPr>
+              <a:t>EXPLORAÇÃO ADICIONAL</a:t>
+            </a:r>
+          </a:p>
+        </p:txBody>
+      </p:sp>
+      <p:sp>
+        <p:nvSpPr>
+          <p:cNvPr id="22" name="product-powerbi-proof">
+            <a:extLst xmlns:a="http://schemas.openxmlformats.org/drawingml/2006/main">
+              <a:ext uri="{FF2B5EF4-FFF2-40B4-BE49-F238E27FC236}">
+                <a16:creationId xmlns:a16="http://schemas.microsoft.com/office/drawing/2014/main" id="{3DFFE398-2209-4AD2-BFFA-486F337BB262}"/>
+              </a:ext>
+            </a:extLst>
+          </p:cNvPr>
+          <p:cNvSpPr>
+            <a:spLocks xmlns:a="http://schemas.openxmlformats.org/drawingml/2006/main" noGrp="1"/>
+          </p:cNvSpPr>
+          <p:nvPr/>
+        </p:nvSpPr>
+        <p:spPr>
+          <a:xfrm xmlns:a="http://schemas.openxmlformats.org/drawingml/2006/main">
+            <a:off x="685800" y="10248900"/>
+            <a:ext cx="8915400" cy="552450"/>
           </a:xfrm>
           <a:prstGeom xmlns:a="http://schemas.openxmlformats.org/drawingml/2006/main" prst="rect">
             <a:avLst/>
@@ -8722,7 +8400,8 @@
           <a:lstStyle xmlns:a="http://schemas.openxmlformats.org/drawingml/2006/main"/>
           <a:p xmlns:a="http://schemas.openxmlformats.org/drawingml/2006/main">
             <a:pPr algn="l">
-              <a:defRPr sz="1875" b="1">
+              <a:buNone/>
+              <a:defRPr sz="2175" b="1">
                 <a:solidFill>
                   <a:srgbClr val="07111C"/>
                 </a:solidFill>
@@ -8732,7 +8411,7 @@
               </a:defRPr>
             </a:pPr>
             <a:r>
-              <a:rPr sz="1875" b="1">
+              <a:rPr sz="2175" b="1">
                 <a:solidFill>
                   <a:srgbClr val="07111C"/>
                 </a:solidFill>
@@ -8740,14 +8419,14 @@
                 <a:ea typeface="Arial"/>
                 <a:cs typeface="Arial"/>
               </a:rPr>
-              <a:t>12 cenários publicados · 100% das restrições · aceite humano obrigatório</a:t>
+              <a:t>Power BI com modelo estrela e arquivos verificados</a:t>
             </a:r>
           </a:p>
         </p:txBody>
       </p:sp>
       <p:cxnSp>
         <p:nvCxnSpPr>
-          <p:cNvPr id="30" name="footer-rule-7"/>
+          <p:cNvPr id="96" name="footer-rule-8"/>
           <p:cNvCxnSpPr/>
           <p:nvPr/>
         </p:nvCxnSpPr>
@@ -8769,10 +8448,10 @@
       </p:cxnSp>
       <p:sp>
         <p:nvSpPr>
-          <p:cNvPr id="15" name="footer-7">
-            <a:extLst xmlns:a="http://schemas.openxmlformats.org/drawingml/2006/main">
-              <a:ext uri="{FF2B5EF4-FFF2-40B4-BE49-F238E27FC236}">
-                <a16:creationId xmlns:a16="http://schemas.microsoft.com/office/drawing/2014/main" id="{879FB160-5E7C-4A0A-BE16-8BA8440858BF}"/>
+          <p:cNvPr id="24" name="footer-8">
+            <a:extLst xmlns:a="http://schemas.openxmlformats.org/drawingml/2006/main">
+              <a:ext uri="{FF2B5EF4-FFF2-40B4-BE49-F238E27FC236}">
+                <a16:creationId xmlns:a16="http://schemas.microsoft.com/office/drawing/2014/main" id="{485BCCDE-FD69-4E4E-A7AC-C795AFD6633A}"/>
               </a:ext>
             </a:extLst>
           </p:cNvPr>
@@ -8802,6 +8481,7 @@
           <a:lstStyle xmlns:a="http://schemas.openxmlformats.org/drawingml/2006/main"/>
           <a:p xmlns:a="http://schemas.openxmlformats.org/drawingml/2006/main">
             <a:pPr algn="l">
+              <a:buNone/>
               <a:defRPr sz="1200" b="0">
                 <a:solidFill>
                   <a:srgbClr val="53606D"/>
@@ -8827,10 +8507,10 @@
       </p:sp>
       <p:sp>
         <p:nvSpPr>
-          <p:cNvPr id="16" name="footer-page-7">
-            <a:extLst xmlns:a="http://schemas.openxmlformats.org/drawingml/2006/main">
-              <a:ext uri="{FF2B5EF4-FFF2-40B4-BE49-F238E27FC236}">
-                <a16:creationId xmlns:a16="http://schemas.microsoft.com/office/drawing/2014/main" id="{6CA91ED8-7E0E-433D-9AFA-55771DA22B52}"/>
+          <p:cNvPr id="25" name="footer-page-8">
+            <a:extLst xmlns:a="http://schemas.openxmlformats.org/drawingml/2006/main">
+              <a:ext uri="{FF2B5EF4-FFF2-40B4-BE49-F238E27FC236}">
+                <a16:creationId xmlns:a16="http://schemas.microsoft.com/office/drawing/2014/main" id="{360922B6-36BE-4A83-BCFF-361D755A7066}"/>
               </a:ext>
             </a:extLst>
           </p:cNvPr>
@@ -8860,6 +8540,7 @@
           <a:lstStyle xmlns:a="http://schemas.openxmlformats.org/drawingml/2006/main"/>
           <a:p xmlns:a="http://schemas.openxmlformats.org/drawingml/2006/main">
             <a:pPr algn="r">
+              <a:buNone/>
               <a:defRPr sz="1200" b="0">
                 <a:solidFill>
                   <a:srgbClr val="53606D"/>
@@ -8878,7 +8559,7 @@
                 <a:ea typeface="Arial"/>
                 <a:cs typeface="Arial"/>
               </a:rPr>
-              <a:t>7/10</a:t>
+              <a:t>7/9</a:t>
             </a:r>
           </a:p>
         </p:txBody>
@@ -8886,7 +8567,7 @@
     </p:spTree>
     <p:extLst>
       <p:ext uri="{BB962C8B-B14F-4D97-AF65-F5344CB8AC3E}">
-        <p14:creationId xmlns:p14="http://schemas.microsoft.com/office/powerpoint/2010/main" val="679812029"/>
+        <p14:creationId xmlns:p14="http://schemas.microsoft.com/office/powerpoint/2010/main" val="229838652"/>
       </p:ext>
     </p:extLst>
   </p:cSld>
@@ -8914,10 +8595,10 @@
       </p:grpSpPr>
       <p:sp>
         <p:nvSpPr>
-          <p:cNvPr id="26" name="kicker-8">
-            <a:extLst xmlns:a="http://schemas.openxmlformats.org/drawingml/2006/main">
-              <a:ext uri="{FF2B5EF4-FFF2-40B4-BE49-F238E27FC236}">
-                <a16:creationId xmlns:a16="http://schemas.microsoft.com/office/drawing/2014/main" id="{13323388-F758-47C3-802D-1ACEDC76A4D2}"/>
+          <p:cNvPr id="18" name="kicker-9">
+            <a:extLst xmlns:a="http://schemas.openxmlformats.org/drawingml/2006/main">
+              <a:ext uri="{FF2B5EF4-FFF2-40B4-BE49-F238E27FC236}">
+                <a16:creationId xmlns:a16="http://schemas.microsoft.com/office/drawing/2014/main" id="{EC1D63BC-BDD9-4416-8BB8-5466FAC681C0}"/>
               </a:ext>
             </a:extLst>
           </p:cNvPr>
@@ -8947,6 +8628,7 @@
           <a:lstStyle xmlns:a="http://schemas.openxmlformats.org/drawingml/2006/main"/>
           <a:p xmlns:a="http://schemas.openxmlformats.org/drawingml/2006/main">
             <a:pPr algn="l">
+              <a:buNone/>
               <a:defRPr sz="1350" b="1">
                 <a:solidFill>
                   <a:srgbClr val="3D8DFF"/>
@@ -8965,17 +8647,17 @@
                 <a:ea typeface="Arial"/>
                 <a:cs typeface="Arial"/>
               </a:rPr>
-              <a:t>PRODUTO</a:t>
-            </a:r>
-          </a:p>
-        </p:txBody>
-      </p:sp>
-      <p:sp>
-        <p:nvSpPr>
-          <p:cNvPr id="2" name="page-8">
-            <a:extLst xmlns:a="http://schemas.openxmlformats.org/drawingml/2006/main">
-              <a:ext uri="{FF2B5EF4-FFF2-40B4-BE49-F238E27FC236}">
-                <a16:creationId xmlns:a16="http://schemas.microsoft.com/office/drawing/2014/main" id="{085CC0FB-9DA9-4DB1-948A-14D31DFD71C3}"/>
+              <a:t>LIMITES</a:t>
+            </a:r>
+          </a:p>
+        </p:txBody>
+      </p:sp>
+      <p:sp>
+        <p:nvSpPr>
+          <p:cNvPr id="2" name="page-9">
+            <a:extLst xmlns:a="http://schemas.openxmlformats.org/drawingml/2006/main">
+              <a:ext uri="{FF2B5EF4-FFF2-40B4-BE49-F238E27FC236}">
+                <a16:creationId xmlns:a16="http://schemas.microsoft.com/office/drawing/2014/main" id="{52C7C719-083C-456E-A679-9B010E655EDB}"/>
               </a:ext>
             </a:extLst>
           </p:cNvPr>
@@ -9005,6 +8687,7 @@
           <a:lstStyle xmlns:a="http://schemas.openxmlformats.org/drawingml/2006/main"/>
           <a:p xmlns:a="http://schemas.openxmlformats.org/drawingml/2006/main">
             <a:pPr algn="r">
+              <a:buNone/>
               <a:defRPr sz="1350" b="1">
                 <a:solidFill>
                   <a:srgbClr val="53606D"/>
@@ -9030,10 +8713,10 @@
       </p:sp>
       <p:sp>
         <p:nvSpPr>
-          <p:cNvPr id="3" name="title-8">
-            <a:extLst xmlns:a="http://schemas.openxmlformats.org/drawingml/2006/main">
-              <a:ext uri="{FF2B5EF4-FFF2-40B4-BE49-F238E27FC236}">
-                <a16:creationId xmlns:a16="http://schemas.microsoft.com/office/drawing/2014/main" id="{8EAD528E-F504-44D4-97EC-A4ED4177FC17}"/>
+          <p:cNvPr id="3" name="title-9">
+            <a:extLst xmlns:a="http://schemas.openxmlformats.org/drawingml/2006/main">
+              <a:ext uri="{FF2B5EF4-FFF2-40B4-BE49-F238E27FC236}">
+                <a16:creationId xmlns:a16="http://schemas.microsoft.com/office/drawing/2014/main" id="{0B318391-4DB9-4666-8D12-A3705990F1DF}"/>
               </a:ext>
             </a:extLst>
           </p:cNvPr>
@@ -9063,6 +8746,7 @@
           <a:lstStyle xmlns:a="http://schemas.openxmlformats.org/drawingml/2006/main"/>
           <a:p xmlns:a="http://schemas.openxmlformats.org/drawingml/2006/main">
             <a:pPr algn="l">
+              <a:buNone/>
               <a:defRPr sz="3750" b="1">
                 <a:solidFill>
                   <a:srgbClr val="07111C"/>
@@ -9081,17 +8765,17 @@
                 <a:ea typeface="Arial"/>
                 <a:cs typeface="Arial"/>
               </a:rPr>
-              <a:t>Cinco páginas, uma trilha de decisão</a:t>
-            </a:r>
-          </a:p>
-        </p:txBody>
-      </p:sp>
-      <p:sp>
-        <p:nvSpPr>
-          <p:cNvPr id="4" name="subtitle-8">
-            <a:extLst xmlns:a="http://schemas.openxmlformats.org/drawingml/2006/main">
-              <a:ext uri="{FF2B5EF4-FFF2-40B4-BE49-F238E27FC236}">
-                <a16:creationId xmlns:a16="http://schemas.microsoft.com/office/drawing/2014/main" id="{8F1FE70D-04EE-4DA5-B441-1A4F36CD241C}"/>
+              <a:t>Limites claros evitam promessas</a:t>
+            </a:r>
+          </a:p>
+        </p:txBody>
+      </p:sp>
+      <p:sp>
+        <p:nvSpPr>
+          <p:cNvPr id="4" name="subtitle-9">
+            <a:extLst xmlns:a="http://schemas.openxmlformats.org/drawingml/2006/main">
+              <a:ext uri="{FF2B5EF4-FFF2-40B4-BE49-F238E27FC236}">
+                <a16:creationId xmlns:a16="http://schemas.microsoft.com/office/drawing/2014/main" id="{014C88DE-F3D5-4910-9C41-01E9607740E7}"/>
               </a:ext>
             </a:extLst>
           </p:cNvPr>
@@ -9121,6 +8805,7 @@
           <a:lstStyle xmlns:a="http://schemas.openxmlformats.org/drawingml/2006/main"/>
           <a:p xmlns:a="http://schemas.openxmlformats.org/drawingml/2006/main">
             <a:pPr algn="l">
+              <a:buNone/>
               <a:defRPr sz="1875" b="0">
                 <a:solidFill>
                   <a:srgbClr val="53606D"/>
@@ -9139,14 +8824,14 @@
                 <a:ea typeface="Arial"/>
                 <a:cs typeface="Arial"/>
               </a:rPr>
-              <a:t>Tendência → associação → previsão → cenário → confiabilidade.</a:t>
+              <a:t>O protótipo mostra o que pode — e o que não pode — afirmar.</a:t>
             </a:r>
           </a:p>
         </p:txBody>
       </p:sp>
       <p:cxnSp>
         <p:nvCxnSpPr>
-          <p:cNvPr id="30" name="header-rule-8"/>
+          <p:cNvPr id="54" name="header-rule-9"/>
           <p:cNvCxnSpPr/>
           <p:nvPr/>
         </p:nvCxnSpPr>
@@ -9166,24 +8851,82 @@
           </a:ln>
         </p:spPr>
       </p:cxnSp>
-      <p:sp>
-        <p:nvSpPr>
-          <p:cNvPr id="6" name="product-index-0">
-            <a:extLst xmlns:a="http://schemas.openxmlformats.org/drawingml/2006/main">
-              <a:ext uri="{FF2B5EF4-FFF2-40B4-BE49-F238E27FC236}">
-                <a16:creationId xmlns:a16="http://schemas.microsoft.com/office/drawing/2014/main" id="{8C5E6F41-3061-44E2-A958-2141A1F641A8}"/>
-              </a:ext>
-            </a:extLst>
-          </p:cNvPr>
-          <p:cNvSpPr>
-            <a:spLocks xmlns:a="http://schemas.openxmlformats.org/drawingml/2006/main" noGrp="1"/>
-          </p:cNvSpPr>
-          <p:nvPr/>
-        </p:nvSpPr>
-        <p:spPr>
-          <a:xfrm xmlns:a="http://schemas.openxmlformats.org/drawingml/2006/main">
-            <a:off x="685800" y="3543300"/>
-            <a:ext cx="628650" cy="438150"/>
+      <p:pic>
+        <p:nvPicPr>
+          <p:cNvPr id="55" name=""/>
+          <p:cNvPicPr>
+            <a:picLocks xmlns:a="http://schemas.openxmlformats.org/drawingml/2006/main" noChangeAspect="1"/>
+          </p:cNvPicPr>
+          <p:nvPr/>
+        </p:nvPicPr>
+        <p:blipFill>
+          <a:blip xmlns:r="http://schemas.openxmlformats.org/officeDocument/2006/relationships" xmlns:a="http://schemas.openxmlformats.org/drawingml/2006/main" r:embed="Rc0f669b2a8e3496e"/>
+          <a:srcRect xmlns:a="http://schemas.openxmlformats.org/drawingml/2006/main" l="0" t="16524" r="0" b="16524"/>
+          <a:stretch xmlns:a="http://schemas.openxmlformats.org/drawingml/2006/main">
+            <a:fillRect l="0" t="0" r="0" b="0"/>
+          </a:stretch>
+        </p:blipFill>
+        <p:spPr>
+          <a:xfrm xmlns:a="http://schemas.openxmlformats.org/drawingml/2006/main">
+            <a:off x="685800" y="3486150"/>
+            <a:ext cx="8915400" cy="4476750"/>
+          </a:xfrm>
+          <a:prstGeom xmlns:a="http://schemas.openxmlformats.org/drawingml/2006/main" prst="roundRect">
+            <a:avLst>
+              <a:gd name="adj" fmla="val 2553"/>
+            </a:avLst>
+          </a:prstGeom>
+        </p:spPr>
+      </p:pic>
+      <p:sp>
+        <p:nvSpPr>
+          <p:cNvPr id="7" name="limit-dot-0">
+            <a:extLst xmlns:a="http://schemas.openxmlformats.org/drawingml/2006/main">
+              <a:ext uri="{FF2B5EF4-FFF2-40B4-BE49-F238E27FC236}">
+                <a16:creationId xmlns:a16="http://schemas.microsoft.com/office/drawing/2014/main" id="{1340E1E0-4F68-4279-AA85-1B686F109A5E}"/>
+              </a:ext>
+            </a:extLst>
+          </p:cNvPr>
+          <p:cNvSpPr>
+            <a:spLocks xmlns:a="http://schemas.openxmlformats.org/drawingml/2006/main" noGrp="1"/>
+          </p:cNvSpPr>
+          <p:nvPr/>
+        </p:nvSpPr>
+        <p:spPr>
+          <a:xfrm xmlns:a="http://schemas.openxmlformats.org/drawingml/2006/main">
+            <a:off x="685800" y="8648700"/>
+            <a:ext cx="171450" cy="171450"/>
+          </a:xfrm>
+          <a:prstGeom xmlns:a="http://schemas.openxmlformats.org/drawingml/2006/main" prst="ellipse">
+            <a:avLst/>
+          </a:prstGeom>
+          <a:solidFill xmlns:a="http://schemas.openxmlformats.org/drawingml/2006/main">
+            <a:srgbClr val="3D8DFF"/>
+          </a:solidFill>
+          <a:ln xmlns:a="http://schemas.openxmlformats.org/drawingml/2006/main" w="0">
+            <a:noFill/>
+            <a:prstDash val="solid"/>
+          </a:ln>
+        </p:spPr>
+      </p:sp>
+      <p:sp>
+        <p:nvSpPr>
+          <p:cNvPr id="8" name="limit-text-0">
+            <a:extLst xmlns:a="http://schemas.openxmlformats.org/drawingml/2006/main">
+              <a:ext uri="{FF2B5EF4-FFF2-40B4-BE49-F238E27FC236}">
+                <a16:creationId xmlns:a16="http://schemas.microsoft.com/office/drawing/2014/main" id="{4891817F-5694-4578-B849-DC97F376A19D}"/>
+              </a:ext>
+            </a:extLst>
+          </p:cNvPr>
+          <p:cNvSpPr>
+            <a:spLocks xmlns:a="http://schemas.openxmlformats.org/drawingml/2006/main" noGrp="1"/>
+          </p:cNvSpPr>
+          <p:nvPr/>
+        </p:nvSpPr>
+        <p:spPr>
+          <a:xfrm xmlns:a="http://schemas.openxmlformats.org/drawingml/2006/main">
+            <a:off x="1066800" y="8572500"/>
+            <a:ext cx="8096250" cy="457200"/>
           </a:xfrm>
           <a:prstGeom xmlns:a="http://schemas.openxmlformats.org/drawingml/2006/main" prst="rect">
             <a:avLst/>
@@ -9201,47 +8944,79 @@
           <a:lstStyle xmlns:a="http://schemas.openxmlformats.org/drawingml/2006/main"/>
           <a:p xmlns:a="http://schemas.openxmlformats.org/drawingml/2006/main">
             <a:pPr algn="l">
-              <a:defRPr sz="1650" b="1">
-                <a:solidFill>
-                  <a:srgbClr val="3D8DFF"/>
-                </a:solidFill>
-                <a:latin typeface="Arial"/>
-                <a:ea typeface="Arial"/>
-                <a:cs typeface="Arial"/>
-              </a:defRPr>
-            </a:pPr>
-            <a:r>
-              <a:rPr sz="1650" b="1">
-                <a:solidFill>
-                  <a:srgbClr val="3D8DFF"/>
-                </a:solidFill>
-                <a:latin typeface="Arial"/>
-                <a:ea typeface="Arial"/>
-                <a:cs typeface="Arial"/>
-              </a:rPr>
-              <a:t>01</a:t>
-            </a:r>
-          </a:p>
-        </p:txBody>
-      </p:sp>
-      <p:sp>
-        <p:nvSpPr>
-          <p:cNvPr id="7" name="product-page-0">
-            <a:extLst xmlns:a="http://schemas.openxmlformats.org/drawingml/2006/main">
-              <a:ext uri="{FF2B5EF4-FFF2-40B4-BE49-F238E27FC236}">
-                <a16:creationId xmlns:a16="http://schemas.microsoft.com/office/drawing/2014/main" id="{E620A6BE-FC68-492B-8B95-69CA27A7568F}"/>
-              </a:ext>
-            </a:extLst>
-          </p:cNvPr>
-          <p:cNvSpPr>
-            <a:spLocks xmlns:a="http://schemas.openxmlformats.org/drawingml/2006/main" noGrp="1"/>
-          </p:cNvSpPr>
-          <p:nvPr/>
-        </p:nvSpPr>
-        <p:spPr>
-          <a:xfrm xmlns:a="http://schemas.openxmlformats.org/drawingml/2006/main">
-            <a:off x="1485900" y="3486150"/>
-            <a:ext cx="3429000" cy="552450"/>
+              <a:buNone/>
+              <a:defRPr sz="1875" b="1">
+                <a:solidFill>
+                  <a:srgbClr val="07111C"/>
+                </a:solidFill>
+                <a:latin typeface="Arial"/>
+                <a:ea typeface="Arial"/>
+                <a:cs typeface="Arial"/>
+              </a:defRPr>
+            </a:pPr>
+            <a:r>
+              <a:rPr sz="1875" b="1">
+                <a:solidFill>
+                  <a:srgbClr val="07111C"/>
+                </a:solidFill>
+                <a:latin typeface="Arial"/>
+                <a:ea typeface="Arial"/>
+                <a:cs typeface="Arial"/>
+              </a:rPr>
+              <a:t>Não demonstra causalidade industrial</a:t>
+            </a:r>
+          </a:p>
+        </p:txBody>
+      </p:sp>
+      <p:sp>
+        <p:nvSpPr>
+          <p:cNvPr id="9" name="limit-dot-1">
+            <a:extLst xmlns:a="http://schemas.openxmlformats.org/drawingml/2006/main">
+              <a:ext uri="{FF2B5EF4-FFF2-40B4-BE49-F238E27FC236}">
+                <a16:creationId xmlns:a16="http://schemas.microsoft.com/office/drawing/2014/main" id="{305D7822-F2DF-46D6-8BD8-6602D2DF815A}"/>
+              </a:ext>
+            </a:extLst>
+          </p:cNvPr>
+          <p:cNvSpPr>
+            <a:spLocks xmlns:a="http://schemas.openxmlformats.org/drawingml/2006/main" noGrp="1"/>
+          </p:cNvSpPr>
+          <p:nvPr/>
+        </p:nvSpPr>
+        <p:spPr>
+          <a:xfrm xmlns:a="http://schemas.openxmlformats.org/drawingml/2006/main">
+            <a:off x="685800" y="9334500"/>
+            <a:ext cx="171450" cy="171450"/>
+          </a:xfrm>
+          <a:prstGeom xmlns:a="http://schemas.openxmlformats.org/drawingml/2006/main" prst="ellipse">
+            <a:avLst/>
+          </a:prstGeom>
+          <a:solidFill xmlns:a="http://schemas.openxmlformats.org/drawingml/2006/main">
+            <a:srgbClr val="3D8DFF"/>
+          </a:solidFill>
+          <a:ln xmlns:a="http://schemas.openxmlformats.org/drawingml/2006/main" w="0">
+            <a:noFill/>
+            <a:prstDash val="solid"/>
+          </a:ln>
+        </p:spPr>
+      </p:sp>
+      <p:sp>
+        <p:nvSpPr>
+          <p:cNvPr id="10" name="limit-text-1">
+            <a:extLst xmlns:a="http://schemas.openxmlformats.org/drawingml/2006/main">
+              <a:ext uri="{FF2B5EF4-FFF2-40B4-BE49-F238E27FC236}">
+                <a16:creationId xmlns:a16="http://schemas.microsoft.com/office/drawing/2014/main" id="{D3AD3E4A-FFAB-4877-ACEA-4FBFD08E43A2}"/>
+              </a:ext>
+            </a:extLst>
+          </p:cNvPr>
+          <p:cNvSpPr>
+            <a:spLocks xmlns:a="http://schemas.openxmlformats.org/drawingml/2006/main" noGrp="1"/>
+          </p:cNvSpPr>
+          <p:nvPr/>
+        </p:nvSpPr>
+        <p:spPr>
+          <a:xfrm xmlns:a="http://schemas.openxmlformats.org/drawingml/2006/main">
+            <a:off x="1066800" y="9258300"/>
+            <a:ext cx="8096250" cy="457200"/>
           </a:xfrm>
           <a:prstGeom xmlns:a="http://schemas.openxmlformats.org/drawingml/2006/main" prst="rect">
             <a:avLst/>
@@ -9259,6 +9034,7 @@
           <a:lstStyle xmlns:a="http://schemas.openxmlformats.org/drawingml/2006/main"/>
           <a:p xmlns:a="http://schemas.openxmlformats.org/drawingml/2006/main">
             <a:pPr algn="l">
+              <a:buNone/>
               <a:defRPr sz="1875" b="1">
                 <a:solidFill>
                   <a:srgbClr val="07111C"/>
@@ -9277,21 +9053,201 @@
                 <a:ea typeface="Arial"/>
                 <a:cs typeface="Arial"/>
               </a:rPr>
-              <a:t>Executive Overview</a:t>
+              <a:t>Não valida conformidade API 5CT</a:t>
+            </a:r>
+          </a:p>
+        </p:txBody>
+      </p:sp>
+      <p:sp>
+        <p:nvSpPr>
+          <p:cNvPr id="11" name="limit-dot-2">
+            <a:extLst xmlns:a="http://schemas.openxmlformats.org/drawingml/2006/main">
+              <a:ext uri="{FF2B5EF4-FFF2-40B4-BE49-F238E27FC236}">
+                <a16:creationId xmlns:a16="http://schemas.microsoft.com/office/drawing/2014/main" id="{FEC69F0B-C565-4EF7-8E0B-4DA1FDF25114}"/>
+              </a:ext>
+            </a:extLst>
+          </p:cNvPr>
+          <p:cNvSpPr>
+            <a:spLocks xmlns:a="http://schemas.openxmlformats.org/drawingml/2006/main" noGrp="1"/>
+          </p:cNvSpPr>
+          <p:nvPr/>
+        </p:nvSpPr>
+        <p:spPr>
+          <a:xfrm xmlns:a="http://schemas.openxmlformats.org/drawingml/2006/main">
+            <a:off x="685800" y="10020300"/>
+            <a:ext cx="171450" cy="171450"/>
+          </a:xfrm>
+          <a:prstGeom xmlns:a="http://schemas.openxmlformats.org/drawingml/2006/main" prst="ellipse">
+            <a:avLst/>
+          </a:prstGeom>
+          <a:solidFill xmlns:a="http://schemas.openxmlformats.org/drawingml/2006/main">
+            <a:srgbClr val="3D8DFF"/>
+          </a:solidFill>
+          <a:ln xmlns:a="http://schemas.openxmlformats.org/drawingml/2006/main" w="0">
+            <a:noFill/>
+            <a:prstDash val="solid"/>
+          </a:ln>
+        </p:spPr>
+      </p:sp>
+      <p:sp>
+        <p:nvSpPr>
+          <p:cNvPr id="12" name="limit-text-2">
+            <a:extLst xmlns:a="http://schemas.openxmlformats.org/drawingml/2006/main">
+              <a:ext uri="{FF2B5EF4-FFF2-40B4-BE49-F238E27FC236}">
+                <a16:creationId xmlns:a16="http://schemas.microsoft.com/office/drawing/2014/main" id="{D5D2BA6F-7D85-4944-B581-D00C38FE69DE}"/>
+              </a:ext>
+            </a:extLst>
+          </p:cNvPr>
+          <p:cNvSpPr>
+            <a:spLocks xmlns:a="http://schemas.openxmlformats.org/drawingml/2006/main" noGrp="1"/>
+          </p:cNvSpPr>
+          <p:nvPr/>
+        </p:nvSpPr>
+        <p:spPr>
+          <a:xfrm xmlns:a="http://schemas.openxmlformats.org/drawingml/2006/main">
+            <a:off x="1066800" y="9944100"/>
+            <a:ext cx="8096250" cy="457200"/>
+          </a:xfrm>
+          <a:prstGeom xmlns:a="http://schemas.openxmlformats.org/drawingml/2006/main" prst="rect">
+            <a:avLst/>
+          </a:prstGeom>
+          <a:noFill xmlns:a="http://schemas.openxmlformats.org/drawingml/2006/main"/>
+          <a:ln xmlns:a="http://schemas.openxmlformats.org/drawingml/2006/main" w="0">
+            <a:noFill/>
+            <a:prstDash val="solid"/>
+          </a:ln>
+        </p:spPr>
+        <p:txBody>
+          <a:bodyPr xmlns:a="http://schemas.openxmlformats.org/drawingml/2006/main" anchor="t">
+            <a:normAutofit fontScale="100000"/>
+          </a:bodyPr>
+          <a:lstStyle xmlns:a="http://schemas.openxmlformats.org/drawingml/2006/main"/>
+          <a:p xmlns:a="http://schemas.openxmlformats.org/drawingml/2006/main">
+            <a:pPr algn="l">
+              <a:buNone/>
+              <a:defRPr sz="1875" b="1">
+                <a:solidFill>
+                  <a:srgbClr val="07111C"/>
+                </a:solidFill>
+                <a:latin typeface="Arial"/>
+                <a:ea typeface="Arial"/>
+                <a:cs typeface="Arial"/>
+              </a:defRPr>
+            </a:pPr>
+            <a:r>
+              <a:rPr sz="1875" b="1">
+                <a:solidFill>
+                  <a:srgbClr val="07111C"/>
+                </a:solidFill>
+                <a:latin typeface="Arial"/>
+                <a:ea typeface="Arial"/>
+                <a:cs typeface="Arial"/>
+              </a:rPr>
+              <a:t>Não promete ganho financeiro</a:t>
+            </a:r>
+          </a:p>
+        </p:txBody>
+      </p:sp>
+      <p:sp>
+        <p:nvSpPr>
+          <p:cNvPr id="13" name="limit-dot-3">
+            <a:extLst xmlns:a="http://schemas.openxmlformats.org/drawingml/2006/main">
+              <a:ext uri="{FF2B5EF4-FFF2-40B4-BE49-F238E27FC236}">
+                <a16:creationId xmlns:a16="http://schemas.microsoft.com/office/drawing/2014/main" id="{A0501082-7F39-4E60-973E-BBAE527130F2}"/>
+              </a:ext>
+            </a:extLst>
+          </p:cNvPr>
+          <p:cNvSpPr>
+            <a:spLocks xmlns:a="http://schemas.openxmlformats.org/drawingml/2006/main" noGrp="1"/>
+          </p:cNvSpPr>
+          <p:nvPr/>
+        </p:nvSpPr>
+        <p:spPr>
+          <a:xfrm xmlns:a="http://schemas.openxmlformats.org/drawingml/2006/main">
+            <a:off x="685800" y="10706100"/>
+            <a:ext cx="171450" cy="171450"/>
+          </a:xfrm>
+          <a:prstGeom xmlns:a="http://schemas.openxmlformats.org/drawingml/2006/main" prst="ellipse">
+            <a:avLst/>
+          </a:prstGeom>
+          <a:solidFill xmlns:a="http://schemas.openxmlformats.org/drawingml/2006/main">
+            <a:srgbClr val="E55B68"/>
+          </a:solidFill>
+          <a:ln xmlns:a="http://schemas.openxmlformats.org/drawingml/2006/main" w="0">
+            <a:noFill/>
+            <a:prstDash val="solid"/>
+          </a:ln>
+        </p:spPr>
+      </p:sp>
+      <p:sp>
+        <p:nvSpPr>
+          <p:cNvPr id="14" name="limit-text-3">
+            <a:extLst xmlns:a="http://schemas.openxmlformats.org/drawingml/2006/main">
+              <a:ext uri="{FF2B5EF4-FFF2-40B4-BE49-F238E27FC236}">
+                <a16:creationId xmlns:a16="http://schemas.microsoft.com/office/drawing/2014/main" id="{0CB92674-1FE1-4518-AEDB-2CC9839F82D2}"/>
+              </a:ext>
+            </a:extLst>
+          </p:cNvPr>
+          <p:cNvSpPr>
+            <a:spLocks xmlns:a="http://schemas.openxmlformats.org/drawingml/2006/main" noGrp="1"/>
+          </p:cNvSpPr>
+          <p:nvPr/>
+        </p:nvSpPr>
+        <p:spPr>
+          <a:xfrm xmlns:a="http://schemas.openxmlformats.org/drawingml/2006/main">
+            <a:off x="1066800" y="10629900"/>
+            <a:ext cx="8096250" cy="457200"/>
+          </a:xfrm>
+          <a:prstGeom xmlns:a="http://schemas.openxmlformats.org/drawingml/2006/main" prst="rect">
+            <a:avLst/>
+          </a:prstGeom>
+          <a:noFill xmlns:a="http://schemas.openxmlformats.org/drawingml/2006/main"/>
+          <a:ln xmlns:a="http://schemas.openxmlformats.org/drawingml/2006/main" w="0">
+            <a:noFill/>
+            <a:prstDash val="solid"/>
+          </a:ln>
+        </p:spPr>
+        <p:txBody>
+          <a:bodyPr xmlns:a="http://schemas.openxmlformats.org/drawingml/2006/main" anchor="t">
+            <a:normAutofit fontScale="100000"/>
+          </a:bodyPr>
+          <a:lstStyle xmlns:a="http://schemas.openxmlformats.org/drawingml/2006/main"/>
+          <a:p xmlns:a="http://schemas.openxmlformats.org/drawingml/2006/main">
+            <a:pPr algn="l">
+              <a:buNone/>
+              <a:defRPr sz="1875" b="1">
+                <a:solidFill>
+                  <a:srgbClr val="07111C"/>
+                </a:solidFill>
+                <a:latin typeface="Arial"/>
+                <a:ea typeface="Arial"/>
+                <a:cs typeface="Arial"/>
+              </a:defRPr>
+            </a:pPr>
+            <a:r>
+              <a:rPr sz="1875" b="1">
+                <a:solidFill>
+                  <a:srgbClr val="07111C"/>
+                </a:solidFill>
+                <a:latin typeface="Arial"/>
+                <a:ea typeface="Arial"/>
+                <a:cs typeface="Arial"/>
+              </a:rPr>
+              <a:t>Não controla equipamentos</a:t>
             </a:r>
           </a:p>
         </p:txBody>
       </p:sp>
       <p:cxnSp>
         <p:nvCxnSpPr>
-          <p:cNvPr id="33" name="product-rule-0"/>
+          <p:cNvPr id="64" name="footer-rule-9"/>
           <p:cNvCxnSpPr/>
           <p:nvPr/>
         </p:nvCxnSpPr>
         <p:spPr>
           <a:xfrm xmlns:a="http://schemas.openxmlformats.org/drawingml/2006/main">
-            <a:off x="1485900" y="4133850"/>
-            <a:ext cx="3429000" cy="0"/>
+            <a:off x="685800" y="12039600"/>
+            <a:ext cx="8915400" cy="0"/>
           </a:xfrm>
           <a:prstGeom xmlns:a="http://schemas.openxmlformats.org/drawingml/2006/main" prst="straightConnector1">
             <a:avLst/>
@@ -9306,705 +9262,10 @@
       </p:cxnSp>
       <p:sp>
         <p:nvSpPr>
-          <p:cNvPr id="9" name="product-index-1">
-            <a:extLst xmlns:a="http://schemas.openxmlformats.org/drawingml/2006/main">
-              <a:ext uri="{FF2B5EF4-FFF2-40B4-BE49-F238E27FC236}">
-                <a16:creationId xmlns:a16="http://schemas.microsoft.com/office/drawing/2014/main" id="{EBF830FF-E4DE-4E0C-9072-A52B69F8773E}"/>
-              </a:ext>
-            </a:extLst>
-          </p:cNvPr>
-          <p:cNvSpPr>
-            <a:spLocks xmlns:a="http://schemas.openxmlformats.org/drawingml/2006/main" noGrp="1"/>
-          </p:cNvSpPr>
-          <p:nvPr/>
-        </p:nvSpPr>
-        <p:spPr>
-          <a:xfrm xmlns:a="http://schemas.openxmlformats.org/drawingml/2006/main">
-            <a:off x="685800" y="4610100"/>
-            <a:ext cx="628650" cy="438150"/>
-          </a:xfrm>
-          <a:prstGeom xmlns:a="http://schemas.openxmlformats.org/drawingml/2006/main" prst="rect">
-            <a:avLst/>
-          </a:prstGeom>
-          <a:noFill xmlns:a="http://schemas.openxmlformats.org/drawingml/2006/main"/>
-          <a:ln xmlns:a="http://schemas.openxmlformats.org/drawingml/2006/main" w="0">
-            <a:noFill/>
-            <a:prstDash val="solid"/>
-          </a:ln>
-        </p:spPr>
-        <p:txBody>
-          <a:bodyPr xmlns:a="http://schemas.openxmlformats.org/drawingml/2006/main" anchor="t">
-            <a:normAutofit fontScale="100000"/>
-          </a:bodyPr>
-          <a:lstStyle xmlns:a="http://schemas.openxmlformats.org/drawingml/2006/main"/>
-          <a:p xmlns:a="http://schemas.openxmlformats.org/drawingml/2006/main">
-            <a:pPr algn="l">
-              <a:defRPr sz="1650" b="1">
-                <a:solidFill>
-                  <a:srgbClr val="3D8DFF"/>
-                </a:solidFill>
-                <a:latin typeface="Arial"/>
-                <a:ea typeface="Arial"/>
-                <a:cs typeface="Arial"/>
-              </a:defRPr>
-            </a:pPr>
-            <a:r>
-              <a:rPr sz="1650" b="1">
-                <a:solidFill>
-                  <a:srgbClr val="3D8DFF"/>
-                </a:solidFill>
-                <a:latin typeface="Arial"/>
-                <a:ea typeface="Arial"/>
-                <a:cs typeface="Arial"/>
-              </a:rPr>
-              <a:t>02</a:t>
-            </a:r>
-          </a:p>
-        </p:txBody>
-      </p:sp>
-      <p:sp>
-        <p:nvSpPr>
-          <p:cNvPr id="10" name="product-page-1">
-            <a:extLst xmlns:a="http://schemas.openxmlformats.org/drawingml/2006/main">
-              <a:ext uri="{FF2B5EF4-FFF2-40B4-BE49-F238E27FC236}">
-                <a16:creationId xmlns:a16="http://schemas.microsoft.com/office/drawing/2014/main" id="{BC167A51-2493-4275-B03A-235C4AA6B681}"/>
-              </a:ext>
-            </a:extLst>
-          </p:cNvPr>
-          <p:cNvSpPr>
-            <a:spLocks xmlns:a="http://schemas.openxmlformats.org/drawingml/2006/main" noGrp="1"/>
-          </p:cNvSpPr>
-          <p:nvPr/>
-        </p:nvSpPr>
-        <p:spPr>
-          <a:xfrm xmlns:a="http://schemas.openxmlformats.org/drawingml/2006/main">
-            <a:off x="1485900" y="4552950"/>
-            <a:ext cx="3429000" cy="552450"/>
-          </a:xfrm>
-          <a:prstGeom xmlns:a="http://schemas.openxmlformats.org/drawingml/2006/main" prst="rect">
-            <a:avLst/>
-          </a:prstGeom>
-          <a:noFill xmlns:a="http://schemas.openxmlformats.org/drawingml/2006/main"/>
-          <a:ln xmlns:a="http://schemas.openxmlformats.org/drawingml/2006/main" w="0">
-            <a:noFill/>
-            <a:prstDash val="solid"/>
-          </a:ln>
-        </p:spPr>
-        <p:txBody>
-          <a:bodyPr xmlns:a="http://schemas.openxmlformats.org/drawingml/2006/main" anchor="t">
-            <a:normAutofit fontScale="100000"/>
-          </a:bodyPr>
-          <a:lstStyle xmlns:a="http://schemas.openxmlformats.org/drawingml/2006/main"/>
-          <a:p xmlns:a="http://schemas.openxmlformats.org/drawingml/2006/main">
-            <a:pPr algn="l">
-              <a:defRPr sz="1875" b="1">
-                <a:solidFill>
-                  <a:srgbClr val="07111C"/>
-                </a:solidFill>
-                <a:latin typeface="Arial"/>
-                <a:ea typeface="Arial"/>
-                <a:cs typeface="Arial"/>
-              </a:defRPr>
-            </a:pPr>
-            <a:r>
-              <a:rPr sz="1875" b="1">
-                <a:solidFill>
-                  <a:srgbClr val="07111C"/>
-                </a:solidFill>
-                <a:latin typeface="Arial"/>
-                <a:ea typeface="Arial"/>
-                <a:cs typeface="Arial"/>
-              </a:rPr>
-              <a:t>Root Cause &amp; Explainability</a:t>
-            </a:r>
-          </a:p>
-        </p:txBody>
-      </p:sp>
-      <p:cxnSp>
-        <p:nvCxnSpPr>
-          <p:cNvPr id="36" name="product-rule-1"/>
-          <p:cNvCxnSpPr/>
-          <p:nvPr/>
-        </p:nvCxnSpPr>
-        <p:spPr>
-          <a:xfrm xmlns:a="http://schemas.openxmlformats.org/drawingml/2006/main">
-            <a:off x="1485900" y="5200650"/>
-            <a:ext cx="3429000" cy="0"/>
-          </a:xfrm>
-          <a:prstGeom xmlns:a="http://schemas.openxmlformats.org/drawingml/2006/main" prst="straightConnector1">
-            <a:avLst/>
-          </a:prstGeom>
-          <a:ln xmlns:a="http://schemas.openxmlformats.org/drawingml/2006/main" w="9525">
-            <a:solidFill>
-              <a:srgbClr val="BCC4CC"/>
-            </a:solidFill>
-            <a:prstDash val="solid"/>
-          </a:ln>
-        </p:spPr>
-      </p:cxnSp>
-      <p:sp>
-        <p:nvSpPr>
-          <p:cNvPr id="12" name="product-index-2">
-            <a:extLst xmlns:a="http://schemas.openxmlformats.org/drawingml/2006/main">
-              <a:ext uri="{FF2B5EF4-FFF2-40B4-BE49-F238E27FC236}">
-                <a16:creationId xmlns:a16="http://schemas.microsoft.com/office/drawing/2014/main" id="{32B4761E-026D-488B-9A42-FCE986DB702B}"/>
-              </a:ext>
-            </a:extLst>
-          </p:cNvPr>
-          <p:cNvSpPr>
-            <a:spLocks xmlns:a="http://schemas.openxmlformats.org/drawingml/2006/main" noGrp="1"/>
-          </p:cNvSpPr>
-          <p:nvPr/>
-        </p:nvSpPr>
-        <p:spPr>
-          <a:xfrm xmlns:a="http://schemas.openxmlformats.org/drawingml/2006/main">
-            <a:off x="685800" y="5676900"/>
-            <a:ext cx="628650" cy="438150"/>
-          </a:xfrm>
-          <a:prstGeom xmlns:a="http://schemas.openxmlformats.org/drawingml/2006/main" prst="rect">
-            <a:avLst/>
-          </a:prstGeom>
-          <a:noFill xmlns:a="http://schemas.openxmlformats.org/drawingml/2006/main"/>
-          <a:ln xmlns:a="http://schemas.openxmlformats.org/drawingml/2006/main" w="0">
-            <a:noFill/>
-            <a:prstDash val="solid"/>
-          </a:ln>
-        </p:spPr>
-        <p:txBody>
-          <a:bodyPr xmlns:a="http://schemas.openxmlformats.org/drawingml/2006/main" anchor="t">
-            <a:normAutofit fontScale="100000"/>
-          </a:bodyPr>
-          <a:lstStyle xmlns:a="http://schemas.openxmlformats.org/drawingml/2006/main"/>
-          <a:p xmlns:a="http://schemas.openxmlformats.org/drawingml/2006/main">
-            <a:pPr algn="l">
-              <a:defRPr sz="1650" b="1">
-                <a:solidFill>
-                  <a:srgbClr val="3D8DFF"/>
-                </a:solidFill>
-                <a:latin typeface="Arial"/>
-                <a:ea typeface="Arial"/>
-                <a:cs typeface="Arial"/>
-              </a:defRPr>
-            </a:pPr>
-            <a:r>
-              <a:rPr sz="1650" b="1">
-                <a:solidFill>
-                  <a:srgbClr val="3D8DFF"/>
-                </a:solidFill>
-                <a:latin typeface="Arial"/>
-                <a:ea typeface="Arial"/>
-                <a:cs typeface="Arial"/>
-              </a:rPr>
-              <a:t>03</a:t>
-            </a:r>
-          </a:p>
-        </p:txBody>
-      </p:sp>
-      <p:sp>
-        <p:nvSpPr>
-          <p:cNvPr id="13" name="product-page-2">
-            <a:extLst xmlns:a="http://schemas.openxmlformats.org/drawingml/2006/main">
-              <a:ext uri="{FF2B5EF4-FFF2-40B4-BE49-F238E27FC236}">
-                <a16:creationId xmlns:a16="http://schemas.microsoft.com/office/drawing/2014/main" id="{DAA49201-0452-461D-8554-51B5EC018777}"/>
-              </a:ext>
-            </a:extLst>
-          </p:cNvPr>
-          <p:cNvSpPr>
-            <a:spLocks xmlns:a="http://schemas.openxmlformats.org/drawingml/2006/main" noGrp="1"/>
-          </p:cNvSpPr>
-          <p:nvPr/>
-        </p:nvSpPr>
-        <p:spPr>
-          <a:xfrm xmlns:a="http://schemas.openxmlformats.org/drawingml/2006/main">
-            <a:off x="1485900" y="5619750"/>
-            <a:ext cx="3429000" cy="552450"/>
-          </a:xfrm>
-          <a:prstGeom xmlns:a="http://schemas.openxmlformats.org/drawingml/2006/main" prst="rect">
-            <a:avLst/>
-          </a:prstGeom>
-          <a:noFill xmlns:a="http://schemas.openxmlformats.org/drawingml/2006/main"/>
-          <a:ln xmlns:a="http://schemas.openxmlformats.org/drawingml/2006/main" w="0">
-            <a:noFill/>
-            <a:prstDash val="solid"/>
-          </a:ln>
-        </p:spPr>
-        <p:txBody>
-          <a:bodyPr xmlns:a="http://schemas.openxmlformats.org/drawingml/2006/main" anchor="t">
-            <a:normAutofit fontScale="100000"/>
-          </a:bodyPr>
-          <a:lstStyle xmlns:a="http://schemas.openxmlformats.org/drawingml/2006/main"/>
-          <a:p xmlns:a="http://schemas.openxmlformats.org/drawingml/2006/main">
-            <a:pPr algn="l">
-              <a:defRPr sz="1875" b="1">
-                <a:solidFill>
-                  <a:srgbClr val="07111C"/>
-                </a:solidFill>
-                <a:latin typeface="Arial"/>
-                <a:ea typeface="Arial"/>
-                <a:cs typeface="Arial"/>
-              </a:defRPr>
-            </a:pPr>
-            <a:r>
-              <a:rPr sz="1875" b="1">
-                <a:solidFill>
-                  <a:srgbClr val="07111C"/>
-                </a:solidFill>
-                <a:latin typeface="Arial"/>
-                <a:ea typeface="Arial"/>
-                <a:cs typeface="Arial"/>
-              </a:rPr>
-              <a:t>Forecast &amp; Risk</a:t>
-            </a:r>
-          </a:p>
-        </p:txBody>
-      </p:sp>
-      <p:cxnSp>
-        <p:nvCxnSpPr>
-          <p:cNvPr id="39" name="product-rule-2"/>
-          <p:cNvCxnSpPr/>
-          <p:nvPr/>
-        </p:nvCxnSpPr>
-        <p:spPr>
-          <a:xfrm xmlns:a="http://schemas.openxmlformats.org/drawingml/2006/main">
-            <a:off x="1485900" y="6267450"/>
-            <a:ext cx="3429000" cy="0"/>
-          </a:xfrm>
-          <a:prstGeom xmlns:a="http://schemas.openxmlformats.org/drawingml/2006/main" prst="straightConnector1">
-            <a:avLst/>
-          </a:prstGeom>
-          <a:ln xmlns:a="http://schemas.openxmlformats.org/drawingml/2006/main" w="9525">
-            <a:solidFill>
-              <a:srgbClr val="BCC4CC"/>
-            </a:solidFill>
-            <a:prstDash val="solid"/>
-          </a:ln>
-        </p:spPr>
-      </p:cxnSp>
-      <p:sp>
-        <p:nvSpPr>
-          <p:cNvPr id="15" name="product-index-3">
-            <a:extLst xmlns:a="http://schemas.openxmlformats.org/drawingml/2006/main">
-              <a:ext uri="{FF2B5EF4-FFF2-40B4-BE49-F238E27FC236}">
-                <a16:creationId xmlns:a16="http://schemas.microsoft.com/office/drawing/2014/main" id="{00D96976-D4CC-4D65-B420-80FBC0257C03}"/>
-              </a:ext>
-            </a:extLst>
-          </p:cNvPr>
-          <p:cNvSpPr>
-            <a:spLocks xmlns:a="http://schemas.openxmlformats.org/drawingml/2006/main" noGrp="1"/>
-          </p:cNvSpPr>
-          <p:nvPr/>
-        </p:nvSpPr>
-        <p:spPr>
-          <a:xfrm xmlns:a="http://schemas.openxmlformats.org/drawingml/2006/main">
-            <a:off x="685800" y="6743700"/>
-            <a:ext cx="628650" cy="438150"/>
-          </a:xfrm>
-          <a:prstGeom xmlns:a="http://schemas.openxmlformats.org/drawingml/2006/main" prst="rect">
-            <a:avLst/>
-          </a:prstGeom>
-          <a:noFill xmlns:a="http://schemas.openxmlformats.org/drawingml/2006/main"/>
-          <a:ln xmlns:a="http://schemas.openxmlformats.org/drawingml/2006/main" w="0">
-            <a:noFill/>
-            <a:prstDash val="solid"/>
-          </a:ln>
-        </p:spPr>
-        <p:txBody>
-          <a:bodyPr xmlns:a="http://schemas.openxmlformats.org/drawingml/2006/main" anchor="t">
-            <a:normAutofit fontScale="100000"/>
-          </a:bodyPr>
-          <a:lstStyle xmlns:a="http://schemas.openxmlformats.org/drawingml/2006/main"/>
-          <a:p xmlns:a="http://schemas.openxmlformats.org/drawingml/2006/main">
-            <a:pPr algn="l">
-              <a:defRPr sz="1650" b="1">
-                <a:solidFill>
-                  <a:srgbClr val="3D8DFF"/>
-                </a:solidFill>
-                <a:latin typeface="Arial"/>
-                <a:ea typeface="Arial"/>
-                <a:cs typeface="Arial"/>
-              </a:defRPr>
-            </a:pPr>
-            <a:r>
-              <a:rPr sz="1650" b="1">
-                <a:solidFill>
-                  <a:srgbClr val="3D8DFF"/>
-                </a:solidFill>
-                <a:latin typeface="Arial"/>
-                <a:ea typeface="Arial"/>
-                <a:cs typeface="Arial"/>
-              </a:rPr>
-              <a:t>04</a:t>
-            </a:r>
-          </a:p>
-        </p:txBody>
-      </p:sp>
-      <p:sp>
-        <p:nvSpPr>
-          <p:cNvPr id="16" name="product-page-3">
-            <a:extLst xmlns:a="http://schemas.openxmlformats.org/drawingml/2006/main">
-              <a:ext uri="{FF2B5EF4-FFF2-40B4-BE49-F238E27FC236}">
-                <a16:creationId xmlns:a16="http://schemas.microsoft.com/office/drawing/2014/main" id="{568E5AE2-EE32-436A-88F0-35FA6D0AFAF0}"/>
-              </a:ext>
-            </a:extLst>
-          </p:cNvPr>
-          <p:cNvSpPr>
-            <a:spLocks xmlns:a="http://schemas.openxmlformats.org/drawingml/2006/main" noGrp="1"/>
-          </p:cNvSpPr>
-          <p:nvPr/>
-        </p:nvSpPr>
-        <p:spPr>
-          <a:xfrm xmlns:a="http://schemas.openxmlformats.org/drawingml/2006/main">
-            <a:off x="1485900" y="6686550"/>
-            <a:ext cx="3429000" cy="552450"/>
-          </a:xfrm>
-          <a:prstGeom xmlns:a="http://schemas.openxmlformats.org/drawingml/2006/main" prst="rect">
-            <a:avLst/>
-          </a:prstGeom>
-          <a:noFill xmlns:a="http://schemas.openxmlformats.org/drawingml/2006/main"/>
-          <a:ln xmlns:a="http://schemas.openxmlformats.org/drawingml/2006/main" w="0">
-            <a:noFill/>
-            <a:prstDash val="solid"/>
-          </a:ln>
-        </p:spPr>
-        <p:txBody>
-          <a:bodyPr xmlns:a="http://schemas.openxmlformats.org/drawingml/2006/main" anchor="t">
-            <a:normAutofit fontScale="100000"/>
-          </a:bodyPr>
-          <a:lstStyle xmlns:a="http://schemas.openxmlformats.org/drawingml/2006/main"/>
-          <a:p xmlns:a="http://schemas.openxmlformats.org/drawingml/2006/main">
-            <a:pPr algn="l">
-              <a:defRPr sz="1875" b="1">
-                <a:solidFill>
-                  <a:srgbClr val="07111C"/>
-                </a:solidFill>
-                <a:latin typeface="Arial"/>
-                <a:ea typeface="Arial"/>
-                <a:cs typeface="Arial"/>
-              </a:defRPr>
-            </a:pPr>
-            <a:r>
-              <a:rPr sz="1875" b="1">
-                <a:solidFill>
-                  <a:srgbClr val="07111C"/>
-                </a:solidFill>
-                <a:latin typeface="Arial"/>
-                <a:ea typeface="Arial"/>
-                <a:cs typeface="Arial"/>
-              </a:rPr>
-              <a:t>Scenario Lab</a:t>
-            </a:r>
-          </a:p>
-        </p:txBody>
-      </p:sp>
-      <p:cxnSp>
-        <p:nvCxnSpPr>
-          <p:cNvPr id="42" name="product-rule-3"/>
-          <p:cNvCxnSpPr/>
-          <p:nvPr/>
-        </p:nvCxnSpPr>
-        <p:spPr>
-          <a:xfrm xmlns:a="http://schemas.openxmlformats.org/drawingml/2006/main">
-            <a:off x="1485900" y="7334250"/>
-            <a:ext cx="3429000" cy="0"/>
-          </a:xfrm>
-          <a:prstGeom xmlns:a="http://schemas.openxmlformats.org/drawingml/2006/main" prst="straightConnector1">
-            <a:avLst/>
-          </a:prstGeom>
-          <a:ln xmlns:a="http://schemas.openxmlformats.org/drawingml/2006/main" w="9525">
-            <a:solidFill>
-              <a:srgbClr val="BCC4CC"/>
-            </a:solidFill>
-            <a:prstDash val="solid"/>
-          </a:ln>
-        </p:spPr>
-      </p:cxnSp>
-      <p:sp>
-        <p:nvSpPr>
-          <p:cNvPr id="18" name="product-index-4">
-            <a:extLst xmlns:a="http://schemas.openxmlformats.org/drawingml/2006/main">
-              <a:ext uri="{FF2B5EF4-FFF2-40B4-BE49-F238E27FC236}">
-                <a16:creationId xmlns:a16="http://schemas.microsoft.com/office/drawing/2014/main" id="{24741B3C-62D6-4B77-99E1-12FB6F7AEE3D}"/>
-              </a:ext>
-            </a:extLst>
-          </p:cNvPr>
-          <p:cNvSpPr>
-            <a:spLocks xmlns:a="http://schemas.openxmlformats.org/drawingml/2006/main" noGrp="1"/>
-          </p:cNvSpPr>
-          <p:nvPr/>
-        </p:nvSpPr>
-        <p:spPr>
-          <a:xfrm xmlns:a="http://schemas.openxmlformats.org/drawingml/2006/main">
-            <a:off x="685800" y="7810500"/>
-            <a:ext cx="628650" cy="438150"/>
-          </a:xfrm>
-          <a:prstGeom xmlns:a="http://schemas.openxmlformats.org/drawingml/2006/main" prst="rect">
-            <a:avLst/>
-          </a:prstGeom>
-          <a:noFill xmlns:a="http://schemas.openxmlformats.org/drawingml/2006/main"/>
-          <a:ln xmlns:a="http://schemas.openxmlformats.org/drawingml/2006/main" w="0">
-            <a:noFill/>
-            <a:prstDash val="solid"/>
-          </a:ln>
-        </p:spPr>
-        <p:txBody>
-          <a:bodyPr xmlns:a="http://schemas.openxmlformats.org/drawingml/2006/main" anchor="t">
-            <a:normAutofit fontScale="100000"/>
-          </a:bodyPr>
-          <a:lstStyle xmlns:a="http://schemas.openxmlformats.org/drawingml/2006/main"/>
-          <a:p xmlns:a="http://schemas.openxmlformats.org/drawingml/2006/main">
-            <a:pPr algn="l">
-              <a:defRPr sz="1650" b="1">
-                <a:solidFill>
-                  <a:srgbClr val="3D8DFF"/>
-                </a:solidFill>
-                <a:latin typeface="Arial"/>
-                <a:ea typeface="Arial"/>
-                <a:cs typeface="Arial"/>
-              </a:defRPr>
-            </a:pPr>
-            <a:r>
-              <a:rPr sz="1650" b="1">
-                <a:solidFill>
-                  <a:srgbClr val="3D8DFF"/>
-                </a:solidFill>
-                <a:latin typeface="Arial"/>
-                <a:ea typeface="Arial"/>
-                <a:cs typeface="Arial"/>
-              </a:rPr>
-              <a:t>05</a:t>
-            </a:r>
-          </a:p>
-        </p:txBody>
-      </p:sp>
-      <p:sp>
-        <p:nvSpPr>
-          <p:cNvPr id="19" name="product-page-4">
-            <a:extLst xmlns:a="http://schemas.openxmlformats.org/drawingml/2006/main">
-              <a:ext uri="{FF2B5EF4-FFF2-40B4-BE49-F238E27FC236}">
-                <a16:creationId xmlns:a16="http://schemas.microsoft.com/office/drawing/2014/main" id="{F17CF344-F140-4841-BCBF-3E810813091C}"/>
-              </a:ext>
-            </a:extLst>
-          </p:cNvPr>
-          <p:cNvSpPr>
-            <a:spLocks xmlns:a="http://schemas.openxmlformats.org/drawingml/2006/main" noGrp="1"/>
-          </p:cNvSpPr>
-          <p:nvPr/>
-        </p:nvSpPr>
-        <p:spPr>
-          <a:xfrm xmlns:a="http://schemas.openxmlformats.org/drawingml/2006/main">
-            <a:off x="1485900" y="7753350"/>
-            <a:ext cx="3429000" cy="552450"/>
-          </a:xfrm>
-          <a:prstGeom xmlns:a="http://schemas.openxmlformats.org/drawingml/2006/main" prst="rect">
-            <a:avLst/>
-          </a:prstGeom>
-          <a:noFill xmlns:a="http://schemas.openxmlformats.org/drawingml/2006/main"/>
-          <a:ln xmlns:a="http://schemas.openxmlformats.org/drawingml/2006/main" w="0">
-            <a:noFill/>
-            <a:prstDash val="solid"/>
-          </a:ln>
-        </p:spPr>
-        <p:txBody>
-          <a:bodyPr xmlns:a="http://schemas.openxmlformats.org/drawingml/2006/main" anchor="t">
-            <a:normAutofit fontScale="100000"/>
-          </a:bodyPr>
-          <a:lstStyle xmlns:a="http://schemas.openxmlformats.org/drawingml/2006/main"/>
-          <a:p xmlns:a="http://schemas.openxmlformats.org/drawingml/2006/main">
-            <a:pPr algn="l">
-              <a:defRPr sz="1875" b="1">
-                <a:solidFill>
-                  <a:srgbClr val="07111C"/>
-                </a:solidFill>
-                <a:latin typeface="Arial"/>
-                <a:ea typeface="Arial"/>
-                <a:cs typeface="Arial"/>
-              </a:defRPr>
-            </a:pPr>
-            <a:r>
-              <a:rPr sz="1875" b="1">
-                <a:solidFill>
-                  <a:srgbClr val="07111C"/>
-                </a:solidFill>
-                <a:latin typeface="Arial"/>
-                <a:ea typeface="Arial"/>
-                <a:cs typeface="Arial"/>
-              </a:rPr>
-              <a:t>Model Reliability</a:t>
-            </a:r>
-          </a:p>
-        </p:txBody>
-      </p:sp>
-      <p:pic>
-        <p:nvPicPr>
-          <p:cNvPr id="45" name=""/>
-          <p:cNvPicPr>
-            <a:picLocks xmlns:a="http://schemas.openxmlformats.org/drawingml/2006/main" noChangeAspect="1"/>
-          </p:cNvPicPr>
-          <p:nvPr/>
-        </p:nvPicPr>
-        <p:blipFill>
-          <a:blip xmlns:r="http://schemas.openxmlformats.org/officeDocument/2006/relationships" xmlns:a="http://schemas.openxmlformats.org/drawingml/2006/main" r:embed="Rb21448187ac14a2a"/>
-          <a:srcRect xmlns:a="http://schemas.openxmlformats.org/drawingml/2006/main" l="23462" t="0" r="23462" b="0"/>
-          <a:stretch xmlns:a="http://schemas.openxmlformats.org/drawingml/2006/main">
-            <a:fillRect l="0" t="0" r="0" b="0"/>
-          </a:stretch>
-        </p:blipFill>
-        <p:spPr>
-          <a:xfrm xmlns:a="http://schemas.openxmlformats.org/drawingml/2006/main">
-            <a:off x="5219700" y="3543300"/>
-            <a:ext cx="4381500" cy="6191250"/>
-          </a:xfrm>
-          <a:prstGeom xmlns:a="http://schemas.openxmlformats.org/drawingml/2006/main" prst="roundRect">
-            <a:avLst>
-              <a:gd name="adj" fmla="val 2609"/>
-            </a:avLst>
-          </a:prstGeom>
-        </p:spPr>
-      </p:pic>
-      <p:sp>
-        <p:nvSpPr>
-          <p:cNvPr id="21" name="product-powerbi">
-            <a:extLst xmlns:a="http://schemas.openxmlformats.org/drawingml/2006/main">
-              <a:ext uri="{FF2B5EF4-FFF2-40B4-BE49-F238E27FC236}">
-                <a16:creationId xmlns:a16="http://schemas.microsoft.com/office/drawing/2014/main" id="{801DA8E9-9406-4FF1-A04E-0239F4D8BCDE}"/>
-              </a:ext>
-            </a:extLst>
-          </p:cNvPr>
-          <p:cNvSpPr>
-            <a:spLocks xmlns:a="http://schemas.openxmlformats.org/drawingml/2006/main" noGrp="1"/>
-          </p:cNvSpPr>
-          <p:nvPr/>
-        </p:nvSpPr>
-        <p:spPr>
-          <a:xfrm xmlns:a="http://schemas.openxmlformats.org/drawingml/2006/main">
-            <a:off x="685800" y="9829800"/>
-            <a:ext cx="1714500" cy="342900"/>
-          </a:xfrm>
-          <a:prstGeom xmlns:a="http://schemas.openxmlformats.org/drawingml/2006/main" prst="rect">
-            <a:avLst/>
-          </a:prstGeom>
-          <a:noFill xmlns:a="http://schemas.openxmlformats.org/drawingml/2006/main"/>
-          <a:ln xmlns:a="http://schemas.openxmlformats.org/drawingml/2006/main" w="0">
-            <a:noFill/>
-            <a:prstDash val="solid"/>
-          </a:ln>
-        </p:spPr>
-        <p:txBody>
-          <a:bodyPr xmlns:a="http://schemas.openxmlformats.org/drawingml/2006/main" anchor="t">
-            <a:normAutofit fontScale="100000"/>
-          </a:bodyPr>
-          <a:lstStyle xmlns:a="http://schemas.openxmlformats.org/drawingml/2006/main"/>
-          <a:p xmlns:a="http://schemas.openxmlformats.org/drawingml/2006/main">
-            <a:pPr algn="l">
-              <a:defRPr sz="1350" b="1">
-                <a:solidFill>
-                  <a:srgbClr val="3D8DFF"/>
-                </a:solidFill>
-                <a:latin typeface="Arial"/>
-                <a:ea typeface="Arial"/>
-                <a:cs typeface="Arial"/>
-              </a:defRPr>
-            </a:pPr>
-            <a:r>
-              <a:rPr sz="1350" b="1">
-                <a:solidFill>
-                  <a:srgbClr val="3D8DFF"/>
-                </a:solidFill>
-                <a:latin typeface="Arial"/>
-                <a:ea typeface="Arial"/>
-                <a:cs typeface="Arial"/>
-              </a:rPr>
-              <a:t>POWER BI</a:t>
-            </a:r>
-          </a:p>
-        </p:txBody>
-      </p:sp>
-      <p:sp>
-        <p:nvSpPr>
-          <p:cNvPr id="22" name="product-powerbi-proof">
-            <a:extLst xmlns:a="http://schemas.openxmlformats.org/drawingml/2006/main">
-              <a:ext uri="{FF2B5EF4-FFF2-40B4-BE49-F238E27FC236}">
-                <a16:creationId xmlns:a16="http://schemas.microsoft.com/office/drawing/2014/main" id="{3DFFE398-2209-4AD2-BFFA-486F337BB262}"/>
-              </a:ext>
-            </a:extLst>
-          </p:cNvPr>
-          <p:cNvSpPr>
-            <a:spLocks xmlns:a="http://schemas.openxmlformats.org/drawingml/2006/main" noGrp="1"/>
-          </p:cNvSpPr>
-          <p:nvPr/>
-        </p:nvSpPr>
-        <p:spPr>
-          <a:xfrm xmlns:a="http://schemas.openxmlformats.org/drawingml/2006/main">
-            <a:off x="685800" y="10248900"/>
-            <a:ext cx="8915400" cy="552450"/>
-          </a:xfrm>
-          <a:prstGeom xmlns:a="http://schemas.openxmlformats.org/drawingml/2006/main" prst="rect">
-            <a:avLst/>
-          </a:prstGeom>
-          <a:noFill xmlns:a="http://schemas.openxmlformats.org/drawingml/2006/main"/>
-          <a:ln xmlns:a="http://schemas.openxmlformats.org/drawingml/2006/main" w="0">
-            <a:noFill/>
-            <a:prstDash val="solid"/>
-          </a:ln>
-        </p:spPr>
-        <p:txBody>
-          <a:bodyPr xmlns:a="http://schemas.openxmlformats.org/drawingml/2006/main" anchor="t">
-            <a:normAutofit fontScale="100000"/>
-          </a:bodyPr>
-          <a:lstStyle xmlns:a="http://schemas.openxmlformats.org/drawingml/2006/main"/>
-          <a:p xmlns:a="http://schemas.openxmlformats.org/drawingml/2006/main">
-            <a:pPr algn="l">
-              <a:defRPr sz="2175" b="1">
-                <a:solidFill>
-                  <a:srgbClr val="07111C"/>
-                </a:solidFill>
-                <a:latin typeface="Arial"/>
-                <a:ea typeface="Arial"/>
-                <a:cs typeface="Arial"/>
-              </a:defRPr>
-            </a:pPr>
-            <a:r>
-              <a:rPr sz="2175" b="1">
-                <a:solidFill>
-                  <a:srgbClr val="07111C"/>
-                </a:solidFill>
-                <a:latin typeface="Arial"/>
-                <a:ea typeface="Arial"/>
-                <a:cs typeface="Arial"/>
-              </a:rPr>
-              <a:t>13 tabelas · 26 arquivos verificados · modelo estrela</a:t>
-            </a:r>
-          </a:p>
-        </p:txBody>
-      </p:sp>
-      <p:cxnSp>
-        <p:nvCxnSpPr>
-          <p:cNvPr id="48" name="footer-rule-8"/>
-          <p:cNvCxnSpPr/>
-          <p:nvPr/>
-        </p:nvCxnSpPr>
-        <p:spPr>
-          <a:xfrm xmlns:a="http://schemas.openxmlformats.org/drawingml/2006/main">
-            <a:off x="685800" y="12039600"/>
-            <a:ext cx="8915400" cy="0"/>
-          </a:xfrm>
-          <a:prstGeom xmlns:a="http://schemas.openxmlformats.org/drawingml/2006/main" prst="straightConnector1">
-            <a:avLst/>
-          </a:prstGeom>
-          <a:ln xmlns:a="http://schemas.openxmlformats.org/drawingml/2006/main" w="9525">
-            <a:solidFill>
-              <a:srgbClr val="BCC4CC"/>
-            </a:solidFill>
-            <a:prstDash val="solid"/>
-          </a:ln>
-        </p:spPr>
-      </p:cxnSp>
-      <p:sp>
-        <p:nvSpPr>
-          <p:cNvPr id="24" name="footer-8">
-            <a:extLst xmlns:a="http://schemas.openxmlformats.org/drawingml/2006/main">
-              <a:ext uri="{FF2B5EF4-FFF2-40B4-BE49-F238E27FC236}">
-                <a16:creationId xmlns:a16="http://schemas.microsoft.com/office/drawing/2014/main" id="{485BCCDE-FD69-4E4E-A7AC-C795AFD6633A}"/>
+          <p:cNvPr id="16" name="footer-9">
+            <a:extLst xmlns:a="http://schemas.openxmlformats.org/drawingml/2006/main">
+              <a:ext uri="{FF2B5EF4-FFF2-40B4-BE49-F238E27FC236}">
+                <a16:creationId xmlns:a16="http://schemas.microsoft.com/office/drawing/2014/main" id="{B3CB2A96-7BEA-469E-B01B-78C16A75F437}"/>
               </a:ext>
             </a:extLst>
           </p:cNvPr>
@@ -10034,6 +9295,7 @@
           <a:lstStyle xmlns:a="http://schemas.openxmlformats.org/drawingml/2006/main"/>
           <a:p xmlns:a="http://schemas.openxmlformats.org/drawingml/2006/main">
             <a:pPr algn="l">
+              <a:buNone/>
               <a:defRPr sz="1200" b="0">
                 <a:solidFill>
                   <a:srgbClr val="53606D"/>
@@ -10059,10 +9321,10 @@
       </p:sp>
       <p:sp>
         <p:nvSpPr>
-          <p:cNvPr id="25" name="footer-page-8">
-            <a:extLst xmlns:a="http://schemas.openxmlformats.org/drawingml/2006/main">
-              <a:ext uri="{FF2B5EF4-FFF2-40B4-BE49-F238E27FC236}">
-                <a16:creationId xmlns:a16="http://schemas.microsoft.com/office/drawing/2014/main" id="{360922B6-36BE-4A83-BCFF-361D755A7066}"/>
+          <p:cNvPr id="17" name="footer-page-9">
+            <a:extLst xmlns:a="http://schemas.openxmlformats.org/drawingml/2006/main">
+              <a:ext uri="{FF2B5EF4-FFF2-40B4-BE49-F238E27FC236}">
+                <a16:creationId xmlns:a16="http://schemas.microsoft.com/office/drawing/2014/main" id="{FDB705C5-6FB4-486B-8E36-FD328329D84B}"/>
               </a:ext>
             </a:extLst>
           </p:cNvPr>
@@ -10092,6 +9354,7 @@
           <a:lstStyle xmlns:a="http://schemas.openxmlformats.org/drawingml/2006/main"/>
           <a:p xmlns:a="http://schemas.openxmlformats.org/drawingml/2006/main">
             <a:pPr algn="r">
+              <a:buNone/>
               <a:defRPr sz="1200" b="0">
                 <a:solidFill>
                   <a:srgbClr val="53606D"/>
@@ -10110,7 +9373,7 @@
                 <a:ea typeface="Arial"/>
                 <a:cs typeface="Arial"/>
               </a:rPr>
-              <a:t>8/10</a:t>
+              <a:t>8/9</a:t>
             </a:r>
           </a:p>
         </p:txBody>
@@ -10118,7 +9381,7 @@
     </p:spTree>
     <p:extLst>
       <p:ext uri="{BB962C8B-B14F-4D97-AF65-F5344CB8AC3E}">
-        <p14:creationId xmlns:p14="http://schemas.microsoft.com/office/powerpoint/2010/main" val="229838652"/>
+        <p14:creationId xmlns:p14="http://schemas.microsoft.com/office/powerpoint/2010/main" val="1549112306"/>
       </p:ext>
     </p:extLst>
   </p:cSld>
@@ -10146,22 +9409,22 @@
       </p:grpSpPr>
       <p:sp>
         <p:nvSpPr>
-          <p:cNvPr id="18" name="kicker-9">
-            <a:extLst xmlns:a="http://schemas.openxmlformats.org/drawingml/2006/main">
-              <a:ext uri="{FF2B5EF4-FFF2-40B4-BE49-F238E27FC236}">
-                <a16:creationId xmlns:a16="http://schemas.microsoft.com/office/drawing/2014/main" id="{EC1D63BC-BDD9-4416-8BB8-5466FAC681C0}"/>
-              </a:ext>
-            </a:extLst>
-          </p:cNvPr>
-          <p:cNvSpPr>
-            <a:spLocks xmlns:a="http://schemas.openxmlformats.org/drawingml/2006/main" noGrp="1"/>
-          </p:cNvSpPr>
-          <p:nvPr/>
-        </p:nvSpPr>
-        <p:spPr>
-          <a:xfrm xmlns:a="http://schemas.openxmlformats.org/drawingml/2006/main">
-            <a:off x="685800" y="523875"/>
-            <a:ext cx="7429500" cy="304800"/>
+          <p:cNvPr id="10" name="close-kicker">
+            <a:extLst xmlns:a="http://schemas.openxmlformats.org/drawingml/2006/main">
+              <a:ext uri="{FF2B5EF4-FFF2-40B4-BE49-F238E27FC236}">
+                <a16:creationId xmlns:a16="http://schemas.microsoft.com/office/drawing/2014/main" id="{4A29BF44-3BDA-4C78-9CBD-C6046E39C2F2}"/>
+              </a:ext>
+            </a:extLst>
+          </p:cNvPr>
+          <p:cNvSpPr>
+            <a:spLocks xmlns:a="http://schemas.openxmlformats.org/drawingml/2006/main" noGrp="1"/>
+          </p:cNvSpPr>
+          <p:nvPr/>
+        </p:nvSpPr>
+        <p:spPr>
+          <a:xfrm xmlns:a="http://schemas.openxmlformats.org/drawingml/2006/main">
+            <a:off x="685800" y="762000"/>
+            <a:ext cx="8915400" cy="381000"/>
           </a:xfrm>
           <a:prstGeom xmlns:a="http://schemas.openxmlformats.org/drawingml/2006/main" prst="rect">
             <a:avLst/>
@@ -10179,7 +9442,8 @@
           <a:lstStyle xmlns:a="http://schemas.openxmlformats.org/drawingml/2006/main"/>
           <a:p xmlns:a="http://schemas.openxmlformats.org/drawingml/2006/main">
             <a:pPr algn="l">
-              <a:defRPr sz="1350" b="1">
+              <a:buNone/>
+              <a:defRPr sz="1425" b="1">
                 <a:solidFill>
                   <a:srgbClr val="3D8DFF"/>
                 </a:solidFill>
@@ -10189,7 +9453,7 @@
               </a:defRPr>
             </a:pPr>
             <a:r>
-              <a:rPr sz="1350" b="1">
+              <a:rPr sz="1425" b="1">
                 <a:solidFill>
                   <a:srgbClr val="3D8DFF"/>
                 </a:solidFill>
@@ -10197,29 +9461,29 @@
                 <a:ea typeface="Arial"/>
                 <a:cs typeface="Arial"/>
               </a:rPr>
-              <a:t>GOVERNANÇA</a:t>
-            </a:r>
-          </a:p>
-        </p:txBody>
-      </p:sp>
-      <p:sp>
-        <p:nvSpPr>
-          <p:cNvPr id="2" name="page-9">
-            <a:extLst xmlns:a="http://schemas.openxmlformats.org/drawingml/2006/main">
-              <a:ext uri="{FF2B5EF4-FFF2-40B4-BE49-F238E27FC236}">
-                <a16:creationId xmlns:a16="http://schemas.microsoft.com/office/drawing/2014/main" id="{52C7C719-083C-456E-A679-9B010E655EDB}"/>
-              </a:ext>
-            </a:extLst>
-          </p:cNvPr>
-          <p:cNvSpPr>
-            <a:spLocks xmlns:a="http://schemas.openxmlformats.org/drawingml/2006/main" noGrp="1"/>
-          </p:cNvSpPr>
-          <p:nvPr/>
-        </p:nvSpPr>
-        <p:spPr>
-          <a:xfrm xmlns:a="http://schemas.openxmlformats.org/drawingml/2006/main">
-            <a:off x="8705850" y="523875"/>
-            <a:ext cx="895350" cy="304800"/>
+              <a:t>STEELFLOW AI</a:t>
+            </a:r>
+          </a:p>
+        </p:txBody>
+      </p:sp>
+      <p:sp>
+        <p:nvSpPr>
+          <p:cNvPr id="2" name="close-title">
+            <a:extLst xmlns:a="http://schemas.openxmlformats.org/drawingml/2006/main">
+              <a:ext uri="{FF2B5EF4-FFF2-40B4-BE49-F238E27FC236}">
+                <a16:creationId xmlns:a16="http://schemas.microsoft.com/office/drawing/2014/main" id="{584C9D75-4C20-4B03-ABCF-158C3E284423}"/>
+              </a:ext>
+            </a:extLst>
+          </p:cNvPr>
+          <p:cNvSpPr>
+            <a:spLocks xmlns:a="http://schemas.openxmlformats.org/drawingml/2006/main" noGrp="1"/>
+          </p:cNvSpPr>
+          <p:nvPr/>
+        </p:nvSpPr>
+        <p:spPr>
+          <a:xfrm xmlns:a="http://schemas.openxmlformats.org/drawingml/2006/main">
+            <a:off x="685800" y="1762125"/>
+            <a:ext cx="8915400" cy="2095500"/>
           </a:xfrm>
           <a:prstGeom xmlns:a="http://schemas.openxmlformats.org/drawingml/2006/main" prst="rect">
             <a:avLst/>
@@ -10236,8 +9500,92 @@
           </a:bodyPr>
           <a:lstStyle xmlns:a="http://schemas.openxmlformats.org/drawingml/2006/main"/>
           <a:p xmlns:a="http://schemas.openxmlformats.org/drawingml/2006/main">
-            <a:pPr algn="r">
-              <a:defRPr sz="1350" b="1">
+            <a:pPr algn="l">
+              <a:buNone/>
+              <a:defRPr sz="4950" b="1">
+                <a:solidFill>
+                  <a:srgbClr val="07111C"/>
+                </a:solidFill>
+                <a:latin typeface="Arial"/>
+                <a:ea typeface="Arial"/>
+                <a:cs typeface="Arial"/>
+              </a:defRPr>
+            </a:pPr>
+            <a:r>
+              <a:rPr sz="4950" b="1">
+                <a:solidFill>
+                  <a:srgbClr val="07111C"/>
+                </a:solidFill>
+                <a:latin typeface="Arial"/>
+                <a:ea typeface="Arial"/>
+                <a:cs typeface="Arial"/>
+              </a:rPr>
+              <a:t>Quer explorar</a:t>
+            </a:r>
+          </a:p>
+          <a:p xmlns:a="http://schemas.openxmlformats.org/drawingml/2006/main">
+            <a:pPr algn="l">
+              <a:buNone/>
+              <a:defRPr sz="4950" b="1">
+                <a:solidFill>
+                  <a:srgbClr val="07111C"/>
+                </a:solidFill>
+                <a:latin typeface="Arial"/>
+                <a:ea typeface="Arial"/>
+                <a:cs typeface="Arial"/>
+              </a:defRPr>
+            </a:pPr>
+            <a:r>
+              <a:rPr sz="4950" b="1">
+                <a:solidFill>
+                  <a:srgbClr val="07111C"/>
+                </a:solidFill>
+                <a:latin typeface="Arial"/>
+                <a:ea typeface="Arial"/>
+                <a:cs typeface="Arial"/>
+              </a:rPr>
+              <a:t>o projeto?</a:t>
+            </a:r>
+          </a:p>
+        </p:txBody>
+      </p:sp>
+      <p:sp>
+        <p:nvSpPr>
+          <p:cNvPr id="3" name="close-body">
+            <a:extLst xmlns:a="http://schemas.openxmlformats.org/drawingml/2006/main">
+              <a:ext uri="{FF2B5EF4-FFF2-40B4-BE49-F238E27FC236}">
+                <a16:creationId xmlns:a16="http://schemas.microsoft.com/office/drawing/2014/main" id="{B4D2B44C-B7F8-4096-840E-D7E4AEEFC94C}"/>
+              </a:ext>
+            </a:extLst>
+          </p:cNvPr>
+          <p:cNvSpPr>
+            <a:spLocks xmlns:a="http://schemas.openxmlformats.org/drawingml/2006/main" noGrp="1"/>
+          </p:cNvSpPr>
+          <p:nvPr/>
+        </p:nvSpPr>
+        <p:spPr>
+          <a:xfrm xmlns:a="http://schemas.openxmlformats.org/drawingml/2006/main">
+            <a:off x="685800" y="4476750"/>
+            <a:ext cx="8191500" cy="1428750"/>
+          </a:xfrm>
+          <a:prstGeom xmlns:a="http://schemas.openxmlformats.org/drawingml/2006/main" prst="rect">
+            <a:avLst/>
+          </a:prstGeom>
+          <a:noFill xmlns:a="http://schemas.openxmlformats.org/drawingml/2006/main"/>
+          <a:ln xmlns:a="http://schemas.openxmlformats.org/drawingml/2006/main" w="0">
+            <a:noFill/>
+            <a:prstDash val="solid"/>
+          </a:ln>
+        </p:spPr>
+        <p:txBody>
+          <a:bodyPr xmlns:a="http://schemas.openxmlformats.org/drawingml/2006/main" anchor="t">
+            <a:normAutofit fontScale="100000"/>
+          </a:bodyPr>
+          <a:lstStyle xmlns:a="http://schemas.openxmlformats.org/drawingml/2006/main"/>
+          <a:p xmlns:a="http://schemas.openxmlformats.org/drawingml/2006/main">
+            <a:pPr algn="l">
+              <a:buNone/>
+              <a:defRPr sz="2175" b="0">
                 <a:solidFill>
                   <a:srgbClr val="53606D"/>
                 </a:solidFill>
@@ -10247,7 +9595,7 @@
               </a:defRPr>
             </a:pPr>
             <a:r>
-              <a:rPr sz="1350" b="1">
+              <a:rPr sz="2175" b="0">
                 <a:solidFill>
                   <a:srgbClr val="53606D"/>
                 </a:solidFill>
@@ -10255,225 +9603,51 @@
                 <a:ea typeface="Arial"/>
                 <a:cs typeface="Arial"/>
               </a:rPr>
-              <a:t>09</a:t>
-            </a:r>
-          </a:p>
-        </p:txBody>
-      </p:sp>
-      <p:sp>
-        <p:nvSpPr>
-          <p:cNvPr id="3" name="title-9">
-            <a:extLst xmlns:a="http://schemas.openxmlformats.org/drawingml/2006/main">
-              <a:ext uri="{FF2B5EF4-FFF2-40B4-BE49-F238E27FC236}">
-                <a16:creationId xmlns:a16="http://schemas.microsoft.com/office/drawing/2014/main" id="{0B318391-4DB9-4666-8D12-A3705990F1DF}"/>
-              </a:ext>
-            </a:extLst>
-          </p:cNvPr>
-          <p:cNvSpPr>
-            <a:spLocks xmlns:a="http://schemas.openxmlformats.org/drawingml/2006/main" noGrp="1"/>
-          </p:cNvSpPr>
-          <p:nvPr/>
-        </p:nvSpPr>
-        <p:spPr>
-          <a:xfrm xmlns:a="http://schemas.openxmlformats.org/drawingml/2006/main">
-            <a:off x="685800" y="1000125"/>
-            <a:ext cx="8915400" cy="1162050"/>
-          </a:xfrm>
-          <a:prstGeom xmlns:a="http://schemas.openxmlformats.org/drawingml/2006/main" prst="rect">
-            <a:avLst/>
-          </a:prstGeom>
-          <a:noFill xmlns:a="http://schemas.openxmlformats.org/drawingml/2006/main"/>
-          <a:ln xmlns:a="http://schemas.openxmlformats.org/drawingml/2006/main" w="0">
-            <a:noFill/>
-            <a:prstDash val="solid"/>
-          </a:ln>
-        </p:spPr>
-        <p:txBody>
-          <a:bodyPr xmlns:a="http://schemas.openxmlformats.org/drawingml/2006/main" anchor="t">
-            <a:normAutofit fontScale="100000"/>
-          </a:bodyPr>
-          <a:lstStyle xmlns:a="http://schemas.openxmlformats.org/drawingml/2006/main"/>
-          <a:p xmlns:a="http://schemas.openxmlformats.org/drawingml/2006/main">
-            <a:pPr algn="l">
-              <a:defRPr sz="3750" b="1">
-                <a:solidFill>
-                  <a:srgbClr val="07111C"/>
-                </a:solidFill>
-                <a:latin typeface="Arial"/>
-                <a:ea typeface="Arial"/>
-                <a:cs typeface="Arial"/>
-              </a:defRPr>
-            </a:pPr>
-            <a:r>
-              <a:rPr sz="3750" b="1">
-                <a:solidFill>
-                  <a:srgbClr val="07111C"/>
-                </a:solidFill>
-                <a:latin typeface="Arial"/>
-                <a:ea typeface="Arial"/>
-                <a:cs typeface="Arial"/>
-              </a:rPr>
-              <a:t>O limite é parte do produto</a:t>
-            </a:r>
-          </a:p>
-        </p:txBody>
-      </p:sp>
-      <p:sp>
-        <p:nvSpPr>
-          <p:cNvPr id="4" name="subtitle-9">
-            <a:extLst xmlns:a="http://schemas.openxmlformats.org/drawingml/2006/main">
-              <a:ext uri="{FF2B5EF4-FFF2-40B4-BE49-F238E27FC236}">
-                <a16:creationId xmlns:a16="http://schemas.microsoft.com/office/drawing/2014/main" id="{014C88DE-F3D5-4910-9C41-01E9607740E7}"/>
-              </a:ext>
-            </a:extLst>
-          </p:cNvPr>
-          <p:cNvSpPr>
-            <a:spLocks xmlns:a="http://schemas.openxmlformats.org/drawingml/2006/main" noGrp="1"/>
-          </p:cNvSpPr>
-          <p:nvPr/>
-        </p:nvSpPr>
-        <p:spPr>
-          <a:xfrm xmlns:a="http://schemas.openxmlformats.org/drawingml/2006/main">
-            <a:off x="685800" y="2133600"/>
-            <a:ext cx="8915400" cy="704850"/>
-          </a:xfrm>
-          <a:prstGeom xmlns:a="http://schemas.openxmlformats.org/drawingml/2006/main" prst="rect">
-            <a:avLst/>
-          </a:prstGeom>
-          <a:noFill xmlns:a="http://schemas.openxmlformats.org/drawingml/2006/main"/>
-          <a:ln xmlns:a="http://schemas.openxmlformats.org/drawingml/2006/main" w="0">
-            <a:noFill/>
-            <a:prstDash val="solid"/>
-          </a:ln>
-        </p:spPr>
-        <p:txBody>
-          <a:bodyPr xmlns:a="http://schemas.openxmlformats.org/drawingml/2006/main" anchor="t">
-            <a:normAutofit fontScale="100000"/>
-          </a:bodyPr>
-          <a:lstStyle xmlns:a="http://schemas.openxmlformats.org/drawingml/2006/main"/>
-          <a:p xmlns:a="http://schemas.openxmlformats.org/drawingml/2006/main">
-            <a:pPr algn="l">
-              <a:defRPr sz="1875" b="0">
-                <a:solidFill>
-                  <a:srgbClr val="53606D"/>
-                </a:solidFill>
-                <a:latin typeface="Arial"/>
-                <a:ea typeface="Arial"/>
-                <a:cs typeface="Arial"/>
-              </a:defRPr>
-            </a:pPr>
-            <a:r>
-              <a:rPr sz="1875" b="0">
-                <a:solidFill>
-                  <a:srgbClr val="53606D"/>
-                </a:solidFill>
-                <a:latin typeface="Arial"/>
-                <a:ea typeface="Arial"/>
-                <a:cs typeface="Arial"/>
-              </a:rPr>
-              <a:t>Confiabilidade também é tornar visível o que o sistema não pode afirmar.</a:t>
+              <a:t>Veja o código, os dados sintéticos, os testes e as telas.</a:t>
             </a:r>
           </a:p>
         </p:txBody>
       </p:sp>
       <p:cxnSp>
         <p:nvCxnSpPr>
-          <p:cNvPr id="22" name="header-rule-9"/>
+          <p:cNvPr id="21" name="close-accent"/>
           <p:cNvCxnSpPr/>
           <p:nvPr/>
         </p:nvCxnSpPr>
         <p:spPr>
           <a:xfrm xmlns:a="http://schemas.openxmlformats.org/drawingml/2006/main">
-            <a:off x="685800" y="2990850"/>
-            <a:ext cx="8915400" cy="0"/>
+            <a:off x="685800" y="6429375"/>
+            <a:ext cx="2857500" cy="0"/>
           </a:xfrm>
           <a:prstGeom xmlns:a="http://schemas.openxmlformats.org/drawingml/2006/main" prst="straightConnector1">
             <a:avLst/>
           </a:prstGeom>
-          <a:ln xmlns:a="http://schemas.openxmlformats.org/drawingml/2006/main" w="9525">
+          <a:ln xmlns:a="http://schemas.openxmlformats.org/drawingml/2006/main" w="95250">
             <a:solidFill>
-              <a:srgbClr val="BCC4CC"/>
+              <a:srgbClr val="20CDBF"/>
             </a:solidFill>
             <a:prstDash val="solid"/>
           </a:ln>
         </p:spPr>
       </p:cxnSp>
-      <p:pic>
-        <p:nvPicPr>
-          <p:cNvPr id="23" name=""/>
-          <p:cNvPicPr>
-            <a:picLocks xmlns:a="http://schemas.openxmlformats.org/drawingml/2006/main" noChangeAspect="1"/>
-          </p:cNvPicPr>
-          <p:nvPr/>
-        </p:nvPicPr>
-        <p:blipFill>
-          <a:blip xmlns:r="http://schemas.openxmlformats.org/officeDocument/2006/relationships" xmlns:a="http://schemas.openxmlformats.org/drawingml/2006/main" r:embed="R11b22f6d1d8d4d95"/>
-          <a:srcRect xmlns:a="http://schemas.openxmlformats.org/drawingml/2006/main" l="0" t="16524" r="0" b="16524"/>
-          <a:stretch xmlns:a="http://schemas.openxmlformats.org/drawingml/2006/main">
-            <a:fillRect l="0" t="0" r="0" b="0"/>
-          </a:stretch>
-        </p:blipFill>
-        <p:spPr>
-          <a:xfrm xmlns:a="http://schemas.openxmlformats.org/drawingml/2006/main">
-            <a:off x="685800" y="3486150"/>
-            <a:ext cx="8915400" cy="4476750"/>
-          </a:xfrm>
-          <a:prstGeom xmlns:a="http://schemas.openxmlformats.org/drawingml/2006/main" prst="roundRect">
-            <a:avLst>
-              <a:gd name="adj" fmla="val 2553"/>
-            </a:avLst>
-          </a:prstGeom>
-        </p:spPr>
-      </p:pic>
-      <p:sp>
-        <p:nvSpPr>
-          <p:cNvPr id="7" name="limit-dot-0">
-            <a:extLst xmlns:a="http://schemas.openxmlformats.org/drawingml/2006/main">
-              <a:ext uri="{FF2B5EF4-FFF2-40B4-BE49-F238E27FC236}">
-                <a16:creationId xmlns:a16="http://schemas.microsoft.com/office/drawing/2014/main" id="{1340E1E0-4F68-4279-AA85-1B686F109A5E}"/>
-              </a:ext>
-            </a:extLst>
-          </p:cNvPr>
-          <p:cNvSpPr>
-            <a:spLocks xmlns:a="http://schemas.openxmlformats.org/drawingml/2006/main" noGrp="1"/>
-          </p:cNvSpPr>
-          <p:nvPr/>
-        </p:nvSpPr>
-        <p:spPr>
-          <a:xfrm xmlns:a="http://schemas.openxmlformats.org/drawingml/2006/main">
-            <a:off x="685800" y="8648700"/>
-            <a:ext cx="171450" cy="171450"/>
-          </a:xfrm>
-          <a:prstGeom xmlns:a="http://schemas.openxmlformats.org/drawingml/2006/main" prst="ellipse">
-            <a:avLst/>
-          </a:prstGeom>
-          <a:solidFill xmlns:a="http://schemas.openxmlformats.org/drawingml/2006/main">
-            <a:srgbClr val="3D8DFF"/>
-          </a:solidFill>
-          <a:ln xmlns:a="http://schemas.openxmlformats.org/drawingml/2006/main" w="0">
-            <a:noFill/>
-            <a:prstDash val="solid"/>
-          </a:ln>
-        </p:spPr>
-      </p:sp>
-      <p:sp>
-        <p:nvSpPr>
-          <p:cNvPr id="8" name="limit-text-0">
-            <a:extLst xmlns:a="http://schemas.openxmlformats.org/drawingml/2006/main">
-              <a:ext uri="{FF2B5EF4-FFF2-40B4-BE49-F238E27FC236}">
-                <a16:creationId xmlns:a16="http://schemas.microsoft.com/office/drawing/2014/main" id="{4891817F-5694-4578-B849-DC97F376A19D}"/>
-              </a:ext>
-            </a:extLst>
-          </p:cNvPr>
-          <p:cNvSpPr>
-            <a:spLocks xmlns:a="http://schemas.openxmlformats.org/drawingml/2006/main" noGrp="1"/>
-          </p:cNvSpPr>
-          <p:nvPr/>
-        </p:nvSpPr>
-        <p:spPr>
-          <a:xfrm xmlns:a="http://schemas.openxmlformats.org/drawingml/2006/main">
-            <a:off x="1066800" y="8572500"/>
-            <a:ext cx="8096250" cy="457200"/>
+      <p:sp>
+        <p:nvSpPr>
+          <p:cNvPr id="5" name="close-url-label">
+            <a:extLst xmlns:a="http://schemas.openxmlformats.org/drawingml/2006/main">
+              <a:ext uri="{FF2B5EF4-FFF2-40B4-BE49-F238E27FC236}">
+                <a16:creationId xmlns:a16="http://schemas.microsoft.com/office/drawing/2014/main" id="{D3A57EAB-876A-4CEA-ABE5-5D9BE11EC9A9}"/>
+              </a:ext>
+            </a:extLst>
+          </p:cNvPr>
+          <p:cNvSpPr>
+            <a:spLocks xmlns:a="http://schemas.openxmlformats.org/drawingml/2006/main" noGrp="1"/>
+          </p:cNvSpPr>
+          <p:nvPr/>
+        </p:nvSpPr>
+        <p:spPr>
+          <a:xfrm xmlns:a="http://schemas.openxmlformats.org/drawingml/2006/main">
+            <a:off x="685800" y="7239000"/>
+            <a:ext cx="8915400" cy="400050"/>
           </a:xfrm>
           <a:prstGeom xmlns:a="http://schemas.openxmlformats.org/drawingml/2006/main" prst="rect">
             <a:avLst/>
@@ -10491,7 +9665,67 @@
           <a:lstStyle xmlns:a="http://schemas.openxmlformats.org/drawingml/2006/main"/>
           <a:p xmlns:a="http://schemas.openxmlformats.org/drawingml/2006/main">
             <a:pPr algn="l">
-              <a:defRPr sz="1875" b="1">
+              <a:buNone/>
+              <a:defRPr sz="1350" b="1">
+                <a:solidFill>
+                  <a:srgbClr val="3D8DFF"/>
+                </a:solidFill>
+                <a:latin typeface="Arial"/>
+                <a:ea typeface="Arial"/>
+                <a:cs typeface="Arial"/>
+              </a:defRPr>
+            </a:pPr>
+            <a:r>
+              <a:rPr sz="1350" b="1">
+                <a:solidFill>
+                  <a:srgbClr val="3D8DFF"/>
+                </a:solidFill>
+                <a:latin typeface="Arial"/>
+                <a:ea typeface="Arial"/>
+                <a:cs typeface="Arial"/>
+              </a:rPr>
+              <a:t>REPOSITÓRIO E DOCUMENTAÇÃO</a:t>
+            </a:r>
+          </a:p>
+        </p:txBody>
+      </p:sp>
+      <p:sp>
+        <p:nvSpPr>
+          <p:cNvPr id="6" name="close-url">
+            <a:extLst xmlns:a="http://schemas.openxmlformats.org/drawingml/2006/main">
+              <a:ext uri="{FF2B5EF4-FFF2-40B4-BE49-F238E27FC236}">
+                <a16:creationId xmlns:a16="http://schemas.microsoft.com/office/drawing/2014/main" id="{94A5A874-2061-4322-A504-FA6CDFB44C5E}"/>
+              </a:ext>
+            </a:extLst>
+          </p:cNvPr>
+          <p:cNvSpPr>
+            <a:spLocks xmlns:a="http://schemas.openxmlformats.org/drawingml/2006/main" noGrp="1"/>
+          </p:cNvSpPr>
+          <p:nvPr/>
+        </p:nvSpPr>
+        <p:spPr>
+          <a:xfrm xmlns:a="http://schemas.openxmlformats.org/drawingml/2006/main">
+            <a:off x="685800" y="7829550"/>
+            <a:ext cx="8915400" cy="952500"/>
+          </a:xfrm>
+          <a:prstGeom xmlns:a="http://schemas.openxmlformats.org/drawingml/2006/main" prst="rect">
+            <a:avLst/>
+          </a:prstGeom>
+          <a:noFill xmlns:a="http://schemas.openxmlformats.org/drawingml/2006/main"/>
+          <a:ln xmlns:a="http://schemas.openxmlformats.org/drawingml/2006/main" w="0">
+            <a:noFill/>
+            <a:prstDash val="solid"/>
+          </a:ln>
+        </p:spPr>
+        <p:txBody>
+          <a:bodyPr xmlns:a="http://schemas.openxmlformats.org/drawingml/2006/main" anchor="t">
+            <a:normAutofit fontScale="100000"/>
+          </a:bodyPr>
+          <a:lstStyle xmlns:a="http://schemas.openxmlformats.org/drawingml/2006/main"/>
+          <a:p xmlns:a="http://schemas.openxmlformats.org/drawingml/2006/main">
+            <a:pPr algn="l">
+              <a:buNone/>
+              <a:defRPr sz="2850" b="1">
                 <a:solidFill>
                   <a:srgbClr val="07111C"/>
                 </a:solidFill>
@@ -10501,7 +9735,7 @@
               </a:defRPr>
             </a:pPr>
             <a:r>
-              <a:rPr sz="1875" b="1">
+              <a:rPr sz="2850" b="1">
                 <a:solidFill>
                   <a:srgbClr val="07111C"/>
                 </a:solidFill>
@@ -10509,60 +9743,29 @@
                 <a:ea typeface="Arial"/>
                 <a:cs typeface="Arial"/>
               </a:rPr>
-              <a:t>Não demonstra causalidade industrial</a:t>
-            </a:r>
-          </a:p>
-        </p:txBody>
-      </p:sp>
-      <p:sp>
-        <p:nvSpPr>
-          <p:cNvPr id="9" name="limit-dot-1">
-            <a:extLst xmlns:a="http://schemas.openxmlformats.org/drawingml/2006/main">
-              <a:ext uri="{FF2B5EF4-FFF2-40B4-BE49-F238E27FC236}">
-                <a16:creationId xmlns:a16="http://schemas.microsoft.com/office/drawing/2014/main" id="{305D7822-F2DF-46D6-8BD8-6602D2DF815A}"/>
-              </a:ext>
-            </a:extLst>
-          </p:cNvPr>
-          <p:cNvSpPr>
-            <a:spLocks xmlns:a="http://schemas.openxmlformats.org/drawingml/2006/main" noGrp="1"/>
-          </p:cNvSpPr>
-          <p:nvPr/>
-        </p:nvSpPr>
-        <p:spPr>
-          <a:xfrm xmlns:a="http://schemas.openxmlformats.org/drawingml/2006/main">
-            <a:off x="685800" y="9334500"/>
-            <a:ext cx="171450" cy="171450"/>
-          </a:xfrm>
-          <a:prstGeom xmlns:a="http://schemas.openxmlformats.org/drawingml/2006/main" prst="ellipse">
-            <a:avLst/>
-          </a:prstGeom>
-          <a:solidFill xmlns:a="http://schemas.openxmlformats.org/drawingml/2006/main">
-            <a:srgbClr val="3D8DFF"/>
-          </a:solidFill>
-          <a:ln xmlns:a="http://schemas.openxmlformats.org/drawingml/2006/main" w="0">
-            <a:noFill/>
-            <a:prstDash val="solid"/>
-          </a:ln>
-        </p:spPr>
-      </p:sp>
-      <p:sp>
-        <p:nvSpPr>
-          <p:cNvPr id="10" name="limit-text-1">
-            <a:extLst xmlns:a="http://schemas.openxmlformats.org/drawingml/2006/main">
-              <a:ext uri="{FF2B5EF4-FFF2-40B4-BE49-F238E27FC236}">
-                <a16:creationId xmlns:a16="http://schemas.microsoft.com/office/drawing/2014/main" id="{D3AD3E4A-FFAB-4877-ACEA-4FBFD08E43A2}"/>
-              </a:ext>
-            </a:extLst>
-          </p:cNvPr>
-          <p:cNvSpPr>
-            <a:spLocks xmlns:a="http://schemas.openxmlformats.org/drawingml/2006/main" noGrp="1"/>
-          </p:cNvSpPr>
-          <p:nvPr/>
-        </p:nvSpPr>
-        <p:spPr>
-          <a:xfrm xmlns:a="http://schemas.openxmlformats.org/drawingml/2006/main">
-            <a:off x="1066800" y="9258300"/>
-            <a:ext cx="8096250" cy="457200"/>
+              <a:t>github.com/bryanleme/steelFlow-ai</a:t>
+            </a:r>
+          </a:p>
+        </p:txBody>
+      </p:sp>
+      <p:sp>
+        <p:nvSpPr>
+          <p:cNvPr id="7" name="close-next">
+            <a:extLst xmlns:a="http://schemas.openxmlformats.org/drawingml/2006/main">
+              <a:ext uri="{FF2B5EF4-FFF2-40B4-BE49-F238E27FC236}">
+                <a16:creationId xmlns:a16="http://schemas.microsoft.com/office/drawing/2014/main" id="{8170760B-0AB7-4DE6-98EE-69BF5979AD91}"/>
+              </a:ext>
+            </a:extLst>
+          </p:cNvPr>
+          <p:cNvSpPr>
+            <a:spLocks xmlns:a="http://schemas.openxmlformats.org/drawingml/2006/main" noGrp="1"/>
+          </p:cNvSpPr>
+          <p:nvPr/>
+        </p:nvSpPr>
+        <p:spPr>
+          <a:xfrm xmlns:a="http://schemas.openxmlformats.org/drawingml/2006/main">
+            <a:off x="685800" y="9667875"/>
+            <a:ext cx="8572500" cy="1143000"/>
           </a:xfrm>
           <a:prstGeom xmlns:a="http://schemas.openxmlformats.org/drawingml/2006/main" prst="rect">
             <a:avLst/>
@@ -10580,7 +9783,67 @@
           <a:lstStyle xmlns:a="http://schemas.openxmlformats.org/drawingml/2006/main"/>
           <a:p xmlns:a="http://schemas.openxmlformats.org/drawingml/2006/main">
             <a:pPr algn="l">
-              <a:defRPr sz="1875" b="1">
+              <a:buNone/>
+              <a:defRPr sz="1950" b="0">
+                <a:solidFill>
+                  <a:srgbClr val="53606D"/>
+                </a:solidFill>
+                <a:latin typeface="Arial"/>
+                <a:ea typeface="Arial"/>
+                <a:cs typeface="Arial"/>
+              </a:defRPr>
+            </a:pPr>
+            <a:r>
+              <a:rPr sz="1950" b="0">
+                <a:solidFill>
+                  <a:srgbClr val="53606D"/>
+                </a:solidFill>
+                <a:latin typeface="Arial"/>
+                <a:ea typeface="Arial"/>
+                <a:cs typeface="Arial"/>
+              </a:rPr>
+              <a:t>Teste o fluxo. Questione os limites. Compartilhe o que você melhoraria.</a:t>
+            </a:r>
+          </a:p>
+        </p:txBody>
+      </p:sp>
+      <p:sp>
+        <p:nvSpPr>
+          <p:cNvPr id="8" name="close-scope">
+            <a:extLst xmlns:a="http://schemas.openxmlformats.org/drawingml/2006/main">
+              <a:ext uri="{FF2B5EF4-FFF2-40B4-BE49-F238E27FC236}">
+                <a16:creationId xmlns:a16="http://schemas.microsoft.com/office/drawing/2014/main" id="{44E43D55-E684-4397-9217-42A4BAE55AC1}"/>
+              </a:ext>
+            </a:extLst>
+          </p:cNvPr>
+          <p:cNvSpPr>
+            <a:spLocks xmlns:a="http://schemas.openxmlformats.org/drawingml/2006/main" noGrp="1"/>
+          </p:cNvSpPr>
+          <p:nvPr/>
+        </p:nvSpPr>
+        <p:spPr>
+          <a:xfrm xmlns:a="http://schemas.openxmlformats.org/drawingml/2006/main">
+            <a:off x="685800" y="11668125"/>
+            <a:ext cx="8915400" cy="400050"/>
+          </a:xfrm>
+          <a:prstGeom xmlns:a="http://schemas.openxmlformats.org/drawingml/2006/main" prst="rect">
+            <a:avLst/>
+          </a:prstGeom>
+          <a:noFill xmlns:a="http://schemas.openxmlformats.org/drawingml/2006/main"/>
+          <a:ln xmlns:a="http://schemas.openxmlformats.org/drawingml/2006/main" w="0">
+            <a:noFill/>
+            <a:prstDash val="solid"/>
+          </a:ln>
+        </p:spPr>
+        <p:txBody>
+          <a:bodyPr xmlns:a="http://schemas.openxmlformats.org/drawingml/2006/main" anchor="t">
+            <a:normAutofit fontScale="100000"/>
+          </a:bodyPr>
+          <a:lstStyle xmlns:a="http://schemas.openxmlformats.org/drawingml/2006/main"/>
+          <a:p xmlns:a="http://schemas.openxmlformats.org/drawingml/2006/main">
+            <a:pPr algn="l">
+              <a:buNone/>
+              <a:defRPr sz="1350" b="1">
                 <a:solidFill>
                   <a:srgbClr val="07111C"/>
                 </a:solidFill>
@@ -10590,7 +9853,7 @@
               </a:defRPr>
             </a:pPr>
             <a:r>
-              <a:rPr sz="1875" b="1">
+              <a:rPr sz="1350" b="1">
                 <a:solidFill>
                   <a:srgbClr val="07111C"/>
                 </a:solidFill>
@@ -10598,229 +9861,29 @@
                 <a:ea typeface="Arial"/>
                 <a:cs typeface="Arial"/>
               </a:rPr>
-              <a:t>Não valida conformidade API 5CT</a:t>
-            </a:r>
-          </a:p>
-        </p:txBody>
-      </p:sp>
-      <p:sp>
-        <p:nvSpPr>
-          <p:cNvPr id="11" name="limit-dot-2">
-            <a:extLst xmlns:a="http://schemas.openxmlformats.org/drawingml/2006/main">
-              <a:ext uri="{FF2B5EF4-FFF2-40B4-BE49-F238E27FC236}">
-                <a16:creationId xmlns:a16="http://schemas.microsoft.com/office/drawing/2014/main" id="{FEC69F0B-C565-4EF7-8E0B-4DA1FDF25114}"/>
-              </a:ext>
-            </a:extLst>
-          </p:cNvPr>
-          <p:cNvSpPr>
-            <a:spLocks xmlns:a="http://schemas.openxmlformats.org/drawingml/2006/main" noGrp="1"/>
-          </p:cNvSpPr>
-          <p:nvPr/>
-        </p:nvSpPr>
-        <p:spPr>
-          <a:xfrm xmlns:a="http://schemas.openxmlformats.org/drawingml/2006/main">
-            <a:off x="685800" y="10020300"/>
-            <a:ext cx="171450" cy="171450"/>
-          </a:xfrm>
-          <a:prstGeom xmlns:a="http://schemas.openxmlformats.org/drawingml/2006/main" prst="ellipse">
-            <a:avLst/>
-          </a:prstGeom>
-          <a:solidFill xmlns:a="http://schemas.openxmlformats.org/drawingml/2006/main">
-            <a:srgbClr val="3D8DFF"/>
-          </a:solidFill>
-          <a:ln xmlns:a="http://schemas.openxmlformats.org/drawingml/2006/main" w="0">
-            <a:noFill/>
-            <a:prstDash val="solid"/>
-          </a:ln>
-        </p:spPr>
-      </p:sp>
-      <p:sp>
-        <p:nvSpPr>
-          <p:cNvPr id="12" name="limit-text-2">
-            <a:extLst xmlns:a="http://schemas.openxmlformats.org/drawingml/2006/main">
-              <a:ext uri="{FF2B5EF4-FFF2-40B4-BE49-F238E27FC236}">
-                <a16:creationId xmlns:a16="http://schemas.microsoft.com/office/drawing/2014/main" id="{D5D2BA6F-7D85-4944-B581-D00C38FE69DE}"/>
-              </a:ext>
-            </a:extLst>
-          </p:cNvPr>
-          <p:cNvSpPr>
-            <a:spLocks xmlns:a="http://schemas.openxmlformats.org/drawingml/2006/main" noGrp="1"/>
-          </p:cNvSpPr>
-          <p:nvPr/>
-        </p:nvSpPr>
-        <p:spPr>
-          <a:xfrm xmlns:a="http://schemas.openxmlformats.org/drawingml/2006/main">
-            <a:off x="1066800" y="9944100"/>
-            <a:ext cx="8096250" cy="457200"/>
-          </a:xfrm>
-          <a:prstGeom xmlns:a="http://schemas.openxmlformats.org/drawingml/2006/main" prst="rect">
-            <a:avLst/>
-          </a:prstGeom>
-          <a:noFill xmlns:a="http://schemas.openxmlformats.org/drawingml/2006/main"/>
-          <a:ln xmlns:a="http://schemas.openxmlformats.org/drawingml/2006/main" w="0">
-            <a:noFill/>
-            <a:prstDash val="solid"/>
-          </a:ln>
-        </p:spPr>
-        <p:txBody>
-          <a:bodyPr xmlns:a="http://schemas.openxmlformats.org/drawingml/2006/main" anchor="t">
-            <a:normAutofit fontScale="100000"/>
-          </a:bodyPr>
-          <a:lstStyle xmlns:a="http://schemas.openxmlformats.org/drawingml/2006/main"/>
-          <a:p xmlns:a="http://schemas.openxmlformats.org/drawingml/2006/main">
-            <a:pPr algn="l">
-              <a:defRPr sz="1875" b="1">
-                <a:solidFill>
-                  <a:srgbClr val="07111C"/>
-                </a:solidFill>
-                <a:latin typeface="Arial"/>
-                <a:ea typeface="Arial"/>
-                <a:cs typeface="Arial"/>
-              </a:defRPr>
-            </a:pPr>
-            <a:r>
-              <a:rPr sz="1875" b="1">
-                <a:solidFill>
-                  <a:srgbClr val="07111C"/>
-                </a:solidFill>
-                <a:latin typeface="Arial"/>
-                <a:ea typeface="Arial"/>
-                <a:cs typeface="Arial"/>
-              </a:rPr>
-              <a:t>Não alega ganho ou ROI de produção</a:t>
-            </a:r>
-          </a:p>
-        </p:txBody>
-      </p:sp>
-      <p:sp>
-        <p:nvSpPr>
-          <p:cNvPr id="13" name="limit-dot-3">
-            <a:extLst xmlns:a="http://schemas.openxmlformats.org/drawingml/2006/main">
-              <a:ext uri="{FF2B5EF4-FFF2-40B4-BE49-F238E27FC236}">
-                <a16:creationId xmlns:a16="http://schemas.microsoft.com/office/drawing/2014/main" id="{A0501082-7F39-4E60-973E-BBAE527130F2}"/>
-              </a:ext>
-            </a:extLst>
-          </p:cNvPr>
-          <p:cNvSpPr>
-            <a:spLocks xmlns:a="http://schemas.openxmlformats.org/drawingml/2006/main" noGrp="1"/>
-          </p:cNvSpPr>
-          <p:nvPr/>
-        </p:nvSpPr>
-        <p:spPr>
-          <a:xfrm xmlns:a="http://schemas.openxmlformats.org/drawingml/2006/main">
-            <a:off x="685800" y="10706100"/>
-            <a:ext cx="171450" cy="171450"/>
-          </a:xfrm>
-          <a:prstGeom xmlns:a="http://schemas.openxmlformats.org/drawingml/2006/main" prst="ellipse">
-            <a:avLst/>
-          </a:prstGeom>
-          <a:solidFill xmlns:a="http://schemas.openxmlformats.org/drawingml/2006/main">
-            <a:srgbClr val="E55B68"/>
-          </a:solidFill>
-          <a:ln xmlns:a="http://schemas.openxmlformats.org/drawingml/2006/main" w="0">
-            <a:noFill/>
-            <a:prstDash val="solid"/>
-          </a:ln>
-        </p:spPr>
-      </p:sp>
-      <p:sp>
-        <p:nvSpPr>
-          <p:cNvPr id="14" name="limit-text-3">
-            <a:extLst xmlns:a="http://schemas.openxmlformats.org/drawingml/2006/main">
-              <a:ext uri="{FF2B5EF4-FFF2-40B4-BE49-F238E27FC236}">
-                <a16:creationId xmlns:a16="http://schemas.microsoft.com/office/drawing/2014/main" id="{0CB92674-1FE1-4518-AEDB-2CC9839F82D2}"/>
-              </a:ext>
-            </a:extLst>
-          </p:cNvPr>
-          <p:cNvSpPr>
-            <a:spLocks xmlns:a="http://schemas.openxmlformats.org/drawingml/2006/main" noGrp="1"/>
-          </p:cNvSpPr>
-          <p:nvPr/>
-        </p:nvSpPr>
-        <p:spPr>
-          <a:xfrm xmlns:a="http://schemas.openxmlformats.org/drawingml/2006/main">
-            <a:off x="1066800" y="10629900"/>
-            <a:ext cx="8096250" cy="457200"/>
-          </a:xfrm>
-          <a:prstGeom xmlns:a="http://schemas.openxmlformats.org/drawingml/2006/main" prst="rect">
-            <a:avLst/>
-          </a:prstGeom>
-          <a:noFill xmlns:a="http://schemas.openxmlformats.org/drawingml/2006/main"/>
-          <a:ln xmlns:a="http://schemas.openxmlformats.org/drawingml/2006/main" w="0">
-            <a:noFill/>
-            <a:prstDash val="solid"/>
-          </a:ln>
-        </p:spPr>
-        <p:txBody>
-          <a:bodyPr xmlns:a="http://schemas.openxmlformats.org/drawingml/2006/main" anchor="t">
-            <a:normAutofit fontScale="100000"/>
-          </a:bodyPr>
-          <a:lstStyle xmlns:a="http://schemas.openxmlformats.org/drawingml/2006/main"/>
-          <a:p xmlns:a="http://schemas.openxmlformats.org/drawingml/2006/main">
-            <a:pPr algn="l">
-              <a:defRPr sz="1875" b="1">
-                <a:solidFill>
-                  <a:srgbClr val="07111C"/>
-                </a:solidFill>
-                <a:latin typeface="Arial"/>
-                <a:ea typeface="Arial"/>
-                <a:cs typeface="Arial"/>
-              </a:defRPr>
-            </a:pPr>
-            <a:r>
-              <a:rPr sz="1875" b="1">
-                <a:solidFill>
-                  <a:srgbClr val="07111C"/>
-                </a:solidFill>
-                <a:latin typeface="Arial"/>
-                <a:ea typeface="Arial"/>
-                <a:cs typeface="Arial"/>
-              </a:rPr>
-              <a:t>Não envia comandos para equipamentos</a:t>
-            </a:r>
-          </a:p>
-        </p:txBody>
-      </p:sp>
-      <p:cxnSp>
-        <p:nvCxnSpPr>
-          <p:cNvPr id="32" name="footer-rule-9"/>
-          <p:cNvCxnSpPr/>
-          <p:nvPr/>
-        </p:nvCxnSpPr>
-        <p:spPr>
-          <a:xfrm xmlns:a="http://schemas.openxmlformats.org/drawingml/2006/main">
-            <a:off x="685800" y="12039600"/>
-            <a:ext cx="8915400" cy="0"/>
-          </a:xfrm>
-          <a:prstGeom xmlns:a="http://schemas.openxmlformats.org/drawingml/2006/main" prst="straightConnector1">
-            <a:avLst/>
-          </a:prstGeom>
-          <a:ln xmlns:a="http://schemas.openxmlformats.org/drawingml/2006/main" w="9525">
-            <a:solidFill>
-              <a:srgbClr val="BCC4CC"/>
-            </a:solidFill>
-            <a:prstDash val="solid"/>
-          </a:ln>
-        </p:spPr>
-      </p:cxnSp>
-      <p:sp>
-        <p:nvSpPr>
-          <p:cNvPr id="16" name="footer-9">
-            <a:extLst xmlns:a="http://schemas.openxmlformats.org/drawingml/2006/main">
-              <a:ext uri="{FF2B5EF4-FFF2-40B4-BE49-F238E27FC236}">
-                <a16:creationId xmlns:a16="http://schemas.microsoft.com/office/drawing/2014/main" id="{B3CB2A96-7BEA-469E-B01B-78C16A75F437}"/>
-              </a:ext>
-            </a:extLst>
-          </p:cNvPr>
-          <p:cNvSpPr>
-            <a:spLocks xmlns:a="http://schemas.openxmlformats.org/drawingml/2006/main" noGrp="1"/>
-          </p:cNvSpPr>
-          <p:nvPr/>
-        </p:nvSpPr>
-        <p:spPr>
-          <a:xfrm xmlns:a="http://schemas.openxmlformats.org/drawingml/2006/main">
-            <a:off x="685800" y="12211050"/>
-            <a:ext cx="7429500" cy="266700"/>
+              <a:t>Protótipo educacional · dados 100% sintéticos · sem controle de máquina</a:t>
+            </a:r>
+          </a:p>
+        </p:txBody>
+      </p:sp>
+      <p:sp>
+        <p:nvSpPr>
+          <p:cNvPr id="9" name="close-page">
+            <a:extLst xmlns:a="http://schemas.openxmlformats.org/drawingml/2006/main">
+              <a:ext uri="{FF2B5EF4-FFF2-40B4-BE49-F238E27FC236}">
+                <a16:creationId xmlns:a16="http://schemas.microsoft.com/office/drawing/2014/main" id="{743BA035-DA5C-42C6-9464-2A791F3A6D2C}"/>
+              </a:ext>
+            </a:extLst>
+          </p:cNvPr>
+          <p:cNvSpPr>
+            <a:spLocks xmlns:a="http://schemas.openxmlformats.org/drawingml/2006/main" noGrp="1"/>
+          </p:cNvSpPr>
+          <p:nvPr/>
+        </p:nvSpPr>
+        <p:spPr>
+          <a:xfrm xmlns:a="http://schemas.openxmlformats.org/drawingml/2006/main">
+            <a:off x="8667750" y="12211050"/>
+            <a:ext cx="933450" cy="266700"/>
           </a:xfrm>
           <a:prstGeom xmlns:a="http://schemas.openxmlformats.org/drawingml/2006/main" prst="rect">
             <a:avLst/>
@@ -10837,7 +9900,8 @@
           </a:bodyPr>
           <a:lstStyle xmlns:a="http://schemas.openxmlformats.org/drawingml/2006/main"/>
           <a:p xmlns:a="http://schemas.openxmlformats.org/drawingml/2006/main">
-            <a:pPr algn="l">
+            <a:pPr algn="r">
+              <a:buNone/>
               <a:defRPr sz="1200" b="0">
                 <a:solidFill>
                   <a:srgbClr val="53606D"/>
@@ -10856,65 +9920,7 @@
                 <a:ea typeface="Arial"/>
                 <a:cs typeface="Arial"/>
               </a:rPr>
-              <a:t>100% sintético · sem controle de máquina</a:t>
-            </a:r>
-          </a:p>
-        </p:txBody>
-      </p:sp>
-      <p:sp>
-        <p:nvSpPr>
-          <p:cNvPr id="17" name="footer-page-9">
-            <a:extLst xmlns:a="http://schemas.openxmlformats.org/drawingml/2006/main">
-              <a:ext uri="{FF2B5EF4-FFF2-40B4-BE49-F238E27FC236}">
-                <a16:creationId xmlns:a16="http://schemas.microsoft.com/office/drawing/2014/main" id="{FDB705C5-6FB4-486B-8E36-FD328329D84B}"/>
-              </a:ext>
-            </a:extLst>
-          </p:cNvPr>
-          <p:cNvSpPr>
-            <a:spLocks xmlns:a="http://schemas.openxmlformats.org/drawingml/2006/main" noGrp="1"/>
-          </p:cNvSpPr>
-          <p:nvPr/>
-        </p:nvSpPr>
-        <p:spPr>
-          <a:xfrm xmlns:a="http://schemas.openxmlformats.org/drawingml/2006/main">
-            <a:off x="8763000" y="12211050"/>
-            <a:ext cx="838200" cy="266700"/>
-          </a:xfrm>
-          <a:prstGeom xmlns:a="http://schemas.openxmlformats.org/drawingml/2006/main" prst="rect">
-            <a:avLst/>
-          </a:prstGeom>
-          <a:noFill xmlns:a="http://schemas.openxmlformats.org/drawingml/2006/main"/>
-          <a:ln xmlns:a="http://schemas.openxmlformats.org/drawingml/2006/main" w="0">
-            <a:noFill/>
-            <a:prstDash val="solid"/>
-          </a:ln>
-        </p:spPr>
-        <p:txBody>
-          <a:bodyPr xmlns:a="http://schemas.openxmlformats.org/drawingml/2006/main" anchor="t">
-            <a:normAutofit fontScale="95833"/>
-          </a:bodyPr>
-          <a:lstStyle xmlns:a="http://schemas.openxmlformats.org/drawingml/2006/main"/>
-          <a:p xmlns:a="http://schemas.openxmlformats.org/drawingml/2006/main">
-            <a:pPr algn="r">
-              <a:defRPr sz="1200" b="0">
-                <a:solidFill>
-                  <a:srgbClr val="53606D"/>
-                </a:solidFill>
-                <a:latin typeface="Arial"/>
-                <a:ea typeface="Arial"/>
-                <a:cs typeface="Arial"/>
-              </a:defRPr>
-            </a:pPr>
-            <a:r>
-              <a:rPr sz="1200" b="0">
-                <a:solidFill>
-                  <a:srgbClr val="53606D"/>
-                </a:solidFill>
-                <a:latin typeface="Arial"/>
-                <a:ea typeface="Arial"/>
-                <a:cs typeface="Arial"/>
-              </a:rPr>
-              <a:t>9/10</a:t>
+              <a:t>9/9</a:t>
             </a:r>
           </a:p>
         </p:txBody>
@@ -10922,7 +9928,7 @@
     </p:spTree>
     <p:extLst>
       <p:ext uri="{BB962C8B-B14F-4D97-AF65-F5344CB8AC3E}">
-        <p14:creationId xmlns:p14="http://schemas.microsoft.com/office/powerpoint/2010/main" val="1549112306"/>
+        <p14:creationId xmlns:p14="http://schemas.microsoft.com/office/powerpoint/2010/main" val="1423961865"/>
       </p:ext>
     </p:extLst>
   </p:cSld>

--- a/docs/SteelFlow_AI_LinkedIn_Carousel.pptx
+++ b/docs/SteelFlow_AI_LinkedIn_Carousel.pptx
@@ -2,15 +2,17 @@
 <file path=ppt/presentation.xml><?xml version="1.0" encoding="utf-8"?>
 <p:presentation xmlns:p="http://schemas.openxmlformats.org/presentationml/2006/main">
   <p:sldMasterIdLst>
-    <p:sldMasterId xmlns:r="http://schemas.openxmlformats.org/officeDocument/2006/relationships" id="2147483648" r:id="R26e7d0f5fc874eb5"/>
+    <p:sldMasterId xmlns:r="http://schemas.openxmlformats.org/officeDocument/2006/relationships" id="2147483648" r:id="R2166a3e36a254aed"/>
   </p:sldMasterIdLst>
   <p:notesMasterIdLst>
-    <p:notesMasterId xmlns:r="http://schemas.openxmlformats.org/officeDocument/2006/relationships" r:id="R8ef81704d08f48aa"/>
+    <p:notesMasterId xmlns:r="http://schemas.openxmlformats.org/officeDocument/2006/relationships" r:id="Ra63a337227e843ce"/>
   </p:notesMasterIdLst>
   <p:sldIdLst>
-    <p:sldId xmlns:r="http://schemas.openxmlformats.org/officeDocument/2006/relationships" id="256" r:id="R551c72f710124c2f"/>
-    <p:sldId xmlns:r="http://schemas.openxmlformats.org/officeDocument/2006/relationships" id="257" r:id="Rc43c175d650f4efb"/>
-    <p:sldId xmlns:r="http://schemas.openxmlformats.org/officeDocument/2006/relationships" id="258" r:id="Rd2c5971a14484827"/>
+    <p:sldId xmlns:r="http://schemas.openxmlformats.org/officeDocument/2006/relationships" id="256" r:id="Rb84656718e1c4394"/>
+    <p:sldId xmlns:r="http://schemas.openxmlformats.org/officeDocument/2006/relationships" id="257" r:id="R384c7f98936c4175"/>
+    <p:sldId xmlns:r="http://schemas.openxmlformats.org/officeDocument/2006/relationships" id="258" r:id="R912b159c0a094cc1"/>
+    <p:sldId xmlns:r="http://schemas.openxmlformats.org/officeDocument/2006/relationships" id="259" r:id="R69dd126753444f51"/>
+    <p:sldId xmlns:r="http://schemas.openxmlformats.org/officeDocument/2006/relationships" id="260" r:id="R4a649cca10bc4389"/>
   </p:sldIdLst>
   <p:sldSz cx="10287000" cy="12858750"/>
   <p:notesSz cx="6858000" cy="9144000"/>
@@ -534,12 +536,17 @@
           </a:p>
           <a:p xmlns:a="http://schemas.openxmlformats.org/drawingml/2006/main">
             <a:r>
-              <a:t>- artifacts/samples/phase_6_optimization_summaries.json</a:t>
-            </a:r>
-          </a:p>
-          <a:p xmlns:a="http://schemas.openxmlformats.org/drawingml/2006/main">
-            <a:r>
-              <a:t>- docs/images/phase7/scenario-lab.png</a:t>
+              <a:t>- artifacts/samples/phase_7_product_summary.json</a:t>
+            </a:r>
+          </a:p>
+          <a:p xmlns:a="http://schemas.openxmlformats.org/drawingml/2006/main">
+            <a:r>
+              <a:t>- docs/images/phase7/root-cause-explainability.png</a:t>
+            </a:r>
+          </a:p>
+          <a:p xmlns:a="http://schemas.openxmlformats.org/drawingml/2006/main">
+            <a:r>
+              <a:t>- powerbi/README.md</a:t>
             </a:r>
           </a:p>
           <a:p xmlns:a="http://schemas.openxmlformats.org/drawingml/2006/main">
@@ -575,6 +582,176 @@
 </file>
 
 <file path=ppt/notesSlides/notesSlide3.xml><?xml version="1.0" encoding="utf-8"?>
+<p:notes xmlns:p="http://schemas.openxmlformats.org/presentationml/2006/main">
+  <p:cSld>
+    <p:spTree>
+      <p:nvGrpSpPr>
+        <p:cNvPr id="1" name=""/>
+        <p:cNvGrpSpPr/>
+        <p:nvPr/>
+      </p:nvGrpSpPr>
+      <p:grpSpPr>
+        <a:xfrm xmlns:a="http://schemas.openxmlformats.org/drawingml/2006/main"/>
+      </p:grpSpPr>
+      <p:sp>
+        <p:nvSpPr>
+          <p:cNvPr id="2" name="Slide Image Placeholder 1"/>
+          <p:cNvSpPr>
+            <a:spLocks xmlns:a="http://schemas.openxmlformats.org/drawingml/2006/main" noGrp="1"/>
+          </p:cNvSpPr>
+          <p:nvPr>
+            <p:ph type="sldImg" idx="0"/>
+          </p:nvPr>
+        </p:nvSpPr>
+        <p:spPr/>
+      </p:sp>
+      <p:sp>
+        <p:nvSpPr>
+          <p:cNvPr id="3" name="Notes Placeholder 2"/>
+          <p:cNvSpPr>
+            <a:spLocks xmlns:a="http://schemas.openxmlformats.org/drawingml/2006/main" noGrp="1"/>
+          </p:cNvSpPr>
+          <p:nvPr>
+            <p:ph type="body" idx="1"/>
+          </p:nvPr>
+        </p:nvSpPr>
+        <p:spPr/>
+        <p:txBody>
+          <a:bodyPr xmlns:a="http://schemas.openxmlformats.org/drawingml/2006/main"/>
+          <a:lstStyle xmlns:a="http://schemas.openxmlformats.org/drawingml/2006/main"/>
+          <a:p xmlns:a="http://schemas.openxmlformats.org/drawingml/2006/main">
+            <a:r>
+              <a:t>[Sources]</a:t>
+            </a:r>
+          </a:p>
+          <a:p xmlns:a="http://schemas.openxmlformats.org/drawingml/2006/main">
+            <a:r>
+              <a:t>- artifacts/samples/phase_5_modeling_summaries.json</a:t>
+            </a:r>
+          </a:p>
+          <a:p xmlns:a="http://schemas.openxmlformats.org/drawingml/2006/main">
+            <a:r>
+              <a:t>- docs/images/phase7/forecast-risk.png</a:t>
+            </a:r>
+          </a:p>
+          <a:p xmlns:a="http://schemas.openxmlformats.org/drawingml/2006/main">
+            <a:r>
+              <a:t>[/Sources]</a:t>
+            </a:r>
+          </a:p>
+        </p:txBody>
+      </p:sp>
+      <p:sp>
+        <p:nvSpPr>
+          <p:cNvPr id="4" name="Slide Number Placeholder 3"/>
+          <p:cNvSpPr>
+            <a:spLocks xmlns:a="http://schemas.openxmlformats.org/drawingml/2006/main" noGrp="1"/>
+          </p:cNvSpPr>
+          <p:nvPr>
+            <p:ph type="sldNum" idx="5"/>
+          </p:nvPr>
+        </p:nvSpPr>
+        <p:spPr/>
+        <p:txBody>
+          <a:bodyPr xmlns:a="http://schemas.openxmlformats.org/drawingml/2006/main"/>
+          <a:lstStyle xmlns:a="http://schemas.openxmlformats.org/drawingml/2006/main"/>
+          <a:p xmlns:a="http://schemas.openxmlformats.org/drawingml/2006/main"/>
+        </p:txBody>
+      </p:sp>
+    </p:spTree>
+  </p:cSld>
+  <p:clrMapOvr>
+    <a:masterClrMapping xmlns:a="http://schemas.openxmlformats.org/drawingml/2006/main"/>
+  </p:clrMapOvr>
+</p:notes>
+</file>
+
+<file path=ppt/notesSlides/notesSlide4.xml><?xml version="1.0" encoding="utf-8"?>
+<p:notes xmlns:p="http://schemas.openxmlformats.org/presentationml/2006/main">
+  <p:cSld>
+    <p:spTree>
+      <p:nvGrpSpPr>
+        <p:cNvPr id="1" name=""/>
+        <p:cNvGrpSpPr/>
+        <p:nvPr/>
+      </p:nvGrpSpPr>
+      <p:grpSpPr>
+        <a:xfrm xmlns:a="http://schemas.openxmlformats.org/drawingml/2006/main"/>
+      </p:grpSpPr>
+      <p:sp>
+        <p:nvSpPr>
+          <p:cNvPr id="2" name="Slide Image Placeholder 1"/>
+          <p:cNvSpPr>
+            <a:spLocks xmlns:a="http://schemas.openxmlformats.org/drawingml/2006/main" noGrp="1"/>
+          </p:cNvSpPr>
+          <p:nvPr>
+            <p:ph type="sldImg" idx="0"/>
+          </p:nvPr>
+        </p:nvSpPr>
+        <p:spPr/>
+      </p:sp>
+      <p:sp>
+        <p:nvSpPr>
+          <p:cNvPr id="3" name="Notes Placeholder 2"/>
+          <p:cNvSpPr>
+            <a:spLocks xmlns:a="http://schemas.openxmlformats.org/drawingml/2006/main" noGrp="1"/>
+          </p:cNvSpPr>
+          <p:nvPr>
+            <p:ph type="body" idx="1"/>
+          </p:nvPr>
+        </p:nvSpPr>
+        <p:spPr/>
+        <p:txBody>
+          <a:bodyPr xmlns:a="http://schemas.openxmlformats.org/drawingml/2006/main"/>
+          <a:lstStyle xmlns:a="http://schemas.openxmlformats.org/drawingml/2006/main"/>
+          <a:p xmlns:a="http://schemas.openxmlformats.org/drawingml/2006/main">
+            <a:r>
+              <a:t>[Sources]</a:t>
+            </a:r>
+          </a:p>
+          <a:p xmlns:a="http://schemas.openxmlformats.org/drawingml/2006/main">
+            <a:r>
+              <a:t>- artifacts/samples/phase_6_optimization_summaries.json</a:t>
+            </a:r>
+          </a:p>
+          <a:p xmlns:a="http://schemas.openxmlformats.org/drawingml/2006/main">
+            <a:r>
+              <a:t>- docs/images/phase7/scenario-lab.png</a:t>
+            </a:r>
+          </a:p>
+          <a:p xmlns:a="http://schemas.openxmlformats.org/drawingml/2006/main">
+            <a:r>
+              <a:t>[/Sources]</a:t>
+            </a:r>
+          </a:p>
+        </p:txBody>
+      </p:sp>
+      <p:sp>
+        <p:nvSpPr>
+          <p:cNvPr id="4" name="Slide Number Placeholder 3"/>
+          <p:cNvSpPr>
+            <a:spLocks xmlns:a="http://schemas.openxmlformats.org/drawingml/2006/main" noGrp="1"/>
+          </p:cNvSpPr>
+          <p:nvPr>
+            <p:ph type="sldNum" idx="5"/>
+          </p:nvPr>
+        </p:nvSpPr>
+        <p:spPr/>
+        <p:txBody>
+          <a:bodyPr xmlns:a="http://schemas.openxmlformats.org/drawingml/2006/main"/>
+          <a:lstStyle xmlns:a="http://schemas.openxmlformats.org/drawingml/2006/main"/>
+          <a:p xmlns:a="http://schemas.openxmlformats.org/drawingml/2006/main"/>
+        </p:txBody>
+      </p:sp>
+    </p:spTree>
+  </p:cSld>
+  <p:clrMapOvr>
+    <a:masterClrMapping xmlns:a="http://schemas.openxmlformats.org/drawingml/2006/main"/>
+  </p:clrMapOvr>
+</p:notes>
+</file>
+
+<file path=ppt/notesSlides/notesSlide5.xml><?xml version="1.0" encoding="utf-8"?>
 <p:notes xmlns:p="http://schemas.openxmlformats.org/presentationml/2006/main">
   <p:cSld>
     <p:spTree>
@@ -702,7 +879,7 @@
   </p:cSld>
   <p:clrMap bg1="lt1" tx1="dk1" bg2="lt2" tx2="dk2" accent1="accent1" accent2="accent2" accent3="accent3" accent4="accent4" accent5="accent5" accent6="accent6" hlink="hlink" folHlink="folHlink"/>
   <p:sldLayoutIdLst>
-    <p:sldLayoutId xmlns:r="http://schemas.openxmlformats.org/officeDocument/2006/relationships" id="2147483649" r:id="Ra234896f68254edd"/>
+    <p:sldLayoutId xmlns:r="http://schemas.openxmlformats.org/officeDocument/2006/relationships" id="2147483649" r:id="R99ee016e78544bcf"/>
   </p:sldLayoutIdLst>
   <p:txStyles>
     <p:titleStyle>
@@ -1302,7 +1479,7 @@
                 <a:ea typeface="Arial"/>
                 <a:cs typeface="Arial"/>
               </a:rPr>
-              <a:t>O PROBLEMA QUE EU VI</a:t>
+              <a:t>STEELFLOW AI · ANÁLISE DE CENÁRIOS</a:t>
             </a:r>
           </a:p>
         </p:txBody>
@@ -1420,7 +1597,7 @@
                 <a:ea typeface="Arial"/>
                 <a:cs typeface="Arial"/>
               </a:rPr>
-              <a:t>Havia dados.</a:t>
+              <a:t>Dados para comparar</a:t>
             </a:r>
           </a:p>
           <a:p xmlns:a="http://schemas.openxmlformats.org/drawingml/2006/main">
@@ -1444,7 +1621,7 @@
                 <a:ea typeface="Arial"/>
                 <a:cs typeface="Arial"/>
               </a:rPr>
-              <a:t>Faltava testar hipóteses.</a:t>
+              <a:t>decisões.</a:t>
             </a:r>
           </a:p>
         </p:txBody>
@@ -1503,7 +1680,7 @@
                 <a:ea typeface="Arial"/>
                 <a:cs typeface="Arial"/>
               </a:rPr>
-              <a:t>Quando os defeitos apareciam, os parâmetros eram ajustados na tentativa e erro.</a:t>
+              <a:t>Quando um defeito aparece, a plataforma ajuda a trocar tentativa e erro por hipóteses comparáveis.</a:t>
             </a:r>
           </a:p>
         </p:txBody>
@@ -1517,7 +1694,7 @@
           <p:nvPr/>
         </p:nvPicPr>
         <p:blipFill>
-          <a:blip xmlns:r="http://schemas.openxmlformats.org/officeDocument/2006/relationships" xmlns:a="http://schemas.openxmlformats.org/drawingml/2006/main" r:embed="R59877cda60dd45ce"/>
+          <a:blip xmlns:r="http://schemas.openxmlformats.org/officeDocument/2006/relationships" xmlns:a="http://schemas.openxmlformats.org/drawingml/2006/main" r:embed="R906f4f4016474c1f"/>
           <a:srcRect xmlns:a="http://schemas.openxmlformats.org/drawingml/2006/main" l="0" t="6553" r="0" b="6553"/>
           <a:stretch xmlns:a="http://schemas.openxmlformats.org/drawingml/2006/main">
             <a:fillRect l="0" t="0" r="0" b="0"/>
@@ -1648,7 +1825,7 @@
                 <a:ea typeface="Arial"/>
                 <a:cs typeface="Arial"/>
               </a:rPr>
-              <a:t>01/03</a:t>
+              <a:t>01/05</a:t>
             </a:r>
           </a:p>
         </p:txBody>
@@ -1684,10 +1861,10 @@
       </p:grpSpPr>
       <p:sp>
         <p:nvSpPr>
-          <p:cNvPr id="17" name="kicker-7">
-            <a:extLst xmlns:a="http://schemas.openxmlformats.org/drawingml/2006/main">
-              <a:ext uri="{FF2B5EF4-FFF2-40B4-BE49-F238E27FC236}">
-                <a16:creationId xmlns:a16="http://schemas.microsoft.com/office/drawing/2014/main" id="{7DD2BC6F-D214-4CBA-88EC-599B1C28FA7D}"/>
+          <p:cNvPr id="26" name="kicker-8">
+            <a:extLst xmlns:a="http://schemas.openxmlformats.org/drawingml/2006/main">
+              <a:ext uri="{FF2B5EF4-FFF2-40B4-BE49-F238E27FC236}">
+                <a16:creationId xmlns:a16="http://schemas.microsoft.com/office/drawing/2014/main" id="{13323388-F758-47C3-802D-1ACEDC76A4D2}"/>
               </a:ext>
             </a:extLst>
           </p:cNvPr>
@@ -1736,17 +1913,17 @@
                 <a:ea typeface="Arial"/>
                 <a:cs typeface="Arial"/>
               </a:rPr>
-              <a:t>A PROPOSTA</a:t>
-            </a:r>
-          </a:p>
-        </p:txBody>
-      </p:sp>
-      <p:sp>
-        <p:nvSpPr>
-          <p:cNvPr id="2" name="page-7">
-            <a:extLst xmlns:a="http://schemas.openxmlformats.org/drawingml/2006/main">
-              <a:ext uri="{FF2B5EF4-FFF2-40B4-BE49-F238E27FC236}">
-                <a16:creationId xmlns:a16="http://schemas.microsoft.com/office/drawing/2014/main" id="{6A092EF0-99DD-4B9B-AA19-12622A4EDBCC}"/>
+              <a:t>A PLATAFORMA</a:t>
+            </a:r>
+          </a:p>
+        </p:txBody>
+      </p:sp>
+      <p:sp>
+        <p:nvSpPr>
+          <p:cNvPr id="2" name="page-8">
+            <a:extLst xmlns:a="http://schemas.openxmlformats.org/drawingml/2006/main">
+              <a:ext uri="{FF2B5EF4-FFF2-40B4-BE49-F238E27FC236}">
+                <a16:creationId xmlns:a16="http://schemas.microsoft.com/office/drawing/2014/main" id="{085CC0FB-9DA9-4DB1-948A-14D31DFD71C3}"/>
               </a:ext>
             </a:extLst>
           </p:cNvPr>
@@ -1802,10 +1979,10 @@
       </p:sp>
       <p:sp>
         <p:nvSpPr>
-          <p:cNvPr id="3" name="title-7">
-            <a:extLst xmlns:a="http://schemas.openxmlformats.org/drawingml/2006/main">
-              <a:ext uri="{FF2B5EF4-FFF2-40B4-BE49-F238E27FC236}">
-                <a16:creationId xmlns:a16="http://schemas.microsoft.com/office/drawing/2014/main" id="{B63F41E9-DCD1-4F71-9BF9-B13413805947}"/>
+          <p:cNvPr id="3" name="title-8">
+            <a:extLst xmlns:a="http://schemas.openxmlformats.org/drawingml/2006/main">
+              <a:ext uri="{FF2B5EF4-FFF2-40B4-BE49-F238E27FC236}">
+                <a16:creationId xmlns:a16="http://schemas.microsoft.com/office/drawing/2014/main" id="{8EAD528E-F504-44D4-97EC-A4ED4177FC17}"/>
               </a:ext>
             </a:extLst>
           </p:cNvPr>
@@ -1818,6 +1995,65 @@
           <a:xfrm xmlns:a="http://schemas.openxmlformats.org/drawingml/2006/main">
             <a:off x="685800" y="1000125"/>
             <a:ext cx="8915400" cy="1162050"/>
+          </a:xfrm>
+          <a:prstGeom xmlns:a="http://schemas.openxmlformats.org/drawingml/2006/main" prst="rect">
+            <a:avLst/>
+          </a:prstGeom>
+          <a:noFill xmlns:a="http://schemas.openxmlformats.org/drawingml/2006/main"/>
+          <a:ln xmlns:a="http://schemas.openxmlformats.org/drawingml/2006/main" w="0">
+            <a:noFill/>
+            <a:prstDash val="solid"/>
+          </a:ln>
+        </p:spPr>
+        <p:txBody>
+          <a:bodyPr xmlns:a="http://schemas.openxmlformats.org/drawingml/2006/main" anchor="t">
+            <a:normAutofit fontScale="95605"/>
+          </a:bodyPr>
+          <a:lstStyle xmlns:a="http://schemas.openxmlformats.org/drawingml/2006/main"/>
+          <a:p xmlns:a="http://schemas.openxmlformats.org/drawingml/2006/main">
+            <a:pPr algn="l">
+              <a:buNone/>
+              <a:defRPr sz="3750" b="1">
+                <a:solidFill>
+                  <a:srgbClr val="07111C"/>
+                </a:solidFill>
+                <a:latin typeface="Arial"/>
+                <a:ea typeface="Arial"/>
+                <a:cs typeface="Arial"/>
+              </a:defRPr>
+            </a:pPr>
+            <a:r>
+              <a:rPr sz="3750" b="1">
+                <a:solidFill>
+                  <a:srgbClr val="07111C"/>
+                </a:solidFill>
+                <a:latin typeface="Arial"/>
+                <a:ea typeface="Arial"/>
+                <a:cs typeface="Arial"/>
+              </a:rPr>
+              <a:t>Cinco páginas. Uma jornada de decisão.</a:t>
+            </a:r>
+          </a:p>
+        </p:txBody>
+      </p:sp>
+      <p:sp>
+        <p:nvSpPr>
+          <p:cNvPr id="4" name="subtitle-8">
+            <a:extLst xmlns:a="http://schemas.openxmlformats.org/drawingml/2006/main">
+              <a:ext uri="{FF2B5EF4-FFF2-40B4-BE49-F238E27FC236}">
+                <a16:creationId xmlns:a16="http://schemas.microsoft.com/office/drawing/2014/main" id="{8F1FE70D-04EE-4DA5-B441-1A4F36CD241C}"/>
+              </a:ext>
+            </a:extLst>
+          </p:cNvPr>
+          <p:cNvSpPr>
+            <a:spLocks xmlns:a="http://schemas.openxmlformats.org/drawingml/2006/main" noGrp="1"/>
+          </p:cNvSpPr>
+          <p:nvPr/>
+        </p:nvSpPr>
+        <p:spPr>
+          <a:xfrm xmlns:a="http://schemas.openxmlformats.org/drawingml/2006/main">
+            <a:off x="685800" y="2133600"/>
+            <a:ext cx="8915400" cy="704850"/>
           </a:xfrm>
           <a:prstGeom xmlns:a="http://schemas.openxmlformats.org/drawingml/2006/main" prst="rect">
             <a:avLst/>
@@ -1836,65 +2072,6 @@
           <a:p xmlns:a="http://schemas.openxmlformats.org/drawingml/2006/main">
             <a:pPr algn="l">
               <a:buNone/>
-              <a:defRPr sz="3750" b="1">
-                <a:solidFill>
-                  <a:srgbClr val="07111C"/>
-                </a:solidFill>
-                <a:latin typeface="Arial"/>
-                <a:ea typeface="Arial"/>
-                <a:cs typeface="Arial"/>
-              </a:defRPr>
-            </a:pPr>
-            <a:r>
-              <a:rPr sz="3750" b="1">
-                <a:solidFill>
-                  <a:srgbClr val="07111C"/>
-                </a:solidFill>
-                <a:latin typeface="Arial"/>
-                <a:ea typeface="Arial"/>
-                <a:cs typeface="Arial"/>
-              </a:rPr>
-              <a:t>Testar hipóteses antes de ajustar</a:t>
-            </a:r>
-          </a:p>
-        </p:txBody>
-      </p:sp>
-      <p:sp>
-        <p:nvSpPr>
-          <p:cNvPr id="4" name="subtitle-7">
-            <a:extLst xmlns:a="http://schemas.openxmlformats.org/drawingml/2006/main">
-              <a:ext uri="{FF2B5EF4-FFF2-40B4-BE49-F238E27FC236}">
-                <a16:creationId xmlns:a16="http://schemas.microsoft.com/office/drawing/2014/main" id="{301F72D8-C84C-47AE-B5A3-54F74CA295D5}"/>
-              </a:ext>
-            </a:extLst>
-          </p:cNvPr>
-          <p:cNvSpPr>
-            <a:spLocks xmlns:a="http://schemas.openxmlformats.org/drawingml/2006/main" noGrp="1"/>
-          </p:cNvSpPr>
-          <p:nvPr/>
-        </p:nvSpPr>
-        <p:spPr>
-          <a:xfrm xmlns:a="http://schemas.openxmlformats.org/drawingml/2006/main">
-            <a:off x="685800" y="2133600"/>
-            <a:ext cx="8915400" cy="704850"/>
-          </a:xfrm>
-          <a:prstGeom xmlns:a="http://schemas.openxmlformats.org/drawingml/2006/main" prst="rect">
-            <a:avLst/>
-          </a:prstGeom>
-          <a:noFill xmlns:a="http://schemas.openxmlformats.org/drawingml/2006/main"/>
-          <a:ln xmlns:a="http://schemas.openxmlformats.org/drawingml/2006/main" w="0">
-            <a:noFill/>
-            <a:prstDash val="solid"/>
-          </a:ln>
-        </p:spPr>
-        <p:txBody>
-          <a:bodyPr xmlns:a="http://schemas.openxmlformats.org/drawingml/2006/main" anchor="t">
-            <a:normAutofit fontScale="100000"/>
-          </a:bodyPr>
-          <a:lstStyle xmlns:a="http://schemas.openxmlformats.org/drawingml/2006/main"/>
-          <a:p xmlns:a="http://schemas.openxmlformats.org/drawingml/2006/main">
-            <a:pPr algn="l">
-              <a:buNone/>
               <a:defRPr sz="1875" b="0">
                 <a:solidFill>
                   <a:srgbClr val="53606D"/>
@@ -1913,14 +2090,14 @@
                 <a:ea typeface="Arial"/>
                 <a:cs typeface="Arial"/>
               </a:rPr>
-              <a:t>Compare parâmetros e veja probabilidades, faixas e limites.</a:t>
+              <a:t>Veja tendências, influências, riscos, cenários e confiabilidade.</a:t>
             </a:r>
           </a:p>
         </p:txBody>
       </p:sp>
       <p:cxnSp>
         <p:nvCxnSpPr>
-          <p:cNvPr id="81" name="header-rule-7"/>
+          <p:cNvPr id="126" name="header-rule-8"/>
           <p:cNvCxnSpPr/>
           <p:nvPr/>
         </p:nvCxnSpPr>
@@ -1942,22 +2119,22 @@
       </p:cxnSp>
       <p:sp>
         <p:nvSpPr>
-          <p:cNvPr id="6" name="scenario-stat-0">
-            <a:extLst xmlns:a="http://schemas.openxmlformats.org/drawingml/2006/main">
-              <a:ext uri="{FF2B5EF4-FFF2-40B4-BE49-F238E27FC236}">
-                <a16:creationId xmlns:a16="http://schemas.microsoft.com/office/drawing/2014/main" id="{3874855A-F37C-4BE5-91CD-BFB684E4AD1A}"/>
-              </a:ext>
-            </a:extLst>
-          </p:cNvPr>
-          <p:cNvSpPr>
-            <a:spLocks xmlns:a="http://schemas.openxmlformats.org/drawingml/2006/main" noGrp="1"/>
-          </p:cNvSpPr>
-          <p:nvPr/>
-        </p:nvSpPr>
-        <p:spPr>
-          <a:xfrm xmlns:a="http://schemas.openxmlformats.org/drawingml/2006/main">
-            <a:off x="685800" y="3429000"/>
-            <a:ext cx="2381250" cy="685800"/>
+          <p:cNvPr id="6" name="product-index-0">
+            <a:extLst xmlns:a="http://schemas.openxmlformats.org/drawingml/2006/main">
+              <a:ext uri="{FF2B5EF4-FFF2-40B4-BE49-F238E27FC236}">
+                <a16:creationId xmlns:a16="http://schemas.microsoft.com/office/drawing/2014/main" id="{8C5E6F41-3061-44E2-A958-2141A1F641A8}"/>
+              </a:ext>
+            </a:extLst>
+          </p:cNvPr>
+          <p:cNvSpPr>
+            <a:spLocks xmlns:a="http://schemas.openxmlformats.org/drawingml/2006/main" noGrp="1"/>
+          </p:cNvSpPr>
+          <p:nvPr/>
+        </p:nvSpPr>
+        <p:spPr>
+          <a:xfrm xmlns:a="http://schemas.openxmlformats.org/drawingml/2006/main">
+            <a:off x="685800" y="3543300"/>
+            <a:ext cx="628650" cy="438150"/>
           </a:xfrm>
           <a:prstGeom xmlns:a="http://schemas.openxmlformats.org/drawingml/2006/main" prst="rect">
             <a:avLst/>
@@ -1976,7 +2153,7 @@
           <a:p xmlns:a="http://schemas.openxmlformats.org/drawingml/2006/main">
             <a:pPr algn="l">
               <a:buNone/>
-              <a:defRPr sz="3300" b="1">
+              <a:defRPr sz="1650" b="1">
                 <a:solidFill>
                   <a:srgbClr val="3D8DFF"/>
                 </a:solidFill>
@@ -1986,7 +2163,7 @@
               </a:defRPr>
             </a:pPr>
             <a:r>
-              <a:rPr sz="3300" b="1">
+              <a:rPr sz="1650" b="1">
                 <a:solidFill>
                   <a:srgbClr val="3D8DFF"/>
                 </a:solidFill>
@@ -1994,29 +2171,29 @@
                 <a:ea typeface="Arial"/>
                 <a:cs typeface="Arial"/>
               </a:rPr>
-              <a:t>12</a:t>
-            </a:r>
-          </a:p>
-        </p:txBody>
-      </p:sp>
-      <p:sp>
-        <p:nvSpPr>
-          <p:cNvPr id="7" name="scenario-label-0">
-            <a:extLst xmlns:a="http://schemas.openxmlformats.org/drawingml/2006/main">
-              <a:ext uri="{FF2B5EF4-FFF2-40B4-BE49-F238E27FC236}">
-                <a16:creationId xmlns:a16="http://schemas.microsoft.com/office/drawing/2014/main" id="{4B60A1AD-6086-4D18-AA3A-BF02DED97DC9}"/>
-              </a:ext>
-            </a:extLst>
-          </p:cNvPr>
-          <p:cNvSpPr>
-            <a:spLocks xmlns:a="http://schemas.openxmlformats.org/drawingml/2006/main" noGrp="1"/>
-          </p:cNvSpPr>
-          <p:nvPr/>
-        </p:nvSpPr>
-        <p:spPr>
-          <a:xfrm xmlns:a="http://schemas.openxmlformats.org/drawingml/2006/main">
-            <a:off x="685800" y="4171950"/>
-            <a:ext cx="2381250" cy="552450"/>
+              <a:t>01</a:t>
+            </a:r>
+          </a:p>
+        </p:txBody>
+      </p:sp>
+      <p:sp>
+        <p:nvSpPr>
+          <p:cNvPr id="7" name="product-page-0">
+            <a:extLst xmlns:a="http://schemas.openxmlformats.org/drawingml/2006/main">
+              <a:ext uri="{FF2B5EF4-FFF2-40B4-BE49-F238E27FC236}">
+                <a16:creationId xmlns:a16="http://schemas.microsoft.com/office/drawing/2014/main" id="{E620A6BE-FC68-492B-8B95-69CA27A7568F}"/>
+              </a:ext>
+            </a:extLst>
+          </p:cNvPr>
+          <p:cNvSpPr>
+            <a:spLocks xmlns:a="http://schemas.openxmlformats.org/drawingml/2006/main" noGrp="1"/>
+          </p:cNvSpPr>
+          <p:nvPr/>
+        </p:nvSpPr>
+        <p:spPr>
+          <a:xfrm xmlns:a="http://schemas.openxmlformats.org/drawingml/2006/main">
+            <a:off x="1485900" y="3486150"/>
+            <a:ext cx="3429000" cy="552450"/>
           </a:xfrm>
           <a:prstGeom xmlns:a="http://schemas.openxmlformats.org/drawingml/2006/main" prst="rect">
             <a:avLst/>
@@ -2035,47 +2212,69 @@
           <a:p xmlns:a="http://schemas.openxmlformats.org/drawingml/2006/main">
             <a:pPr algn="l">
               <a:buNone/>
-              <a:defRPr sz="1500" b="0">
-                <a:solidFill>
-                  <a:srgbClr val="53606D"/>
-                </a:solidFill>
-                <a:latin typeface="Arial"/>
-                <a:ea typeface="Arial"/>
-                <a:cs typeface="Arial"/>
-              </a:defRPr>
-            </a:pPr>
-            <a:r>
-              <a:rPr sz="1500" b="0">
-                <a:solidFill>
-                  <a:srgbClr val="53606D"/>
-                </a:solidFill>
-                <a:latin typeface="Arial"/>
-                <a:ea typeface="Arial"/>
-                <a:cs typeface="Arial"/>
-              </a:rPr>
-              <a:t>cenários publicados</a:t>
-            </a:r>
-          </a:p>
-        </p:txBody>
-      </p:sp>
-      <p:sp>
-        <p:nvSpPr>
-          <p:cNvPr id="8" name="scenario-stat-1">
-            <a:extLst xmlns:a="http://schemas.openxmlformats.org/drawingml/2006/main">
-              <a:ext uri="{FF2B5EF4-FFF2-40B4-BE49-F238E27FC236}">
-                <a16:creationId xmlns:a16="http://schemas.microsoft.com/office/drawing/2014/main" id="{5D22E322-4953-4C2D-91E9-4402904D1F6F}"/>
-              </a:ext>
-            </a:extLst>
-          </p:cNvPr>
-          <p:cNvSpPr>
-            <a:spLocks xmlns:a="http://schemas.openxmlformats.org/drawingml/2006/main" noGrp="1"/>
-          </p:cNvSpPr>
-          <p:nvPr/>
-        </p:nvSpPr>
-        <p:spPr>
-          <a:xfrm xmlns:a="http://schemas.openxmlformats.org/drawingml/2006/main">
-            <a:off x="3752850" y="3429000"/>
-            <a:ext cx="2381250" cy="685800"/>
+              <a:defRPr sz="1875" b="1">
+                <a:solidFill>
+                  <a:srgbClr val="07111C"/>
+                </a:solidFill>
+                <a:latin typeface="Arial"/>
+                <a:ea typeface="Arial"/>
+                <a:cs typeface="Arial"/>
+              </a:defRPr>
+            </a:pPr>
+            <a:r>
+              <a:rPr sz="1875" b="1">
+                <a:solidFill>
+                  <a:srgbClr val="07111C"/>
+                </a:solidFill>
+                <a:latin typeface="Arial"/>
+                <a:ea typeface="Arial"/>
+                <a:cs typeface="Arial"/>
+              </a:rPr>
+              <a:t>Visão geral</a:t>
+            </a:r>
+          </a:p>
+        </p:txBody>
+      </p:sp>
+      <p:cxnSp>
+        <p:nvCxnSpPr>
+          <p:cNvPr id="129" name="product-rule-0"/>
+          <p:cNvCxnSpPr/>
+          <p:nvPr/>
+        </p:nvCxnSpPr>
+        <p:spPr>
+          <a:xfrm xmlns:a="http://schemas.openxmlformats.org/drawingml/2006/main">
+            <a:off x="1485900" y="4133850"/>
+            <a:ext cx="3429000" cy="0"/>
+          </a:xfrm>
+          <a:prstGeom xmlns:a="http://schemas.openxmlformats.org/drawingml/2006/main" prst="straightConnector1">
+            <a:avLst/>
+          </a:prstGeom>
+          <a:ln xmlns:a="http://schemas.openxmlformats.org/drawingml/2006/main" w="9525">
+            <a:solidFill>
+              <a:srgbClr val="BCC4CC"/>
+            </a:solidFill>
+            <a:prstDash val="solid"/>
+          </a:ln>
+        </p:spPr>
+      </p:cxnSp>
+      <p:sp>
+        <p:nvSpPr>
+          <p:cNvPr id="9" name="product-index-1">
+            <a:extLst xmlns:a="http://schemas.openxmlformats.org/drawingml/2006/main">
+              <a:ext uri="{FF2B5EF4-FFF2-40B4-BE49-F238E27FC236}">
+                <a16:creationId xmlns:a16="http://schemas.microsoft.com/office/drawing/2014/main" id="{EBF830FF-E4DE-4E0C-9072-A52B69F8773E}"/>
+              </a:ext>
+            </a:extLst>
+          </p:cNvPr>
+          <p:cNvSpPr>
+            <a:spLocks xmlns:a="http://schemas.openxmlformats.org/drawingml/2006/main" noGrp="1"/>
+          </p:cNvSpPr>
+          <p:nvPr/>
+        </p:nvSpPr>
+        <p:spPr>
+          <a:xfrm xmlns:a="http://schemas.openxmlformats.org/drawingml/2006/main">
+            <a:off x="685800" y="4610100"/>
+            <a:ext cx="628650" cy="438150"/>
           </a:xfrm>
           <a:prstGeom xmlns:a="http://schemas.openxmlformats.org/drawingml/2006/main" prst="rect">
             <a:avLst/>
@@ -2094,7 +2293,7 @@
           <a:p xmlns:a="http://schemas.openxmlformats.org/drawingml/2006/main">
             <a:pPr algn="l">
               <a:buNone/>
-              <a:defRPr sz="3300" b="1">
+              <a:defRPr sz="1650" b="1">
                 <a:solidFill>
                   <a:srgbClr val="3D8DFF"/>
                 </a:solidFill>
@@ -2104,7 +2303,7 @@
               </a:defRPr>
             </a:pPr>
             <a:r>
-              <a:rPr sz="3300" b="1">
+              <a:rPr sz="1650" b="1">
                 <a:solidFill>
                   <a:srgbClr val="3D8DFF"/>
                 </a:solidFill>
@@ -2112,29 +2311,29 @@
                 <a:ea typeface="Arial"/>
                 <a:cs typeface="Arial"/>
               </a:rPr>
-              <a:t>9</a:t>
-            </a:r>
-          </a:p>
-        </p:txBody>
-      </p:sp>
-      <p:sp>
-        <p:nvSpPr>
-          <p:cNvPr id="9" name="scenario-label-1">
-            <a:extLst xmlns:a="http://schemas.openxmlformats.org/drawingml/2006/main">
-              <a:ext uri="{FF2B5EF4-FFF2-40B4-BE49-F238E27FC236}">
-                <a16:creationId xmlns:a16="http://schemas.microsoft.com/office/drawing/2014/main" id="{E033F261-4F50-4440-B9EC-5106D37A955B}"/>
-              </a:ext>
-            </a:extLst>
-          </p:cNvPr>
-          <p:cNvSpPr>
-            <a:spLocks xmlns:a="http://schemas.openxmlformats.org/drawingml/2006/main" noGrp="1"/>
-          </p:cNvSpPr>
-          <p:nvPr/>
-        </p:nvSpPr>
-        <p:spPr>
-          <a:xfrm xmlns:a="http://schemas.openxmlformats.org/drawingml/2006/main">
-            <a:off x="3752850" y="4171950"/>
-            <a:ext cx="2381250" cy="552450"/>
+              <a:t>02</a:t>
+            </a:r>
+          </a:p>
+        </p:txBody>
+      </p:sp>
+      <p:sp>
+        <p:nvSpPr>
+          <p:cNvPr id="10" name="product-page-1">
+            <a:extLst xmlns:a="http://schemas.openxmlformats.org/drawingml/2006/main">
+              <a:ext uri="{FF2B5EF4-FFF2-40B4-BE49-F238E27FC236}">
+                <a16:creationId xmlns:a16="http://schemas.microsoft.com/office/drawing/2014/main" id="{BC167A51-2493-4275-B03A-235C4AA6B681}"/>
+              </a:ext>
+            </a:extLst>
+          </p:cNvPr>
+          <p:cNvSpPr>
+            <a:spLocks xmlns:a="http://schemas.openxmlformats.org/drawingml/2006/main" noGrp="1"/>
+          </p:cNvSpPr>
+          <p:nvPr/>
+        </p:nvSpPr>
+        <p:spPr>
+          <a:xfrm xmlns:a="http://schemas.openxmlformats.org/drawingml/2006/main">
+            <a:off x="1485900" y="4552950"/>
+            <a:ext cx="3429000" cy="552450"/>
           </a:xfrm>
           <a:prstGeom xmlns:a="http://schemas.openxmlformats.org/drawingml/2006/main" prst="rect">
             <a:avLst/>
@@ -2153,47 +2352,69 @@
           <a:p xmlns:a="http://schemas.openxmlformats.org/drawingml/2006/main">
             <a:pPr algn="l">
               <a:buNone/>
-              <a:defRPr sz="1500" b="0">
-                <a:solidFill>
-                  <a:srgbClr val="53606D"/>
-                </a:solidFill>
-                <a:latin typeface="Arial"/>
-                <a:ea typeface="Arial"/>
-                <a:cs typeface="Arial"/>
-              </a:defRPr>
-            </a:pPr>
-            <a:r>
-              <a:rPr sz="1500" b="0">
-                <a:solidFill>
-                  <a:srgbClr val="53606D"/>
-                </a:solidFill>
-                <a:latin typeface="Arial"/>
-                <a:ea typeface="Arial"/>
-                <a:cs typeface="Arial"/>
-              </a:rPr>
-              <a:t>restrições obrigatórias</a:t>
-            </a:r>
-          </a:p>
-        </p:txBody>
-      </p:sp>
-      <p:sp>
-        <p:nvSpPr>
-          <p:cNvPr id="10" name="scenario-stat-2">
-            <a:extLst xmlns:a="http://schemas.openxmlformats.org/drawingml/2006/main">
-              <a:ext uri="{FF2B5EF4-FFF2-40B4-BE49-F238E27FC236}">
-                <a16:creationId xmlns:a16="http://schemas.microsoft.com/office/drawing/2014/main" id="{7DD40CCC-8CAC-4B1A-A91B-89AD34FD2788}"/>
-              </a:ext>
-            </a:extLst>
-          </p:cNvPr>
-          <p:cNvSpPr>
-            <a:spLocks xmlns:a="http://schemas.openxmlformats.org/drawingml/2006/main" noGrp="1"/>
-          </p:cNvSpPr>
-          <p:nvPr/>
-        </p:nvSpPr>
-        <p:spPr>
-          <a:xfrm xmlns:a="http://schemas.openxmlformats.org/drawingml/2006/main">
-            <a:off x="6819900" y="3429000"/>
-            <a:ext cx="2381250" cy="685800"/>
+              <a:defRPr sz="1875" b="1">
+                <a:solidFill>
+                  <a:srgbClr val="07111C"/>
+                </a:solidFill>
+                <a:latin typeface="Arial"/>
+                <a:ea typeface="Arial"/>
+                <a:cs typeface="Arial"/>
+              </a:defRPr>
+            </a:pPr>
+            <a:r>
+              <a:rPr sz="1875" b="1">
+                <a:solidFill>
+                  <a:srgbClr val="07111C"/>
+                </a:solidFill>
+                <a:latin typeface="Arial"/>
+                <a:ea typeface="Arial"/>
+                <a:cs typeface="Arial"/>
+              </a:rPr>
+              <a:t>O que influenciou</a:t>
+            </a:r>
+          </a:p>
+        </p:txBody>
+      </p:sp>
+      <p:cxnSp>
+        <p:nvCxnSpPr>
+          <p:cNvPr id="132" name="product-rule-1"/>
+          <p:cNvCxnSpPr/>
+          <p:nvPr/>
+        </p:nvCxnSpPr>
+        <p:spPr>
+          <a:xfrm xmlns:a="http://schemas.openxmlformats.org/drawingml/2006/main">
+            <a:off x="1485900" y="5200650"/>
+            <a:ext cx="3429000" cy="0"/>
+          </a:xfrm>
+          <a:prstGeom xmlns:a="http://schemas.openxmlformats.org/drawingml/2006/main" prst="straightConnector1">
+            <a:avLst/>
+          </a:prstGeom>
+          <a:ln xmlns:a="http://schemas.openxmlformats.org/drawingml/2006/main" w="9525">
+            <a:solidFill>
+              <a:srgbClr val="BCC4CC"/>
+            </a:solidFill>
+            <a:prstDash val="solid"/>
+          </a:ln>
+        </p:spPr>
+      </p:cxnSp>
+      <p:sp>
+        <p:nvSpPr>
+          <p:cNvPr id="12" name="product-index-2">
+            <a:extLst xmlns:a="http://schemas.openxmlformats.org/drawingml/2006/main">
+              <a:ext uri="{FF2B5EF4-FFF2-40B4-BE49-F238E27FC236}">
+                <a16:creationId xmlns:a16="http://schemas.microsoft.com/office/drawing/2014/main" id="{32B4761E-026D-488B-9A42-FCE986DB702B}"/>
+              </a:ext>
+            </a:extLst>
+          </p:cNvPr>
+          <p:cNvSpPr>
+            <a:spLocks xmlns:a="http://schemas.openxmlformats.org/drawingml/2006/main" noGrp="1"/>
+          </p:cNvSpPr>
+          <p:nvPr/>
+        </p:nvSpPr>
+        <p:spPr>
+          <a:xfrm xmlns:a="http://schemas.openxmlformats.org/drawingml/2006/main">
+            <a:off x="685800" y="5676900"/>
+            <a:ext cx="628650" cy="438150"/>
           </a:xfrm>
           <a:prstGeom xmlns:a="http://schemas.openxmlformats.org/drawingml/2006/main" prst="rect">
             <a:avLst/>
@@ -2212,47 +2433,47 @@
           <a:p xmlns:a="http://schemas.openxmlformats.org/drawingml/2006/main">
             <a:pPr algn="l">
               <a:buNone/>
-              <a:defRPr sz="3300" b="1">
-                <a:solidFill>
-                  <a:srgbClr val="E55B68"/>
-                </a:solidFill>
-                <a:latin typeface="Arial"/>
-                <a:ea typeface="Arial"/>
-                <a:cs typeface="Arial"/>
-              </a:defRPr>
-            </a:pPr>
-            <a:r>
-              <a:rPr sz="3300" b="1">
-                <a:solidFill>
-                  <a:srgbClr val="E55B68"/>
-                </a:solidFill>
-                <a:latin typeface="Arial"/>
-                <a:ea typeface="Arial"/>
-                <a:cs typeface="Arial"/>
-              </a:rPr>
-              <a:t>3/3</a:t>
-            </a:r>
-          </a:p>
-        </p:txBody>
-      </p:sp>
-      <p:sp>
-        <p:nvSpPr>
-          <p:cNvPr id="11" name="scenario-label-2">
-            <a:extLst xmlns:a="http://schemas.openxmlformats.org/drawingml/2006/main">
-              <a:ext uri="{FF2B5EF4-FFF2-40B4-BE49-F238E27FC236}">
-                <a16:creationId xmlns:a16="http://schemas.microsoft.com/office/drawing/2014/main" id="{A76B89E4-D43B-41CE-8CB1-6E6DA87F4D0B}"/>
-              </a:ext>
-            </a:extLst>
-          </p:cNvPr>
-          <p:cNvSpPr>
-            <a:spLocks xmlns:a="http://schemas.openxmlformats.org/drawingml/2006/main" noGrp="1"/>
-          </p:cNvSpPr>
-          <p:nvPr/>
-        </p:nvSpPr>
-        <p:spPr>
-          <a:xfrm xmlns:a="http://schemas.openxmlformats.org/drawingml/2006/main">
-            <a:off x="6819900" y="4171950"/>
-            <a:ext cx="2381250" cy="552450"/>
+              <a:defRPr sz="1650" b="1">
+                <a:solidFill>
+                  <a:srgbClr val="3D8DFF"/>
+                </a:solidFill>
+                <a:latin typeface="Arial"/>
+                <a:ea typeface="Arial"/>
+                <a:cs typeface="Arial"/>
+              </a:defRPr>
+            </a:pPr>
+            <a:r>
+              <a:rPr sz="1650" b="1">
+                <a:solidFill>
+                  <a:srgbClr val="3D8DFF"/>
+                </a:solidFill>
+                <a:latin typeface="Arial"/>
+                <a:ea typeface="Arial"/>
+                <a:cs typeface="Arial"/>
+              </a:rPr>
+              <a:t>03</a:t>
+            </a:r>
+          </a:p>
+        </p:txBody>
+      </p:sp>
+      <p:sp>
+        <p:nvSpPr>
+          <p:cNvPr id="13" name="product-page-2">
+            <a:extLst xmlns:a="http://schemas.openxmlformats.org/drawingml/2006/main">
+              <a:ext uri="{FF2B5EF4-FFF2-40B4-BE49-F238E27FC236}">
+                <a16:creationId xmlns:a16="http://schemas.microsoft.com/office/drawing/2014/main" id="{DAA49201-0452-461D-8554-51B5EC018777}"/>
+              </a:ext>
+            </a:extLst>
+          </p:cNvPr>
+          <p:cNvSpPr>
+            <a:spLocks xmlns:a="http://schemas.openxmlformats.org/drawingml/2006/main" noGrp="1"/>
+          </p:cNvSpPr>
+          <p:nvPr/>
+        </p:nvSpPr>
+        <p:spPr>
+          <a:xfrm xmlns:a="http://schemas.openxmlformats.org/drawingml/2006/main">
+            <a:off x="1485900" y="5619750"/>
+            <a:ext cx="3429000" cy="552450"/>
           </a:xfrm>
           <a:prstGeom xmlns:a="http://schemas.openxmlformats.org/drawingml/2006/main" prst="rect">
             <a:avLst/>
@@ -2271,98 +2492,413 @@
           <a:p xmlns:a="http://schemas.openxmlformats.org/drawingml/2006/main">
             <a:pPr algn="l">
               <a:buNone/>
-              <a:defRPr sz="1500" b="0">
-                <a:solidFill>
-                  <a:srgbClr val="53606D"/>
-                </a:solidFill>
-                <a:latin typeface="Arial"/>
-                <a:ea typeface="Arial"/>
-                <a:cs typeface="Arial"/>
-              </a:defRPr>
-            </a:pPr>
-            <a:r>
-              <a:rPr sz="1500" b="0">
-                <a:solidFill>
-                  <a:srgbClr val="53606D"/>
-                </a:solidFill>
-                <a:latin typeface="Arial"/>
-                <a:ea typeface="Arial"/>
-                <a:cs typeface="Arial"/>
-              </a:rPr>
-              <a:t>fora do histórico</a:t>
-            </a:r>
-          </a:p>
+              <a:defRPr sz="1875" b="1">
+                <a:solidFill>
+                  <a:srgbClr val="07111C"/>
+                </a:solidFill>
+                <a:latin typeface="Arial"/>
+                <a:ea typeface="Arial"/>
+                <a:cs typeface="Arial"/>
+              </a:defRPr>
+            </a:pPr>
+            <a:r>
+              <a:rPr sz="1875" b="1">
+                <a:solidFill>
+                  <a:srgbClr val="07111C"/>
+                </a:solidFill>
+                <a:latin typeface="Arial"/>
+                <a:ea typeface="Arial"/>
+                <a:cs typeface="Arial"/>
+              </a:rPr>
+              <a:t>Previsão e risco</a:t>
+            </a:r>
+          </a:p>
+        </p:txBody>
+      </p:sp>
+      <p:cxnSp>
+        <p:nvCxnSpPr>
+          <p:cNvPr id="135" name="product-rule-2"/>
+          <p:cNvCxnSpPr/>
+          <p:nvPr/>
+        </p:nvCxnSpPr>
+        <p:spPr>
+          <a:xfrm xmlns:a="http://schemas.openxmlformats.org/drawingml/2006/main">
+            <a:off x="1485900" y="6267450"/>
+            <a:ext cx="3429000" cy="0"/>
+          </a:xfrm>
+          <a:prstGeom xmlns:a="http://schemas.openxmlformats.org/drawingml/2006/main" prst="straightConnector1">
+            <a:avLst/>
+          </a:prstGeom>
+          <a:ln xmlns:a="http://schemas.openxmlformats.org/drawingml/2006/main" w="9525">
+            <a:solidFill>
+              <a:srgbClr val="BCC4CC"/>
+            </a:solidFill>
+            <a:prstDash val="solid"/>
+          </a:ln>
+        </p:spPr>
+      </p:cxnSp>
+      <p:sp>
+        <p:nvSpPr>
+          <p:cNvPr id="15" name="product-index-3">
+            <a:extLst xmlns:a="http://schemas.openxmlformats.org/drawingml/2006/main">
+              <a:ext uri="{FF2B5EF4-FFF2-40B4-BE49-F238E27FC236}">
+                <a16:creationId xmlns:a16="http://schemas.microsoft.com/office/drawing/2014/main" id="{00D96976-D4CC-4D65-B420-80FBC0257C03}"/>
+              </a:ext>
+            </a:extLst>
+          </p:cNvPr>
+          <p:cNvSpPr>
+            <a:spLocks xmlns:a="http://schemas.openxmlformats.org/drawingml/2006/main" noGrp="1"/>
+          </p:cNvSpPr>
+          <p:nvPr/>
+        </p:nvSpPr>
+        <p:spPr>
+          <a:xfrm xmlns:a="http://schemas.openxmlformats.org/drawingml/2006/main">
+            <a:off x="685800" y="6743700"/>
+            <a:ext cx="628650" cy="438150"/>
+          </a:xfrm>
+          <a:prstGeom xmlns:a="http://schemas.openxmlformats.org/drawingml/2006/main" prst="rect">
+            <a:avLst/>
+          </a:prstGeom>
+          <a:noFill xmlns:a="http://schemas.openxmlformats.org/drawingml/2006/main"/>
+          <a:ln xmlns:a="http://schemas.openxmlformats.org/drawingml/2006/main" w="0">
+            <a:noFill/>
+            <a:prstDash val="solid"/>
+          </a:ln>
+        </p:spPr>
+        <p:txBody>
+          <a:bodyPr xmlns:a="http://schemas.openxmlformats.org/drawingml/2006/main" anchor="t">
+            <a:normAutofit fontScale="100000"/>
+          </a:bodyPr>
+          <a:lstStyle xmlns:a="http://schemas.openxmlformats.org/drawingml/2006/main"/>
           <a:p xmlns:a="http://schemas.openxmlformats.org/drawingml/2006/main">
             <a:pPr algn="l">
               <a:buNone/>
-              <a:defRPr sz="1500" b="0">
-                <a:solidFill>
-                  <a:srgbClr val="53606D"/>
-                </a:solidFill>
-                <a:latin typeface="Arial"/>
-                <a:ea typeface="Arial"/>
-                <a:cs typeface="Arial"/>
-              </a:defRPr>
-            </a:pPr>
-            <a:r>
-              <a:rPr sz="1500" b="0">
-                <a:solidFill>
-                  <a:srgbClr val="53606D"/>
-                </a:solidFill>
-                <a:latin typeface="Arial"/>
-                <a:ea typeface="Arial"/>
-                <a:cs typeface="Arial"/>
-              </a:rPr>
-              <a:t>recusadas</a:t>
+              <a:defRPr sz="1650" b="1">
+                <a:solidFill>
+                  <a:srgbClr val="3D8DFF"/>
+                </a:solidFill>
+                <a:latin typeface="Arial"/>
+                <a:ea typeface="Arial"/>
+                <a:cs typeface="Arial"/>
+              </a:defRPr>
+            </a:pPr>
+            <a:r>
+              <a:rPr sz="1650" b="1">
+                <a:solidFill>
+                  <a:srgbClr val="3D8DFF"/>
+                </a:solidFill>
+                <a:latin typeface="Arial"/>
+                <a:ea typeface="Arial"/>
+                <a:cs typeface="Arial"/>
+              </a:rPr>
+              <a:t>04</a:t>
+            </a:r>
+          </a:p>
+        </p:txBody>
+      </p:sp>
+      <p:sp>
+        <p:nvSpPr>
+          <p:cNvPr id="16" name="product-page-3">
+            <a:extLst xmlns:a="http://schemas.openxmlformats.org/drawingml/2006/main">
+              <a:ext uri="{FF2B5EF4-FFF2-40B4-BE49-F238E27FC236}">
+                <a16:creationId xmlns:a16="http://schemas.microsoft.com/office/drawing/2014/main" id="{568E5AE2-EE32-436A-88F0-35FA6D0AFAF0}"/>
+              </a:ext>
+            </a:extLst>
+          </p:cNvPr>
+          <p:cNvSpPr>
+            <a:spLocks xmlns:a="http://schemas.openxmlformats.org/drawingml/2006/main" noGrp="1"/>
+          </p:cNvSpPr>
+          <p:nvPr/>
+        </p:nvSpPr>
+        <p:spPr>
+          <a:xfrm xmlns:a="http://schemas.openxmlformats.org/drawingml/2006/main">
+            <a:off x="1485900" y="6686550"/>
+            <a:ext cx="3429000" cy="552450"/>
+          </a:xfrm>
+          <a:prstGeom xmlns:a="http://schemas.openxmlformats.org/drawingml/2006/main" prst="rect">
+            <a:avLst/>
+          </a:prstGeom>
+          <a:noFill xmlns:a="http://schemas.openxmlformats.org/drawingml/2006/main"/>
+          <a:ln xmlns:a="http://schemas.openxmlformats.org/drawingml/2006/main" w="0">
+            <a:noFill/>
+            <a:prstDash val="solid"/>
+          </a:ln>
+        </p:spPr>
+        <p:txBody>
+          <a:bodyPr xmlns:a="http://schemas.openxmlformats.org/drawingml/2006/main" anchor="t">
+            <a:normAutofit fontScale="100000"/>
+          </a:bodyPr>
+          <a:lstStyle xmlns:a="http://schemas.openxmlformats.org/drawingml/2006/main"/>
+          <a:p xmlns:a="http://schemas.openxmlformats.org/drawingml/2006/main">
+            <a:pPr algn="l">
+              <a:buNone/>
+              <a:defRPr sz="1875" b="1">
+                <a:solidFill>
+                  <a:srgbClr val="07111C"/>
+                </a:solidFill>
+                <a:latin typeface="Arial"/>
+                <a:ea typeface="Arial"/>
+                <a:cs typeface="Arial"/>
+              </a:defRPr>
+            </a:pPr>
+            <a:r>
+              <a:rPr sz="1875" b="1">
+                <a:solidFill>
+                  <a:srgbClr val="07111C"/>
+                </a:solidFill>
+                <a:latin typeface="Arial"/>
+                <a:ea typeface="Arial"/>
+                <a:cs typeface="Arial"/>
+              </a:rPr>
+              <a:t>Teste de cenários</a:t>
+            </a:r>
+          </a:p>
+        </p:txBody>
+      </p:sp>
+      <p:cxnSp>
+        <p:nvCxnSpPr>
+          <p:cNvPr id="138" name="product-rule-3"/>
+          <p:cNvCxnSpPr/>
+          <p:nvPr/>
+        </p:nvCxnSpPr>
+        <p:spPr>
+          <a:xfrm xmlns:a="http://schemas.openxmlformats.org/drawingml/2006/main">
+            <a:off x="1485900" y="7334250"/>
+            <a:ext cx="3429000" cy="0"/>
+          </a:xfrm>
+          <a:prstGeom xmlns:a="http://schemas.openxmlformats.org/drawingml/2006/main" prst="straightConnector1">
+            <a:avLst/>
+          </a:prstGeom>
+          <a:ln xmlns:a="http://schemas.openxmlformats.org/drawingml/2006/main" w="9525">
+            <a:solidFill>
+              <a:srgbClr val="BCC4CC"/>
+            </a:solidFill>
+            <a:prstDash val="solid"/>
+          </a:ln>
+        </p:spPr>
+      </p:cxnSp>
+      <p:sp>
+        <p:nvSpPr>
+          <p:cNvPr id="18" name="product-index-4">
+            <a:extLst xmlns:a="http://schemas.openxmlformats.org/drawingml/2006/main">
+              <a:ext uri="{FF2B5EF4-FFF2-40B4-BE49-F238E27FC236}">
+                <a16:creationId xmlns:a16="http://schemas.microsoft.com/office/drawing/2014/main" id="{24741B3C-62D6-4B77-99E1-12FB6F7AEE3D}"/>
+              </a:ext>
+            </a:extLst>
+          </p:cNvPr>
+          <p:cNvSpPr>
+            <a:spLocks xmlns:a="http://schemas.openxmlformats.org/drawingml/2006/main" noGrp="1"/>
+          </p:cNvSpPr>
+          <p:nvPr/>
+        </p:nvSpPr>
+        <p:spPr>
+          <a:xfrm xmlns:a="http://schemas.openxmlformats.org/drawingml/2006/main">
+            <a:off x="685800" y="7810500"/>
+            <a:ext cx="628650" cy="438150"/>
+          </a:xfrm>
+          <a:prstGeom xmlns:a="http://schemas.openxmlformats.org/drawingml/2006/main" prst="rect">
+            <a:avLst/>
+          </a:prstGeom>
+          <a:noFill xmlns:a="http://schemas.openxmlformats.org/drawingml/2006/main"/>
+          <a:ln xmlns:a="http://schemas.openxmlformats.org/drawingml/2006/main" w="0">
+            <a:noFill/>
+            <a:prstDash val="solid"/>
+          </a:ln>
+        </p:spPr>
+        <p:txBody>
+          <a:bodyPr xmlns:a="http://schemas.openxmlformats.org/drawingml/2006/main" anchor="t">
+            <a:normAutofit fontScale="100000"/>
+          </a:bodyPr>
+          <a:lstStyle xmlns:a="http://schemas.openxmlformats.org/drawingml/2006/main"/>
+          <a:p xmlns:a="http://schemas.openxmlformats.org/drawingml/2006/main">
+            <a:pPr algn="l">
+              <a:buNone/>
+              <a:defRPr sz="1650" b="1">
+                <a:solidFill>
+                  <a:srgbClr val="3D8DFF"/>
+                </a:solidFill>
+                <a:latin typeface="Arial"/>
+                <a:ea typeface="Arial"/>
+                <a:cs typeface="Arial"/>
+              </a:defRPr>
+            </a:pPr>
+            <a:r>
+              <a:rPr sz="1650" b="1">
+                <a:solidFill>
+                  <a:srgbClr val="3D8DFF"/>
+                </a:solidFill>
+                <a:latin typeface="Arial"/>
+                <a:ea typeface="Arial"/>
+                <a:cs typeface="Arial"/>
+              </a:rPr>
+              <a:t>05</a:t>
+            </a:r>
+          </a:p>
+        </p:txBody>
+      </p:sp>
+      <p:sp>
+        <p:nvSpPr>
+          <p:cNvPr id="19" name="product-page-4">
+            <a:extLst xmlns:a="http://schemas.openxmlformats.org/drawingml/2006/main">
+              <a:ext uri="{FF2B5EF4-FFF2-40B4-BE49-F238E27FC236}">
+                <a16:creationId xmlns:a16="http://schemas.microsoft.com/office/drawing/2014/main" id="{F17CF344-F140-4841-BCBF-3E810813091C}"/>
+              </a:ext>
+            </a:extLst>
+          </p:cNvPr>
+          <p:cNvSpPr>
+            <a:spLocks xmlns:a="http://schemas.openxmlformats.org/drawingml/2006/main" noGrp="1"/>
+          </p:cNvSpPr>
+          <p:nvPr/>
+        </p:nvSpPr>
+        <p:spPr>
+          <a:xfrm xmlns:a="http://schemas.openxmlformats.org/drawingml/2006/main">
+            <a:off x="1485900" y="7753350"/>
+            <a:ext cx="3429000" cy="552450"/>
+          </a:xfrm>
+          <a:prstGeom xmlns:a="http://schemas.openxmlformats.org/drawingml/2006/main" prst="rect">
+            <a:avLst/>
+          </a:prstGeom>
+          <a:noFill xmlns:a="http://schemas.openxmlformats.org/drawingml/2006/main"/>
+          <a:ln xmlns:a="http://schemas.openxmlformats.org/drawingml/2006/main" w="0">
+            <a:noFill/>
+            <a:prstDash val="solid"/>
+          </a:ln>
+        </p:spPr>
+        <p:txBody>
+          <a:bodyPr xmlns:a="http://schemas.openxmlformats.org/drawingml/2006/main" anchor="t">
+            <a:normAutofit fontScale="100000"/>
+          </a:bodyPr>
+          <a:lstStyle xmlns:a="http://schemas.openxmlformats.org/drawingml/2006/main"/>
+          <a:p xmlns:a="http://schemas.openxmlformats.org/drawingml/2006/main">
+            <a:pPr algn="l">
+              <a:buNone/>
+              <a:defRPr sz="1875" b="1">
+                <a:solidFill>
+                  <a:srgbClr val="07111C"/>
+                </a:solidFill>
+                <a:latin typeface="Arial"/>
+                <a:ea typeface="Arial"/>
+                <a:cs typeface="Arial"/>
+              </a:defRPr>
+            </a:pPr>
+            <a:r>
+              <a:rPr sz="1875" b="1">
+                <a:solidFill>
+                  <a:srgbClr val="07111C"/>
+                </a:solidFill>
+                <a:latin typeface="Arial"/>
+                <a:ea typeface="Arial"/>
+                <a:cs typeface="Arial"/>
+              </a:rPr>
+              <a:t>Confiabilidade do modelo</a:t>
             </a:r>
           </a:p>
         </p:txBody>
       </p:sp>
       <p:pic>
         <p:nvPicPr>
-          <p:cNvPr id="88" name=""/>
+          <p:cNvPr id="141" name=""/>
           <p:cNvPicPr>
             <a:picLocks xmlns:a="http://schemas.openxmlformats.org/drawingml/2006/main" noChangeAspect="1"/>
           </p:cNvPicPr>
           <p:nvPr/>
         </p:nvPicPr>
         <p:blipFill>
-          <a:blip xmlns:r="http://schemas.openxmlformats.org/officeDocument/2006/relationships" xmlns:a="http://schemas.openxmlformats.org/drawingml/2006/main" r:embed="Ra67721ec89e84179"/>
-          <a:srcRect xmlns:a="http://schemas.openxmlformats.org/drawingml/2006/main" l="0" t="10114" r="0" b="10114"/>
+          <a:blip xmlns:r="http://schemas.openxmlformats.org/officeDocument/2006/relationships" xmlns:a="http://schemas.openxmlformats.org/drawingml/2006/main" r:embed="R4b8c7e6cab9c4c70"/>
+          <a:srcRect xmlns:a="http://schemas.openxmlformats.org/drawingml/2006/main" l="23462" t="0" r="23462" b="0"/>
           <a:stretch xmlns:a="http://schemas.openxmlformats.org/drawingml/2006/main">
             <a:fillRect l="0" t="0" r="0" b="0"/>
           </a:stretch>
         </p:blipFill>
         <p:spPr>
           <a:xfrm xmlns:a="http://schemas.openxmlformats.org/drawingml/2006/main">
-            <a:off x="685800" y="5219700"/>
-            <a:ext cx="8915400" cy="5334000"/>
+            <a:off x="5219700" y="3543300"/>
+            <a:ext cx="4381500" cy="6191250"/>
           </a:xfrm>
           <a:prstGeom xmlns:a="http://schemas.openxmlformats.org/drawingml/2006/main" prst="roundRect">
             <a:avLst>
-              <a:gd name="adj" fmla="val 2143"/>
+              <a:gd name="adj" fmla="val 2609"/>
             </a:avLst>
           </a:prstGeom>
         </p:spPr>
       </p:pic>
       <p:sp>
         <p:nvSpPr>
-          <p:cNvPr id="13" name="scenario-close">
-            <a:extLst xmlns:a="http://schemas.openxmlformats.org/drawingml/2006/main">
-              <a:ext uri="{FF2B5EF4-FFF2-40B4-BE49-F238E27FC236}">
-                <a16:creationId xmlns:a16="http://schemas.microsoft.com/office/drawing/2014/main" id="{77D68B23-F225-4FB9-AD55-5D8FE63700B5}"/>
-              </a:ext>
-            </a:extLst>
-          </p:cNvPr>
-          <p:cNvSpPr>
-            <a:spLocks xmlns:a="http://schemas.openxmlformats.org/drawingml/2006/main" noGrp="1"/>
-          </p:cNvSpPr>
-          <p:nvPr/>
-        </p:nvSpPr>
-        <p:spPr>
-          <a:xfrm xmlns:a="http://schemas.openxmlformats.org/drawingml/2006/main">
-            <a:off x="685800" y="10953750"/>
-            <a:ext cx="8915400" cy="609600"/>
+          <p:cNvPr id="21" name="product-powerbi">
+            <a:extLst xmlns:a="http://schemas.openxmlformats.org/drawingml/2006/main">
+              <a:ext uri="{FF2B5EF4-FFF2-40B4-BE49-F238E27FC236}">
+                <a16:creationId xmlns:a16="http://schemas.microsoft.com/office/drawing/2014/main" id="{801DA8E9-9406-4FF1-A04E-0239F4D8BCDE}"/>
+              </a:ext>
+            </a:extLst>
+          </p:cNvPr>
+          <p:cNvSpPr>
+            <a:spLocks xmlns:a="http://schemas.openxmlformats.org/drawingml/2006/main" noGrp="1"/>
+          </p:cNvSpPr>
+          <p:nvPr/>
+        </p:nvSpPr>
+        <p:spPr>
+          <a:xfrm xmlns:a="http://schemas.openxmlformats.org/drawingml/2006/main">
+            <a:off x="685800" y="9829800"/>
+            <a:ext cx="1714500" cy="342900"/>
+          </a:xfrm>
+          <a:prstGeom xmlns:a="http://schemas.openxmlformats.org/drawingml/2006/main" prst="rect">
+            <a:avLst/>
+          </a:prstGeom>
+          <a:noFill xmlns:a="http://schemas.openxmlformats.org/drawingml/2006/main"/>
+          <a:ln xmlns:a="http://schemas.openxmlformats.org/drawingml/2006/main" w="0">
+            <a:noFill/>
+            <a:prstDash val="solid"/>
+          </a:ln>
+        </p:spPr>
+        <p:txBody>
+          <a:bodyPr xmlns:a="http://schemas.openxmlformats.org/drawingml/2006/main" anchor="t">
+            <a:normAutofit fontScale="61111"/>
+          </a:bodyPr>
+          <a:lstStyle xmlns:a="http://schemas.openxmlformats.org/drawingml/2006/main"/>
+          <a:p xmlns:a="http://schemas.openxmlformats.org/drawingml/2006/main">
+            <a:pPr algn="l">
+              <a:buNone/>
+              <a:defRPr sz="1350" b="1">
+                <a:solidFill>
+                  <a:srgbClr val="3D8DFF"/>
+                </a:solidFill>
+                <a:latin typeface="Arial"/>
+                <a:ea typeface="Arial"/>
+                <a:cs typeface="Arial"/>
+              </a:defRPr>
+            </a:pPr>
+            <a:r>
+              <a:rPr sz="1350" b="1">
+                <a:solidFill>
+                  <a:srgbClr val="3D8DFF"/>
+                </a:solidFill>
+                <a:latin typeface="Arial"/>
+                <a:ea typeface="Arial"/>
+                <a:cs typeface="Arial"/>
+              </a:rPr>
+              <a:t>EXPLORAÇÃO COMPLEMENTAR</a:t>
+            </a:r>
+          </a:p>
+        </p:txBody>
+      </p:sp>
+      <p:sp>
+        <p:nvSpPr>
+          <p:cNvPr id="22" name="product-powerbi-proof">
+            <a:extLst xmlns:a="http://schemas.openxmlformats.org/drawingml/2006/main">
+              <a:ext uri="{FF2B5EF4-FFF2-40B4-BE49-F238E27FC236}">
+                <a16:creationId xmlns:a16="http://schemas.microsoft.com/office/drawing/2014/main" id="{3DFFE398-2209-4AD2-BFFA-486F337BB262}"/>
+              </a:ext>
+            </a:extLst>
+          </p:cNvPr>
+          <p:cNvSpPr>
+            <a:spLocks xmlns:a="http://schemas.openxmlformats.org/drawingml/2006/main" noGrp="1"/>
+          </p:cNvSpPr>
+          <p:nvPr/>
+        </p:nvSpPr>
+        <p:spPr>
+          <a:xfrm xmlns:a="http://schemas.openxmlformats.org/drawingml/2006/main">
+            <a:off x="685800" y="10248900"/>
+            <a:ext cx="8915400" cy="552450"/>
           </a:xfrm>
           <a:prstGeom xmlns:a="http://schemas.openxmlformats.org/drawingml/2006/main" prst="rect">
             <a:avLst/>
@@ -2381,7 +2917,7 @@
           <a:p xmlns:a="http://schemas.openxmlformats.org/drawingml/2006/main">
             <a:pPr algn="l">
               <a:buNone/>
-              <a:defRPr sz="1875" b="1">
+              <a:defRPr sz="2175" b="1">
                 <a:solidFill>
                   <a:srgbClr val="07111C"/>
                 </a:solidFill>
@@ -2391,7 +2927,7 @@
               </a:defRPr>
             </a:pPr>
             <a:r>
-              <a:rPr sz="1875" b="1">
+              <a:rPr sz="2175" b="1">
                 <a:solidFill>
                   <a:srgbClr val="07111C"/>
                 </a:solidFill>
@@ -2399,14 +2935,14 @@
                 <a:ea typeface="Arial"/>
                 <a:cs typeface="Arial"/>
               </a:rPr>
-              <a:t>Probabilidades + P10/P50/P90 + revisão humana.</a:t>
+              <a:t>Power BI com modelo estrela e arquivos verificados</a:t>
             </a:r>
           </a:p>
         </p:txBody>
       </p:sp>
       <p:cxnSp>
         <p:nvCxnSpPr>
-          <p:cNvPr id="90" name="footer-rule-7"/>
+          <p:cNvPr id="144" name="footer-rule-8"/>
           <p:cNvCxnSpPr/>
           <p:nvPr/>
         </p:nvCxnSpPr>
@@ -2428,10 +2964,10 @@
       </p:cxnSp>
       <p:sp>
         <p:nvSpPr>
-          <p:cNvPr id="15" name="footer-7">
-            <a:extLst xmlns:a="http://schemas.openxmlformats.org/drawingml/2006/main">
-              <a:ext uri="{FF2B5EF4-FFF2-40B4-BE49-F238E27FC236}">
-                <a16:creationId xmlns:a16="http://schemas.microsoft.com/office/drawing/2014/main" id="{879FB160-5E7C-4A0A-BE16-8BA8440858BF}"/>
+          <p:cNvPr id="24" name="footer-8">
+            <a:extLst xmlns:a="http://schemas.openxmlformats.org/drawingml/2006/main">
+              <a:ext uri="{FF2B5EF4-FFF2-40B4-BE49-F238E27FC236}">
+                <a16:creationId xmlns:a16="http://schemas.microsoft.com/office/drawing/2014/main" id="{485BCCDE-FD69-4E4E-A7AC-C795AFD6633A}"/>
               </a:ext>
             </a:extLst>
           </p:cNvPr>
@@ -2487,10 +3023,10 @@
       </p:sp>
       <p:sp>
         <p:nvSpPr>
-          <p:cNvPr id="16" name="footer-page-7">
-            <a:extLst xmlns:a="http://schemas.openxmlformats.org/drawingml/2006/main">
-              <a:ext uri="{FF2B5EF4-FFF2-40B4-BE49-F238E27FC236}">
-                <a16:creationId xmlns:a16="http://schemas.microsoft.com/office/drawing/2014/main" id="{6CA91ED8-7E0E-433D-9AFA-55771DA22B52}"/>
+          <p:cNvPr id="25" name="footer-page-8">
+            <a:extLst xmlns:a="http://schemas.openxmlformats.org/drawingml/2006/main">
+              <a:ext uri="{FF2B5EF4-FFF2-40B4-BE49-F238E27FC236}">
+                <a16:creationId xmlns:a16="http://schemas.microsoft.com/office/drawing/2014/main" id="{360922B6-36BE-4A83-BCFF-361D755A7066}"/>
               </a:ext>
             </a:extLst>
           </p:cNvPr>
@@ -2539,7 +3075,7 @@
                 <a:ea typeface="Arial"/>
                 <a:cs typeface="Arial"/>
               </a:rPr>
-              <a:t>2/3</a:t>
+              <a:t>2/5</a:t>
             </a:r>
           </a:p>
         </p:txBody>
@@ -2547,7 +3083,7 @@
     </p:spTree>
     <p:extLst>
       <p:ext uri="{BB962C8B-B14F-4D97-AF65-F5344CB8AC3E}">
-        <p14:creationId xmlns:p14="http://schemas.microsoft.com/office/powerpoint/2010/main" val="679812029"/>
+        <p14:creationId xmlns:p14="http://schemas.microsoft.com/office/powerpoint/2010/main" val="229838652"/>
       </p:ext>
     </p:extLst>
   </p:cSld>
@@ -2575,22 +3111,22 @@
       </p:grpSpPr>
       <p:sp>
         <p:nvSpPr>
-          <p:cNvPr id="10" name="close-kicker">
-            <a:extLst xmlns:a="http://schemas.openxmlformats.org/drawingml/2006/main">
-              <a:ext uri="{FF2B5EF4-FFF2-40B4-BE49-F238E27FC236}">
-                <a16:creationId xmlns:a16="http://schemas.microsoft.com/office/drawing/2014/main" id="{4A29BF44-3BDA-4C78-9CBD-C6046E39C2F2}"/>
-              </a:ext>
-            </a:extLst>
-          </p:cNvPr>
-          <p:cNvSpPr>
-            <a:spLocks xmlns:a="http://schemas.openxmlformats.org/drawingml/2006/main" noGrp="1"/>
-          </p:cNvSpPr>
-          <p:nvPr/>
-        </p:nvSpPr>
-        <p:spPr>
-          <a:xfrm xmlns:a="http://schemas.openxmlformats.org/drawingml/2006/main">
-            <a:off x="685800" y="762000"/>
-            <a:ext cx="8915400" cy="381000"/>
+          <p:cNvPr id="17" name="kicker-6">
+            <a:extLst xmlns:a="http://schemas.openxmlformats.org/drawingml/2006/main">
+              <a:ext uri="{FF2B5EF4-FFF2-40B4-BE49-F238E27FC236}">
+                <a16:creationId xmlns:a16="http://schemas.microsoft.com/office/drawing/2014/main" id="{659F945D-A006-43A3-AB1A-75F5D7E456D3}"/>
+              </a:ext>
+            </a:extLst>
+          </p:cNvPr>
+          <p:cNvSpPr>
+            <a:spLocks xmlns:a="http://schemas.openxmlformats.org/drawingml/2006/main" noGrp="1"/>
+          </p:cNvSpPr>
+          <p:nvPr/>
+        </p:nvSpPr>
+        <p:spPr>
+          <a:xfrm xmlns:a="http://schemas.openxmlformats.org/drawingml/2006/main">
+            <a:off x="685800" y="523875"/>
+            <a:ext cx="7429500" cy="304800"/>
           </a:xfrm>
           <a:prstGeom xmlns:a="http://schemas.openxmlformats.org/drawingml/2006/main" prst="rect">
             <a:avLst/>
@@ -2609,7 +3145,7 @@
           <a:p xmlns:a="http://schemas.openxmlformats.org/drawingml/2006/main">
             <a:pPr algn="l">
               <a:buNone/>
-              <a:defRPr sz="1425" b="1">
+              <a:defRPr sz="1350" b="1">
                 <a:solidFill>
                   <a:srgbClr val="3D8DFF"/>
                 </a:solidFill>
@@ -2619,7 +3155,7 @@
               </a:defRPr>
             </a:pPr>
             <a:r>
-              <a:rPr sz="1425" b="1">
+              <a:rPr sz="1350" b="1">
                 <a:solidFill>
                   <a:srgbClr val="3D8DFF"/>
                 </a:solidFill>
@@ -2627,29 +3163,29 @@
                 <a:ea typeface="Arial"/>
                 <a:cs typeface="Arial"/>
               </a:rPr>
-              <a:t>STEELFLOW AI</a:t>
-            </a:r>
-          </a:p>
-        </p:txBody>
-      </p:sp>
-      <p:sp>
-        <p:nvSpPr>
-          <p:cNvPr id="2" name="close-title">
-            <a:extLst xmlns:a="http://schemas.openxmlformats.org/drawingml/2006/main">
-              <a:ext uri="{FF2B5EF4-FFF2-40B4-BE49-F238E27FC236}">
-                <a16:creationId xmlns:a16="http://schemas.microsoft.com/office/drawing/2014/main" id="{584C9D75-4C20-4B03-ABCF-158C3E284423}"/>
-              </a:ext>
-            </a:extLst>
-          </p:cNvPr>
-          <p:cNvSpPr>
-            <a:spLocks xmlns:a="http://schemas.openxmlformats.org/drawingml/2006/main" noGrp="1"/>
-          </p:cNvSpPr>
-          <p:nvPr/>
-        </p:nvSpPr>
-        <p:spPr>
-          <a:xfrm xmlns:a="http://schemas.openxmlformats.org/drawingml/2006/main">
-            <a:off x="685800" y="1762125"/>
-            <a:ext cx="8915400" cy="2095500"/>
+              <a:t>PREVISÃO E RISCO</a:t>
+            </a:r>
+          </a:p>
+        </p:txBody>
+      </p:sp>
+      <p:sp>
+        <p:nvSpPr>
+          <p:cNvPr id="2" name="page-6">
+            <a:extLst xmlns:a="http://schemas.openxmlformats.org/drawingml/2006/main">
+              <a:ext uri="{FF2B5EF4-FFF2-40B4-BE49-F238E27FC236}">
+                <a16:creationId xmlns:a16="http://schemas.microsoft.com/office/drawing/2014/main" id="{0B509CEE-2A28-444C-B744-1F7E6C3F7E4E}"/>
+              </a:ext>
+            </a:extLst>
+          </p:cNvPr>
+          <p:cNvSpPr>
+            <a:spLocks xmlns:a="http://schemas.openxmlformats.org/drawingml/2006/main" noGrp="1"/>
+          </p:cNvSpPr>
+          <p:nvPr/>
+        </p:nvSpPr>
+        <p:spPr>
+          <a:xfrm xmlns:a="http://schemas.openxmlformats.org/drawingml/2006/main">
+            <a:off x="8705850" y="523875"/>
+            <a:ext cx="895350" cy="304800"/>
           </a:xfrm>
           <a:prstGeom xmlns:a="http://schemas.openxmlformats.org/drawingml/2006/main" prst="rect">
             <a:avLst/>
@@ -2666,73 +3202,49 @@
           </a:bodyPr>
           <a:lstStyle xmlns:a="http://schemas.openxmlformats.org/drawingml/2006/main"/>
           <a:p xmlns:a="http://schemas.openxmlformats.org/drawingml/2006/main">
-            <a:pPr algn="l">
-              <a:buNone/>
-              <a:defRPr sz="4950" b="1">
-                <a:solidFill>
-                  <a:srgbClr val="07111C"/>
-                </a:solidFill>
-                <a:latin typeface="Arial"/>
-                <a:ea typeface="Arial"/>
-                <a:cs typeface="Arial"/>
-              </a:defRPr>
-            </a:pPr>
-            <a:r>
-              <a:rPr sz="4950" b="1">
-                <a:solidFill>
-                  <a:srgbClr val="07111C"/>
-                </a:solidFill>
-                <a:latin typeface="Arial"/>
-                <a:ea typeface="Arial"/>
-                <a:cs typeface="Arial"/>
-              </a:rPr>
-              <a:t>Da tentativa e erro</a:t>
-            </a:r>
-          </a:p>
-          <a:p xmlns:a="http://schemas.openxmlformats.org/drawingml/2006/main">
-            <a:pPr algn="l">
-              <a:buNone/>
-              <a:defRPr sz="4950" b="1">
-                <a:solidFill>
-                  <a:srgbClr val="07111C"/>
-                </a:solidFill>
-                <a:latin typeface="Arial"/>
-                <a:ea typeface="Arial"/>
-                <a:cs typeface="Arial"/>
-              </a:defRPr>
-            </a:pPr>
-            <a:r>
-              <a:rPr sz="4950" b="1">
-                <a:solidFill>
-                  <a:srgbClr val="07111C"/>
-                </a:solidFill>
-                <a:latin typeface="Arial"/>
-                <a:ea typeface="Arial"/>
-                <a:cs typeface="Arial"/>
-              </a:rPr>
-              <a:t>ao teste de hipóteses.</a:t>
-            </a:r>
-          </a:p>
-        </p:txBody>
-      </p:sp>
-      <p:sp>
-        <p:nvSpPr>
-          <p:cNvPr id="3" name="close-body">
-            <a:extLst xmlns:a="http://schemas.openxmlformats.org/drawingml/2006/main">
-              <a:ext uri="{FF2B5EF4-FFF2-40B4-BE49-F238E27FC236}">
-                <a16:creationId xmlns:a16="http://schemas.microsoft.com/office/drawing/2014/main" id="{B4D2B44C-B7F8-4096-840E-D7E4AEEFC94C}"/>
-              </a:ext>
-            </a:extLst>
-          </p:cNvPr>
-          <p:cNvSpPr>
-            <a:spLocks xmlns:a="http://schemas.openxmlformats.org/drawingml/2006/main" noGrp="1"/>
-          </p:cNvSpPr>
-          <p:nvPr/>
-        </p:nvSpPr>
-        <p:spPr>
-          <a:xfrm xmlns:a="http://schemas.openxmlformats.org/drawingml/2006/main">
-            <a:off x="685800" y="4476750"/>
-            <a:ext cx="8191500" cy="1428750"/>
+            <a:pPr algn="r">
+              <a:buNone/>
+              <a:defRPr sz="1350" b="1">
+                <a:solidFill>
+                  <a:srgbClr val="53606D"/>
+                </a:solidFill>
+                <a:latin typeface="Arial"/>
+                <a:ea typeface="Arial"/>
+                <a:cs typeface="Arial"/>
+              </a:defRPr>
+            </a:pPr>
+            <a:r>
+              <a:rPr sz="1350" b="1">
+                <a:solidFill>
+                  <a:srgbClr val="53606D"/>
+                </a:solidFill>
+                <a:latin typeface="Arial"/>
+                <a:ea typeface="Arial"/>
+                <a:cs typeface="Arial"/>
+              </a:rPr>
+              <a:t>03</a:t>
+            </a:r>
+          </a:p>
+        </p:txBody>
+      </p:sp>
+      <p:sp>
+        <p:nvSpPr>
+          <p:cNvPr id="3" name="title-6">
+            <a:extLst xmlns:a="http://schemas.openxmlformats.org/drawingml/2006/main">
+              <a:ext uri="{FF2B5EF4-FFF2-40B4-BE49-F238E27FC236}">
+                <a16:creationId xmlns:a16="http://schemas.microsoft.com/office/drawing/2014/main" id="{5492D9AD-FB96-4C42-8E81-83EF7CDA4A63}"/>
+              </a:ext>
+            </a:extLst>
+          </p:cNvPr>
+          <p:cNvSpPr>
+            <a:spLocks xmlns:a="http://schemas.openxmlformats.org/drawingml/2006/main" noGrp="1"/>
+          </p:cNvSpPr>
+          <p:nvPr/>
+        </p:nvSpPr>
+        <p:spPr>
+          <a:xfrm xmlns:a="http://schemas.openxmlformats.org/drawingml/2006/main">
+            <a:off x="685800" y="1000125"/>
+            <a:ext cx="8915400" cy="1162050"/>
           </a:xfrm>
           <a:prstGeom xmlns:a="http://schemas.openxmlformats.org/drawingml/2006/main" prst="rect">
             <a:avLst/>
@@ -2751,6 +3263,1784 @@
           <a:p xmlns:a="http://schemas.openxmlformats.org/drawingml/2006/main">
             <a:pPr algn="l">
               <a:buNone/>
+              <a:defRPr sz="3750" b="1">
+                <a:solidFill>
+                  <a:srgbClr val="07111C"/>
+                </a:solidFill>
+                <a:latin typeface="Arial"/>
+                <a:ea typeface="Arial"/>
+                <a:cs typeface="Arial"/>
+              </a:defRPr>
+            </a:pPr>
+            <a:r>
+              <a:rPr sz="3750" b="1">
+                <a:solidFill>
+                  <a:srgbClr val="07111C"/>
+                </a:solidFill>
+                <a:latin typeface="Arial"/>
+                <a:ea typeface="Arial"/>
+                <a:cs typeface="Arial"/>
+              </a:rPr>
+              <a:t>A previsão mostra valor, risco e faixa</a:t>
+            </a:r>
+          </a:p>
+        </p:txBody>
+      </p:sp>
+      <p:sp>
+        <p:nvSpPr>
+          <p:cNvPr id="4" name="subtitle-6">
+            <a:extLst xmlns:a="http://schemas.openxmlformats.org/drawingml/2006/main">
+              <a:ext uri="{FF2B5EF4-FFF2-40B4-BE49-F238E27FC236}">
+                <a16:creationId xmlns:a16="http://schemas.microsoft.com/office/drawing/2014/main" id="{B93B64D3-FB90-4719-855E-5414F94AACA1}"/>
+              </a:ext>
+            </a:extLst>
+          </p:cNvPr>
+          <p:cNvSpPr>
+            <a:spLocks xmlns:a="http://schemas.openxmlformats.org/drawingml/2006/main" noGrp="1"/>
+          </p:cNvSpPr>
+          <p:nvPr/>
+        </p:nvSpPr>
+        <p:spPr>
+          <a:xfrm xmlns:a="http://schemas.openxmlformats.org/drawingml/2006/main">
+            <a:off x="685800" y="2133600"/>
+            <a:ext cx="8915400" cy="704850"/>
+          </a:xfrm>
+          <a:prstGeom xmlns:a="http://schemas.openxmlformats.org/drawingml/2006/main" prst="rect">
+            <a:avLst/>
+          </a:prstGeom>
+          <a:noFill xmlns:a="http://schemas.openxmlformats.org/drawingml/2006/main"/>
+          <a:ln xmlns:a="http://schemas.openxmlformats.org/drawingml/2006/main" w="0">
+            <a:noFill/>
+            <a:prstDash val="solid"/>
+          </a:ln>
+        </p:spPr>
+        <p:txBody>
+          <a:bodyPr xmlns:a="http://schemas.openxmlformats.org/drawingml/2006/main" anchor="t">
+            <a:normAutofit fontScale="100000"/>
+          </a:bodyPr>
+          <a:lstStyle xmlns:a="http://schemas.openxmlformats.org/drawingml/2006/main"/>
+          <a:p xmlns:a="http://schemas.openxmlformats.org/drawingml/2006/main">
+            <a:pPr algn="l">
+              <a:buNone/>
+              <a:defRPr sz="1875" b="0">
+                <a:solidFill>
+                  <a:srgbClr val="53606D"/>
+                </a:solidFill>
+                <a:latin typeface="Arial"/>
+                <a:ea typeface="Arial"/>
+                <a:cs typeface="Arial"/>
+              </a:defRPr>
+            </a:pPr>
+            <a:r>
+              <a:rPr sz="1875" b="0">
+                <a:solidFill>
+                  <a:srgbClr val="53606D"/>
+                </a:solidFill>
+                <a:latin typeface="Arial"/>
+                <a:ea typeface="Arial"/>
+                <a:cs typeface="Arial"/>
+              </a:rPr>
+              <a:t>Não entrega apenas um número. Mostra a incerteza.</a:t>
+            </a:r>
+          </a:p>
+        </p:txBody>
+      </p:sp>
+      <p:cxnSp>
+        <p:nvCxnSpPr>
+          <p:cNvPr id="81" name="header-rule-6"/>
+          <p:cNvCxnSpPr/>
+          <p:nvPr/>
+        </p:nvCxnSpPr>
+        <p:spPr>
+          <a:xfrm xmlns:a="http://schemas.openxmlformats.org/drawingml/2006/main">
+            <a:off x="685800" y="2990850"/>
+            <a:ext cx="8915400" cy="0"/>
+          </a:xfrm>
+          <a:prstGeom xmlns:a="http://schemas.openxmlformats.org/drawingml/2006/main" prst="straightConnector1">
+            <a:avLst/>
+          </a:prstGeom>
+          <a:ln xmlns:a="http://schemas.openxmlformats.org/drawingml/2006/main" w="9525">
+            <a:solidFill>
+              <a:srgbClr val="BCC4CC"/>
+            </a:solidFill>
+            <a:prstDash val="solid"/>
+          </a:ln>
+        </p:spPr>
+      </p:cxnSp>
+      <p:sp>
+        <p:nvSpPr>
+          <p:cNvPr id="6" name="coverage-panel">
+            <a:extLst xmlns:a="http://schemas.openxmlformats.org/drawingml/2006/main">
+              <a:ext uri="{FF2B5EF4-FFF2-40B4-BE49-F238E27FC236}">
+                <a16:creationId xmlns:a16="http://schemas.microsoft.com/office/drawing/2014/main" id="{EC299AF2-E080-435B-A00E-BD55179F766D}"/>
+              </a:ext>
+            </a:extLst>
+          </p:cNvPr>
+          <p:cNvSpPr>
+            <a:spLocks xmlns:a="http://schemas.openxmlformats.org/drawingml/2006/main" noGrp="1"/>
+          </p:cNvSpPr>
+          <p:nvPr/>
+        </p:nvSpPr>
+        <p:spPr>
+          <a:xfrm xmlns:a="http://schemas.openxmlformats.org/drawingml/2006/main">
+            <a:off x="685800" y="3543300"/>
+            <a:ext cx="4229100" cy="1809750"/>
+          </a:xfrm>
+          <a:prstGeom xmlns:a="http://schemas.openxmlformats.org/drawingml/2006/main" prst="roundRect">
+            <a:avLst>
+              <a:gd name="adj" fmla="val 6316"/>
+            </a:avLst>
+          </a:prstGeom>
+          <a:solidFill xmlns:a="http://schemas.openxmlformats.org/drawingml/2006/main">
+            <a:srgbClr val="DDF3FC"/>
+          </a:solidFill>
+          <a:ln xmlns:a="http://schemas.openxmlformats.org/drawingml/2006/main" w="0">
+            <a:noFill/>
+            <a:prstDash val="solid"/>
+          </a:ln>
+        </p:spPr>
+      </p:sp>
+      <p:sp>
+        <p:nvSpPr>
+          <p:cNvPr id="7" name="coverage-value">
+            <a:extLst xmlns:a="http://schemas.openxmlformats.org/drawingml/2006/main">
+              <a:ext uri="{FF2B5EF4-FFF2-40B4-BE49-F238E27FC236}">
+                <a16:creationId xmlns:a16="http://schemas.microsoft.com/office/drawing/2014/main" id="{D6CF3F07-787A-47F9-9146-0C2605BF5B61}"/>
+              </a:ext>
+            </a:extLst>
+          </p:cNvPr>
+          <p:cNvSpPr>
+            <a:spLocks xmlns:a="http://schemas.openxmlformats.org/drawingml/2006/main" noGrp="1"/>
+          </p:cNvSpPr>
+          <p:nvPr/>
+        </p:nvSpPr>
+        <p:spPr>
+          <a:xfrm xmlns:a="http://schemas.openxmlformats.org/drawingml/2006/main">
+            <a:off x="971550" y="3943350"/>
+            <a:ext cx="3695700" cy="666750"/>
+          </a:xfrm>
+          <a:prstGeom xmlns:a="http://schemas.openxmlformats.org/drawingml/2006/main" prst="rect">
+            <a:avLst/>
+          </a:prstGeom>
+          <a:noFill xmlns:a="http://schemas.openxmlformats.org/drawingml/2006/main"/>
+          <a:ln xmlns:a="http://schemas.openxmlformats.org/drawingml/2006/main" w="0">
+            <a:noFill/>
+            <a:prstDash val="solid"/>
+          </a:ln>
+        </p:spPr>
+        <p:txBody>
+          <a:bodyPr xmlns:a="http://schemas.openxmlformats.org/drawingml/2006/main" anchor="t">
+            <a:normAutofit fontScale="100000"/>
+          </a:bodyPr>
+          <a:lstStyle xmlns:a="http://schemas.openxmlformats.org/drawingml/2006/main"/>
+          <a:p xmlns:a="http://schemas.openxmlformats.org/drawingml/2006/main">
+            <a:pPr algn="l">
+              <a:buNone/>
+              <a:defRPr sz="3150" b="1">
+                <a:solidFill>
+                  <a:srgbClr val="3D8DFF"/>
+                </a:solidFill>
+                <a:latin typeface="Arial"/>
+                <a:ea typeface="Arial"/>
+                <a:cs typeface="Arial"/>
+              </a:defRPr>
+            </a:pPr>
+            <a:r>
+              <a:rPr sz="3150" b="1">
+                <a:solidFill>
+                  <a:srgbClr val="3D8DFF"/>
+                </a:solidFill>
+                <a:latin typeface="Arial"/>
+                <a:ea typeface="Arial"/>
+                <a:cs typeface="Arial"/>
+              </a:rPr>
+              <a:t>P10–P90</a:t>
+            </a:r>
+          </a:p>
+        </p:txBody>
+      </p:sp>
+      <p:sp>
+        <p:nvSpPr>
+          <p:cNvPr id="8" name="coverage-label">
+            <a:extLst xmlns:a="http://schemas.openxmlformats.org/drawingml/2006/main">
+              <a:ext uri="{FF2B5EF4-FFF2-40B4-BE49-F238E27FC236}">
+                <a16:creationId xmlns:a16="http://schemas.microsoft.com/office/drawing/2014/main" id="{C58CB391-84C5-4855-8331-BB1F00EEE94A}"/>
+              </a:ext>
+            </a:extLst>
+          </p:cNvPr>
+          <p:cNvSpPr>
+            <a:spLocks xmlns:a="http://schemas.openxmlformats.org/drawingml/2006/main" noGrp="1"/>
+          </p:cNvSpPr>
+          <p:nvPr/>
+        </p:nvSpPr>
+        <p:spPr>
+          <a:xfrm xmlns:a="http://schemas.openxmlformats.org/drawingml/2006/main">
+            <a:off x="971550" y="4686300"/>
+            <a:ext cx="3695700" cy="571500"/>
+          </a:xfrm>
+          <a:prstGeom xmlns:a="http://schemas.openxmlformats.org/drawingml/2006/main" prst="rect">
+            <a:avLst/>
+          </a:prstGeom>
+          <a:noFill xmlns:a="http://schemas.openxmlformats.org/drawingml/2006/main"/>
+          <a:ln xmlns:a="http://schemas.openxmlformats.org/drawingml/2006/main" w="0">
+            <a:noFill/>
+            <a:prstDash val="solid"/>
+          </a:ln>
+        </p:spPr>
+        <p:txBody>
+          <a:bodyPr xmlns:a="http://schemas.openxmlformats.org/drawingml/2006/main" anchor="t">
+            <a:normAutofit fontScale="95454"/>
+          </a:bodyPr>
+          <a:lstStyle xmlns:a="http://schemas.openxmlformats.org/drawingml/2006/main"/>
+          <a:p xmlns:a="http://schemas.openxmlformats.org/drawingml/2006/main">
+            <a:pPr algn="l">
+              <a:buNone/>
+              <a:defRPr sz="1650" b="0">
+                <a:solidFill>
+                  <a:srgbClr val="53606D"/>
+                </a:solidFill>
+                <a:latin typeface="Arial"/>
+                <a:ea typeface="Arial"/>
+                <a:cs typeface="Arial"/>
+              </a:defRPr>
+            </a:pPr>
+            <a:r>
+              <a:rPr sz="1650" b="0">
+                <a:solidFill>
+                  <a:srgbClr val="53606D"/>
+                </a:solidFill>
+                <a:latin typeface="Arial"/>
+                <a:ea typeface="Arial"/>
+                <a:cs typeface="Arial"/>
+              </a:rPr>
+              <a:t>faixa provável</a:t>
+            </a:r>
+          </a:p>
+          <a:p xmlns:a="http://schemas.openxmlformats.org/drawingml/2006/main">
+            <a:pPr algn="l">
+              <a:buNone/>
+              <a:defRPr sz="1650" b="0">
+                <a:solidFill>
+                  <a:srgbClr val="53606D"/>
+                </a:solidFill>
+                <a:latin typeface="Arial"/>
+                <a:ea typeface="Arial"/>
+                <a:cs typeface="Arial"/>
+              </a:defRPr>
+            </a:pPr>
+            <a:r>
+              <a:rPr sz="1650" b="0">
+                <a:solidFill>
+                  <a:srgbClr val="53606D"/>
+                </a:solidFill>
+                <a:latin typeface="Arial"/>
+                <a:ea typeface="Arial"/>
+                <a:cs typeface="Arial"/>
+              </a:rPr>
+              <a:t>para cada previsão</a:t>
+            </a:r>
+          </a:p>
+        </p:txBody>
+      </p:sp>
+      <p:sp>
+        <p:nvSpPr>
+          <p:cNvPr id="9" name="calibration-panel">
+            <a:extLst xmlns:a="http://schemas.openxmlformats.org/drawingml/2006/main">
+              <a:ext uri="{FF2B5EF4-FFF2-40B4-BE49-F238E27FC236}">
+                <a16:creationId xmlns:a16="http://schemas.microsoft.com/office/drawing/2014/main" id="{A53F84A9-C583-45A2-A10D-ED2808C11D61}"/>
+              </a:ext>
+            </a:extLst>
+          </p:cNvPr>
+          <p:cNvSpPr>
+            <a:spLocks xmlns:a="http://schemas.openxmlformats.org/drawingml/2006/main" noGrp="1"/>
+          </p:cNvSpPr>
+          <p:nvPr/>
+        </p:nvSpPr>
+        <p:spPr>
+          <a:xfrm xmlns:a="http://schemas.openxmlformats.org/drawingml/2006/main">
+            <a:off x="5372100" y="3543300"/>
+            <a:ext cx="4229100" cy="1809750"/>
+          </a:xfrm>
+          <a:prstGeom xmlns:a="http://schemas.openxmlformats.org/drawingml/2006/main" prst="roundRect">
+            <a:avLst>
+              <a:gd name="adj" fmla="val 6316"/>
+            </a:avLst>
+          </a:prstGeom>
+          <a:solidFill xmlns:a="http://schemas.openxmlformats.org/drawingml/2006/main">
+            <a:srgbClr val="EEF1F4"/>
+          </a:solidFill>
+          <a:ln xmlns:a="http://schemas.openxmlformats.org/drawingml/2006/main" w="0">
+            <a:noFill/>
+            <a:prstDash val="solid"/>
+          </a:ln>
+        </p:spPr>
+      </p:sp>
+      <p:sp>
+        <p:nvSpPr>
+          <p:cNvPr id="10" name="calibration-value">
+            <a:extLst xmlns:a="http://schemas.openxmlformats.org/drawingml/2006/main">
+              <a:ext uri="{FF2B5EF4-FFF2-40B4-BE49-F238E27FC236}">
+                <a16:creationId xmlns:a16="http://schemas.microsoft.com/office/drawing/2014/main" id="{35C904CA-1018-4383-AC1B-D5DF900EC581}"/>
+              </a:ext>
+            </a:extLst>
+          </p:cNvPr>
+          <p:cNvSpPr>
+            <a:spLocks xmlns:a="http://schemas.openxmlformats.org/drawingml/2006/main" noGrp="1"/>
+          </p:cNvSpPr>
+          <p:nvPr/>
+        </p:nvSpPr>
+        <p:spPr>
+          <a:xfrm xmlns:a="http://schemas.openxmlformats.org/drawingml/2006/main">
+            <a:off x="5657850" y="3943350"/>
+            <a:ext cx="3695700" cy="666750"/>
+          </a:xfrm>
+          <a:prstGeom xmlns:a="http://schemas.openxmlformats.org/drawingml/2006/main" prst="rect">
+            <a:avLst/>
+          </a:prstGeom>
+          <a:noFill xmlns:a="http://schemas.openxmlformats.org/drawingml/2006/main"/>
+          <a:ln xmlns:a="http://schemas.openxmlformats.org/drawingml/2006/main" w="0">
+            <a:noFill/>
+            <a:prstDash val="solid"/>
+          </a:ln>
+        </p:spPr>
+        <p:txBody>
+          <a:bodyPr xmlns:a="http://schemas.openxmlformats.org/drawingml/2006/main" anchor="t">
+            <a:normAutofit fontScale="100000"/>
+          </a:bodyPr>
+          <a:lstStyle xmlns:a="http://schemas.openxmlformats.org/drawingml/2006/main"/>
+          <a:p xmlns:a="http://schemas.openxmlformats.org/drawingml/2006/main">
+            <a:pPr algn="l">
+              <a:buNone/>
+              <a:defRPr sz="2700" b="1">
+                <a:solidFill>
+                  <a:srgbClr val="20CDBF"/>
+                </a:solidFill>
+                <a:latin typeface="Arial"/>
+                <a:ea typeface="Arial"/>
+                <a:cs typeface="Arial"/>
+              </a:defRPr>
+            </a:pPr>
+            <a:r>
+              <a:rPr sz="2700" b="1">
+                <a:solidFill>
+                  <a:srgbClr val="20CDBF"/>
+                </a:solidFill>
+                <a:latin typeface="Arial"/>
+                <a:ea typeface="Arial"/>
+                <a:cs typeface="Arial"/>
+              </a:rPr>
+              <a:t>4 modelos</a:t>
+            </a:r>
+          </a:p>
+        </p:txBody>
+      </p:sp>
+      <p:sp>
+        <p:nvSpPr>
+          <p:cNvPr id="11" name="calibration-label">
+            <a:extLst xmlns:a="http://schemas.openxmlformats.org/drawingml/2006/main">
+              <a:ext uri="{FF2B5EF4-FFF2-40B4-BE49-F238E27FC236}">
+                <a16:creationId xmlns:a16="http://schemas.microsoft.com/office/drawing/2014/main" id="{9808A3DB-6589-4E66-82B5-8ACE943759BF}"/>
+              </a:ext>
+            </a:extLst>
+          </p:cNvPr>
+          <p:cNvSpPr>
+            <a:spLocks xmlns:a="http://schemas.openxmlformats.org/drawingml/2006/main" noGrp="1"/>
+          </p:cNvSpPr>
+          <p:nvPr/>
+        </p:nvSpPr>
+        <p:spPr>
+          <a:xfrm xmlns:a="http://schemas.openxmlformats.org/drawingml/2006/main">
+            <a:off x="5657850" y="4686300"/>
+            <a:ext cx="3695700" cy="571500"/>
+          </a:xfrm>
+          <a:prstGeom xmlns:a="http://schemas.openxmlformats.org/drawingml/2006/main" prst="rect">
+            <a:avLst/>
+          </a:prstGeom>
+          <a:noFill xmlns:a="http://schemas.openxmlformats.org/drawingml/2006/main"/>
+          <a:ln xmlns:a="http://schemas.openxmlformats.org/drawingml/2006/main" w="0">
+            <a:noFill/>
+            <a:prstDash val="solid"/>
+          </a:ln>
+        </p:spPr>
+        <p:txBody>
+          <a:bodyPr xmlns:a="http://schemas.openxmlformats.org/drawingml/2006/main" anchor="t">
+            <a:normAutofit fontScale="95454"/>
+          </a:bodyPr>
+          <a:lstStyle xmlns:a="http://schemas.openxmlformats.org/drawingml/2006/main"/>
+          <a:p xmlns:a="http://schemas.openxmlformats.org/drawingml/2006/main">
+            <a:pPr algn="l">
+              <a:buNone/>
+              <a:defRPr sz="1650" b="0">
+                <a:solidFill>
+                  <a:srgbClr val="53606D"/>
+                </a:solidFill>
+                <a:latin typeface="Arial"/>
+                <a:ea typeface="Arial"/>
+                <a:cs typeface="Arial"/>
+              </a:defRPr>
+            </a:pPr>
+            <a:r>
+              <a:rPr sz="1650" b="0">
+                <a:solidFill>
+                  <a:srgbClr val="53606D"/>
+                </a:solidFill>
+                <a:latin typeface="Arial"/>
+                <a:ea typeface="Arial"/>
+                <a:cs typeface="Arial"/>
+              </a:rPr>
+              <a:t>de risco passaram</a:t>
+            </a:r>
+          </a:p>
+          <a:p xmlns:a="http://schemas.openxmlformats.org/drawingml/2006/main">
+            <a:pPr algn="l">
+              <a:buNone/>
+              <a:defRPr sz="1650" b="0">
+                <a:solidFill>
+                  <a:srgbClr val="53606D"/>
+                </a:solidFill>
+                <a:latin typeface="Arial"/>
+                <a:ea typeface="Arial"/>
+                <a:cs typeface="Arial"/>
+              </a:defRPr>
+            </a:pPr>
+            <a:r>
+              <a:rPr sz="1650" b="0">
+                <a:solidFill>
+                  <a:srgbClr val="53606D"/>
+                </a:solidFill>
+                <a:latin typeface="Arial"/>
+                <a:ea typeface="Arial"/>
+                <a:cs typeface="Arial"/>
+              </a:rPr>
+              <a:t>por calibração</a:t>
+            </a:r>
+          </a:p>
+        </p:txBody>
+      </p:sp>
+      <p:pic>
+        <p:nvPicPr>
+          <p:cNvPr id="88" name=""/>
+          <p:cNvPicPr>
+            <a:picLocks xmlns:a="http://schemas.openxmlformats.org/drawingml/2006/main" noChangeAspect="1"/>
+          </p:cNvPicPr>
+          <p:nvPr/>
+        </p:nvPicPr>
+        <p:blipFill>
+          <a:blip xmlns:r="http://schemas.openxmlformats.org/officeDocument/2006/relationships" xmlns:a="http://schemas.openxmlformats.org/drawingml/2006/main" r:embed="Rcf32bc9ce250446f"/>
+          <a:srcRect xmlns:a="http://schemas.openxmlformats.org/drawingml/2006/main" l="0" t="13675" r="0" b="13675"/>
+          <a:stretch xmlns:a="http://schemas.openxmlformats.org/drawingml/2006/main">
+            <a:fillRect l="0" t="0" r="0" b="0"/>
+          </a:stretch>
+        </p:blipFill>
+        <p:spPr>
+          <a:xfrm xmlns:a="http://schemas.openxmlformats.org/drawingml/2006/main">
+            <a:off x="685800" y="5905500"/>
+            <a:ext cx="8915400" cy="4857750"/>
+          </a:xfrm>
+          <a:prstGeom xmlns:a="http://schemas.openxmlformats.org/drawingml/2006/main" prst="roundRect">
+            <a:avLst>
+              <a:gd name="adj" fmla="val 2353"/>
+            </a:avLst>
+          </a:prstGeom>
+        </p:spPr>
+      </p:pic>
+      <p:sp>
+        <p:nvSpPr>
+          <p:cNvPr id="13" name="uncertainty-caption">
+            <a:extLst xmlns:a="http://schemas.openxmlformats.org/drawingml/2006/main">
+              <a:ext uri="{FF2B5EF4-FFF2-40B4-BE49-F238E27FC236}">
+                <a16:creationId xmlns:a16="http://schemas.microsoft.com/office/drawing/2014/main" id="{27BF9B8F-FE17-46E5-A26F-BC14C8E998B6}"/>
+              </a:ext>
+            </a:extLst>
+          </p:cNvPr>
+          <p:cNvSpPr>
+            <a:spLocks xmlns:a="http://schemas.openxmlformats.org/drawingml/2006/main" noGrp="1"/>
+          </p:cNvSpPr>
+          <p:nvPr/>
+        </p:nvSpPr>
+        <p:spPr>
+          <a:xfrm xmlns:a="http://schemas.openxmlformats.org/drawingml/2006/main">
+            <a:off x="685800" y="11125200"/>
+            <a:ext cx="8915400" cy="457200"/>
+          </a:xfrm>
+          <a:prstGeom xmlns:a="http://schemas.openxmlformats.org/drawingml/2006/main" prst="rect">
+            <a:avLst/>
+          </a:prstGeom>
+          <a:noFill xmlns:a="http://schemas.openxmlformats.org/drawingml/2006/main"/>
+          <a:ln xmlns:a="http://schemas.openxmlformats.org/drawingml/2006/main" w="0">
+            <a:noFill/>
+            <a:prstDash val="solid"/>
+          </a:ln>
+        </p:spPr>
+        <p:txBody>
+          <a:bodyPr xmlns:a="http://schemas.openxmlformats.org/drawingml/2006/main" anchor="t">
+            <a:normAutofit fontScale="100000"/>
+          </a:bodyPr>
+          <a:lstStyle xmlns:a="http://schemas.openxmlformats.org/drawingml/2006/main"/>
+          <a:p xmlns:a="http://schemas.openxmlformats.org/drawingml/2006/main">
+            <a:pPr algn="l">
+              <a:buNone/>
+              <a:defRPr sz="2100" b="1">
+                <a:solidFill>
+                  <a:srgbClr val="07111C"/>
+                </a:solidFill>
+                <a:latin typeface="Arial"/>
+                <a:ea typeface="Arial"/>
+                <a:cs typeface="Arial"/>
+              </a:defRPr>
+            </a:pPr>
+            <a:r>
+              <a:rPr sz="2100" b="1">
+                <a:solidFill>
+                  <a:srgbClr val="07111C"/>
+                </a:solidFill>
+                <a:latin typeface="Arial"/>
+                <a:ea typeface="Arial"/>
+                <a:cs typeface="Arial"/>
+              </a:rPr>
+              <a:t>Produtividade, energia, qualidade e parada em contexto.</a:t>
+            </a:r>
+          </a:p>
+        </p:txBody>
+      </p:sp>
+      <p:cxnSp>
+        <p:nvCxnSpPr>
+          <p:cNvPr id="90" name="footer-rule-6"/>
+          <p:cNvCxnSpPr/>
+          <p:nvPr/>
+        </p:nvCxnSpPr>
+        <p:spPr>
+          <a:xfrm xmlns:a="http://schemas.openxmlformats.org/drawingml/2006/main">
+            <a:off x="685800" y="12039600"/>
+            <a:ext cx="8915400" cy="0"/>
+          </a:xfrm>
+          <a:prstGeom xmlns:a="http://schemas.openxmlformats.org/drawingml/2006/main" prst="straightConnector1">
+            <a:avLst/>
+          </a:prstGeom>
+          <a:ln xmlns:a="http://schemas.openxmlformats.org/drawingml/2006/main" w="9525">
+            <a:solidFill>
+              <a:srgbClr val="BCC4CC"/>
+            </a:solidFill>
+            <a:prstDash val="solid"/>
+          </a:ln>
+        </p:spPr>
+      </p:cxnSp>
+      <p:sp>
+        <p:nvSpPr>
+          <p:cNvPr id="15" name="footer-6">
+            <a:extLst xmlns:a="http://schemas.openxmlformats.org/drawingml/2006/main">
+              <a:ext uri="{FF2B5EF4-FFF2-40B4-BE49-F238E27FC236}">
+                <a16:creationId xmlns:a16="http://schemas.microsoft.com/office/drawing/2014/main" id="{4C805FD8-4599-4ADF-B429-241AE7810433}"/>
+              </a:ext>
+            </a:extLst>
+          </p:cNvPr>
+          <p:cNvSpPr>
+            <a:spLocks xmlns:a="http://schemas.openxmlformats.org/drawingml/2006/main" noGrp="1"/>
+          </p:cNvSpPr>
+          <p:nvPr/>
+        </p:nvSpPr>
+        <p:spPr>
+          <a:xfrm xmlns:a="http://schemas.openxmlformats.org/drawingml/2006/main">
+            <a:off x="685800" y="12211050"/>
+            <a:ext cx="7429500" cy="266700"/>
+          </a:xfrm>
+          <a:prstGeom xmlns:a="http://schemas.openxmlformats.org/drawingml/2006/main" prst="rect">
+            <a:avLst/>
+          </a:prstGeom>
+          <a:noFill xmlns:a="http://schemas.openxmlformats.org/drawingml/2006/main"/>
+          <a:ln xmlns:a="http://schemas.openxmlformats.org/drawingml/2006/main" w="0">
+            <a:noFill/>
+            <a:prstDash val="solid"/>
+          </a:ln>
+        </p:spPr>
+        <p:txBody>
+          <a:bodyPr xmlns:a="http://schemas.openxmlformats.org/drawingml/2006/main" anchor="t">
+            <a:normAutofit fontScale="95833"/>
+          </a:bodyPr>
+          <a:lstStyle xmlns:a="http://schemas.openxmlformats.org/drawingml/2006/main"/>
+          <a:p xmlns:a="http://schemas.openxmlformats.org/drawingml/2006/main">
+            <a:pPr algn="l">
+              <a:buNone/>
+              <a:defRPr sz="1200" b="0">
+                <a:solidFill>
+                  <a:srgbClr val="53606D"/>
+                </a:solidFill>
+                <a:latin typeface="Arial"/>
+                <a:ea typeface="Arial"/>
+                <a:cs typeface="Arial"/>
+              </a:defRPr>
+            </a:pPr>
+            <a:r>
+              <a:rPr sz="1200" b="0">
+                <a:solidFill>
+                  <a:srgbClr val="53606D"/>
+                </a:solidFill>
+                <a:latin typeface="Arial"/>
+                <a:ea typeface="Arial"/>
+                <a:cs typeface="Arial"/>
+              </a:rPr>
+              <a:t>100% sintético · sem controle de máquina</a:t>
+            </a:r>
+          </a:p>
+        </p:txBody>
+      </p:sp>
+      <p:sp>
+        <p:nvSpPr>
+          <p:cNvPr id="16" name="footer-page-6">
+            <a:extLst xmlns:a="http://schemas.openxmlformats.org/drawingml/2006/main">
+              <a:ext uri="{FF2B5EF4-FFF2-40B4-BE49-F238E27FC236}">
+                <a16:creationId xmlns:a16="http://schemas.microsoft.com/office/drawing/2014/main" id="{2013CB81-4EEF-4A4F-908A-E38429DD83EC}"/>
+              </a:ext>
+            </a:extLst>
+          </p:cNvPr>
+          <p:cNvSpPr>
+            <a:spLocks xmlns:a="http://schemas.openxmlformats.org/drawingml/2006/main" noGrp="1"/>
+          </p:cNvSpPr>
+          <p:nvPr/>
+        </p:nvSpPr>
+        <p:spPr>
+          <a:xfrm xmlns:a="http://schemas.openxmlformats.org/drawingml/2006/main">
+            <a:off x="8763000" y="12211050"/>
+            <a:ext cx="838200" cy="266700"/>
+          </a:xfrm>
+          <a:prstGeom xmlns:a="http://schemas.openxmlformats.org/drawingml/2006/main" prst="rect">
+            <a:avLst/>
+          </a:prstGeom>
+          <a:noFill xmlns:a="http://schemas.openxmlformats.org/drawingml/2006/main"/>
+          <a:ln xmlns:a="http://schemas.openxmlformats.org/drawingml/2006/main" w="0">
+            <a:noFill/>
+            <a:prstDash val="solid"/>
+          </a:ln>
+        </p:spPr>
+        <p:txBody>
+          <a:bodyPr xmlns:a="http://schemas.openxmlformats.org/drawingml/2006/main" anchor="t">
+            <a:normAutofit fontScale="95833"/>
+          </a:bodyPr>
+          <a:lstStyle xmlns:a="http://schemas.openxmlformats.org/drawingml/2006/main"/>
+          <a:p xmlns:a="http://schemas.openxmlformats.org/drawingml/2006/main">
+            <a:pPr algn="r">
+              <a:buNone/>
+              <a:defRPr sz="1200" b="0">
+                <a:solidFill>
+                  <a:srgbClr val="53606D"/>
+                </a:solidFill>
+                <a:latin typeface="Arial"/>
+                <a:ea typeface="Arial"/>
+                <a:cs typeface="Arial"/>
+              </a:defRPr>
+            </a:pPr>
+            <a:r>
+              <a:rPr sz="1200" b="0">
+                <a:solidFill>
+                  <a:srgbClr val="53606D"/>
+                </a:solidFill>
+                <a:latin typeface="Arial"/>
+                <a:ea typeface="Arial"/>
+                <a:cs typeface="Arial"/>
+              </a:rPr>
+              <a:t>3/5</a:t>
+            </a:r>
+          </a:p>
+        </p:txBody>
+      </p:sp>
+    </p:spTree>
+    <p:extLst>
+      <p:ext uri="{BB962C8B-B14F-4D97-AF65-F5344CB8AC3E}">
+        <p14:creationId xmlns:p14="http://schemas.microsoft.com/office/powerpoint/2010/main" val="998034244"/>
+      </p:ext>
+    </p:extLst>
+  </p:cSld>
+</p:sld>
+</file>
+
+<file path=ppt/slides/slide4.xml><?xml version="1.0" encoding="utf-8"?>
+<p:sld xmlns:p="http://schemas.openxmlformats.org/presentationml/2006/main">
+  <p:cSld>
+    <p:bg>
+      <p:bgPr>
+        <a:solidFill xmlns:a="http://schemas.openxmlformats.org/drawingml/2006/main">
+          <a:srgbClr val="FFFFFF"/>
+        </a:solidFill>
+      </p:bgPr>
+    </p:bg>
+    <p:spTree>
+      <p:nvGrpSpPr>
+        <p:cNvPr id="1" name=""/>
+        <p:cNvGrpSpPr/>
+        <p:nvPr/>
+      </p:nvGrpSpPr>
+      <p:grpSpPr>
+        <a:xfrm xmlns:a="http://schemas.openxmlformats.org/drawingml/2006/main"/>
+      </p:grpSpPr>
+      <p:sp>
+        <p:nvSpPr>
+          <p:cNvPr id="17" name="kicker-7">
+            <a:extLst xmlns:a="http://schemas.openxmlformats.org/drawingml/2006/main">
+              <a:ext uri="{FF2B5EF4-FFF2-40B4-BE49-F238E27FC236}">
+                <a16:creationId xmlns:a16="http://schemas.microsoft.com/office/drawing/2014/main" id="{7DD2BC6F-D214-4CBA-88EC-599B1C28FA7D}"/>
+              </a:ext>
+            </a:extLst>
+          </p:cNvPr>
+          <p:cNvSpPr>
+            <a:spLocks xmlns:a="http://schemas.openxmlformats.org/drawingml/2006/main" noGrp="1"/>
+          </p:cNvSpPr>
+          <p:nvPr/>
+        </p:nvSpPr>
+        <p:spPr>
+          <a:xfrm xmlns:a="http://schemas.openxmlformats.org/drawingml/2006/main">
+            <a:off x="685800" y="523875"/>
+            <a:ext cx="7429500" cy="304800"/>
+          </a:xfrm>
+          <a:prstGeom xmlns:a="http://schemas.openxmlformats.org/drawingml/2006/main" prst="rect">
+            <a:avLst/>
+          </a:prstGeom>
+          <a:noFill xmlns:a="http://schemas.openxmlformats.org/drawingml/2006/main"/>
+          <a:ln xmlns:a="http://schemas.openxmlformats.org/drawingml/2006/main" w="0">
+            <a:noFill/>
+            <a:prstDash val="solid"/>
+          </a:ln>
+        </p:spPr>
+        <p:txBody>
+          <a:bodyPr xmlns:a="http://schemas.openxmlformats.org/drawingml/2006/main" anchor="t">
+            <a:normAutofit fontScale="100000"/>
+          </a:bodyPr>
+          <a:lstStyle xmlns:a="http://schemas.openxmlformats.org/drawingml/2006/main"/>
+          <a:p xmlns:a="http://schemas.openxmlformats.org/drawingml/2006/main">
+            <a:pPr algn="l">
+              <a:buNone/>
+              <a:defRPr sz="1350" b="1">
+                <a:solidFill>
+                  <a:srgbClr val="3D8DFF"/>
+                </a:solidFill>
+                <a:latin typeface="Arial"/>
+                <a:ea typeface="Arial"/>
+                <a:cs typeface="Arial"/>
+              </a:defRPr>
+            </a:pPr>
+            <a:r>
+              <a:rPr sz="1350" b="1">
+                <a:solidFill>
+                  <a:srgbClr val="3D8DFF"/>
+                </a:solidFill>
+                <a:latin typeface="Arial"/>
+                <a:ea typeface="Arial"/>
+                <a:cs typeface="Arial"/>
+              </a:rPr>
+              <a:t>TESTE DE CENÁRIOS</a:t>
+            </a:r>
+          </a:p>
+        </p:txBody>
+      </p:sp>
+      <p:sp>
+        <p:nvSpPr>
+          <p:cNvPr id="2" name="page-7">
+            <a:extLst xmlns:a="http://schemas.openxmlformats.org/drawingml/2006/main">
+              <a:ext uri="{FF2B5EF4-FFF2-40B4-BE49-F238E27FC236}">
+                <a16:creationId xmlns:a16="http://schemas.microsoft.com/office/drawing/2014/main" id="{6A092EF0-99DD-4B9B-AA19-12622A4EDBCC}"/>
+              </a:ext>
+            </a:extLst>
+          </p:cNvPr>
+          <p:cNvSpPr>
+            <a:spLocks xmlns:a="http://schemas.openxmlformats.org/drawingml/2006/main" noGrp="1"/>
+          </p:cNvSpPr>
+          <p:nvPr/>
+        </p:nvSpPr>
+        <p:spPr>
+          <a:xfrm xmlns:a="http://schemas.openxmlformats.org/drawingml/2006/main">
+            <a:off x="8705850" y="523875"/>
+            <a:ext cx="895350" cy="304800"/>
+          </a:xfrm>
+          <a:prstGeom xmlns:a="http://schemas.openxmlformats.org/drawingml/2006/main" prst="rect">
+            <a:avLst/>
+          </a:prstGeom>
+          <a:noFill xmlns:a="http://schemas.openxmlformats.org/drawingml/2006/main"/>
+          <a:ln xmlns:a="http://schemas.openxmlformats.org/drawingml/2006/main" w="0">
+            <a:noFill/>
+            <a:prstDash val="solid"/>
+          </a:ln>
+        </p:spPr>
+        <p:txBody>
+          <a:bodyPr xmlns:a="http://schemas.openxmlformats.org/drawingml/2006/main" anchor="t">
+            <a:normAutofit fontScale="100000"/>
+          </a:bodyPr>
+          <a:lstStyle xmlns:a="http://schemas.openxmlformats.org/drawingml/2006/main"/>
+          <a:p xmlns:a="http://schemas.openxmlformats.org/drawingml/2006/main">
+            <a:pPr algn="r">
+              <a:buNone/>
+              <a:defRPr sz="1350" b="1">
+                <a:solidFill>
+                  <a:srgbClr val="53606D"/>
+                </a:solidFill>
+                <a:latin typeface="Arial"/>
+                <a:ea typeface="Arial"/>
+                <a:cs typeface="Arial"/>
+              </a:defRPr>
+            </a:pPr>
+            <a:r>
+              <a:rPr sz="1350" b="1">
+                <a:solidFill>
+                  <a:srgbClr val="53606D"/>
+                </a:solidFill>
+                <a:latin typeface="Arial"/>
+                <a:ea typeface="Arial"/>
+                <a:cs typeface="Arial"/>
+              </a:rPr>
+              <a:t>04</a:t>
+            </a:r>
+          </a:p>
+        </p:txBody>
+      </p:sp>
+      <p:sp>
+        <p:nvSpPr>
+          <p:cNvPr id="3" name="title-7">
+            <a:extLst xmlns:a="http://schemas.openxmlformats.org/drawingml/2006/main">
+              <a:ext uri="{FF2B5EF4-FFF2-40B4-BE49-F238E27FC236}">
+                <a16:creationId xmlns:a16="http://schemas.microsoft.com/office/drawing/2014/main" id="{B63F41E9-DCD1-4F71-9BF9-B13413805947}"/>
+              </a:ext>
+            </a:extLst>
+          </p:cNvPr>
+          <p:cNvSpPr>
+            <a:spLocks xmlns:a="http://schemas.openxmlformats.org/drawingml/2006/main" noGrp="1"/>
+          </p:cNvSpPr>
+          <p:nvPr/>
+        </p:nvSpPr>
+        <p:spPr>
+          <a:xfrm xmlns:a="http://schemas.openxmlformats.org/drawingml/2006/main">
+            <a:off x="685800" y="1000125"/>
+            <a:ext cx="8915400" cy="1162050"/>
+          </a:xfrm>
+          <a:prstGeom xmlns:a="http://schemas.openxmlformats.org/drawingml/2006/main" prst="rect">
+            <a:avLst/>
+          </a:prstGeom>
+          <a:noFill xmlns:a="http://schemas.openxmlformats.org/drawingml/2006/main"/>
+          <a:ln xmlns:a="http://schemas.openxmlformats.org/drawingml/2006/main" w="0">
+            <a:noFill/>
+            <a:prstDash val="solid"/>
+          </a:ln>
+        </p:spPr>
+        <p:txBody>
+          <a:bodyPr xmlns:a="http://schemas.openxmlformats.org/drawingml/2006/main" anchor="t">
+            <a:normAutofit fontScale="100000"/>
+          </a:bodyPr>
+          <a:lstStyle xmlns:a="http://schemas.openxmlformats.org/drawingml/2006/main"/>
+          <a:p xmlns:a="http://schemas.openxmlformats.org/drawingml/2006/main">
+            <a:pPr algn="l">
+              <a:buNone/>
+              <a:defRPr sz="3750" b="1">
+                <a:solidFill>
+                  <a:srgbClr val="07111C"/>
+                </a:solidFill>
+                <a:latin typeface="Arial"/>
+                <a:ea typeface="Arial"/>
+                <a:cs typeface="Arial"/>
+              </a:defRPr>
+            </a:pPr>
+            <a:r>
+              <a:rPr sz="3750" b="1">
+                <a:solidFill>
+                  <a:srgbClr val="07111C"/>
+                </a:solidFill>
+                <a:latin typeface="Arial"/>
+                <a:ea typeface="Arial"/>
+                <a:cs typeface="Arial"/>
+              </a:rPr>
+              <a:t>Mude parâmetros. Compare cenários.</a:t>
+            </a:r>
+          </a:p>
+        </p:txBody>
+      </p:sp>
+      <p:sp>
+        <p:nvSpPr>
+          <p:cNvPr id="4" name="subtitle-7">
+            <a:extLst xmlns:a="http://schemas.openxmlformats.org/drawingml/2006/main">
+              <a:ext uri="{FF2B5EF4-FFF2-40B4-BE49-F238E27FC236}">
+                <a16:creationId xmlns:a16="http://schemas.microsoft.com/office/drawing/2014/main" id="{301F72D8-C84C-47AE-B5A3-54F74CA295D5}"/>
+              </a:ext>
+            </a:extLst>
+          </p:cNvPr>
+          <p:cNvSpPr>
+            <a:spLocks xmlns:a="http://schemas.openxmlformats.org/drawingml/2006/main" noGrp="1"/>
+          </p:cNvSpPr>
+          <p:nvPr/>
+        </p:nvSpPr>
+        <p:spPr>
+          <a:xfrm xmlns:a="http://schemas.openxmlformats.org/drawingml/2006/main">
+            <a:off x="685800" y="2133600"/>
+            <a:ext cx="8915400" cy="704850"/>
+          </a:xfrm>
+          <a:prstGeom xmlns:a="http://schemas.openxmlformats.org/drawingml/2006/main" prst="rect">
+            <a:avLst/>
+          </a:prstGeom>
+          <a:noFill xmlns:a="http://schemas.openxmlformats.org/drawingml/2006/main"/>
+          <a:ln xmlns:a="http://schemas.openxmlformats.org/drawingml/2006/main" w="0">
+            <a:noFill/>
+            <a:prstDash val="solid"/>
+          </a:ln>
+        </p:spPr>
+        <p:txBody>
+          <a:bodyPr xmlns:a="http://schemas.openxmlformats.org/drawingml/2006/main" anchor="t">
+            <a:normAutofit fontScale="100000"/>
+          </a:bodyPr>
+          <a:lstStyle xmlns:a="http://schemas.openxmlformats.org/drawingml/2006/main"/>
+          <a:p xmlns:a="http://schemas.openxmlformats.org/drawingml/2006/main">
+            <a:pPr algn="l">
+              <a:buNone/>
+              <a:defRPr sz="1875" b="0">
+                <a:solidFill>
+                  <a:srgbClr val="53606D"/>
+                </a:solidFill>
+                <a:latin typeface="Arial"/>
+                <a:ea typeface="Arial"/>
+                <a:cs typeface="Arial"/>
+              </a:defRPr>
+            </a:pPr>
+            <a:r>
+              <a:rPr sz="1875" b="0">
+                <a:solidFill>
+                  <a:srgbClr val="53606D"/>
+                </a:solidFill>
+                <a:latin typeface="Arial"/>
+                <a:ea typeface="Arial"/>
+                <a:cs typeface="Arial"/>
+              </a:rPr>
+              <a:t>A plataforma recalcula resultados e bloqueia hipóteses fora do histórico.</a:t>
+            </a:r>
+          </a:p>
+        </p:txBody>
+      </p:sp>
+      <p:cxnSp>
+        <p:nvCxnSpPr>
+          <p:cNvPr id="81" name="header-rule-7"/>
+          <p:cNvCxnSpPr/>
+          <p:nvPr/>
+        </p:nvCxnSpPr>
+        <p:spPr>
+          <a:xfrm xmlns:a="http://schemas.openxmlformats.org/drawingml/2006/main">
+            <a:off x="685800" y="2990850"/>
+            <a:ext cx="8915400" cy="0"/>
+          </a:xfrm>
+          <a:prstGeom xmlns:a="http://schemas.openxmlformats.org/drawingml/2006/main" prst="straightConnector1">
+            <a:avLst/>
+          </a:prstGeom>
+          <a:ln xmlns:a="http://schemas.openxmlformats.org/drawingml/2006/main" w="9525">
+            <a:solidFill>
+              <a:srgbClr val="BCC4CC"/>
+            </a:solidFill>
+            <a:prstDash val="solid"/>
+          </a:ln>
+        </p:spPr>
+      </p:cxnSp>
+      <p:sp>
+        <p:nvSpPr>
+          <p:cNvPr id="6" name="scenario-stat-0">
+            <a:extLst xmlns:a="http://schemas.openxmlformats.org/drawingml/2006/main">
+              <a:ext uri="{FF2B5EF4-FFF2-40B4-BE49-F238E27FC236}">
+                <a16:creationId xmlns:a16="http://schemas.microsoft.com/office/drawing/2014/main" id="{3874855A-F37C-4BE5-91CD-BFB684E4AD1A}"/>
+              </a:ext>
+            </a:extLst>
+          </p:cNvPr>
+          <p:cNvSpPr>
+            <a:spLocks xmlns:a="http://schemas.openxmlformats.org/drawingml/2006/main" noGrp="1"/>
+          </p:cNvSpPr>
+          <p:nvPr/>
+        </p:nvSpPr>
+        <p:spPr>
+          <a:xfrm xmlns:a="http://schemas.openxmlformats.org/drawingml/2006/main">
+            <a:off x="685800" y="3429000"/>
+            <a:ext cx="2381250" cy="685800"/>
+          </a:xfrm>
+          <a:prstGeom xmlns:a="http://schemas.openxmlformats.org/drawingml/2006/main" prst="rect">
+            <a:avLst/>
+          </a:prstGeom>
+          <a:noFill xmlns:a="http://schemas.openxmlformats.org/drawingml/2006/main"/>
+          <a:ln xmlns:a="http://schemas.openxmlformats.org/drawingml/2006/main" w="0">
+            <a:noFill/>
+            <a:prstDash val="solid"/>
+          </a:ln>
+        </p:spPr>
+        <p:txBody>
+          <a:bodyPr xmlns:a="http://schemas.openxmlformats.org/drawingml/2006/main" anchor="t">
+            <a:normAutofit fontScale="100000"/>
+          </a:bodyPr>
+          <a:lstStyle xmlns:a="http://schemas.openxmlformats.org/drawingml/2006/main"/>
+          <a:p xmlns:a="http://schemas.openxmlformats.org/drawingml/2006/main">
+            <a:pPr algn="l">
+              <a:buNone/>
+              <a:defRPr sz="3300" b="1">
+                <a:solidFill>
+                  <a:srgbClr val="3D8DFF"/>
+                </a:solidFill>
+                <a:latin typeface="Arial"/>
+                <a:ea typeface="Arial"/>
+                <a:cs typeface="Arial"/>
+              </a:defRPr>
+            </a:pPr>
+            <a:r>
+              <a:rPr sz="3300" b="1">
+                <a:solidFill>
+                  <a:srgbClr val="3D8DFF"/>
+                </a:solidFill>
+                <a:latin typeface="Arial"/>
+                <a:ea typeface="Arial"/>
+                <a:cs typeface="Arial"/>
+              </a:rPr>
+              <a:t>12</a:t>
+            </a:r>
+          </a:p>
+        </p:txBody>
+      </p:sp>
+      <p:sp>
+        <p:nvSpPr>
+          <p:cNvPr id="7" name="scenario-label-0">
+            <a:extLst xmlns:a="http://schemas.openxmlformats.org/drawingml/2006/main">
+              <a:ext uri="{FF2B5EF4-FFF2-40B4-BE49-F238E27FC236}">
+                <a16:creationId xmlns:a16="http://schemas.microsoft.com/office/drawing/2014/main" id="{4B60A1AD-6086-4D18-AA3A-BF02DED97DC9}"/>
+              </a:ext>
+            </a:extLst>
+          </p:cNvPr>
+          <p:cNvSpPr>
+            <a:spLocks xmlns:a="http://schemas.openxmlformats.org/drawingml/2006/main" noGrp="1"/>
+          </p:cNvSpPr>
+          <p:nvPr/>
+        </p:nvSpPr>
+        <p:spPr>
+          <a:xfrm xmlns:a="http://schemas.openxmlformats.org/drawingml/2006/main">
+            <a:off x="685800" y="4171950"/>
+            <a:ext cx="2381250" cy="552450"/>
+          </a:xfrm>
+          <a:prstGeom xmlns:a="http://schemas.openxmlformats.org/drawingml/2006/main" prst="rect">
+            <a:avLst/>
+          </a:prstGeom>
+          <a:noFill xmlns:a="http://schemas.openxmlformats.org/drawingml/2006/main"/>
+          <a:ln xmlns:a="http://schemas.openxmlformats.org/drawingml/2006/main" w="0">
+            <a:noFill/>
+            <a:prstDash val="solid"/>
+          </a:ln>
+        </p:spPr>
+        <p:txBody>
+          <a:bodyPr xmlns:a="http://schemas.openxmlformats.org/drawingml/2006/main" anchor="t">
+            <a:normAutofit fontScale="100000"/>
+          </a:bodyPr>
+          <a:lstStyle xmlns:a="http://schemas.openxmlformats.org/drawingml/2006/main"/>
+          <a:p xmlns:a="http://schemas.openxmlformats.org/drawingml/2006/main">
+            <a:pPr algn="l">
+              <a:buNone/>
+              <a:defRPr sz="1500" b="0">
+                <a:solidFill>
+                  <a:srgbClr val="53606D"/>
+                </a:solidFill>
+                <a:latin typeface="Arial"/>
+                <a:ea typeface="Arial"/>
+                <a:cs typeface="Arial"/>
+              </a:defRPr>
+            </a:pPr>
+            <a:r>
+              <a:rPr sz="1500" b="0">
+                <a:solidFill>
+                  <a:srgbClr val="53606D"/>
+                </a:solidFill>
+                <a:latin typeface="Arial"/>
+                <a:ea typeface="Arial"/>
+                <a:cs typeface="Arial"/>
+              </a:rPr>
+              <a:t>cenários publicados</a:t>
+            </a:r>
+          </a:p>
+        </p:txBody>
+      </p:sp>
+      <p:sp>
+        <p:nvSpPr>
+          <p:cNvPr id="8" name="scenario-stat-1">
+            <a:extLst xmlns:a="http://schemas.openxmlformats.org/drawingml/2006/main">
+              <a:ext uri="{FF2B5EF4-FFF2-40B4-BE49-F238E27FC236}">
+                <a16:creationId xmlns:a16="http://schemas.microsoft.com/office/drawing/2014/main" id="{5D22E322-4953-4C2D-91E9-4402904D1F6F}"/>
+              </a:ext>
+            </a:extLst>
+          </p:cNvPr>
+          <p:cNvSpPr>
+            <a:spLocks xmlns:a="http://schemas.openxmlformats.org/drawingml/2006/main" noGrp="1"/>
+          </p:cNvSpPr>
+          <p:nvPr/>
+        </p:nvSpPr>
+        <p:spPr>
+          <a:xfrm xmlns:a="http://schemas.openxmlformats.org/drawingml/2006/main">
+            <a:off x="3752850" y="3429000"/>
+            <a:ext cx="2381250" cy="685800"/>
+          </a:xfrm>
+          <a:prstGeom xmlns:a="http://schemas.openxmlformats.org/drawingml/2006/main" prst="rect">
+            <a:avLst/>
+          </a:prstGeom>
+          <a:noFill xmlns:a="http://schemas.openxmlformats.org/drawingml/2006/main"/>
+          <a:ln xmlns:a="http://schemas.openxmlformats.org/drawingml/2006/main" w="0">
+            <a:noFill/>
+            <a:prstDash val="solid"/>
+          </a:ln>
+        </p:spPr>
+        <p:txBody>
+          <a:bodyPr xmlns:a="http://schemas.openxmlformats.org/drawingml/2006/main" anchor="t">
+            <a:normAutofit fontScale="100000"/>
+          </a:bodyPr>
+          <a:lstStyle xmlns:a="http://schemas.openxmlformats.org/drawingml/2006/main"/>
+          <a:p xmlns:a="http://schemas.openxmlformats.org/drawingml/2006/main">
+            <a:pPr algn="l">
+              <a:buNone/>
+              <a:defRPr sz="3300" b="1">
+                <a:solidFill>
+                  <a:srgbClr val="3D8DFF"/>
+                </a:solidFill>
+                <a:latin typeface="Arial"/>
+                <a:ea typeface="Arial"/>
+                <a:cs typeface="Arial"/>
+              </a:defRPr>
+            </a:pPr>
+            <a:r>
+              <a:rPr sz="3300" b="1">
+                <a:solidFill>
+                  <a:srgbClr val="3D8DFF"/>
+                </a:solidFill>
+                <a:latin typeface="Arial"/>
+                <a:ea typeface="Arial"/>
+                <a:cs typeface="Arial"/>
+              </a:rPr>
+              <a:t>9</a:t>
+            </a:r>
+          </a:p>
+        </p:txBody>
+      </p:sp>
+      <p:sp>
+        <p:nvSpPr>
+          <p:cNvPr id="9" name="scenario-label-1">
+            <a:extLst xmlns:a="http://schemas.openxmlformats.org/drawingml/2006/main">
+              <a:ext uri="{FF2B5EF4-FFF2-40B4-BE49-F238E27FC236}">
+                <a16:creationId xmlns:a16="http://schemas.microsoft.com/office/drawing/2014/main" id="{E033F261-4F50-4440-B9EC-5106D37A955B}"/>
+              </a:ext>
+            </a:extLst>
+          </p:cNvPr>
+          <p:cNvSpPr>
+            <a:spLocks xmlns:a="http://schemas.openxmlformats.org/drawingml/2006/main" noGrp="1"/>
+          </p:cNvSpPr>
+          <p:nvPr/>
+        </p:nvSpPr>
+        <p:spPr>
+          <a:xfrm xmlns:a="http://schemas.openxmlformats.org/drawingml/2006/main">
+            <a:off x="3752850" y="4171950"/>
+            <a:ext cx="2381250" cy="552450"/>
+          </a:xfrm>
+          <a:prstGeom xmlns:a="http://schemas.openxmlformats.org/drawingml/2006/main" prst="rect">
+            <a:avLst/>
+          </a:prstGeom>
+          <a:noFill xmlns:a="http://schemas.openxmlformats.org/drawingml/2006/main"/>
+          <a:ln xmlns:a="http://schemas.openxmlformats.org/drawingml/2006/main" w="0">
+            <a:noFill/>
+            <a:prstDash val="solid"/>
+          </a:ln>
+        </p:spPr>
+        <p:txBody>
+          <a:bodyPr xmlns:a="http://schemas.openxmlformats.org/drawingml/2006/main" anchor="t">
+            <a:normAutofit fontScale="100000"/>
+          </a:bodyPr>
+          <a:lstStyle xmlns:a="http://schemas.openxmlformats.org/drawingml/2006/main"/>
+          <a:p xmlns:a="http://schemas.openxmlformats.org/drawingml/2006/main">
+            <a:pPr algn="l">
+              <a:buNone/>
+              <a:defRPr sz="1500" b="0">
+                <a:solidFill>
+                  <a:srgbClr val="53606D"/>
+                </a:solidFill>
+                <a:latin typeface="Arial"/>
+                <a:ea typeface="Arial"/>
+                <a:cs typeface="Arial"/>
+              </a:defRPr>
+            </a:pPr>
+            <a:r>
+              <a:rPr sz="1500" b="0">
+                <a:solidFill>
+                  <a:srgbClr val="53606D"/>
+                </a:solidFill>
+                <a:latin typeface="Arial"/>
+                <a:ea typeface="Arial"/>
+                <a:cs typeface="Arial"/>
+              </a:rPr>
+              <a:t>restrições obrigatórias</a:t>
+            </a:r>
+          </a:p>
+        </p:txBody>
+      </p:sp>
+      <p:sp>
+        <p:nvSpPr>
+          <p:cNvPr id="10" name="scenario-stat-2">
+            <a:extLst xmlns:a="http://schemas.openxmlformats.org/drawingml/2006/main">
+              <a:ext uri="{FF2B5EF4-FFF2-40B4-BE49-F238E27FC236}">
+                <a16:creationId xmlns:a16="http://schemas.microsoft.com/office/drawing/2014/main" id="{7DD40CCC-8CAC-4B1A-A91B-89AD34FD2788}"/>
+              </a:ext>
+            </a:extLst>
+          </p:cNvPr>
+          <p:cNvSpPr>
+            <a:spLocks xmlns:a="http://schemas.openxmlformats.org/drawingml/2006/main" noGrp="1"/>
+          </p:cNvSpPr>
+          <p:nvPr/>
+        </p:nvSpPr>
+        <p:spPr>
+          <a:xfrm xmlns:a="http://schemas.openxmlformats.org/drawingml/2006/main">
+            <a:off x="6819900" y="3429000"/>
+            <a:ext cx="2381250" cy="685800"/>
+          </a:xfrm>
+          <a:prstGeom xmlns:a="http://schemas.openxmlformats.org/drawingml/2006/main" prst="rect">
+            <a:avLst/>
+          </a:prstGeom>
+          <a:noFill xmlns:a="http://schemas.openxmlformats.org/drawingml/2006/main"/>
+          <a:ln xmlns:a="http://schemas.openxmlformats.org/drawingml/2006/main" w="0">
+            <a:noFill/>
+            <a:prstDash val="solid"/>
+          </a:ln>
+        </p:spPr>
+        <p:txBody>
+          <a:bodyPr xmlns:a="http://schemas.openxmlformats.org/drawingml/2006/main" anchor="t">
+            <a:normAutofit fontScale="100000"/>
+          </a:bodyPr>
+          <a:lstStyle xmlns:a="http://schemas.openxmlformats.org/drawingml/2006/main"/>
+          <a:p xmlns:a="http://schemas.openxmlformats.org/drawingml/2006/main">
+            <a:pPr algn="l">
+              <a:buNone/>
+              <a:defRPr sz="3300" b="1">
+                <a:solidFill>
+                  <a:srgbClr val="E55B68"/>
+                </a:solidFill>
+                <a:latin typeface="Arial"/>
+                <a:ea typeface="Arial"/>
+                <a:cs typeface="Arial"/>
+              </a:defRPr>
+            </a:pPr>
+            <a:r>
+              <a:rPr sz="3300" b="1">
+                <a:solidFill>
+                  <a:srgbClr val="E55B68"/>
+                </a:solidFill>
+                <a:latin typeface="Arial"/>
+                <a:ea typeface="Arial"/>
+                <a:cs typeface="Arial"/>
+              </a:rPr>
+              <a:t>3/3</a:t>
+            </a:r>
+          </a:p>
+        </p:txBody>
+      </p:sp>
+      <p:sp>
+        <p:nvSpPr>
+          <p:cNvPr id="11" name="scenario-label-2">
+            <a:extLst xmlns:a="http://schemas.openxmlformats.org/drawingml/2006/main">
+              <a:ext uri="{FF2B5EF4-FFF2-40B4-BE49-F238E27FC236}">
+                <a16:creationId xmlns:a16="http://schemas.microsoft.com/office/drawing/2014/main" id="{A76B89E4-D43B-41CE-8CB1-6E6DA87F4D0B}"/>
+              </a:ext>
+            </a:extLst>
+          </p:cNvPr>
+          <p:cNvSpPr>
+            <a:spLocks xmlns:a="http://schemas.openxmlformats.org/drawingml/2006/main" noGrp="1"/>
+          </p:cNvSpPr>
+          <p:nvPr/>
+        </p:nvSpPr>
+        <p:spPr>
+          <a:xfrm xmlns:a="http://schemas.openxmlformats.org/drawingml/2006/main">
+            <a:off x="6819900" y="4171950"/>
+            <a:ext cx="2381250" cy="552450"/>
+          </a:xfrm>
+          <a:prstGeom xmlns:a="http://schemas.openxmlformats.org/drawingml/2006/main" prst="rect">
+            <a:avLst/>
+          </a:prstGeom>
+          <a:noFill xmlns:a="http://schemas.openxmlformats.org/drawingml/2006/main"/>
+          <a:ln xmlns:a="http://schemas.openxmlformats.org/drawingml/2006/main" w="0">
+            <a:noFill/>
+            <a:prstDash val="solid"/>
+          </a:ln>
+        </p:spPr>
+        <p:txBody>
+          <a:bodyPr xmlns:a="http://schemas.openxmlformats.org/drawingml/2006/main" anchor="t">
+            <a:normAutofit fontScale="100000"/>
+          </a:bodyPr>
+          <a:lstStyle xmlns:a="http://schemas.openxmlformats.org/drawingml/2006/main"/>
+          <a:p xmlns:a="http://schemas.openxmlformats.org/drawingml/2006/main">
+            <a:pPr algn="l">
+              <a:buNone/>
+              <a:defRPr sz="1500" b="0">
+                <a:solidFill>
+                  <a:srgbClr val="53606D"/>
+                </a:solidFill>
+                <a:latin typeface="Arial"/>
+                <a:ea typeface="Arial"/>
+                <a:cs typeface="Arial"/>
+              </a:defRPr>
+            </a:pPr>
+            <a:r>
+              <a:rPr sz="1500" b="0">
+                <a:solidFill>
+                  <a:srgbClr val="53606D"/>
+                </a:solidFill>
+                <a:latin typeface="Arial"/>
+                <a:ea typeface="Arial"/>
+                <a:cs typeface="Arial"/>
+              </a:rPr>
+              <a:t>fora do histórico</a:t>
+            </a:r>
+          </a:p>
+          <a:p xmlns:a="http://schemas.openxmlformats.org/drawingml/2006/main">
+            <a:pPr algn="l">
+              <a:buNone/>
+              <a:defRPr sz="1500" b="0">
+                <a:solidFill>
+                  <a:srgbClr val="53606D"/>
+                </a:solidFill>
+                <a:latin typeface="Arial"/>
+                <a:ea typeface="Arial"/>
+                <a:cs typeface="Arial"/>
+              </a:defRPr>
+            </a:pPr>
+            <a:r>
+              <a:rPr sz="1500" b="0">
+                <a:solidFill>
+                  <a:srgbClr val="53606D"/>
+                </a:solidFill>
+                <a:latin typeface="Arial"/>
+                <a:ea typeface="Arial"/>
+                <a:cs typeface="Arial"/>
+              </a:rPr>
+              <a:t>recusadas</a:t>
+            </a:r>
+          </a:p>
+        </p:txBody>
+      </p:sp>
+      <p:pic>
+        <p:nvPicPr>
+          <p:cNvPr id="88" name=""/>
+          <p:cNvPicPr>
+            <a:picLocks xmlns:a="http://schemas.openxmlformats.org/drawingml/2006/main" noChangeAspect="1"/>
+          </p:cNvPicPr>
+          <p:nvPr/>
+        </p:nvPicPr>
+        <p:blipFill>
+          <a:blip xmlns:r="http://schemas.openxmlformats.org/officeDocument/2006/relationships" xmlns:a="http://schemas.openxmlformats.org/drawingml/2006/main" r:embed="Rc76b6684795640e2"/>
+          <a:srcRect xmlns:a="http://schemas.openxmlformats.org/drawingml/2006/main" l="0" t="10114" r="0" b="10114"/>
+          <a:stretch xmlns:a="http://schemas.openxmlformats.org/drawingml/2006/main">
+            <a:fillRect l="0" t="0" r="0" b="0"/>
+          </a:stretch>
+        </p:blipFill>
+        <p:spPr>
+          <a:xfrm xmlns:a="http://schemas.openxmlformats.org/drawingml/2006/main">
+            <a:off x="685800" y="5219700"/>
+            <a:ext cx="8915400" cy="5334000"/>
+          </a:xfrm>
+          <a:prstGeom xmlns:a="http://schemas.openxmlformats.org/drawingml/2006/main" prst="roundRect">
+            <a:avLst>
+              <a:gd name="adj" fmla="val 2143"/>
+            </a:avLst>
+          </a:prstGeom>
+        </p:spPr>
+      </p:pic>
+      <p:sp>
+        <p:nvSpPr>
+          <p:cNvPr id="13" name="scenario-close">
+            <a:extLst xmlns:a="http://schemas.openxmlformats.org/drawingml/2006/main">
+              <a:ext uri="{FF2B5EF4-FFF2-40B4-BE49-F238E27FC236}">
+                <a16:creationId xmlns:a16="http://schemas.microsoft.com/office/drawing/2014/main" id="{77D68B23-F225-4FB9-AD55-5D8FE63700B5}"/>
+              </a:ext>
+            </a:extLst>
+          </p:cNvPr>
+          <p:cNvSpPr>
+            <a:spLocks xmlns:a="http://schemas.openxmlformats.org/drawingml/2006/main" noGrp="1"/>
+          </p:cNvSpPr>
+          <p:nvPr/>
+        </p:nvSpPr>
+        <p:spPr>
+          <a:xfrm xmlns:a="http://schemas.openxmlformats.org/drawingml/2006/main">
+            <a:off x="685800" y="10953750"/>
+            <a:ext cx="8915400" cy="609600"/>
+          </a:xfrm>
+          <a:prstGeom xmlns:a="http://schemas.openxmlformats.org/drawingml/2006/main" prst="rect">
+            <a:avLst/>
+          </a:prstGeom>
+          <a:noFill xmlns:a="http://schemas.openxmlformats.org/drawingml/2006/main"/>
+          <a:ln xmlns:a="http://schemas.openxmlformats.org/drawingml/2006/main" w="0">
+            <a:noFill/>
+            <a:prstDash val="solid"/>
+          </a:ln>
+        </p:spPr>
+        <p:txBody>
+          <a:bodyPr xmlns:a="http://schemas.openxmlformats.org/drawingml/2006/main" anchor="t">
+            <a:normAutofit fontScale="100000"/>
+          </a:bodyPr>
+          <a:lstStyle xmlns:a="http://schemas.openxmlformats.org/drawingml/2006/main"/>
+          <a:p xmlns:a="http://schemas.openxmlformats.org/drawingml/2006/main">
+            <a:pPr algn="l">
+              <a:buNone/>
+              <a:defRPr sz="1875" b="1">
+                <a:solidFill>
+                  <a:srgbClr val="07111C"/>
+                </a:solidFill>
+                <a:latin typeface="Arial"/>
+                <a:ea typeface="Arial"/>
+                <a:cs typeface="Arial"/>
+              </a:defRPr>
+            </a:pPr>
+            <a:r>
+              <a:rPr sz="1875" b="1">
+                <a:solidFill>
+                  <a:srgbClr val="07111C"/>
+                </a:solidFill>
+                <a:latin typeface="Arial"/>
+                <a:ea typeface="Arial"/>
+                <a:cs typeface="Arial"/>
+              </a:rPr>
+              <a:t>Probabilidades + P10/P50/P90 + decisão humana.</a:t>
+            </a:r>
+          </a:p>
+        </p:txBody>
+      </p:sp>
+      <p:cxnSp>
+        <p:nvCxnSpPr>
+          <p:cNvPr id="90" name="footer-rule-7"/>
+          <p:cNvCxnSpPr/>
+          <p:nvPr/>
+        </p:nvCxnSpPr>
+        <p:spPr>
+          <a:xfrm xmlns:a="http://schemas.openxmlformats.org/drawingml/2006/main">
+            <a:off x="685800" y="12039600"/>
+            <a:ext cx="8915400" cy="0"/>
+          </a:xfrm>
+          <a:prstGeom xmlns:a="http://schemas.openxmlformats.org/drawingml/2006/main" prst="straightConnector1">
+            <a:avLst/>
+          </a:prstGeom>
+          <a:ln xmlns:a="http://schemas.openxmlformats.org/drawingml/2006/main" w="9525">
+            <a:solidFill>
+              <a:srgbClr val="BCC4CC"/>
+            </a:solidFill>
+            <a:prstDash val="solid"/>
+          </a:ln>
+        </p:spPr>
+      </p:cxnSp>
+      <p:sp>
+        <p:nvSpPr>
+          <p:cNvPr id="15" name="footer-7">
+            <a:extLst xmlns:a="http://schemas.openxmlformats.org/drawingml/2006/main">
+              <a:ext uri="{FF2B5EF4-FFF2-40B4-BE49-F238E27FC236}">
+                <a16:creationId xmlns:a16="http://schemas.microsoft.com/office/drawing/2014/main" id="{879FB160-5E7C-4A0A-BE16-8BA8440858BF}"/>
+              </a:ext>
+            </a:extLst>
+          </p:cNvPr>
+          <p:cNvSpPr>
+            <a:spLocks xmlns:a="http://schemas.openxmlformats.org/drawingml/2006/main" noGrp="1"/>
+          </p:cNvSpPr>
+          <p:nvPr/>
+        </p:nvSpPr>
+        <p:spPr>
+          <a:xfrm xmlns:a="http://schemas.openxmlformats.org/drawingml/2006/main">
+            <a:off x="685800" y="12211050"/>
+            <a:ext cx="7429500" cy="266700"/>
+          </a:xfrm>
+          <a:prstGeom xmlns:a="http://schemas.openxmlformats.org/drawingml/2006/main" prst="rect">
+            <a:avLst/>
+          </a:prstGeom>
+          <a:noFill xmlns:a="http://schemas.openxmlformats.org/drawingml/2006/main"/>
+          <a:ln xmlns:a="http://schemas.openxmlformats.org/drawingml/2006/main" w="0">
+            <a:noFill/>
+            <a:prstDash val="solid"/>
+          </a:ln>
+        </p:spPr>
+        <p:txBody>
+          <a:bodyPr xmlns:a="http://schemas.openxmlformats.org/drawingml/2006/main" anchor="t">
+            <a:normAutofit fontScale="95833"/>
+          </a:bodyPr>
+          <a:lstStyle xmlns:a="http://schemas.openxmlformats.org/drawingml/2006/main"/>
+          <a:p xmlns:a="http://schemas.openxmlformats.org/drawingml/2006/main">
+            <a:pPr algn="l">
+              <a:buNone/>
+              <a:defRPr sz="1200" b="0">
+                <a:solidFill>
+                  <a:srgbClr val="53606D"/>
+                </a:solidFill>
+                <a:latin typeface="Arial"/>
+                <a:ea typeface="Arial"/>
+                <a:cs typeface="Arial"/>
+              </a:defRPr>
+            </a:pPr>
+            <a:r>
+              <a:rPr sz="1200" b="0">
+                <a:solidFill>
+                  <a:srgbClr val="53606D"/>
+                </a:solidFill>
+                <a:latin typeface="Arial"/>
+                <a:ea typeface="Arial"/>
+                <a:cs typeface="Arial"/>
+              </a:rPr>
+              <a:t>100% sintético · sem controle de máquina</a:t>
+            </a:r>
+          </a:p>
+        </p:txBody>
+      </p:sp>
+      <p:sp>
+        <p:nvSpPr>
+          <p:cNvPr id="16" name="footer-page-7">
+            <a:extLst xmlns:a="http://schemas.openxmlformats.org/drawingml/2006/main">
+              <a:ext uri="{FF2B5EF4-FFF2-40B4-BE49-F238E27FC236}">
+                <a16:creationId xmlns:a16="http://schemas.microsoft.com/office/drawing/2014/main" id="{6CA91ED8-7E0E-433D-9AFA-55771DA22B52}"/>
+              </a:ext>
+            </a:extLst>
+          </p:cNvPr>
+          <p:cNvSpPr>
+            <a:spLocks xmlns:a="http://schemas.openxmlformats.org/drawingml/2006/main" noGrp="1"/>
+          </p:cNvSpPr>
+          <p:nvPr/>
+        </p:nvSpPr>
+        <p:spPr>
+          <a:xfrm xmlns:a="http://schemas.openxmlformats.org/drawingml/2006/main">
+            <a:off x="8763000" y="12211050"/>
+            <a:ext cx="838200" cy="266700"/>
+          </a:xfrm>
+          <a:prstGeom xmlns:a="http://schemas.openxmlformats.org/drawingml/2006/main" prst="rect">
+            <a:avLst/>
+          </a:prstGeom>
+          <a:noFill xmlns:a="http://schemas.openxmlformats.org/drawingml/2006/main"/>
+          <a:ln xmlns:a="http://schemas.openxmlformats.org/drawingml/2006/main" w="0">
+            <a:noFill/>
+            <a:prstDash val="solid"/>
+          </a:ln>
+        </p:spPr>
+        <p:txBody>
+          <a:bodyPr xmlns:a="http://schemas.openxmlformats.org/drawingml/2006/main" anchor="t">
+            <a:normAutofit fontScale="95833"/>
+          </a:bodyPr>
+          <a:lstStyle xmlns:a="http://schemas.openxmlformats.org/drawingml/2006/main"/>
+          <a:p xmlns:a="http://schemas.openxmlformats.org/drawingml/2006/main">
+            <a:pPr algn="r">
+              <a:buNone/>
+              <a:defRPr sz="1200" b="0">
+                <a:solidFill>
+                  <a:srgbClr val="53606D"/>
+                </a:solidFill>
+                <a:latin typeface="Arial"/>
+                <a:ea typeface="Arial"/>
+                <a:cs typeface="Arial"/>
+              </a:defRPr>
+            </a:pPr>
+            <a:r>
+              <a:rPr sz="1200" b="0">
+                <a:solidFill>
+                  <a:srgbClr val="53606D"/>
+                </a:solidFill>
+                <a:latin typeface="Arial"/>
+                <a:ea typeface="Arial"/>
+                <a:cs typeface="Arial"/>
+              </a:rPr>
+              <a:t>4/5</a:t>
+            </a:r>
+          </a:p>
+        </p:txBody>
+      </p:sp>
+    </p:spTree>
+    <p:extLst>
+      <p:ext uri="{BB962C8B-B14F-4D97-AF65-F5344CB8AC3E}">
+        <p14:creationId xmlns:p14="http://schemas.microsoft.com/office/powerpoint/2010/main" val="679812029"/>
+      </p:ext>
+    </p:extLst>
+  </p:cSld>
+</p:sld>
+</file>
+
+<file path=ppt/slides/slide5.xml><?xml version="1.0" encoding="utf-8"?>
+<p:sld xmlns:p="http://schemas.openxmlformats.org/presentationml/2006/main">
+  <p:cSld>
+    <p:bg>
+      <p:bgPr>
+        <a:solidFill xmlns:a="http://schemas.openxmlformats.org/drawingml/2006/main">
+          <a:srgbClr val="FFFFFF"/>
+        </a:solidFill>
+      </p:bgPr>
+    </p:bg>
+    <p:spTree>
+      <p:nvGrpSpPr>
+        <p:cNvPr id="1" name=""/>
+        <p:cNvGrpSpPr/>
+        <p:nvPr/>
+      </p:nvGrpSpPr>
+      <p:grpSpPr>
+        <a:xfrm xmlns:a="http://schemas.openxmlformats.org/drawingml/2006/main"/>
+      </p:grpSpPr>
+      <p:sp>
+        <p:nvSpPr>
+          <p:cNvPr id="10" name="close-kicker">
+            <a:extLst xmlns:a="http://schemas.openxmlformats.org/drawingml/2006/main">
+              <a:ext uri="{FF2B5EF4-FFF2-40B4-BE49-F238E27FC236}">
+                <a16:creationId xmlns:a16="http://schemas.microsoft.com/office/drawing/2014/main" id="{4A29BF44-3BDA-4C78-9CBD-C6046E39C2F2}"/>
+              </a:ext>
+            </a:extLst>
+          </p:cNvPr>
+          <p:cNvSpPr>
+            <a:spLocks xmlns:a="http://schemas.openxmlformats.org/drawingml/2006/main" noGrp="1"/>
+          </p:cNvSpPr>
+          <p:nvPr/>
+        </p:nvSpPr>
+        <p:spPr>
+          <a:xfrm xmlns:a="http://schemas.openxmlformats.org/drawingml/2006/main">
+            <a:off x="685800" y="762000"/>
+            <a:ext cx="8915400" cy="381000"/>
+          </a:xfrm>
+          <a:prstGeom xmlns:a="http://schemas.openxmlformats.org/drawingml/2006/main" prst="rect">
+            <a:avLst/>
+          </a:prstGeom>
+          <a:noFill xmlns:a="http://schemas.openxmlformats.org/drawingml/2006/main"/>
+          <a:ln xmlns:a="http://schemas.openxmlformats.org/drawingml/2006/main" w="0">
+            <a:noFill/>
+            <a:prstDash val="solid"/>
+          </a:ln>
+        </p:spPr>
+        <p:txBody>
+          <a:bodyPr xmlns:a="http://schemas.openxmlformats.org/drawingml/2006/main" anchor="t">
+            <a:normAutofit fontScale="100000"/>
+          </a:bodyPr>
+          <a:lstStyle xmlns:a="http://schemas.openxmlformats.org/drawingml/2006/main"/>
+          <a:p xmlns:a="http://schemas.openxmlformats.org/drawingml/2006/main">
+            <a:pPr algn="l">
+              <a:buNone/>
+              <a:defRPr sz="1425" b="1">
+                <a:solidFill>
+                  <a:srgbClr val="3D8DFF"/>
+                </a:solidFill>
+                <a:latin typeface="Arial"/>
+                <a:ea typeface="Arial"/>
+                <a:cs typeface="Arial"/>
+              </a:defRPr>
+            </a:pPr>
+            <a:r>
+              <a:rPr sz="1425" b="1">
+                <a:solidFill>
+                  <a:srgbClr val="3D8DFF"/>
+                </a:solidFill>
+                <a:latin typeface="Arial"/>
+                <a:ea typeface="Arial"/>
+                <a:cs typeface="Arial"/>
+              </a:rPr>
+              <a:t>STEELFLOW AI</a:t>
+            </a:r>
+          </a:p>
+        </p:txBody>
+      </p:sp>
+      <p:sp>
+        <p:nvSpPr>
+          <p:cNvPr id="2" name="close-title">
+            <a:extLst xmlns:a="http://schemas.openxmlformats.org/drawingml/2006/main">
+              <a:ext uri="{FF2B5EF4-FFF2-40B4-BE49-F238E27FC236}">
+                <a16:creationId xmlns:a16="http://schemas.microsoft.com/office/drawing/2014/main" id="{584C9D75-4C20-4B03-ABCF-158C3E284423}"/>
+              </a:ext>
+            </a:extLst>
+          </p:cNvPr>
+          <p:cNvSpPr>
+            <a:spLocks xmlns:a="http://schemas.openxmlformats.org/drawingml/2006/main" noGrp="1"/>
+          </p:cNvSpPr>
+          <p:nvPr/>
+        </p:nvSpPr>
+        <p:spPr>
+          <a:xfrm xmlns:a="http://schemas.openxmlformats.org/drawingml/2006/main">
+            <a:off x="685800" y="1762125"/>
+            <a:ext cx="8915400" cy="2095500"/>
+          </a:xfrm>
+          <a:prstGeom xmlns:a="http://schemas.openxmlformats.org/drawingml/2006/main" prst="rect">
+            <a:avLst/>
+          </a:prstGeom>
+          <a:noFill xmlns:a="http://schemas.openxmlformats.org/drawingml/2006/main"/>
+          <a:ln xmlns:a="http://schemas.openxmlformats.org/drawingml/2006/main" w="0">
+            <a:noFill/>
+            <a:prstDash val="solid"/>
+          </a:ln>
+        </p:spPr>
+        <p:txBody>
+          <a:bodyPr xmlns:a="http://schemas.openxmlformats.org/drawingml/2006/main" anchor="t">
+            <a:normAutofit fontScale="100000"/>
+          </a:bodyPr>
+          <a:lstStyle xmlns:a="http://schemas.openxmlformats.org/drawingml/2006/main"/>
+          <a:p xmlns:a="http://schemas.openxmlformats.org/drawingml/2006/main">
+            <a:pPr algn="l">
+              <a:buNone/>
+              <a:defRPr sz="4950" b="1">
+                <a:solidFill>
+                  <a:srgbClr val="07111C"/>
+                </a:solidFill>
+                <a:latin typeface="Arial"/>
+                <a:ea typeface="Arial"/>
+                <a:cs typeface="Arial"/>
+              </a:defRPr>
+            </a:pPr>
+            <a:r>
+              <a:rPr sz="4950" b="1">
+                <a:solidFill>
+                  <a:srgbClr val="07111C"/>
+                </a:solidFill>
+                <a:latin typeface="Arial"/>
+                <a:ea typeface="Arial"/>
+                <a:cs typeface="Arial"/>
+              </a:rPr>
+              <a:t>Explore a</a:t>
+            </a:r>
+          </a:p>
+          <a:p xmlns:a="http://schemas.openxmlformats.org/drawingml/2006/main">
+            <a:pPr algn="l">
+              <a:buNone/>
+              <a:defRPr sz="4950" b="1">
+                <a:solidFill>
+                  <a:srgbClr val="07111C"/>
+                </a:solidFill>
+                <a:latin typeface="Arial"/>
+                <a:ea typeface="Arial"/>
+                <a:cs typeface="Arial"/>
+              </a:defRPr>
+            </a:pPr>
+            <a:r>
+              <a:rPr sz="4950" b="1">
+                <a:solidFill>
+                  <a:srgbClr val="07111C"/>
+                </a:solidFill>
+                <a:latin typeface="Arial"/>
+                <a:ea typeface="Arial"/>
+                <a:cs typeface="Arial"/>
+              </a:rPr>
+              <a:t>plataforma.</a:t>
+            </a:r>
+          </a:p>
+        </p:txBody>
+      </p:sp>
+      <p:sp>
+        <p:nvSpPr>
+          <p:cNvPr id="3" name="close-body">
+            <a:extLst xmlns:a="http://schemas.openxmlformats.org/drawingml/2006/main">
+              <a:ext uri="{FF2B5EF4-FFF2-40B4-BE49-F238E27FC236}">
+                <a16:creationId xmlns:a16="http://schemas.microsoft.com/office/drawing/2014/main" id="{B4D2B44C-B7F8-4096-840E-D7E4AEEFC94C}"/>
+              </a:ext>
+            </a:extLst>
+          </p:cNvPr>
+          <p:cNvSpPr>
+            <a:spLocks xmlns:a="http://schemas.openxmlformats.org/drawingml/2006/main" noGrp="1"/>
+          </p:cNvSpPr>
+          <p:nvPr/>
+        </p:nvSpPr>
+        <p:spPr>
+          <a:xfrm xmlns:a="http://schemas.openxmlformats.org/drawingml/2006/main">
+            <a:off x="685800" y="4476750"/>
+            <a:ext cx="8191500" cy="1428750"/>
+          </a:xfrm>
+          <a:prstGeom xmlns:a="http://schemas.openxmlformats.org/drawingml/2006/main" prst="rect">
+            <a:avLst/>
+          </a:prstGeom>
+          <a:noFill xmlns:a="http://schemas.openxmlformats.org/drawingml/2006/main"/>
+          <a:ln xmlns:a="http://schemas.openxmlformats.org/drawingml/2006/main" w="0">
+            <a:noFill/>
+            <a:prstDash val="solid"/>
+          </a:ln>
+        </p:spPr>
+        <p:txBody>
+          <a:bodyPr xmlns:a="http://schemas.openxmlformats.org/drawingml/2006/main" anchor="t">
+            <a:normAutofit fontScale="100000"/>
+          </a:bodyPr>
+          <a:lstStyle xmlns:a="http://schemas.openxmlformats.org/drawingml/2006/main"/>
+          <a:p xmlns:a="http://schemas.openxmlformats.org/drawingml/2006/main">
+            <a:pPr algn="l">
+              <a:buNone/>
               <a:defRPr sz="2175" b="0">
                 <a:solidFill>
                   <a:srgbClr val="53606D"/>
@@ -2769,7 +5059,7 @@
                 <a:ea typeface="Arial"/>
                 <a:cs typeface="Arial"/>
               </a:rPr>
-              <a:t>O sistema não substitui o especialista. Ele organiza evidências para comparar cenários antes de agir.</a:t>
+              <a:t>Veja as telas, teste o fluxo e questione os limites.</a:t>
             </a:r>
           </a:p>
         </p:txBody>
@@ -2968,7 +5258,7 @@
                 <a:ea typeface="Arial"/>
                 <a:cs typeface="Arial"/>
               </a:rPr>
-              <a:t>Que parâmetro você testaria primeiro se pudesse comparar o resultado antes do ajuste?</a:t>
+              <a:t>Qual hipótese você testaria primeiro?</a:t>
             </a:r>
           </a:p>
         </p:txBody>
@@ -3086,7 +5376,7 @@
                 <a:ea typeface="Arial"/>
                 <a:cs typeface="Arial"/>
               </a:rPr>
-              <a:t>3/3</a:t>
+              <a:t>5/5</a:t>
             </a:r>
           </a:p>
         </p:txBody>
